--- a/Vetoed-deck.pptx
+++ b/Vetoed-deck.pptx
@@ -3614,7 +3614,7 @@
                 </a:solidFill>
                 <a:latin typeface="Consolas"/>
               </a:rPr>
-              <a:t>77</a:t>
+              <a:t>144</a:t>
             </a:r>
           </a:p>
         </p:txBody>
@@ -4618,7 +4618,7 @@
                 </a:solidFill>
                 <a:latin typeface="Segoe UI"/>
               </a:rPr>
-              <a:t>A 20-day vol estimate carries ~16% standard error.</a:t>
+              <a:t>The literature is the prior, not the proof.</a:t>
             </a:r>
             <a:r>
               <a:rPr sz="1500" b="0">
@@ -4627,7 +4627,7 @@
                 </a:solidFill>
                 <a:latin typeface="Segoe UI"/>
               </a:rPr>
-              <a:t> Gating on the premium reduces the resulting selection bias. It does not remove it.</a:t>
+              <a:t> It shows a volatility premium exists. It does not validate this horizon, these strikes, or any threshold in this system.</a:t>
             </a:r>
           </a:p>
         </p:txBody>
@@ -4998,7 +4998,7 @@
                 </a:solidFill>
                 <a:latin typeface="Consolas"/>
               </a:rPr>
-              <a:t>MIT  ·  Alpaca paper trading  ·  77 tests</a:t>
+              <a:t>MIT  ·  Alpaca paper trading  ·  144 tests</a:t>
             </a:r>
           </a:p>
         </p:txBody>
@@ -5697,8 +5697,8 @@
         </p:nvSpPr>
         <p:spPr>
           <a:xfrm>
-            <a:off x="777240" y="5029200"/>
-            <a:ext cx="10058400" cy="914400"/>
+            <a:off x="777240" y="4846320"/>
+            <a:ext cx="10241280" cy="1280160"/>
           </a:xfrm>
           <a:prstGeom prst="rect">
             <a:avLst/>
@@ -5723,7 +5723,17 @@
                 </a:solidFill>
                 <a:latin typeface="Segoe UI"/>
               </a:rPr>
-              <a:t>Bakshi &amp; Kapadia (2003), RFS 16(2)  ·  Carr &amp; Wu (2009), RFS 22(3)  ·  CBOE PUT index, Jun 1986–Dec 2018: 9.95% vs 14.93% volatility at near-identical return.</a:t>
+              <a:t>Bakshi &amp; Kapadia (2003), RFS 16(2)  ·  Carr &amp; Wu (2009), RFS 22(3)  ·  CBOE PUT index, Jun 1986–Dec 2018: 9.95% vs 14.93% volatility at near-identical return.
+</a:t>
+            </a:r>
+            <a:r>
+              <a:rPr sz="1150" b="0">
+                <a:solidFill>
+                  <a:srgbClr val="F0A93B"/>
+                </a:solidFill>
+                <a:latin typeface="Segoe UI"/>
+              </a:rPr>
+              <a:t>These establish that the premium exists. They do not validate this agent: the PUT index is monthly at-the-money cash-secured puts, not 2–14 DTE defined-risk spreads.</a:t>
             </a:r>
           </a:p>
         </p:txBody>
@@ -5908,7 +5918,7 @@
                 </a:solidFill>
                 <a:latin typeface="Consolas"/>
               </a:rPr>
-              <a:t>WHY MOST TOOLS MEASURE NOTHING</a:t>
+              <a:t>WHY A RISK-NEUTRAL EV MEASURES NOTHING</a:t>
             </a:r>
           </a:p>
         </p:txBody>
@@ -5947,8 +5957,8 @@
                 </a:solidFill>
                 <a:latin typeface="Segoe UI"/>
               </a:rPr>
-              <a:t>Ranking by delta-derived EV is
-mathematically empty.</a:t>
+              <a:t>The signal has to be a difference,
+not a level.</a:t>
             </a:r>
           </a:p>
         </p:txBody>
@@ -5961,7 +5971,7 @@
         </p:nvSpPr>
         <p:spPr>
           <a:xfrm>
-            <a:off x="777240" y="2880360"/>
+            <a:off x="777240" y="2834640"/>
             <a:ext cx="5669280" cy="3108960"/>
           </a:xfrm>
           <a:prstGeom prst="rect">
@@ -5990,7 +6000,7 @@
                 </a:solidFill>
                 <a:latin typeface="Segoe UI"/>
               </a:rPr>
-              <a:t>Delta is the </a:t>
+              <a:t>Under the risk-neutral measure a fairly-priced trade has an expected P&amp;L of exactly </a:t>
             </a:r>
             <a:r>
               <a:rPr sz="1600" b="1">
@@ -5999,7 +6009,7 @@
                 </a:solidFill>
                 <a:latin typeface="Segoe UI"/>
               </a:rPr>
-              <a:t>risk-neutral</a:t>
+              <a:t>zero</a:t>
             </a:r>
             <a:r>
               <a:rPr sz="1600" b="0">
@@ -6008,25 +6018,7 @@
                 </a:solidFill>
                 <a:latin typeface="Segoe UI"/>
               </a:rPr>
-              <a:t> probability of finishing in the money. Under risk-neutral pricing, every fairly-priced option trade has an expected value of exactly </a:t>
-            </a:r>
-            <a:r>
-              <a:rPr sz="1600" b="1">
-                <a:solidFill>
-                  <a:srgbClr val="E6EDF3"/>
-                </a:solidFill>
-                <a:latin typeface="Segoe UI"/>
-              </a:rPr>
-              <a:t>zero</a:t>
-            </a:r>
-            <a:r>
-              <a:rPr sz="1600" b="0">
-                <a:solidFill>
-                  <a:srgbClr val="A9B6C3"/>
-                </a:solidFill>
-                <a:latin typeface="Segoe UI"/>
-              </a:rPr>
-              <a:t>.</a:t>
+              <a:t>. A no-arbitrage identity, not an opinion.</a:t>
             </a:r>
           </a:p>
           <a:p>
@@ -6045,7 +6037,7 @@
                 </a:solidFill>
                 <a:latin typeface="Segoe UI"/>
               </a:rPr>
-              <a:t>That is a no-arbitrage identity, not an opinion. So a screener ranking on delta-derived EV is ranking </a:t>
+              <a:t>So an EV built from risk-neutral inputs can only reflect </a:t>
             </a:r>
             <a:r>
               <a:rPr sz="1600" b="1">
@@ -6054,7 +6046,7 @@
                 </a:solidFill>
                 <a:latin typeface="Segoe UI"/>
               </a:rPr>
-              <a:t>quote noise</a:t>
+              <a:t>quoting noise</a:t>
             </a:r>
             <a:r>
               <a:rPr sz="1600" b="0">
@@ -6063,7 +6055,7 @@
                 </a:solidFill>
                 <a:latin typeface="Segoe UI"/>
               </a:rPr>
-              <a:t>.</a:t>
+              <a:t>. The edge has to come from comparing two volatilities.</a:t>
             </a:r>
           </a:p>
         </p:txBody>
@@ -6076,8 +6068,8 @@
         </p:nvSpPr>
         <p:spPr>
           <a:xfrm>
-            <a:off x="7086600" y="2788920"/>
-            <a:ext cx="4297680" cy="1965960"/>
+            <a:off x="7086600" y="2743200"/>
+            <a:ext cx="4297680" cy="2103120"/>
           </a:xfrm>
           <a:prstGeom prst="roundRect">
             <a:avLst>
@@ -6122,8 +6114,8 @@
         </p:nvSpPr>
         <p:spPr>
           <a:xfrm>
-            <a:off x="7406640" y="3108960"/>
-            <a:ext cx="3657600" cy="457200"/>
+            <a:off x="7379208" y="2999232"/>
+            <a:ext cx="3749039" cy="320040"/>
           </a:xfrm>
           <a:prstGeom prst="rect">
             <a:avLst/>
@@ -6142,92 +6134,92 @@
               </a:lnSpc>
             </a:pPr>
             <a:r>
-              <a:rPr sz="1700" b="1">
+              <a:rPr sz="1100" b="1" spc="130">
+                <a:solidFill>
+                  <a:srgbClr val="F0A93B"/>
+                </a:solidFill>
+                <a:latin typeface="Consolas"/>
+              </a:rPr>
+              <a:t>AND DELTA IS NOT A PROBABILITY</a:t>
+            </a:r>
+          </a:p>
+        </p:txBody>
+      </p:sp>
+      <p:sp>
+        <p:nvSpPr>
+          <p:cNvPr id="7" name="TextBox 6"/>
+          <p:cNvSpPr txBox="1"/>
+          <p:nvPr/>
+        </p:nvSpPr>
+        <p:spPr>
+          <a:xfrm>
+            <a:off x="7379208" y="3401568"/>
+            <a:ext cx="3749039" cy="822960"/>
+          </a:xfrm>
+          <a:prstGeom prst="rect">
+            <a:avLst/>
+          </a:prstGeom>
+          <a:noFill/>
+        </p:spPr>
+        <p:txBody>
+          <a:bodyPr wrap="square" anchor="t" lIns="0" rIns="0" tIns="0" bIns="0">
+            <a:spAutoFit/>
+          </a:bodyPr>
+          <a:lstStyle/>
+          <a:p>
+            <a:pPr algn="l">
+              <a:lnSpc>
+                <a:spcPct val="135000"/>
+              </a:lnSpc>
+            </a:pPr>
+            <a:r>
+              <a:rPr sz="1600" b="1">
                 <a:solidFill>
                   <a:srgbClr val="4DD4C0"/>
                 </a:solidFill>
                 <a:latin typeface="Consolas"/>
               </a:rPr>
-              <a:t>Under Q:  E[payoff] = 0</a:t>
-            </a:r>
-          </a:p>
-        </p:txBody>
-      </p:sp>
-      <p:sp>
-        <p:nvSpPr>
-          <p:cNvPr id="7" name="TextBox 6"/>
-          <p:cNvSpPr txBox="1"/>
-          <p:nvPr/>
-        </p:nvSpPr>
-        <p:spPr>
-          <a:xfrm>
-            <a:off x="7406640" y="3611880"/>
-            <a:ext cx="3657600" cy="548640"/>
-          </a:xfrm>
-          <a:prstGeom prst="rect">
-            <a:avLst/>
-          </a:prstGeom>
-          <a:noFill/>
-        </p:spPr>
-        <p:txBody>
-          <a:bodyPr wrap="square" anchor="t" lIns="0" rIns="0" tIns="0" bIns="0">
-            <a:spAutoFit/>
-          </a:bodyPr>
-          <a:lstStyle/>
-          <a:p>
-            <a:pPr algn="l">
-              <a:lnSpc>
-                <a:spcPct val="130000"/>
-              </a:lnSpc>
-            </a:pPr>
-            <a:r>
-              <a:rPr sz="1300" b="0">
+              <a:t>delta  = N(d1)
+P(ITM) = N(d2)</a:t>
+            </a:r>
+          </a:p>
+        </p:txBody>
+      </p:sp>
+      <p:sp>
+        <p:nvSpPr>
+          <p:cNvPr id="8" name="TextBox 7"/>
+          <p:cNvSpPr txBox="1"/>
+          <p:nvPr/>
+        </p:nvSpPr>
+        <p:spPr>
+          <a:xfrm>
+            <a:off x="7379208" y="4279392"/>
+            <a:ext cx="3749039" cy="548640"/>
+          </a:xfrm>
+          <a:prstGeom prst="rect">
+            <a:avLst/>
+          </a:prstGeom>
+          <a:noFill/>
+        </p:spPr>
+        <p:txBody>
+          <a:bodyPr wrap="square" anchor="t" lIns="0" rIns="0" tIns="0" bIns="0">
+            <a:spAutoFit/>
+          </a:bodyPr>
+          <a:lstStyle/>
+          <a:p>
+            <a:pPr algn="l">
+              <a:lnSpc>
+                <a:spcPct val="125000"/>
+              </a:lnSpc>
+            </a:pPr>
+            <a:r>
+              <a:rPr sz="1200" b="0">
                 <a:solidFill>
                   <a:srgbClr val="75828F"/>
                 </a:solidFill>
-                <a:latin typeface="Consolas"/>
-              </a:rPr>
-              <a:t>for every fairly-priced
-option trade, always.</a:t>
-            </a:r>
-          </a:p>
-        </p:txBody>
-      </p:sp>
-      <p:sp>
-        <p:nvSpPr>
-          <p:cNvPr id="8" name="TextBox 7"/>
-          <p:cNvSpPr txBox="1"/>
-          <p:nvPr/>
-        </p:nvSpPr>
-        <p:spPr>
-          <a:xfrm>
-            <a:off x="7406640" y="4206240"/>
-            <a:ext cx="3657600" cy="365760"/>
-          </a:xfrm>
-          <a:prstGeom prst="rect">
-            <a:avLst/>
-          </a:prstGeom>
-          <a:noFill/>
-        </p:spPr>
-        <p:txBody>
-          <a:bodyPr wrap="square" anchor="t" lIns="0" rIns="0" tIns="0" bIns="0">
-            <a:spAutoFit/>
-          </a:bodyPr>
-          <a:lstStyle/>
-          <a:p>
-            <a:pPr algn="l">
-              <a:lnSpc>
-                <a:spcPct val="100000"/>
-              </a:lnSpc>
-            </a:pPr>
-            <a:r>
-              <a:rPr sz="1400" b="1">
-                <a:solidFill>
-                  <a:srgbClr val="F2685C"/>
-                </a:solidFill>
-                <a:latin typeface="Consolas"/>
-              </a:rPr>
-              <a:t>No edge to find there.</a:t>
+                <a:latin typeface="Segoe UI"/>
+              </a:rPr>
+              <a:t>The gap flips sign between calls and puts.</a:t>
             </a:r>
           </a:p>
         </p:txBody>
@@ -6937,7 +6929,7 @@
         </p:nvSpPr>
         <p:spPr>
           <a:xfrm>
-            <a:off x="777240" y="2395728"/>
+            <a:off x="777240" y="2304288"/>
             <a:ext cx="5943600" cy="3108960"/>
           </a:xfrm>
           <a:prstGeom prst="rect">
@@ -6960,67 +6952,40 @@
               </a:spcAft>
             </a:pPr>
             <a:r>
-              <a:rPr sz="1500" b="0">
+              <a:rPr sz="1350" b="1">
+                <a:solidFill>
+                  <a:srgbClr val="F0A93B"/>
+                </a:solidFill>
+                <a:latin typeface="Segoe UI"/>
+              </a:rPr>
+              <a:t>One. </a:t>
+            </a:r>
+            <a:r>
+              <a:rPr sz="1350" b="0">
                 <a:solidFill>
                   <a:srgbClr val="A9B6C3"/>
                 </a:solidFill>
                 <a:latin typeface="Segoe UI"/>
               </a:rPr>
-              <a:t>The first build computed </a:t>
-            </a:r>
-            <a:r>
-              <a:rPr sz="1500" b="0">
+              <a:t>The first build priced one side off </a:t>
+            </a:r>
+            <a:r>
+              <a:rPr sz="1350" b="1">
                 <a:solidFill>
                   <a:srgbClr val="E6EDF3"/>
                 </a:solidFill>
-                <a:latin typeface="Consolas"/>
-              </a:rPr>
-              <a:t>ev_rn</a:t>
-            </a:r>
-            <a:r>
-              <a:rPr sz="1500" b="0">
+                <a:latin typeface="Segoe UI"/>
+              </a:rPr>
+              <a:t>delta</a:t>
+            </a:r>
+            <a:r>
+              <a:rPr sz="1350" b="0">
                 <a:solidFill>
                   <a:srgbClr val="A9B6C3"/>
                 </a:solidFill>
                 <a:latin typeface="Segoe UI"/>
               </a:rPr>
-              <a:t> from </a:t>
-            </a:r>
-            <a:r>
-              <a:rPr sz="1500" b="1">
-                <a:solidFill>
-                  <a:srgbClr val="E6EDF3"/>
-                </a:solidFill>
-                <a:latin typeface="Segoe UI"/>
-              </a:rPr>
-              <a:t>delta</a:t>
-            </a:r>
-            <a:r>
-              <a:rPr sz="1500" b="0">
-                <a:solidFill>
-                  <a:srgbClr val="A9B6C3"/>
-                </a:solidFill>
-                <a:latin typeface="Segoe UI"/>
-              </a:rPr>
-              <a:t> and </a:t>
-            </a:r>
-            <a:r>
-              <a:rPr sz="1500" b="0">
-                <a:solidFill>
-                  <a:srgbClr val="E6EDF3"/>
-                </a:solidFill>
-                <a:latin typeface="Consolas"/>
-              </a:rPr>
-              <a:t>ev_rw</a:t>
-            </a:r>
-            <a:r>
-              <a:rPr sz="1500" b="0">
-                <a:solidFill>
-                  <a:srgbClr val="A9B6C3"/>
-                </a:solidFill>
-                <a:latin typeface="Segoe UI"/>
-              </a:rPr>
-              <a:t> from a lognormal. Those disagree even at identical volatility.</a:t>
+              <a:t> and the other off a lognormal. IWM at implied 14.84% against realised 14.58% — no gap existed — and it reported $2.75 anyway.</a:t>
             </a:r>
           </a:p>
           <a:p>
@@ -7033,31 +6998,40 @@
               </a:spcAft>
             </a:pPr>
             <a:r>
-              <a:rPr sz="1500" b="0">
+              <a:rPr sz="1350" b="1">
+                <a:solidFill>
+                  <a:srgbClr val="F0A93B"/>
+                </a:solidFill>
+                <a:latin typeface="Segoe UI"/>
+              </a:rPr>
+              <a:t>Two. </a:t>
+            </a:r>
+            <a:r>
+              <a:rPr sz="1350" b="0">
                 <a:solidFill>
                   <a:srgbClr val="A9B6C3"/>
                 </a:solidFill>
                 <a:latin typeface="Segoe UI"/>
               </a:rPr>
-              <a:t>The journal proved it. IWM at implied 14.84% vs realised 14.58% — a ratio of 1.018, so </a:t>
-            </a:r>
-            <a:r>
-              <a:rPr sz="1500" b="1">
+              <a:t>The payoff between the strikes was valued at its midpoint. Under a lognormal that is wrong by up to </a:t>
+            </a:r>
+            <a:r>
+              <a:rPr sz="1350" b="1">
                 <a:solidFill>
                   <a:srgbClr val="E6EDF3"/>
                 </a:solidFill>
                 <a:latin typeface="Segoe UI"/>
               </a:rPr>
-              <a:t>no premium existed</a:t>
-            </a:r>
-            <a:r>
-              <a:rPr sz="1500" b="0">
+              <a:t>$37</a:t>
+            </a:r>
+            <a:r>
+              <a:rPr sz="1350" b="0">
                 <a:solidFill>
                   <a:srgbClr val="A9B6C3"/>
                 </a:solidFill>
                 <a:latin typeface="Segoe UI"/>
               </a:rPr>
-              <a:t>. It reported $2.75 anyway.</a:t>
+              <a:t>, and it exceeded the $2.00 gate in 17% of cases — enough to flip a trade decision, not just a displayed number.</a:t>
             </a:r>
           </a:p>
           <a:p>
@@ -7070,22 +7044,22 @@
               </a:spcAft>
             </a:pPr>
             <a:r>
-              <a:rPr sz="1500" b="1">
+              <a:rPr sz="1350" b="1">
                 <a:solidFill>
                   <a:srgbClr val="E6EDF3"/>
                 </a:solidFill>
                 <a:latin typeface="Segoe UI"/>
               </a:rPr>
-              <a:t>86% of that was model mismatch.</a:t>
-            </a:r>
-            <a:r>
-              <a:rPr sz="1500" b="0">
+              <a:t>Both fixed, both pinned by tests.</a:t>
+            </a:r>
+            <a:r>
+              <a:rPr sz="1350" b="0">
                 <a:solidFill>
                   <a:srgbClr val="A9B6C3"/>
                 </a:solidFill>
                 <a:latin typeface="Segoe UI"/>
               </a:rPr>
-              <a:t> Both sides now use one model, and nine tests pin the invariant.</a:t>
+              <a:t> The expected value is now exact in closed form, checked against a brute-force integral of the payoff.</a:t>
             </a:r>
           </a:p>
         </p:txBody>
@@ -7170,7 +7144,7 @@
                 </a:solidFill>
                 <a:latin typeface="Consolas"/>
               </a:rPr>
-              <a:t>BEFORE — DELTA VS LOGNORMAL</a:t>
+              <a:t>REPORTED ON A NO-GAP TRADE</a:t>
             </a:r>
           </a:p>
         </p:txBody>
@@ -7248,7 +7222,7 @@
                 </a:solidFill>
                 <a:latin typeface="Segoe UI"/>
               </a:rPr>
-              <a:t>reported on a trade with no premium on offer</a:t>
+              <a:t>delta priced one side, a lognormal the other</a:t>
             </a:r>
           </a:p>
         </p:txBody>
@@ -7333,7 +7307,7 @@
                 </a:solidFill>
                 <a:latin typeface="Consolas"/>
               </a:rPr>
-              <a:t>AFTER — ONE MODEL, VOL ONLY</a:t>
+              <a:t>SAME TRADE, ONE EXACT MODEL</a:t>
             </a:r>
           </a:p>
         </p:txBody>
@@ -8371,7 +8345,7 @@
                 </a:solidFill>
                 <a:latin typeface="Segoe UI"/>
               </a:rPr>
-              <a:t>No tool output ever enters the prompt</a:t>
+              <a:t>No tool output reaches it; the rest is whitelisted</a:t>
             </a:r>
           </a:p>
         </p:txBody>
@@ -8410,7 +8384,7 @@
                 </a:solidFill>
                 <a:latin typeface="Consolas"/>
               </a:rPr>
-              <a:t>NO INJECTION SURFACE</a:t>
+              <a:t>CONTROLLED VOCABULARY</a:t>
             </a:r>
           </a:p>
         </p:txBody>
@@ -9783,7 +9757,7 @@
                 </a:solidFill>
                 <a:latin typeface="Segoe UI"/>
               </a:rPr>
-              <a:t>17 valid spreads. 6 survived.</a:t>
+              <a:t>20 valid spreads. 7 survived.</a:t>
             </a:r>
           </a:p>
         </p:txBody>
@@ -9822,7 +9796,7 @@
                 </a:solidFill>
                 <a:latin typeface="Segoe UI"/>
               </a:rPr>
-              <a:t>One live screen of the universe. The edge tracks implied-vs-realised exactly as the theory predicts.</a:t>
+              <a:t>One snapshot, counted at each gate. The signal tracks implied-versus-realised, as the hypothesis predicts.</a:t>
             </a:r>
           </a:p>
         </p:txBody>
@@ -10017,7 +9991,7 @@
                 </a:solidFill>
                 <a:latin typeface="Consolas"/>
               </a:rPr>
-              <a:t>1.26</a:t>
+              <a:t>1.260</a:t>
             </a:r>
           </a:p>
         </p:txBody>
@@ -10056,7 +10030,7 @@
                 </a:solidFill>
                 <a:latin typeface="Segoe UI"/>
               </a:rPr>
-              <a:t>top two candidates — +$41.32, +$32.30</a:t>
+              <a:t>2 of 2 survive — +$42.45 and +$33.42</a:t>
             </a:r>
           </a:p>
         </p:txBody>
@@ -10217,7 +10191,7 @@
                 </a:solidFill>
                 <a:latin typeface="Segoe UI"/>
               </a:rPr>
-              <a:t>three candidates, +$4.28 to +$5.43</a:t>
+              <a:t>3 of 3 survive, +$4.29 to +$5.44</a:t>
             </a:r>
           </a:p>
         </p:txBody>
@@ -10378,7 +10352,7 @@
                 </a:solidFill>
                 <a:latin typeface="Segoe UI"/>
               </a:rPr>
-              <a:t>one at +$10.11; three cut at ~$0</a:t>
+              <a:t>2 of 13 survive, best +$11.67</a:t>
             </a:r>
           </a:p>
         </p:txBody>
@@ -10539,7 +10513,7 @@
                 </a:solidFill>
                 <a:latin typeface="Segoe UI"/>
               </a:rPr>
-              <a:t>ZERO CANDIDATES — implied below realised, it sits out</a:t>
+              <a:t>0 of 2 — implied below realised, it sits out</a:t>
             </a:r>
           </a:p>
         </p:txBody>

--- a/Vetoed-deck.pptx
+++ b/Vetoed-deck.pptx
@@ -3614,7 +3614,7 @@
                 </a:solidFill>
                 <a:latin typeface="Consolas"/>
               </a:rPr>
-              <a:t>144</a:t>
+              <a:t>184</a:t>
             </a:r>
           </a:p>
         </p:txBody>
@@ -4998,7 +4998,7 @@
                 </a:solidFill>
                 <a:latin typeface="Consolas"/>
               </a:rPr>
-              <a:t>MIT  ·  Alpaca paper trading  ·  144 tests</a:t>
+              <a:t>MIT  ·  Alpaca paper trading  ·  184 tests</a:t>
             </a:r>
           </a:p>
         </p:txBody>

--- a/Vetoed-deck.pptx
+++ b/Vetoed-deck.pptx
@@ -3614,7 +3614,7 @@
                 </a:solidFill>
                 <a:latin typeface="Consolas"/>
               </a:rPr>
-              <a:t>184</a:t>
+              <a:t>199</a:t>
             </a:r>
           </a:p>
         </p:txBody>
@@ -4998,7 +4998,7 @@
                 </a:solidFill>
                 <a:latin typeface="Consolas"/>
               </a:rPr>
-              <a:t>MIT  ·  Alpaca paper trading  ·  184 tests</a:t>
+              <a:t>MIT  ·  Alpaca paper trading  ·  199 tests</a:t>
             </a:r>
           </a:p>
         </p:txBody>
@@ -7898,7 +7898,7 @@
                 <a:latin typeface="Segoe UI"/>
               </a:rPr>
               <a:t>what is GOOD
-the only LLM</a:t>
+Featherless AI</a:t>
             </a:r>
           </a:p>
         </p:txBody>
@@ -8467,7 +8467,7 @@
                 </a:solidFill>
                 <a:latin typeface="Segoe UI"/>
               </a:rPr>
-              <a:t>No API key? Deterministic selection runs instead</a:t>
+              <a:t>No LLM at all? Deterministic selection runs instead</a:t>
             </a:r>
           </a:p>
         </p:txBody>

--- a/Vetoed-deck.pptx
+++ b/Vetoed-deck.pptx
@@ -3115,7 +3115,7 @@
         </p:nvSpPr>
         <p:spPr>
           <a:xfrm>
-            <a:off x="777240" y="1965960"/>
+            <a:off x="777240" y="1874519"/>
             <a:ext cx="10637215" cy="274320"/>
           </a:xfrm>
           <a:prstGeom prst="rect">
@@ -3154,8 +3154,8 @@
         </p:nvSpPr>
         <p:spPr>
           <a:xfrm>
-            <a:off x="777240" y="2395728"/>
-            <a:ext cx="10637215" cy="1371600"/>
+            <a:off x="777240" y="2286000"/>
+            <a:ext cx="10637215" cy="1463040"/>
           </a:xfrm>
           <a:prstGeom prst="rect">
             <a:avLst/>
@@ -3174,7 +3174,7 @@
               </a:lnSpc>
             </a:pPr>
             <a:r>
-              <a:rPr sz="6800" b="1">
+              <a:rPr sz="7600" b="1">
                 <a:solidFill>
                   <a:srgbClr val="E6EDF3"/>
                 </a:solidFill>
@@ -3193,8 +3193,8 @@
         </p:nvSpPr>
         <p:spPr>
           <a:xfrm>
-            <a:off x="777240" y="3611880"/>
-            <a:ext cx="8412480" cy="1005840"/>
+            <a:off x="777240" y="3703320"/>
+            <a:ext cx="7863840" cy="1005840"/>
           </a:xfrm>
           <a:prstGeom prst="rect">
             <a:avLst/>
@@ -3213,7 +3213,7 @@
               </a:lnSpc>
             </a:pPr>
             <a:r>
-              <a:rPr sz="2200" b="0">
+              <a:rPr sz="2300" b="0">
                 <a:solidFill>
                   <a:srgbClr val="A9B6C3"/>
                 </a:solidFill>
@@ -3222,7 +3222,7 @@
               <a:t>An autonomous options agent where </a:t>
             </a:r>
             <a:r>
-              <a:rPr sz="2200" b="1">
+              <a:rPr sz="2300" b="1">
                 <a:solidFill>
                   <a:srgbClr val="E6EDF3"/>
                 </a:solidFill>
@@ -3241,7 +3241,7 @@
         </p:nvSpPr>
         <p:spPr>
           <a:xfrm>
-            <a:off x="777240" y="4800600"/>
+            <a:off x="777240" y="5029200"/>
             <a:ext cx="10637215" cy="365760"/>
           </a:xfrm>
           <a:prstGeom prst="rect">
@@ -3267,7 +3267,7 @@
                 </a:solidFill>
                 <a:latin typeface="Consolas"/>
               </a:rPr>
-              <a:t>chong1120.github.io/Vetoed   ·   github.com/Chong1120/Vetoed</a:t>
+              <a:t>Alpaca paper trading   ·   chong1120.github.io/Vetoed</a:t>
             </a:r>
           </a:p>
         </p:txBody>
@@ -3332,7 +3332,7 @@
                 </a:solidFill>
                 <a:latin typeface="Consolas"/>
               </a:rPr>
-              <a:t>LIVE NOW</a:t>
+              <a:t>LEARNING, ON A SHORT LEASH</a:t>
             </a:r>
           </a:p>
         </p:txBody>
@@ -3371,140 +3371,22 @@
                 </a:solidFill>
                 <a:latin typeface="Segoe UI"/>
               </a:rPr>
-              <a:t>Every decision is auditable,
-including the refusals.</a:t>
-            </a:r>
-          </a:p>
-        </p:txBody>
-      </p:sp>
-      <p:sp>
-        <p:nvSpPr>
-          <p:cNvPr id="4" name="TextBox 3"/>
-          <p:cNvSpPr txBox="1"/>
-          <p:nvPr/>
-        </p:nvSpPr>
-        <p:spPr>
-          <a:xfrm>
-            <a:off x="777240" y="2880360"/>
-            <a:ext cx="5852160" cy="3108960"/>
-          </a:xfrm>
-          <a:prstGeom prst="rect">
-            <a:avLst/>
-          </a:prstGeom>
-          <a:noFill/>
-        </p:spPr>
-        <p:txBody>
-          <a:bodyPr wrap="square" lIns="0" rIns="0" tIns="0" bIns="0">
-            <a:spAutoFit/>
-          </a:bodyPr>
-          <a:lstStyle/>
-          <a:p>
-            <a:pPr>
-              <a:lnSpc>
-                <a:spcPct val="135000"/>
-              </a:lnSpc>
-              <a:spcAft>
-                <a:spcPts val="1100"/>
-              </a:spcAft>
-            </a:pPr>
-            <a:r>
-              <a:rPr sz="1500" b="0">
-                <a:solidFill>
-                  <a:srgbClr val="A9B6C3"/>
-                </a:solidFill>
-                <a:latin typeface="Segoe UI"/>
-              </a:rPr>
-              <a:t>The dashboard renders the SQLite journal: the screening funnel, implied-vs-realised per underlying, the measured edge on every candidate, and </a:t>
-            </a:r>
-            <a:r>
-              <a:rPr sz="1500" b="1">
-                <a:solidFill>
-                  <a:srgbClr val="E6EDF3"/>
-                </a:solidFill>
-                <a:latin typeface="Segoe UI"/>
-              </a:rPr>
-              <a:t>every trade the risk gates vetoed</a:t>
-            </a:r>
-            <a:r>
-              <a:rPr sz="1500" b="0">
-                <a:solidFill>
-                  <a:srgbClr val="A9B6C3"/>
-                </a:solidFill>
-                <a:latin typeface="Segoe UI"/>
-              </a:rPr>
-              <a:t>.</a:t>
-            </a:r>
-          </a:p>
-          <a:p>
-            <a:pPr>
-              <a:lnSpc>
-                <a:spcPct val="135000"/>
-              </a:lnSpc>
-              <a:spcAft>
-                <a:spcPts val="1100"/>
-              </a:spcAft>
-            </a:pPr>
-            <a:r>
-              <a:rPr sz="1500" b="0">
-                <a:solidFill>
-                  <a:srgbClr val="A9B6C3"/>
-                </a:solidFill>
-                <a:latin typeface="Segoe UI"/>
-              </a:rPr>
-              <a:t>It is static and read-only — no server to sleep, and no route that could place an order even if it were compromised.</a:t>
-            </a:r>
-          </a:p>
-        </p:txBody>
-      </p:sp>
-      <p:sp>
-        <p:nvSpPr>
-          <p:cNvPr id="5" name="TextBox 4"/>
-          <p:cNvSpPr txBox="1"/>
-          <p:nvPr/>
-        </p:nvSpPr>
-        <p:spPr>
-          <a:xfrm>
-            <a:off x="777240" y="4937760"/>
-            <a:ext cx="6400800" cy="365760"/>
-          </a:xfrm>
-          <a:prstGeom prst="rect">
-            <a:avLst/>
-          </a:prstGeom>
-          <a:noFill/>
-        </p:spPr>
-        <p:txBody>
-          <a:bodyPr wrap="square" anchor="t" lIns="0" rIns="0" tIns="0" bIns="0">
-            <a:spAutoFit/>
-          </a:bodyPr>
-          <a:lstStyle/>
-          <a:p>
-            <a:pPr algn="l">
-              <a:lnSpc>
-                <a:spcPct val="100000"/>
-              </a:lnSpc>
-            </a:pPr>
-            <a:r>
-              <a:rPr sz="1700" b="1">
-                <a:solidFill>
-                  <a:srgbClr val="4DD4C0"/>
-                </a:solidFill>
-                <a:latin typeface="Consolas"/>
-              </a:rPr>
-              <a:t>chong1120.github.io/Vetoed</a:t>
-            </a:r>
-          </a:p>
-        </p:txBody>
-      </p:sp>
-      <p:sp>
-        <p:nvSpPr>
-          <p:cNvPr id="6" name="Rounded Rectangle 5"/>
+              <a:t>It can learn. It can't learn its way
+around the risk controls.</a:t>
+            </a:r>
+          </a:p>
+        </p:txBody>
+      </p:sp>
+      <p:sp>
+        <p:nvSpPr>
+          <p:cNvPr id="4" name="Rounded Rectangle 3"/>
           <p:cNvSpPr/>
           <p:nvPr/>
         </p:nvSpPr>
         <p:spPr>
           <a:xfrm>
-            <a:off x="7269480" y="2606040"/>
-            <a:ext cx="1965960" cy="1234440"/>
+            <a:off x="1143000" y="2606040"/>
+            <a:ext cx="4114800" cy="457200"/>
           </a:xfrm>
           <a:prstGeom prst="roundRect">
             <a:avLst>
@@ -3543,131 +3425,92 @@
       </p:sp>
       <p:sp>
         <p:nvSpPr>
-          <p:cNvPr id="7" name="TextBox 6"/>
-          <p:cNvSpPr txBox="1"/>
-          <p:nvPr/>
-        </p:nvSpPr>
-        <p:spPr>
-          <a:xfrm>
-            <a:off x="7488936" y="2825496"/>
-            <a:ext cx="1527048" cy="219456"/>
-          </a:xfrm>
-          <a:prstGeom prst="rect">
-            <a:avLst/>
-          </a:prstGeom>
-          <a:noFill/>
-        </p:spPr>
-        <p:txBody>
-          <a:bodyPr wrap="square" anchor="t" lIns="0" rIns="0" tIns="0" bIns="0">
-            <a:spAutoFit/>
-          </a:bodyPr>
-          <a:lstStyle/>
-          <a:p>
-            <a:pPr algn="l">
+          <p:cNvPr id="5" name="TextBox 4"/>
+          <p:cNvSpPr txBox="1"/>
+          <p:nvPr/>
+        </p:nvSpPr>
+        <p:spPr>
+          <a:xfrm>
+            <a:off x="1143000" y="2724912"/>
+            <a:ext cx="4114800" cy="274320"/>
+          </a:xfrm>
+          <a:prstGeom prst="rect">
+            <a:avLst/>
+          </a:prstGeom>
+          <a:noFill/>
+        </p:spPr>
+        <p:txBody>
+          <a:bodyPr wrap="square" anchor="t" lIns="0" rIns="0" tIns="0" bIns="0">
+            <a:spAutoFit/>
+          </a:bodyPr>
+          <a:lstStyle/>
+          <a:p>
+            <a:pPr algn="ctr">
               <a:lnSpc>
                 <a:spcPct val="100000"/>
               </a:lnSpc>
             </a:pPr>
             <a:r>
-              <a:rPr sz="1050" b="1" spc="140">
+              <a:rPr sz="1200" b="1">
+                <a:solidFill>
+                  <a:srgbClr val="E6EDF3"/>
+                </a:solidFill>
+                <a:latin typeface="Consolas"/>
+              </a:rPr>
+              <a:t>TRADE</a:t>
+            </a:r>
+          </a:p>
+        </p:txBody>
+      </p:sp>
+      <p:sp>
+        <p:nvSpPr>
+          <p:cNvPr id="6" name="TextBox 5"/>
+          <p:cNvSpPr txBox="1"/>
+          <p:nvPr/>
+        </p:nvSpPr>
+        <p:spPr>
+          <a:xfrm>
+            <a:off x="1143000" y="3063240"/>
+            <a:ext cx="4114800" cy="201168"/>
+          </a:xfrm>
+          <a:prstGeom prst="rect">
+            <a:avLst/>
+          </a:prstGeom>
+          <a:noFill/>
+        </p:spPr>
+        <p:txBody>
+          <a:bodyPr wrap="square" anchor="t" lIns="0" rIns="0" tIns="0" bIns="0">
+            <a:spAutoFit/>
+          </a:bodyPr>
+          <a:lstStyle/>
+          <a:p>
+            <a:pPr algn="ctr">
+              <a:lnSpc>
+                <a:spcPct val="100000"/>
+              </a:lnSpc>
+            </a:pPr>
+            <a:r>
+              <a:rPr sz="1100" b="0">
                 <a:solidFill>
                   <a:srgbClr val="75828F"/>
                 </a:solidFill>
                 <a:latin typeface="Consolas"/>
               </a:rPr>
-              <a:t>TESTS</a:t>
-            </a:r>
-          </a:p>
-        </p:txBody>
-      </p:sp>
-      <p:sp>
-        <p:nvSpPr>
-          <p:cNvPr id="8" name="TextBox 7"/>
-          <p:cNvSpPr txBox="1"/>
-          <p:nvPr/>
-        </p:nvSpPr>
-        <p:spPr>
-          <a:xfrm>
-            <a:off x="7488936" y="3099816"/>
-            <a:ext cx="1527048" cy="502920"/>
-          </a:xfrm>
-          <a:prstGeom prst="rect">
-            <a:avLst/>
-          </a:prstGeom>
-          <a:noFill/>
-        </p:spPr>
-        <p:txBody>
-          <a:bodyPr wrap="square" anchor="t" lIns="0" rIns="0" tIns="0" bIns="0">
-            <a:spAutoFit/>
-          </a:bodyPr>
-          <a:lstStyle/>
-          <a:p>
-            <a:pPr algn="l">
-              <a:lnSpc>
-                <a:spcPct val="100000"/>
-              </a:lnSpc>
-            </a:pPr>
-            <a:r>
-              <a:rPr sz="3000" b="1">
-                <a:solidFill>
-                  <a:srgbClr val="3ECF8E"/>
-                </a:solidFill>
-                <a:latin typeface="Consolas"/>
-              </a:rPr>
-              <a:t>199</a:t>
-            </a:r>
-          </a:p>
-        </p:txBody>
-      </p:sp>
-      <p:sp>
-        <p:nvSpPr>
-          <p:cNvPr id="9" name="TextBox 8"/>
-          <p:cNvSpPr txBox="1"/>
-          <p:nvPr/>
-        </p:nvSpPr>
-        <p:spPr>
-          <a:xfrm>
-            <a:off x="7488936" y="3145536"/>
-            <a:ext cx="1527048" cy="457200"/>
-          </a:xfrm>
-          <a:prstGeom prst="rect">
-            <a:avLst/>
-          </a:prstGeom>
-          <a:noFill/>
-        </p:spPr>
-        <p:txBody>
-          <a:bodyPr wrap="square" anchor="t" lIns="0" rIns="0" tIns="0" bIns="0">
-            <a:spAutoFit/>
-          </a:bodyPr>
-          <a:lstStyle/>
-          <a:p>
-            <a:pPr algn="l">
-              <a:lnSpc>
-                <a:spcPct val="120000"/>
-              </a:lnSpc>
-            </a:pPr>
-            <a:r>
-              <a:rPr sz="1150" b="0">
-                <a:solidFill>
-                  <a:srgbClr val="75828F"/>
-                </a:solidFill>
-                <a:latin typeface="Segoe UI"/>
-              </a:rPr>
-              <a:t>passing</a:t>
-            </a:r>
-          </a:p>
-        </p:txBody>
-      </p:sp>
-      <p:sp>
-        <p:nvSpPr>
-          <p:cNvPr id="10" name="Rounded Rectangle 9"/>
+              <a:t>↓</a:t>
+            </a:r>
+          </a:p>
+        </p:txBody>
+      </p:sp>
+      <p:sp>
+        <p:nvSpPr>
+          <p:cNvPr id="7" name="Rounded Rectangle 6"/>
           <p:cNvSpPr/>
           <p:nvPr/>
         </p:nvSpPr>
         <p:spPr>
           <a:xfrm>
-            <a:off x="9418320" y="2606040"/>
-            <a:ext cx="1965960" cy="1234440"/>
+            <a:off x="1143000" y="3264408"/>
+            <a:ext cx="4114800" cy="457200"/>
           </a:xfrm>
           <a:prstGeom prst="roundRect">
             <a:avLst>
@@ -3706,131 +3549,92 @@
       </p:sp>
       <p:sp>
         <p:nvSpPr>
-          <p:cNvPr id="11" name="TextBox 10"/>
-          <p:cNvSpPr txBox="1"/>
-          <p:nvPr/>
-        </p:nvSpPr>
-        <p:spPr>
-          <a:xfrm>
-            <a:off x="9637776" y="2825496"/>
-            <a:ext cx="1527048" cy="219456"/>
-          </a:xfrm>
-          <a:prstGeom prst="rect">
-            <a:avLst/>
-          </a:prstGeom>
-          <a:noFill/>
-        </p:spPr>
-        <p:txBody>
-          <a:bodyPr wrap="square" anchor="t" lIns="0" rIns="0" tIns="0" bIns="0">
-            <a:spAutoFit/>
-          </a:bodyPr>
-          <a:lstStyle/>
-          <a:p>
-            <a:pPr algn="l">
+          <p:cNvPr id="8" name="TextBox 7"/>
+          <p:cNvSpPr txBox="1"/>
+          <p:nvPr/>
+        </p:nvSpPr>
+        <p:spPr>
+          <a:xfrm>
+            <a:off x="1143000" y="3383280"/>
+            <a:ext cx="4114800" cy="274320"/>
+          </a:xfrm>
+          <a:prstGeom prst="rect">
+            <a:avLst/>
+          </a:prstGeom>
+          <a:noFill/>
+        </p:spPr>
+        <p:txBody>
+          <a:bodyPr wrap="square" anchor="t" lIns="0" rIns="0" tIns="0" bIns="0">
+            <a:spAutoFit/>
+          </a:bodyPr>
+          <a:lstStyle/>
+          <a:p>
+            <a:pPr algn="ctr">
               <a:lnSpc>
                 <a:spcPct val="100000"/>
               </a:lnSpc>
             </a:pPr>
             <a:r>
-              <a:rPr sz="1050" b="1" spc="140">
+              <a:rPr sz="1200" b="1">
+                <a:solidFill>
+                  <a:srgbClr val="E6EDF3"/>
+                </a:solidFill>
+                <a:latin typeface="Consolas"/>
+              </a:rPr>
+              <a:t>JOURNAL EVERY DECISION</a:t>
+            </a:r>
+          </a:p>
+        </p:txBody>
+      </p:sp>
+      <p:sp>
+        <p:nvSpPr>
+          <p:cNvPr id="9" name="TextBox 8"/>
+          <p:cNvSpPr txBox="1"/>
+          <p:nvPr/>
+        </p:nvSpPr>
+        <p:spPr>
+          <a:xfrm>
+            <a:off x="1143000" y="3721608"/>
+            <a:ext cx="4114800" cy="201168"/>
+          </a:xfrm>
+          <a:prstGeom prst="rect">
+            <a:avLst/>
+          </a:prstGeom>
+          <a:noFill/>
+        </p:spPr>
+        <p:txBody>
+          <a:bodyPr wrap="square" anchor="t" lIns="0" rIns="0" tIns="0" bIns="0">
+            <a:spAutoFit/>
+          </a:bodyPr>
+          <a:lstStyle/>
+          <a:p>
+            <a:pPr algn="ctr">
+              <a:lnSpc>
+                <a:spcPct val="100000"/>
+              </a:lnSpc>
+            </a:pPr>
+            <a:r>
+              <a:rPr sz="1100" b="0">
                 <a:solidFill>
                   <a:srgbClr val="75828F"/>
                 </a:solidFill>
                 <a:latin typeface="Consolas"/>
               </a:rPr>
-              <a:t>LLM WRITES</a:t>
-            </a:r>
-          </a:p>
-        </p:txBody>
-      </p:sp>
-      <p:sp>
-        <p:nvSpPr>
-          <p:cNvPr id="12" name="TextBox 11"/>
-          <p:cNvSpPr txBox="1"/>
-          <p:nvPr/>
-        </p:nvSpPr>
-        <p:spPr>
-          <a:xfrm>
-            <a:off x="9637776" y="3099816"/>
-            <a:ext cx="1527048" cy="502920"/>
-          </a:xfrm>
-          <a:prstGeom prst="rect">
-            <a:avLst/>
-          </a:prstGeom>
-          <a:noFill/>
-        </p:spPr>
-        <p:txBody>
-          <a:bodyPr wrap="square" anchor="t" lIns="0" rIns="0" tIns="0" bIns="0">
-            <a:spAutoFit/>
-          </a:bodyPr>
-          <a:lstStyle/>
-          <a:p>
-            <a:pPr algn="l">
-              <a:lnSpc>
-                <a:spcPct val="100000"/>
-              </a:lnSpc>
-            </a:pPr>
-            <a:r>
-              <a:rPr sz="3000" b="1">
-                <a:solidFill>
-                  <a:srgbClr val="E6EDF3"/>
-                </a:solidFill>
-                <a:latin typeface="Consolas"/>
-              </a:rPr>
-              <a:t>0</a:t>
-            </a:r>
-          </a:p>
-        </p:txBody>
-      </p:sp>
-      <p:sp>
-        <p:nvSpPr>
-          <p:cNvPr id="13" name="TextBox 12"/>
-          <p:cNvSpPr txBox="1"/>
-          <p:nvPr/>
-        </p:nvSpPr>
-        <p:spPr>
-          <a:xfrm>
-            <a:off x="9637776" y="3145536"/>
-            <a:ext cx="1527048" cy="457200"/>
-          </a:xfrm>
-          <a:prstGeom prst="rect">
-            <a:avLst/>
-          </a:prstGeom>
-          <a:noFill/>
-        </p:spPr>
-        <p:txBody>
-          <a:bodyPr wrap="square" anchor="t" lIns="0" rIns="0" tIns="0" bIns="0">
-            <a:spAutoFit/>
-          </a:bodyPr>
-          <a:lstStyle/>
-          <a:p>
-            <a:pPr algn="l">
-              <a:lnSpc>
-                <a:spcPct val="120000"/>
-              </a:lnSpc>
-            </a:pPr>
-            <a:r>
-              <a:rPr sz="1150" b="0">
-                <a:solidFill>
-                  <a:srgbClr val="75828F"/>
-                </a:solidFill>
-                <a:latin typeface="Segoe UI"/>
-              </a:rPr>
-              <a:t>to the broker</a:t>
-            </a:r>
-          </a:p>
-        </p:txBody>
-      </p:sp>
-      <p:sp>
-        <p:nvSpPr>
-          <p:cNvPr id="14" name="Rounded Rectangle 13"/>
+              <a:t>↓</a:t>
+            </a:r>
+          </a:p>
+        </p:txBody>
+      </p:sp>
+      <p:sp>
+        <p:nvSpPr>
+          <p:cNvPr id="10" name="Rounded Rectangle 9"/>
           <p:cNvSpPr/>
           <p:nvPr/>
         </p:nvSpPr>
         <p:spPr>
           <a:xfrm>
-            <a:off x="7269480" y="4023360"/>
-            <a:ext cx="1965960" cy="1234440"/>
+            <a:off x="1143000" y="3922776"/>
+            <a:ext cx="4114800" cy="457200"/>
           </a:xfrm>
           <a:prstGeom prst="roundRect">
             <a:avLst>
@@ -3869,131 +3673,216 @@
       </p:sp>
       <p:sp>
         <p:nvSpPr>
+          <p:cNvPr id="11" name="TextBox 10"/>
+          <p:cNvSpPr txBox="1"/>
+          <p:nvPr/>
+        </p:nvSpPr>
+        <p:spPr>
+          <a:xfrm>
+            <a:off x="1143000" y="4041648"/>
+            <a:ext cx="4114800" cy="274320"/>
+          </a:xfrm>
+          <a:prstGeom prst="rect">
+            <a:avLst/>
+          </a:prstGeom>
+          <a:noFill/>
+        </p:spPr>
+        <p:txBody>
+          <a:bodyPr wrap="square" anchor="t" lIns="0" rIns="0" tIns="0" bIns="0">
+            <a:spAutoFit/>
+          </a:bodyPr>
+          <a:lstStyle/>
+          <a:p>
+            <a:pPr algn="ctr">
+              <a:lnSpc>
+                <a:spcPct val="100000"/>
+              </a:lnSpc>
+            </a:pPr>
+            <a:r>
+              <a:rPr sz="1200" b="1">
+                <a:solidFill>
+                  <a:srgbClr val="E6EDF3"/>
+                </a:solidFill>
+                <a:latin typeface="Consolas"/>
+              </a:rPr>
+              <a:t>ANALYSE CLOSED TRADES</a:t>
+            </a:r>
+          </a:p>
+        </p:txBody>
+      </p:sp>
+      <p:sp>
+        <p:nvSpPr>
+          <p:cNvPr id="12" name="TextBox 11"/>
+          <p:cNvSpPr txBox="1"/>
+          <p:nvPr/>
+        </p:nvSpPr>
+        <p:spPr>
+          <a:xfrm>
+            <a:off x="1143000" y="4379976"/>
+            <a:ext cx="4114800" cy="201168"/>
+          </a:xfrm>
+          <a:prstGeom prst="rect">
+            <a:avLst/>
+          </a:prstGeom>
+          <a:noFill/>
+        </p:spPr>
+        <p:txBody>
+          <a:bodyPr wrap="square" anchor="t" lIns="0" rIns="0" tIns="0" bIns="0">
+            <a:spAutoFit/>
+          </a:bodyPr>
+          <a:lstStyle/>
+          <a:p>
+            <a:pPr algn="ctr">
+              <a:lnSpc>
+                <a:spcPct val="100000"/>
+              </a:lnSpc>
+            </a:pPr>
+            <a:r>
+              <a:rPr sz="1100" b="0">
+                <a:solidFill>
+                  <a:srgbClr val="75828F"/>
+                </a:solidFill>
+                <a:latin typeface="Consolas"/>
+              </a:rPr>
+              <a:t>↓</a:t>
+            </a:r>
+          </a:p>
+        </p:txBody>
+      </p:sp>
+      <p:sp>
+        <p:nvSpPr>
+          <p:cNvPr id="13" name="Rounded Rectangle 12"/>
+          <p:cNvSpPr/>
+          <p:nvPr/>
+        </p:nvSpPr>
+        <p:spPr>
+          <a:xfrm>
+            <a:off x="1143000" y="4581144"/>
+            <a:ext cx="4114800" cy="457200"/>
+          </a:xfrm>
+          <a:prstGeom prst="roundRect">
+            <a:avLst>
+              <a:gd name="adj" fmla="val 6000"/>
+            </a:avLst>
+          </a:prstGeom>
+          <a:solidFill>
+            <a:srgbClr val="241B0C"/>
+          </a:solidFill>
+          <a:ln w="12700">
+            <a:solidFill>
+              <a:srgbClr val="F0A93B"/>
+            </a:solidFill>
+          </a:ln>
+          <a:effectLst/>
+        </p:spPr>
+        <p:style>
+          <a:lnRef idx="1">
+            <a:schemeClr val="accent1"/>
+          </a:lnRef>
+          <a:fillRef idx="3">
+            <a:schemeClr val="accent1"/>
+          </a:fillRef>
+          <a:effectRef idx="2">
+            <a:schemeClr val="accent1"/>
+          </a:effectRef>
+          <a:fontRef idx="minor">
+            <a:schemeClr val="lt1"/>
+          </a:fontRef>
+        </p:style>
+        <p:txBody>
+          <a:bodyPr rtlCol="0" anchor="ctr"/>
+          <a:lstStyle/>
+          <a:p/>
+        </p:txBody>
+      </p:sp>
+      <p:sp>
+        <p:nvSpPr>
+          <p:cNvPr id="14" name="TextBox 13"/>
+          <p:cNvSpPr txBox="1"/>
+          <p:nvPr/>
+        </p:nvSpPr>
+        <p:spPr>
+          <a:xfrm>
+            <a:off x="1143000" y="4700016"/>
+            <a:ext cx="4114800" cy="274320"/>
+          </a:xfrm>
+          <a:prstGeom prst="rect">
+            <a:avLst/>
+          </a:prstGeom>
+          <a:noFill/>
+        </p:spPr>
+        <p:txBody>
+          <a:bodyPr wrap="square" anchor="t" lIns="0" rIns="0" tIns="0" bIns="0">
+            <a:spAutoFit/>
+          </a:bodyPr>
+          <a:lstStyle/>
+          <a:p>
+            <a:pPr algn="ctr">
+              <a:lnSpc>
+                <a:spcPct val="100000"/>
+              </a:lnSpc>
+            </a:pPr>
+            <a:r>
+              <a:rPr sz="1200" b="1">
+                <a:solidFill>
+                  <a:srgbClr val="F0A93B"/>
+                </a:solidFill>
+                <a:latin typeface="Consolas"/>
+              </a:rPr>
+              <a:t>MIN 5 CLOSED TRADES</a:t>
+            </a:r>
+          </a:p>
+        </p:txBody>
+      </p:sp>
+      <p:sp>
+        <p:nvSpPr>
           <p:cNvPr id="15" name="TextBox 14"/>
           <p:cNvSpPr txBox="1"/>
           <p:nvPr/>
         </p:nvSpPr>
         <p:spPr>
           <a:xfrm>
-            <a:off x="7488936" y="4242816"/>
-            <a:ext cx="1527048" cy="219456"/>
-          </a:xfrm>
-          <a:prstGeom prst="rect">
-            <a:avLst/>
-          </a:prstGeom>
-          <a:noFill/>
-        </p:spPr>
-        <p:txBody>
-          <a:bodyPr wrap="square" anchor="t" lIns="0" rIns="0" tIns="0" bIns="0">
-            <a:spAutoFit/>
-          </a:bodyPr>
-          <a:lstStyle/>
-          <a:p>
-            <a:pPr algn="l">
+            <a:off x="1143000" y="5038344"/>
+            <a:ext cx="4114800" cy="201168"/>
+          </a:xfrm>
+          <a:prstGeom prst="rect">
+            <a:avLst/>
+          </a:prstGeom>
+          <a:noFill/>
+        </p:spPr>
+        <p:txBody>
+          <a:bodyPr wrap="square" anchor="t" lIns="0" rIns="0" tIns="0" bIns="0">
+            <a:spAutoFit/>
+          </a:bodyPr>
+          <a:lstStyle/>
+          <a:p>
+            <a:pPr algn="ctr">
               <a:lnSpc>
                 <a:spcPct val="100000"/>
               </a:lnSpc>
             </a:pPr>
             <a:r>
-              <a:rPr sz="1050" b="1" spc="140">
+              <a:rPr sz="1100" b="0">
                 <a:solidFill>
                   <a:srgbClr val="75828F"/>
                 </a:solidFill>
                 <a:latin typeface="Consolas"/>
               </a:rPr>
-              <a:t>RISK GATES</a:t>
-            </a:r>
-          </a:p>
-        </p:txBody>
-      </p:sp>
-      <p:sp>
-        <p:nvSpPr>
-          <p:cNvPr id="16" name="TextBox 15"/>
-          <p:cNvSpPr txBox="1"/>
-          <p:nvPr/>
-        </p:nvSpPr>
-        <p:spPr>
-          <a:xfrm>
-            <a:off x="7488936" y="4517136"/>
-            <a:ext cx="1527048" cy="502920"/>
-          </a:xfrm>
-          <a:prstGeom prst="rect">
-            <a:avLst/>
-          </a:prstGeom>
-          <a:noFill/>
-        </p:spPr>
-        <p:txBody>
-          <a:bodyPr wrap="square" anchor="t" lIns="0" rIns="0" tIns="0" bIns="0">
-            <a:spAutoFit/>
-          </a:bodyPr>
-          <a:lstStyle/>
-          <a:p>
-            <a:pPr algn="l">
-              <a:lnSpc>
-                <a:spcPct val="100000"/>
-              </a:lnSpc>
-            </a:pPr>
-            <a:r>
-              <a:rPr sz="3000" b="1">
-                <a:solidFill>
-                  <a:srgbClr val="E6EDF3"/>
-                </a:solidFill>
-                <a:latin typeface="Consolas"/>
-              </a:rPr>
-              <a:t>8</a:t>
-            </a:r>
-          </a:p>
-        </p:txBody>
-      </p:sp>
-      <p:sp>
-        <p:nvSpPr>
-          <p:cNvPr id="17" name="TextBox 16"/>
-          <p:cNvSpPr txBox="1"/>
-          <p:nvPr/>
-        </p:nvSpPr>
-        <p:spPr>
-          <a:xfrm>
-            <a:off x="7488936" y="4562856"/>
-            <a:ext cx="1527048" cy="457200"/>
-          </a:xfrm>
-          <a:prstGeom prst="rect">
-            <a:avLst/>
-          </a:prstGeom>
-          <a:noFill/>
-        </p:spPr>
-        <p:txBody>
-          <a:bodyPr wrap="square" anchor="t" lIns="0" rIns="0" tIns="0" bIns="0">
-            <a:spAutoFit/>
-          </a:bodyPr>
-          <a:lstStyle/>
-          <a:p>
-            <a:pPr algn="l">
-              <a:lnSpc>
-                <a:spcPct val="120000"/>
-              </a:lnSpc>
-            </a:pPr>
-            <a:r>
-              <a:rPr sz="1150" b="0">
-                <a:solidFill>
-                  <a:srgbClr val="75828F"/>
-                </a:solidFill>
-                <a:latin typeface="Segoe UI"/>
-              </a:rPr>
-              <a:t>any one vetoes</a:t>
-            </a:r>
-          </a:p>
-        </p:txBody>
-      </p:sp>
-      <p:sp>
-        <p:nvSpPr>
-          <p:cNvPr id="18" name="Rounded Rectangle 17"/>
+              <a:t>↓</a:t>
+            </a:r>
+          </a:p>
+        </p:txBody>
+      </p:sp>
+      <p:sp>
+        <p:nvSpPr>
+          <p:cNvPr id="16" name="Rounded Rectangle 15"/>
           <p:cNvSpPr/>
           <p:nvPr/>
         </p:nvSpPr>
         <p:spPr>
           <a:xfrm>
-            <a:off x="9418320" y="4023360"/>
-            <a:ext cx="1965960" cy="1234440"/>
+            <a:off x="1143000" y="5239512"/>
+            <a:ext cx="4114800" cy="457200"/>
           </a:xfrm>
           <a:prstGeom prst="roundRect">
             <a:avLst>
@@ -4032,41 +3921,126 @@
       </p:sp>
       <p:sp>
         <p:nvSpPr>
-          <p:cNvPr id="19" name="TextBox 18"/>
-          <p:cNvSpPr txBox="1"/>
-          <p:nvPr/>
-        </p:nvSpPr>
-        <p:spPr>
-          <a:xfrm>
-            <a:off x="9637776" y="4242816"/>
-            <a:ext cx="1527048" cy="219456"/>
-          </a:xfrm>
-          <a:prstGeom prst="rect">
-            <a:avLst/>
-          </a:prstGeom>
-          <a:noFill/>
-        </p:spPr>
-        <p:txBody>
-          <a:bodyPr wrap="square" anchor="t" lIns="0" rIns="0" tIns="0" bIns="0">
-            <a:spAutoFit/>
-          </a:bodyPr>
-          <a:lstStyle/>
-          <a:p>
-            <a:pPr algn="l">
+          <p:cNvPr id="17" name="TextBox 16"/>
+          <p:cNvSpPr txBox="1"/>
+          <p:nvPr/>
+        </p:nvSpPr>
+        <p:spPr>
+          <a:xfrm>
+            <a:off x="1143000" y="5358384"/>
+            <a:ext cx="4114800" cy="274320"/>
+          </a:xfrm>
+          <a:prstGeom prst="rect">
+            <a:avLst/>
+          </a:prstGeom>
+          <a:noFill/>
+        </p:spPr>
+        <p:txBody>
+          <a:bodyPr wrap="square" anchor="t" lIns="0" rIns="0" tIns="0" bIns="0">
+            <a:spAutoFit/>
+          </a:bodyPr>
+          <a:lstStyle/>
+          <a:p>
+            <a:pPr algn="ctr">
               <a:lnSpc>
                 <a:spcPct val="100000"/>
               </a:lnSpc>
             </a:pPr>
             <a:r>
-              <a:rPr sz="1050" b="1" spc="140">
+              <a:rPr sz="1200" b="1">
+                <a:solidFill>
+                  <a:srgbClr val="E6EDF3"/>
+                </a:solidFill>
+                <a:latin typeface="Consolas"/>
+              </a:rPr>
+              <a:t>TIGHTEN A LIMIT</a:t>
+            </a:r>
+          </a:p>
+        </p:txBody>
+      </p:sp>
+      <p:sp>
+        <p:nvSpPr>
+          <p:cNvPr id="18" name="TextBox 17"/>
+          <p:cNvSpPr txBox="1"/>
+          <p:nvPr/>
+        </p:nvSpPr>
+        <p:spPr>
+          <a:xfrm>
+            <a:off x="1143000" y="5696712"/>
+            <a:ext cx="4114800" cy="201168"/>
+          </a:xfrm>
+          <a:prstGeom prst="rect">
+            <a:avLst/>
+          </a:prstGeom>
+          <a:noFill/>
+        </p:spPr>
+        <p:txBody>
+          <a:bodyPr wrap="square" anchor="t" lIns="0" rIns="0" tIns="0" bIns="0">
+            <a:spAutoFit/>
+          </a:bodyPr>
+          <a:lstStyle/>
+          <a:p>
+            <a:pPr algn="ctr">
+              <a:lnSpc>
+                <a:spcPct val="100000"/>
+              </a:lnSpc>
+            </a:pPr>
+            <a:r>
+              <a:rPr sz="1100" b="0">
                 <a:solidFill>
                   <a:srgbClr val="75828F"/>
                 </a:solidFill>
                 <a:latin typeface="Consolas"/>
               </a:rPr>
-              <a:t>NAKED POSITIONS</a:t>
-            </a:r>
-          </a:p>
+              <a:t>↓</a:t>
+            </a:r>
+          </a:p>
+        </p:txBody>
+      </p:sp>
+      <p:sp>
+        <p:nvSpPr>
+          <p:cNvPr id="19" name="Rounded Rectangle 18"/>
+          <p:cNvSpPr/>
+          <p:nvPr/>
+        </p:nvSpPr>
+        <p:spPr>
+          <a:xfrm>
+            <a:off x="1143000" y="5897880"/>
+            <a:ext cx="4114800" cy="457200"/>
+          </a:xfrm>
+          <a:prstGeom prst="roundRect">
+            <a:avLst>
+              <a:gd name="adj" fmla="val 6000"/>
+            </a:avLst>
+          </a:prstGeom>
+          <a:solidFill>
+            <a:srgbClr val="10161E"/>
+          </a:solidFill>
+          <a:ln w="12700">
+            <a:solidFill>
+              <a:srgbClr val="212C38"/>
+            </a:solidFill>
+          </a:ln>
+          <a:effectLst/>
+        </p:spPr>
+        <p:style>
+          <a:lnRef idx="1">
+            <a:schemeClr val="accent1"/>
+          </a:lnRef>
+          <a:fillRef idx="3">
+            <a:schemeClr val="accent1"/>
+          </a:fillRef>
+          <a:effectRef idx="2">
+            <a:schemeClr val="accent1"/>
+          </a:effectRef>
+          <a:fontRef idx="minor">
+            <a:schemeClr val="lt1"/>
+          </a:fontRef>
+        </p:style>
+        <p:txBody>
+          <a:bodyPr rtlCol="0" anchor="ctr"/>
+          <a:lstStyle/>
+          <a:p/>
         </p:txBody>
       </p:sp>
       <p:sp>
@@ -4077,33 +4051,33 @@
         </p:nvSpPr>
         <p:spPr>
           <a:xfrm>
-            <a:off x="9637776" y="4517136"/>
-            <a:ext cx="1527048" cy="502920"/>
-          </a:xfrm>
-          <a:prstGeom prst="rect">
-            <a:avLst/>
-          </a:prstGeom>
-          <a:noFill/>
-        </p:spPr>
-        <p:txBody>
-          <a:bodyPr wrap="square" anchor="t" lIns="0" rIns="0" tIns="0" bIns="0">
-            <a:spAutoFit/>
-          </a:bodyPr>
-          <a:lstStyle/>
-          <a:p>
-            <a:pPr algn="l">
+            <a:off x="1143000" y="6016752"/>
+            <a:ext cx="4114800" cy="274320"/>
+          </a:xfrm>
+          <a:prstGeom prst="rect">
+            <a:avLst/>
+          </a:prstGeom>
+          <a:noFill/>
+        </p:spPr>
+        <p:txBody>
+          <a:bodyPr wrap="square" anchor="t" lIns="0" rIns="0" tIns="0" bIns="0">
+            <a:spAutoFit/>
+          </a:bodyPr>
+          <a:lstStyle/>
+          <a:p>
+            <a:pPr algn="ctr">
               <a:lnSpc>
                 <a:spcPct val="100000"/>
               </a:lnSpc>
             </a:pPr>
             <a:r>
-              <a:rPr sz="3000" b="1">
-                <a:solidFill>
-                  <a:srgbClr val="3ECF8E"/>
+              <a:rPr sz="1200" b="1">
+                <a:solidFill>
+                  <a:srgbClr val="E6EDF3"/>
                 </a:solidFill>
                 <a:latin typeface="Consolas"/>
               </a:rPr>
-              <a:t>0</a:t>
+              <a:t>NEXT SESSION</a:t>
             </a:r>
           </a:p>
         </p:txBody>
@@ -4116,40 +4090,198 @@
         </p:nvSpPr>
         <p:spPr>
           <a:xfrm>
-            <a:off x="9637776" y="4562856"/>
-            <a:ext cx="1527048" cy="457200"/>
-          </a:xfrm>
-          <a:prstGeom prst="rect">
-            <a:avLst/>
-          </a:prstGeom>
-          <a:noFill/>
-        </p:spPr>
-        <p:txBody>
-          <a:bodyPr wrap="square" anchor="t" lIns="0" rIns="0" tIns="0" bIns="0">
-            <a:spAutoFit/>
-          </a:bodyPr>
-          <a:lstStyle/>
-          <a:p>
-            <a:pPr algn="l">
-              <a:lnSpc>
-                <a:spcPct val="120000"/>
-              </a:lnSpc>
-            </a:pPr>
-            <a:r>
-              <a:rPr sz="1150" b="0">
-                <a:solidFill>
-                  <a:srgbClr val="75828F"/>
+            <a:off x="6172200" y="2651760"/>
+            <a:ext cx="5029200" cy="3108960"/>
+          </a:xfrm>
+          <a:prstGeom prst="rect">
+            <a:avLst/>
+          </a:prstGeom>
+          <a:noFill/>
+        </p:spPr>
+        <p:txBody>
+          <a:bodyPr wrap="square" lIns="0" rIns="0" tIns="0" bIns="0">
+            <a:spAutoFit/>
+          </a:bodyPr>
+          <a:lstStyle/>
+          <a:p>
+            <a:pPr>
+              <a:lnSpc>
+                <a:spcPct val="135000"/>
+              </a:lnSpc>
+              <a:spcAft>
+                <a:spcPts val="1100"/>
+              </a:spcAft>
+            </a:pPr>
+            <a:r>
+              <a:rPr sz="1400" b="0">
+                <a:solidFill>
+                  <a:srgbClr val="A9B6C3"/>
                 </a:solidFill>
                 <a:latin typeface="Segoe UI"/>
               </a:rPr>
-              <a:t>structurally impossible</a:t>
-            </a:r>
-          </a:p>
-        </p:txBody>
-      </p:sp>
-      <p:sp>
-        <p:nvSpPr>
-          <p:cNvPr id="22" name="TextBox 21"/>
+              <a:t>Three losses in a row on one underlying, and it stops trading that underlying. A losing delta band gets narrowed.</a:t>
+            </a:r>
+          </a:p>
+          <a:p>
+            <a:pPr>
+              <a:lnSpc>
+                <a:spcPct val="135000"/>
+              </a:lnSpc>
+              <a:spcAft>
+                <a:spcPts val="1100"/>
+              </a:spcAft>
+            </a:pPr>
+            <a:r>
+              <a:rPr sz="1400" b="1">
+                <a:solidFill>
+                  <a:srgbClr val="E6EDF3"/>
+                </a:solidFill>
+                <a:latin typeface="Segoe UI"/>
+              </a:rPr>
+              <a:t>Every adjustment is clamped against the defaults</a:t>
+            </a:r>
+            <a:r>
+              <a:rPr sz="1400" b="0">
+                <a:solidFill>
+                  <a:srgbClr val="A9B6C3"/>
+                </a:solidFill>
+                <a:latin typeface="Segoe UI"/>
+              </a:rPr>
+              <a:t>, so the loop can only ever make the agent more restrictive.</a:t>
+            </a:r>
+          </a:p>
+        </p:txBody>
+      </p:sp>
+      <p:sp>
+        <p:nvSpPr>
+          <p:cNvPr id="22" name="Rounded Rectangle 21"/>
+          <p:cNvSpPr/>
+          <p:nvPr/>
+        </p:nvSpPr>
+        <p:spPr>
+          <a:xfrm>
+            <a:off x="6172200" y="4343400"/>
+            <a:ext cx="5029200" cy="1691640"/>
+          </a:xfrm>
+          <a:prstGeom prst="roundRect">
+            <a:avLst>
+              <a:gd name="adj" fmla="val 6000"/>
+            </a:avLst>
+          </a:prstGeom>
+          <a:solidFill>
+            <a:srgbClr val="10161E"/>
+          </a:solidFill>
+          <a:ln w="12700">
+            <a:solidFill>
+              <a:srgbClr val="F0A93B"/>
+            </a:solidFill>
+          </a:ln>
+          <a:effectLst/>
+        </p:spPr>
+        <p:style>
+          <a:lnRef idx="1">
+            <a:schemeClr val="accent1"/>
+          </a:lnRef>
+          <a:fillRef idx="3">
+            <a:schemeClr val="accent1"/>
+          </a:fillRef>
+          <a:effectRef idx="2">
+            <a:schemeClr val="accent1"/>
+          </a:effectRef>
+          <a:fontRef idx="minor">
+            <a:schemeClr val="lt1"/>
+          </a:fontRef>
+        </p:style>
+        <p:txBody>
+          <a:bodyPr rtlCol="0" anchor="ctr"/>
+          <a:lstStyle/>
+          <a:p/>
+        </p:txBody>
+      </p:sp>
+      <p:sp>
+        <p:nvSpPr>
+          <p:cNvPr id="23" name="TextBox 22"/>
+          <p:cNvSpPr txBox="1"/>
+          <p:nvPr/>
+        </p:nvSpPr>
+        <p:spPr>
+          <a:xfrm>
+            <a:off x="6446520" y="4526280"/>
+            <a:ext cx="4480560" cy="274320"/>
+          </a:xfrm>
+          <a:prstGeom prst="rect">
+            <a:avLst/>
+          </a:prstGeom>
+          <a:noFill/>
+        </p:spPr>
+        <p:txBody>
+          <a:bodyPr wrap="square" anchor="t" lIns="0" rIns="0" tIns="0" bIns="0">
+            <a:spAutoFit/>
+          </a:bodyPr>
+          <a:lstStyle/>
+          <a:p>
+            <a:pPr algn="l">
+              <a:lnSpc>
+                <a:spcPct val="100000"/>
+              </a:lnSpc>
+            </a:pPr>
+            <a:r>
+              <a:rPr sz="1050" b="1" spc="130">
+                <a:solidFill>
+                  <a:srgbClr val="F0A93B"/>
+                </a:solidFill>
+                <a:latin typeface="Consolas"/>
+              </a:rPr>
+              <a:t>IT CANNOT</a:t>
+            </a:r>
+          </a:p>
+        </p:txBody>
+      </p:sp>
+      <p:sp>
+        <p:nvSpPr>
+          <p:cNvPr id="24" name="TextBox 23"/>
+          <p:cNvSpPr txBox="1"/>
+          <p:nvPr/>
+        </p:nvSpPr>
+        <p:spPr>
+          <a:xfrm>
+            <a:off x="6446520" y="4864608"/>
+            <a:ext cx="4480560" cy="1097280"/>
+          </a:xfrm>
+          <a:prstGeom prst="rect">
+            <a:avLst/>
+          </a:prstGeom>
+          <a:noFill/>
+        </p:spPr>
+        <p:txBody>
+          <a:bodyPr wrap="square" anchor="t" lIns="0" rIns="0" tIns="0" bIns="0">
+            <a:spAutoFit/>
+          </a:bodyPr>
+          <a:lstStyle/>
+          <a:p>
+            <a:pPr algn="l">
+              <a:lnSpc>
+                <a:spcPct val="145000"/>
+              </a:lnSpc>
+            </a:pPr>
+            <a:r>
+              <a:rPr sz="1250" b="0">
+                <a:solidFill>
+                  <a:srgbClr val="A9B6C3"/>
+                </a:solidFill>
+                <a:latin typeface="Segoe UI"/>
+              </a:rPr>
+              <a:t>increase position size
+loosen a hard limit
+re-enable something it disabled
+react to fewer than 5 closed trades</a:t>
+            </a:r>
+          </a:p>
+        </p:txBody>
+      </p:sp>
+      <p:sp>
+        <p:nvSpPr>
+          <p:cNvPr id="25" name="TextBox 24"/>
           <p:cNvSpPr txBox="1"/>
           <p:nvPr/>
         </p:nvSpPr>
@@ -4188,7 +4320,7 @@
       </p:sp>
       <p:sp>
         <p:nvSpPr>
-          <p:cNvPr id="23" name="TextBox 22"/>
+          <p:cNvPr id="26" name="TextBox 25"/>
           <p:cNvSpPr txBox="1"/>
           <p:nvPr/>
         </p:nvSpPr>
@@ -4227,7 +4359,7 @@
       </p:sp>
       <p:sp>
         <p:nvSpPr>
-          <p:cNvPr id="24" name="Rectangle 23"/>
+          <p:cNvPr id="27" name="Rectangle 26"/>
           <p:cNvSpPr/>
           <p:nvPr/>
         </p:nvSpPr>
@@ -4327,7 +4459,7 @@
                 </a:solidFill>
                 <a:latin typeface="Consolas"/>
               </a:rPr>
-              <a:t>WHAT I AM NOT CLAIMING</a:t>
+              <a:t>RUNNING, UNATTENDED</a:t>
             </a:r>
           </a:p>
         </p:txBody>
@@ -4366,7 +4498,8 @@
                 </a:solidFill>
                 <a:latin typeface="Segoe UI"/>
               </a:rPr>
-              <a:t>The limits, stated before you find them.</a:t>
+              <a:t>It trades on a schedule,
+with nothing of mine switched on.</a:t>
             </a:r>
           </a:p>
         </p:txBody>
@@ -4379,8 +4512,78 @@
         </p:nvSpPr>
         <p:spPr>
           <a:xfrm>
-            <a:off x="777240" y="2395728"/>
-            <a:ext cx="228600" cy="274320"/>
+            <a:off x="777240" y="2697480"/>
+            <a:ext cx="6035040" cy="3108960"/>
+          </a:xfrm>
+          <a:prstGeom prst="rect">
+            <a:avLst/>
+          </a:prstGeom>
+          <a:noFill/>
+        </p:spPr>
+        <p:txBody>
+          <a:bodyPr wrap="square" lIns="0" rIns="0" tIns="0" bIns="0">
+            <a:spAutoFit/>
+          </a:bodyPr>
+          <a:lstStyle/>
+          <a:p>
+            <a:pPr>
+              <a:lnSpc>
+                <a:spcPct val="135000"/>
+              </a:lnSpc>
+              <a:spcAft>
+                <a:spcPts val="1100"/>
+              </a:spcAft>
+            </a:pPr>
+            <a:r>
+              <a:rPr sz="1400" b="0">
+                <a:solidFill>
+                  <a:srgbClr val="A9B6C3"/>
+                </a:solidFill>
+                <a:latin typeface="Segoe UI"/>
+              </a:rPr>
+              <a:t>A GitHub Actions schedule runs one full cycle roughly every 30 minutes during the US session. </a:t>
+            </a:r>
+            <a:r>
+              <a:rPr sz="1400" b="1">
+                <a:solidFill>
+                  <a:srgbClr val="E6EDF3"/>
+                </a:solidFill>
+                <a:latin typeface="Segoe UI"/>
+              </a:rPr>
+              <a:t>No server, no laptop.</a:t>
+            </a:r>
+          </a:p>
+          <a:p>
+            <a:pPr>
+              <a:lnSpc>
+                <a:spcPct val="135000"/>
+              </a:lnSpc>
+              <a:spcAft>
+                <a:spcPts val="1100"/>
+              </a:spcAft>
+            </a:pPr>
+            <a:r>
+              <a:rPr sz="1400" b="0">
+                <a:solidFill>
+                  <a:srgbClr val="A9B6C3"/>
+                </a:solidFill>
+                <a:latin typeface="Segoe UI"/>
+              </a:rPr>
+              <a:t>Every cycle reconciles against Alpaca before it does anything, so a restart can't duplicate a position — and every order carries an id the broker will refuse twice.</a:t>
+            </a:r>
+          </a:p>
+        </p:txBody>
+      </p:sp>
+      <p:sp>
+        <p:nvSpPr>
+          <p:cNvPr id="5" name="TextBox 4"/>
+          <p:cNvSpPr txBox="1"/>
+          <p:nvPr/>
+        </p:nvSpPr>
+        <p:spPr>
+          <a:xfrm>
+            <a:off x="777240" y="4617720"/>
+            <a:ext cx="6035040" cy="320040"/>
           </a:xfrm>
           <a:prstGeom prst="rect">
             <a:avLst/>
@@ -4399,75 +4602,300 @@
               </a:lnSpc>
             </a:pPr>
             <a:r>
-              <a:rPr sz="1500" b="0">
+              <a:rPr sz="1500" b="1">
                 <a:solidFill>
                   <a:srgbClr val="4DD4C0"/>
                 </a:solidFill>
+                <a:latin typeface="Consolas"/>
+              </a:rPr>
+              <a:t>chong1120.github.io/Vetoed</a:t>
+            </a:r>
+          </a:p>
+        </p:txBody>
+      </p:sp>
+      <p:sp>
+        <p:nvSpPr>
+          <p:cNvPr id="6" name="TextBox 5"/>
+          <p:cNvSpPr txBox="1"/>
+          <p:nvPr/>
+        </p:nvSpPr>
+        <p:spPr>
+          <a:xfrm>
+            <a:off x="777240" y="4983480"/>
+            <a:ext cx="6035040" cy="548640"/>
+          </a:xfrm>
+          <a:prstGeom prst="rect">
+            <a:avLst/>
+          </a:prstGeom>
+          <a:noFill/>
+        </p:spPr>
+        <p:txBody>
+          <a:bodyPr wrap="square" anchor="t" lIns="0" rIns="0" tIns="0" bIns="0">
+            <a:spAutoFit/>
+          </a:bodyPr>
+          <a:lstStyle/>
+          <a:p>
+            <a:pPr algn="l">
+              <a:lnSpc>
+                <a:spcPct val="130000"/>
+              </a:lnSpc>
+            </a:pPr>
+            <a:r>
+              <a:rPr sz="1150" b="0">
+                <a:solidFill>
+                  <a:srgbClr val="75828F"/>
+                </a:solidFill>
                 <a:latin typeface="Segoe UI"/>
               </a:rPr>
-              <a:t>•</a:t>
-            </a:r>
-          </a:p>
-        </p:txBody>
-      </p:sp>
-      <p:sp>
-        <p:nvSpPr>
-          <p:cNvPr id="5" name="TextBox 4"/>
-          <p:cNvSpPr txBox="1"/>
-          <p:nvPr/>
-        </p:nvSpPr>
-        <p:spPr>
-          <a:xfrm>
-            <a:off x="1051560" y="2395728"/>
-            <a:ext cx="10332720" cy="914400"/>
-          </a:xfrm>
-          <a:prstGeom prst="rect">
-            <a:avLst/>
-          </a:prstGeom>
-          <a:noFill/>
-        </p:spPr>
-        <p:txBody>
-          <a:bodyPr wrap="square" anchor="t" lIns="0" rIns="0" tIns="0" bIns="0">
-            <a:spAutoFit/>
-          </a:bodyPr>
-          <a:lstStyle/>
-          <a:p>
-            <a:pPr algn="l">
-              <a:lnSpc>
-                <a:spcPct val="130000"/>
-              </a:lnSpc>
-            </a:pPr>
-            <a:r>
-              <a:rPr sz="1500" b="1">
+              <a:t>Equity curve · screening funnel · implied vs realised · every decision · every veto</a:t>
+            </a:r>
+          </a:p>
+        </p:txBody>
+      </p:sp>
+      <p:sp>
+        <p:nvSpPr>
+          <p:cNvPr id="7" name="TextBox 6"/>
+          <p:cNvSpPr txBox="1"/>
+          <p:nvPr/>
+        </p:nvSpPr>
+        <p:spPr>
+          <a:xfrm>
+            <a:off x="7360920" y="2697480"/>
+            <a:ext cx="1920240" cy="640080"/>
+          </a:xfrm>
+          <a:prstGeom prst="rect">
+            <a:avLst/>
+          </a:prstGeom>
+          <a:noFill/>
+        </p:spPr>
+        <p:txBody>
+          <a:bodyPr wrap="square" anchor="t" lIns="0" rIns="0" tIns="0" bIns="0">
+            <a:spAutoFit/>
+          </a:bodyPr>
+          <a:lstStyle/>
+          <a:p>
+            <a:pPr algn="l">
+              <a:lnSpc>
+                <a:spcPct val="100000"/>
+              </a:lnSpc>
+            </a:pPr>
+            <a:r>
+              <a:rPr sz="3600" b="1">
+                <a:solidFill>
+                  <a:srgbClr val="3ECF8E"/>
+                </a:solidFill>
+                <a:latin typeface="Consolas"/>
+              </a:rPr>
+              <a:t>207</a:t>
+            </a:r>
+          </a:p>
+        </p:txBody>
+      </p:sp>
+      <p:sp>
+        <p:nvSpPr>
+          <p:cNvPr id="8" name="TextBox 7"/>
+          <p:cNvSpPr txBox="1"/>
+          <p:nvPr/>
+        </p:nvSpPr>
+        <p:spPr>
+          <a:xfrm>
+            <a:off x="7360920" y="3319272"/>
+            <a:ext cx="1920240" cy="457200"/>
+          </a:xfrm>
+          <a:prstGeom prst="rect">
+            <a:avLst/>
+          </a:prstGeom>
+          <a:noFill/>
+        </p:spPr>
+        <p:txBody>
+          <a:bodyPr wrap="square" anchor="t" lIns="0" rIns="0" tIns="0" bIns="0">
+            <a:spAutoFit/>
+          </a:bodyPr>
+          <a:lstStyle/>
+          <a:p>
+            <a:pPr algn="l">
+              <a:lnSpc>
+                <a:spcPct val="125000"/>
+              </a:lnSpc>
+            </a:pPr>
+            <a:r>
+              <a:rPr sz="1200" b="0">
+                <a:solidFill>
+                  <a:srgbClr val="A9B6C3"/>
+                </a:solidFill>
+                <a:latin typeface="Segoe UI"/>
+              </a:rPr>
+              <a:t>tests passing</a:t>
+            </a:r>
+          </a:p>
+        </p:txBody>
+      </p:sp>
+      <p:sp>
+        <p:nvSpPr>
+          <p:cNvPr id="9" name="TextBox 8"/>
+          <p:cNvSpPr txBox="1"/>
+          <p:nvPr/>
+        </p:nvSpPr>
+        <p:spPr>
+          <a:xfrm>
+            <a:off x="9464040" y="2697480"/>
+            <a:ext cx="1920240" cy="640080"/>
+          </a:xfrm>
+          <a:prstGeom prst="rect">
+            <a:avLst/>
+          </a:prstGeom>
+          <a:noFill/>
+        </p:spPr>
+        <p:txBody>
+          <a:bodyPr wrap="square" anchor="t" lIns="0" rIns="0" tIns="0" bIns="0">
+            <a:spAutoFit/>
+          </a:bodyPr>
+          <a:lstStyle/>
+          <a:p>
+            <a:pPr algn="l">
+              <a:lnSpc>
+                <a:spcPct val="100000"/>
+              </a:lnSpc>
+            </a:pPr>
+            <a:r>
+              <a:rPr sz="3600" b="1">
                 <a:solidFill>
                   <a:srgbClr val="E6EDF3"/>
                 </a:solidFill>
+                <a:latin typeface="Consolas"/>
+              </a:rPr>
+              <a:t>0</a:t>
+            </a:r>
+          </a:p>
+        </p:txBody>
+      </p:sp>
+      <p:sp>
+        <p:nvSpPr>
+          <p:cNvPr id="10" name="TextBox 9"/>
+          <p:cNvSpPr txBox="1"/>
+          <p:nvPr/>
+        </p:nvSpPr>
+        <p:spPr>
+          <a:xfrm>
+            <a:off x="9464040" y="3319272"/>
+            <a:ext cx="1920240" cy="457200"/>
+          </a:xfrm>
+          <a:prstGeom prst="rect">
+            <a:avLst/>
+          </a:prstGeom>
+          <a:noFill/>
+        </p:spPr>
+        <p:txBody>
+          <a:bodyPr wrap="square" anchor="t" lIns="0" rIns="0" tIns="0" bIns="0">
+            <a:spAutoFit/>
+          </a:bodyPr>
+          <a:lstStyle/>
+          <a:p>
+            <a:pPr algn="l">
+              <a:lnSpc>
+                <a:spcPct val="125000"/>
+              </a:lnSpc>
+            </a:pPr>
+            <a:r>
+              <a:rPr sz="1200" b="0">
+                <a:solidFill>
+                  <a:srgbClr val="A9B6C3"/>
+                </a:solidFill>
                 <a:latin typeface="Segoe UI"/>
               </a:rPr>
-              <a:t>Quotes are indicative, not NBBO.</a:t>
-            </a:r>
-            <a:r>
-              <a:rPr sz="1500" b="0">
+              <a:t>LLM write paths</a:t>
+            </a:r>
+          </a:p>
+        </p:txBody>
+      </p:sp>
+      <p:sp>
+        <p:nvSpPr>
+          <p:cNvPr id="11" name="TextBox 10"/>
+          <p:cNvSpPr txBox="1"/>
+          <p:nvPr/>
+        </p:nvSpPr>
+        <p:spPr>
+          <a:xfrm>
+            <a:off x="7360920" y="4160520"/>
+            <a:ext cx="1920240" cy="640080"/>
+          </a:xfrm>
+          <a:prstGeom prst="rect">
+            <a:avLst/>
+          </a:prstGeom>
+          <a:noFill/>
+        </p:spPr>
+        <p:txBody>
+          <a:bodyPr wrap="square" anchor="t" lIns="0" rIns="0" tIns="0" bIns="0">
+            <a:spAutoFit/>
+          </a:bodyPr>
+          <a:lstStyle/>
+          <a:p>
+            <a:pPr algn="l">
+              <a:lnSpc>
+                <a:spcPct val="100000"/>
+              </a:lnSpc>
+            </a:pPr>
+            <a:r>
+              <a:rPr sz="3600" b="1">
+                <a:solidFill>
+                  <a:srgbClr val="E6EDF3"/>
+                </a:solidFill>
+                <a:latin typeface="Consolas"/>
+              </a:rPr>
+              <a:t>8</a:t>
+            </a:r>
+          </a:p>
+        </p:txBody>
+      </p:sp>
+      <p:sp>
+        <p:nvSpPr>
+          <p:cNvPr id="12" name="TextBox 11"/>
+          <p:cNvSpPr txBox="1"/>
+          <p:nvPr/>
+        </p:nvSpPr>
+        <p:spPr>
+          <a:xfrm>
+            <a:off x="7360920" y="4782312"/>
+            <a:ext cx="1920240" cy="457200"/>
+          </a:xfrm>
+          <a:prstGeom prst="rect">
+            <a:avLst/>
+          </a:prstGeom>
+          <a:noFill/>
+        </p:spPr>
+        <p:txBody>
+          <a:bodyPr wrap="square" anchor="t" lIns="0" rIns="0" tIns="0" bIns="0">
+            <a:spAutoFit/>
+          </a:bodyPr>
+          <a:lstStyle/>
+          <a:p>
+            <a:pPr algn="l">
+              <a:lnSpc>
+                <a:spcPct val="125000"/>
+              </a:lnSpc>
+            </a:pPr>
+            <a:r>
+              <a:rPr sz="1200" b="0">
                 <a:solidFill>
                   <a:srgbClr val="A9B6C3"/>
                 </a:solidFill>
                 <a:latin typeface="Segoe UI"/>
               </a:rPr>
-              <a:t> No OPRA agreement, so the credit — and every number downstream — comes from a derived quote.</a:t>
-            </a:r>
-          </a:p>
-        </p:txBody>
-      </p:sp>
-      <p:sp>
-        <p:nvSpPr>
-          <p:cNvPr id="6" name="TextBox 5"/>
-          <p:cNvSpPr txBox="1"/>
-          <p:nvPr/>
-        </p:nvSpPr>
-        <p:spPr>
-          <a:xfrm>
-            <a:off x="777240" y="3310128"/>
-            <a:ext cx="228600" cy="274320"/>
+              <a:t>risk gates</a:t>
+            </a:r>
+          </a:p>
+        </p:txBody>
+      </p:sp>
+      <p:sp>
+        <p:nvSpPr>
+          <p:cNvPr id="13" name="TextBox 12"/>
+          <p:cNvSpPr txBox="1"/>
+          <p:nvPr/>
+        </p:nvSpPr>
+        <p:spPr>
+          <a:xfrm>
+            <a:off x="9464040" y="4160520"/>
+            <a:ext cx="1920240" cy="640080"/>
           </a:xfrm>
           <a:prstGeom prst="rect">
             <a:avLst/>
@@ -4486,242 +4914,59 @@
               </a:lnSpc>
             </a:pPr>
             <a:r>
-              <a:rPr sz="1500" b="0">
+              <a:rPr sz="3600" b="1">
                 <a:solidFill>
                   <a:srgbClr val="4DD4C0"/>
                 </a:solidFill>
+                <a:latin typeface="Consolas"/>
+              </a:rPr>
+              <a:t>100%</a:t>
+            </a:r>
+          </a:p>
+        </p:txBody>
+      </p:sp>
+      <p:sp>
+        <p:nvSpPr>
+          <p:cNvPr id="14" name="TextBox 13"/>
+          <p:cNvSpPr txBox="1"/>
+          <p:nvPr/>
+        </p:nvSpPr>
+        <p:spPr>
+          <a:xfrm>
+            <a:off x="9464040" y="4782312"/>
+            <a:ext cx="1920240" cy="457200"/>
+          </a:xfrm>
+          <a:prstGeom prst="rect">
+            <a:avLst/>
+          </a:prstGeom>
+          <a:noFill/>
+        </p:spPr>
+        <p:txBody>
+          <a:bodyPr wrap="square" anchor="t" lIns="0" rIns="0" tIns="0" bIns="0">
+            <a:spAutoFit/>
+          </a:bodyPr>
+          <a:lstStyle/>
+          <a:p>
+            <a:pPr algn="l">
+              <a:lnSpc>
+                <a:spcPct val="125000"/>
+              </a:lnSpc>
+            </a:pPr>
+            <a:r>
+              <a:rPr sz="1200" b="0">
+                <a:solidFill>
+                  <a:srgbClr val="A9B6C3"/>
+                </a:solidFill>
                 <a:latin typeface="Segoe UI"/>
               </a:rPr>
-              <a:t>•</a:t>
-            </a:r>
-          </a:p>
-        </p:txBody>
-      </p:sp>
-      <p:sp>
-        <p:nvSpPr>
-          <p:cNvPr id="7" name="TextBox 6"/>
-          <p:cNvSpPr txBox="1"/>
-          <p:nvPr/>
-        </p:nvSpPr>
-        <p:spPr>
-          <a:xfrm>
-            <a:off x="1051560" y="3310128"/>
-            <a:ext cx="10332720" cy="914400"/>
-          </a:xfrm>
-          <a:prstGeom prst="rect">
-            <a:avLst/>
-          </a:prstGeom>
-          <a:noFill/>
-        </p:spPr>
-        <p:txBody>
-          <a:bodyPr wrap="square" anchor="t" lIns="0" rIns="0" tIns="0" bIns="0">
-            <a:spAutoFit/>
-          </a:bodyPr>
-          <a:lstStyle/>
-          <a:p>
-            <a:pPr algn="l">
-              <a:lnSpc>
-                <a:spcPct val="130000"/>
-              </a:lnSpc>
-            </a:pPr>
-            <a:r>
-              <a:rPr sz="1500" b="1">
-                <a:solidFill>
-                  <a:srgbClr val="E6EDF3"/>
-                </a:solidFill>
-                <a:latin typeface="Segoe UI"/>
-              </a:rPr>
-              <a:t>Four correlated tickers is not diversification.</a:t>
-            </a:r>
-            <a:r>
-              <a:rPr sz="1500" b="0">
-                <a:solidFill>
-                  <a:srgbClr val="A9B6C3"/>
-                </a:solidFill>
-                <a:latin typeface="Segoe UI"/>
-              </a:rPr>
-              <a:t> It spreads across names, not risk factors.</a:t>
-            </a:r>
-          </a:p>
-        </p:txBody>
-      </p:sp>
-      <p:sp>
-        <p:nvSpPr>
-          <p:cNvPr id="8" name="TextBox 7"/>
-          <p:cNvSpPr txBox="1"/>
-          <p:nvPr/>
-        </p:nvSpPr>
-        <p:spPr>
-          <a:xfrm>
-            <a:off x="777240" y="4224528"/>
-            <a:ext cx="228600" cy="274320"/>
-          </a:xfrm>
-          <a:prstGeom prst="rect">
-            <a:avLst/>
-          </a:prstGeom>
-          <a:noFill/>
-        </p:spPr>
-        <p:txBody>
-          <a:bodyPr wrap="square" anchor="t" lIns="0" rIns="0" tIns="0" bIns="0">
-            <a:spAutoFit/>
-          </a:bodyPr>
-          <a:lstStyle/>
-          <a:p>
-            <a:pPr algn="l">
-              <a:lnSpc>
-                <a:spcPct val="100000"/>
-              </a:lnSpc>
-            </a:pPr>
-            <a:r>
-              <a:rPr sz="1500" b="0">
-                <a:solidFill>
-                  <a:srgbClr val="4DD4C0"/>
-                </a:solidFill>
-                <a:latin typeface="Segoe UI"/>
-              </a:rPr>
-              <a:t>•</a:t>
-            </a:r>
-          </a:p>
-        </p:txBody>
-      </p:sp>
-      <p:sp>
-        <p:nvSpPr>
-          <p:cNvPr id="9" name="TextBox 8"/>
-          <p:cNvSpPr txBox="1"/>
-          <p:nvPr/>
-        </p:nvSpPr>
-        <p:spPr>
-          <a:xfrm>
-            <a:off x="1051560" y="4224528"/>
-            <a:ext cx="10332720" cy="914400"/>
-          </a:xfrm>
-          <a:prstGeom prst="rect">
-            <a:avLst/>
-          </a:prstGeom>
-          <a:noFill/>
-        </p:spPr>
-        <p:txBody>
-          <a:bodyPr wrap="square" anchor="t" lIns="0" rIns="0" tIns="0" bIns="0">
-            <a:spAutoFit/>
-          </a:bodyPr>
-          <a:lstStyle/>
-          <a:p>
-            <a:pPr algn="l">
-              <a:lnSpc>
-                <a:spcPct val="130000"/>
-              </a:lnSpc>
-            </a:pPr>
-            <a:r>
-              <a:rPr sz="1500" b="1">
-                <a:solidFill>
-                  <a:srgbClr val="E6EDF3"/>
-                </a:solidFill>
-                <a:latin typeface="Segoe UI"/>
-              </a:rPr>
-              <a:t>The literature is the prior, not the proof.</a:t>
-            </a:r>
-            <a:r>
-              <a:rPr sz="1500" b="0">
-                <a:solidFill>
-                  <a:srgbClr val="A9B6C3"/>
-                </a:solidFill>
-                <a:latin typeface="Segoe UI"/>
-              </a:rPr>
-              <a:t> It shows a volatility premium exists. It does not validate this horizon, these strikes, or any threshold in this system.</a:t>
-            </a:r>
-          </a:p>
-        </p:txBody>
-      </p:sp>
-      <p:sp>
-        <p:nvSpPr>
-          <p:cNvPr id="10" name="TextBox 9"/>
-          <p:cNvSpPr txBox="1"/>
-          <p:nvPr/>
-        </p:nvSpPr>
-        <p:spPr>
-          <a:xfrm>
-            <a:off x="777240" y="5138928"/>
-            <a:ext cx="228600" cy="274320"/>
-          </a:xfrm>
-          <a:prstGeom prst="rect">
-            <a:avLst/>
-          </a:prstGeom>
-          <a:noFill/>
-        </p:spPr>
-        <p:txBody>
-          <a:bodyPr wrap="square" anchor="t" lIns="0" rIns="0" tIns="0" bIns="0">
-            <a:spAutoFit/>
-          </a:bodyPr>
-          <a:lstStyle/>
-          <a:p>
-            <a:pPr algn="l">
-              <a:lnSpc>
-                <a:spcPct val="100000"/>
-              </a:lnSpc>
-            </a:pPr>
-            <a:r>
-              <a:rPr sz="1500" b="0">
-                <a:solidFill>
-                  <a:srgbClr val="4DD4C0"/>
-                </a:solidFill>
-                <a:latin typeface="Segoe UI"/>
-              </a:rPr>
-              <a:t>•</a:t>
-            </a:r>
-          </a:p>
-        </p:txBody>
-      </p:sp>
-      <p:sp>
-        <p:nvSpPr>
-          <p:cNvPr id="11" name="TextBox 10"/>
-          <p:cNvSpPr txBox="1"/>
-          <p:nvPr/>
-        </p:nvSpPr>
-        <p:spPr>
-          <a:xfrm>
-            <a:off x="1051560" y="5138928"/>
-            <a:ext cx="10332720" cy="914400"/>
-          </a:xfrm>
-          <a:prstGeom prst="rect">
-            <a:avLst/>
-          </a:prstGeom>
-          <a:noFill/>
-        </p:spPr>
-        <p:txBody>
-          <a:bodyPr wrap="square" anchor="t" lIns="0" rIns="0" tIns="0" bIns="0">
-            <a:spAutoFit/>
-          </a:bodyPr>
-          <a:lstStyle/>
-          <a:p>
-            <a:pPr algn="l">
-              <a:lnSpc>
-                <a:spcPct val="130000"/>
-              </a:lnSpc>
-            </a:pPr>
-            <a:r>
-              <a:rPr sz="1500" b="1">
-                <a:solidFill>
-                  <a:srgbClr val="E6EDF3"/>
-                </a:solidFill>
-                <a:latin typeface="Segoe UI"/>
-              </a:rPr>
-              <a:t>A contest window is statistical noise.</a:t>
-            </a:r>
-            <a:r>
-              <a:rPr sz="1500" b="0">
-                <a:solidFill>
-                  <a:srgbClr val="A9B6C3"/>
-                </a:solidFill>
-                <a:latin typeface="Segoe UI"/>
-              </a:rPr>
-              <a:t> Ten to twenty trades cannot separate a 60% win rate from 70%. That is exactly why the circuit breaker refuses to react to fewer than five closed trades, and can only ever tighten.</a:t>
-            </a:r>
-          </a:p>
-        </p:txBody>
-      </p:sp>
-      <p:sp>
-        <p:nvSpPr>
-          <p:cNvPr id="12" name="TextBox 11"/>
+              <a:t>decisions journalled</a:t>
+            </a:r>
+          </a:p>
+        </p:txBody>
+      </p:sp>
+      <p:sp>
+        <p:nvSpPr>
+          <p:cNvPr id="15" name="TextBox 14"/>
           <p:cNvSpPr txBox="1"/>
           <p:nvPr/>
         </p:nvSpPr>
@@ -4760,7 +5005,7 @@
       </p:sp>
       <p:sp>
         <p:nvSpPr>
-          <p:cNvPr id="13" name="TextBox 12"/>
+          <p:cNvPr id="16" name="TextBox 15"/>
           <p:cNvSpPr txBox="1"/>
           <p:nvPr/>
         </p:nvSpPr>
@@ -4799,7 +5044,7 @@
       </p:sp>
       <p:sp>
         <p:nvSpPr>
-          <p:cNvPr id="14" name="Rectangle 13"/>
+          <p:cNvPr id="17" name="Rectangle 16"/>
           <p:cNvSpPr/>
           <p:nvPr/>
         </p:nvSpPr>
@@ -4873,7 +5118,7 @@
         </p:nvSpPr>
         <p:spPr>
           <a:xfrm>
-            <a:off x="777240" y="2148840"/>
+            <a:off x="777240" y="658368"/>
             <a:ext cx="10637215" cy="274320"/>
           </a:xfrm>
           <a:prstGeom prst="rect">
@@ -4893,13 +5138,13 @@
               </a:lnSpc>
             </a:pPr>
             <a:r>
-              <a:rPr sz="1200" b="1" spc="260">
+              <a:rPr sz="1200" b="1" spc="220">
                 <a:solidFill>
                   <a:srgbClr val="4DD4C0"/>
                 </a:solidFill>
                 <a:latin typeface="Consolas"/>
               </a:rPr>
-              <a:t>VETOED</a:t>
+              <a:t>WHAT I AM NOT CLAIMING</a:t>
             </a:r>
           </a:p>
         </p:txBody>
@@ -4912,93 +5157,594 @@
         </p:nvSpPr>
         <p:spPr>
           <a:xfrm>
+            <a:off x="777240" y="1078992"/>
+            <a:ext cx="10637215" cy="1143000"/>
+          </a:xfrm>
+          <a:prstGeom prst="rect">
+            <a:avLst/>
+          </a:prstGeom>
+          <a:noFill/>
+        </p:spPr>
+        <p:txBody>
+          <a:bodyPr wrap="square" anchor="t" lIns="0" rIns="0" tIns="0" bIns="0">
+            <a:spAutoFit/>
+          </a:bodyPr>
+          <a:lstStyle/>
+          <a:p>
+            <a:pPr algn="l">
+              <a:lnSpc>
+                <a:spcPct val="106000"/>
+              </a:lnSpc>
+            </a:pPr>
+            <a:r>
+              <a:rPr sz="3400" b="1">
+                <a:solidFill>
+                  <a:srgbClr val="E6EDF3"/>
+                </a:solidFill>
+                <a:latin typeface="Segoe UI"/>
+              </a:rPr>
+              <a:t>The limits, stated before you find them.</a:t>
+            </a:r>
+          </a:p>
+        </p:txBody>
+      </p:sp>
+      <p:sp>
+        <p:nvSpPr>
+          <p:cNvPr id="4" name="TextBox 3"/>
+          <p:cNvSpPr txBox="1"/>
+          <p:nvPr/>
+        </p:nvSpPr>
+        <p:spPr>
+          <a:xfrm>
             <a:off x="777240" y="2606040"/>
-            <a:ext cx="10637215" cy="1737360"/>
-          </a:xfrm>
-          <a:prstGeom prst="rect">
-            <a:avLst/>
-          </a:prstGeom>
-          <a:noFill/>
-        </p:spPr>
-        <p:txBody>
-          <a:bodyPr wrap="square" anchor="t" lIns="0" rIns="0" tIns="0" bIns="0">
-            <a:spAutoFit/>
-          </a:bodyPr>
-          <a:lstStyle/>
-          <a:p>
-            <a:pPr algn="l">
-              <a:lnSpc>
-                <a:spcPct val="110000"/>
-              </a:lnSpc>
-            </a:pPr>
-            <a:r>
-              <a:rPr sz="4400" b="1">
+            <a:ext cx="201168" cy="274320"/>
+          </a:xfrm>
+          <a:prstGeom prst="rect">
+            <a:avLst/>
+          </a:prstGeom>
+          <a:noFill/>
+        </p:spPr>
+        <p:txBody>
+          <a:bodyPr wrap="square" anchor="t" lIns="0" rIns="0" tIns="0" bIns="0">
+            <a:spAutoFit/>
+          </a:bodyPr>
+          <a:lstStyle/>
+          <a:p>
+            <a:pPr algn="l">
+              <a:lnSpc>
+                <a:spcPct val="100000"/>
+              </a:lnSpc>
+            </a:pPr>
+            <a:r>
+              <a:rPr sz="1300" b="0">
+                <a:solidFill>
+                  <a:srgbClr val="4DD4C0"/>
+                </a:solidFill>
+                <a:latin typeface="Segoe UI"/>
+              </a:rPr>
+              <a:t>•</a:t>
+            </a:r>
+          </a:p>
+        </p:txBody>
+      </p:sp>
+      <p:sp>
+        <p:nvSpPr>
+          <p:cNvPr id="5" name="TextBox 4"/>
+          <p:cNvSpPr txBox="1"/>
+          <p:nvPr/>
+        </p:nvSpPr>
+        <p:spPr>
+          <a:xfrm>
+            <a:off x="1014984" y="2606040"/>
+            <a:ext cx="4663440" cy="914400"/>
+          </a:xfrm>
+          <a:prstGeom prst="rect">
+            <a:avLst/>
+          </a:prstGeom>
+          <a:noFill/>
+        </p:spPr>
+        <p:txBody>
+          <a:bodyPr wrap="square" anchor="t" lIns="0" rIns="0" tIns="0" bIns="0">
+            <a:spAutoFit/>
+          </a:bodyPr>
+          <a:lstStyle/>
+          <a:p>
+            <a:pPr algn="l">
+              <a:lnSpc>
+                <a:spcPct val="135000"/>
+              </a:lnSpc>
+            </a:pPr>
+            <a:r>
+              <a:rPr sz="1300" b="1">
                 <a:solidFill>
                   <a:srgbClr val="E6EDF3"/>
                 </a:solidFill>
                 <a:latin typeface="Segoe UI"/>
               </a:rPr>
-              <a:t>An agent that is most useful
-when it says no.</a:t>
-            </a:r>
-          </a:p>
-        </p:txBody>
-      </p:sp>
-      <p:sp>
-        <p:nvSpPr>
-          <p:cNvPr id="4" name="TextBox 3"/>
-          <p:cNvSpPr txBox="1"/>
-          <p:nvPr/>
-        </p:nvSpPr>
-        <p:spPr>
-          <a:xfrm>
-            <a:off x="777240" y="4434840"/>
-            <a:ext cx="10637215" cy="1188720"/>
-          </a:xfrm>
-          <a:prstGeom prst="rect">
-            <a:avLst/>
-          </a:prstGeom>
-          <a:noFill/>
-        </p:spPr>
-        <p:txBody>
-          <a:bodyPr wrap="square" anchor="t" lIns="0" rIns="0" tIns="0" bIns="0">
-            <a:spAutoFit/>
-          </a:bodyPr>
-          <a:lstStyle/>
-          <a:p>
-            <a:pPr algn="l">
-              <a:lnSpc>
-                <a:spcPct val="175000"/>
-              </a:lnSpc>
-            </a:pPr>
-            <a:r>
-              <a:rPr sz="1400" b="1">
+              <a:t>Quotes are indicative</a:t>
+            </a:r>
+            <a:r>
+              <a:rPr sz="1300" b="0">
+                <a:solidFill>
+                  <a:srgbClr val="A9B6C3"/>
+                </a:solidFill>
+                <a:latin typeface="Segoe UI"/>
+              </a:rPr>
+              <a:t>, not true NBBO.</a:t>
+            </a:r>
+          </a:p>
+        </p:txBody>
+      </p:sp>
+      <p:sp>
+        <p:nvSpPr>
+          <p:cNvPr id="6" name="TextBox 5"/>
+          <p:cNvSpPr txBox="1"/>
+          <p:nvPr/>
+        </p:nvSpPr>
+        <p:spPr>
+          <a:xfrm>
+            <a:off x="777240" y="3566160"/>
+            <a:ext cx="201168" cy="274320"/>
+          </a:xfrm>
+          <a:prstGeom prst="rect">
+            <a:avLst/>
+          </a:prstGeom>
+          <a:noFill/>
+        </p:spPr>
+        <p:txBody>
+          <a:bodyPr wrap="square" anchor="t" lIns="0" rIns="0" tIns="0" bIns="0">
+            <a:spAutoFit/>
+          </a:bodyPr>
+          <a:lstStyle/>
+          <a:p>
+            <a:pPr algn="l">
+              <a:lnSpc>
+                <a:spcPct val="100000"/>
+              </a:lnSpc>
+            </a:pPr>
+            <a:r>
+              <a:rPr sz="1300" b="0">
                 <a:solidFill>
                   <a:srgbClr val="4DD4C0"/>
                 </a:solidFill>
-                <a:latin typeface="Consolas"/>
-              </a:rPr>
-              <a:t>chong1120.github.io/Vetoed
-</a:t>
-            </a:r>
-            <a:r>
-              <a:rPr sz="1400" b="0">
+                <a:latin typeface="Segoe UI"/>
+              </a:rPr>
+              <a:t>•</a:t>
+            </a:r>
+          </a:p>
+        </p:txBody>
+      </p:sp>
+      <p:sp>
+        <p:nvSpPr>
+          <p:cNvPr id="7" name="TextBox 6"/>
+          <p:cNvSpPr txBox="1"/>
+          <p:nvPr/>
+        </p:nvSpPr>
+        <p:spPr>
+          <a:xfrm>
+            <a:off x="1014984" y="3566160"/>
+            <a:ext cx="4663440" cy="914400"/>
+          </a:xfrm>
+          <a:prstGeom prst="rect">
+            <a:avLst/>
+          </a:prstGeom>
+          <a:noFill/>
+        </p:spPr>
+        <p:txBody>
+          <a:bodyPr wrap="square" anchor="t" lIns="0" rIns="0" tIns="0" bIns="0">
+            <a:spAutoFit/>
+          </a:bodyPr>
+          <a:lstStyle/>
+          <a:p>
+            <a:pPr algn="l">
+              <a:lnSpc>
+                <a:spcPct val="135000"/>
+              </a:lnSpc>
+            </a:pPr>
+            <a:r>
+              <a:rPr sz="1300" b="1">
+                <a:solidFill>
+                  <a:srgbClr val="E6EDF3"/>
+                </a:solidFill>
+                <a:latin typeface="Segoe UI"/>
+              </a:rPr>
+              <a:t>Skew isn't modelled</a:t>
+            </a:r>
+            <a:r>
+              <a:rPr sz="1300" b="0">
                 <a:solidFill>
                   <a:srgbClr val="A9B6C3"/>
                 </a:solidFill>
-                <a:latin typeface="Consolas"/>
-              </a:rPr>
-              <a:t>github.com/Chong1120/Vetoed
-</a:t>
-            </a:r>
-            <a:r>
-              <a:rPr sz="1400" b="0">
-                <a:solidFill>
-                  <a:srgbClr val="75828F"/>
-                </a:solidFill>
-                <a:latin typeface="Consolas"/>
-              </a:rPr>
-              <a:t>MIT  ·  Alpaca paper trading  ·  199 tests</a:t>
+                <a:latin typeface="Segoe UI"/>
+              </a:rPr>
+              <a:t> — both legs use one volatility.</a:t>
+            </a:r>
+          </a:p>
+        </p:txBody>
+      </p:sp>
+      <p:sp>
+        <p:nvSpPr>
+          <p:cNvPr id="8" name="TextBox 7"/>
+          <p:cNvSpPr txBox="1"/>
+          <p:nvPr/>
+        </p:nvSpPr>
+        <p:spPr>
+          <a:xfrm>
+            <a:off x="777240" y="4526280"/>
+            <a:ext cx="201168" cy="274320"/>
+          </a:xfrm>
+          <a:prstGeom prst="rect">
+            <a:avLst/>
+          </a:prstGeom>
+          <a:noFill/>
+        </p:spPr>
+        <p:txBody>
+          <a:bodyPr wrap="square" anchor="t" lIns="0" rIns="0" tIns="0" bIns="0">
+            <a:spAutoFit/>
+          </a:bodyPr>
+          <a:lstStyle/>
+          <a:p>
+            <a:pPr algn="l">
+              <a:lnSpc>
+                <a:spcPct val="100000"/>
+              </a:lnSpc>
+            </a:pPr>
+            <a:r>
+              <a:rPr sz="1300" b="0">
+                <a:solidFill>
+                  <a:srgbClr val="4DD4C0"/>
+                </a:solidFill>
+                <a:latin typeface="Segoe UI"/>
+              </a:rPr>
+              <a:t>•</a:t>
+            </a:r>
+          </a:p>
+        </p:txBody>
+      </p:sp>
+      <p:sp>
+        <p:nvSpPr>
+          <p:cNvPr id="9" name="TextBox 8"/>
+          <p:cNvSpPr txBox="1"/>
+          <p:nvPr/>
+        </p:nvSpPr>
+        <p:spPr>
+          <a:xfrm>
+            <a:off x="1014984" y="4526280"/>
+            <a:ext cx="4663440" cy="914400"/>
+          </a:xfrm>
+          <a:prstGeom prst="rect">
+            <a:avLst/>
+          </a:prstGeom>
+          <a:noFill/>
+        </p:spPr>
+        <p:txBody>
+          <a:bodyPr wrap="square" anchor="t" lIns="0" rIns="0" tIns="0" bIns="0">
+            <a:spAutoFit/>
+          </a:bodyPr>
+          <a:lstStyle/>
+          <a:p>
+            <a:pPr algn="l">
+              <a:lnSpc>
+                <a:spcPct val="135000"/>
+              </a:lnSpc>
+            </a:pPr>
+            <a:r>
+              <a:rPr sz="1300" b="1">
+                <a:solidFill>
+                  <a:srgbClr val="E6EDF3"/>
+                </a:solidFill>
+                <a:latin typeface="Segoe UI"/>
+              </a:rPr>
+              <a:t>20-day realised vol is an estimator</a:t>
+            </a:r>
+            <a:r>
+              <a:rPr sz="1300" b="0">
+                <a:solidFill>
+                  <a:srgbClr val="A9B6C3"/>
+                </a:solidFill>
+                <a:latin typeface="Segoe UI"/>
+              </a:rPr>
+              <a:t>, not a forecast of volatility to expiry.</a:t>
+            </a:r>
+          </a:p>
+        </p:txBody>
+      </p:sp>
+      <p:sp>
+        <p:nvSpPr>
+          <p:cNvPr id="10" name="TextBox 9"/>
+          <p:cNvSpPr txBox="1"/>
+          <p:nvPr/>
+        </p:nvSpPr>
+        <p:spPr>
+          <a:xfrm>
+            <a:off x="6172200" y="2606040"/>
+            <a:ext cx="201168" cy="274320"/>
+          </a:xfrm>
+          <a:prstGeom prst="rect">
+            <a:avLst/>
+          </a:prstGeom>
+          <a:noFill/>
+        </p:spPr>
+        <p:txBody>
+          <a:bodyPr wrap="square" anchor="t" lIns="0" rIns="0" tIns="0" bIns="0">
+            <a:spAutoFit/>
+          </a:bodyPr>
+          <a:lstStyle/>
+          <a:p>
+            <a:pPr algn="l">
+              <a:lnSpc>
+                <a:spcPct val="100000"/>
+              </a:lnSpc>
+            </a:pPr>
+            <a:r>
+              <a:rPr sz="1300" b="0">
+                <a:solidFill>
+                  <a:srgbClr val="4DD4C0"/>
+                </a:solidFill>
+                <a:latin typeface="Segoe UI"/>
+              </a:rPr>
+              <a:t>•</a:t>
+            </a:r>
+          </a:p>
+        </p:txBody>
+      </p:sp>
+      <p:sp>
+        <p:nvSpPr>
+          <p:cNvPr id="11" name="TextBox 10"/>
+          <p:cNvSpPr txBox="1"/>
+          <p:nvPr/>
+        </p:nvSpPr>
+        <p:spPr>
+          <a:xfrm>
+            <a:off x="6409944" y="2606040"/>
+            <a:ext cx="4663440" cy="914400"/>
+          </a:xfrm>
+          <a:prstGeom prst="rect">
+            <a:avLst/>
+          </a:prstGeom>
+          <a:noFill/>
+        </p:spPr>
+        <p:txBody>
+          <a:bodyPr wrap="square" anchor="t" lIns="0" rIns="0" tIns="0" bIns="0">
+            <a:spAutoFit/>
+          </a:bodyPr>
+          <a:lstStyle/>
+          <a:p>
+            <a:pPr algn="l">
+              <a:lnSpc>
+                <a:spcPct val="135000"/>
+              </a:lnSpc>
+            </a:pPr>
+            <a:r>
+              <a:rPr sz="1300" b="1">
+                <a:solidFill>
+                  <a:srgbClr val="E6EDF3"/>
+                </a:solidFill>
+                <a:latin typeface="Segoe UI"/>
+              </a:rPr>
+              <a:t>Four correlated tickers</a:t>
+            </a:r>
+            <a:r>
+              <a:rPr sz="1300" b="0">
+                <a:solidFill>
+                  <a:srgbClr val="A9B6C3"/>
+                </a:solidFill>
+                <a:latin typeface="Segoe UI"/>
+              </a:rPr>
+              <a:t> is not diversification.</a:t>
+            </a:r>
+          </a:p>
+        </p:txBody>
+      </p:sp>
+      <p:sp>
+        <p:nvSpPr>
+          <p:cNvPr id="12" name="TextBox 11"/>
+          <p:cNvSpPr txBox="1"/>
+          <p:nvPr/>
+        </p:nvSpPr>
+        <p:spPr>
+          <a:xfrm>
+            <a:off x="6172200" y="3566160"/>
+            <a:ext cx="201168" cy="274320"/>
+          </a:xfrm>
+          <a:prstGeom prst="rect">
+            <a:avLst/>
+          </a:prstGeom>
+          <a:noFill/>
+        </p:spPr>
+        <p:txBody>
+          <a:bodyPr wrap="square" anchor="t" lIns="0" rIns="0" tIns="0" bIns="0">
+            <a:spAutoFit/>
+          </a:bodyPr>
+          <a:lstStyle/>
+          <a:p>
+            <a:pPr algn="l">
+              <a:lnSpc>
+                <a:spcPct val="100000"/>
+              </a:lnSpc>
+            </a:pPr>
+            <a:r>
+              <a:rPr sz="1300" b="0">
+                <a:solidFill>
+                  <a:srgbClr val="4DD4C0"/>
+                </a:solidFill>
+                <a:latin typeface="Segoe UI"/>
+              </a:rPr>
+              <a:t>•</a:t>
+            </a:r>
+          </a:p>
+        </p:txBody>
+      </p:sp>
+      <p:sp>
+        <p:nvSpPr>
+          <p:cNvPr id="13" name="TextBox 12"/>
+          <p:cNvSpPr txBox="1"/>
+          <p:nvPr/>
+        </p:nvSpPr>
+        <p:spPr>
+          <a:xfrm>
+            <a:off x="6409944" y="3566160"/>
+            <a:ext cx="4663440" cy="914400"/>
+          </a:xfrm>
+          <a:prstGeom prst="rect">
+            <a:avLst/>
+          </a:prstGeom>
+          <a:noFill/>
+        </p:spPr>
+        <p:txBody>
+          <a:bodyPr wrap="square" anchor="t" lIns="0" rIns="0" tIns="0" bIns="0">
+            <a:spAutoFit/>
+          </a:bodyPr>
+          <a:lstStyle/>
+          <a:p>
+            <a:pPr algn="l">
+              <a:lnSpc>
+                <a:spcPct val="135000"/>
+              </a:lnSpc>
+            </a:pPr>
+            <a:r>
+              <a:rPr sz="1300" b="1">
+                <a:solidFill>
+                  <a:srgbClr val="E6EDF3"/>
+                </a:solidFill>
+                <a:latin typeface="Segoe UI"/>
+              </a:rPr>
+              <a:t>Exit thresholds are unvalidated</a:t>
+            </a:r>
+            <a:r>
+              <a:rPr sz="1300" b="0">
+                <a:solidFill>
+                  <a:srgbClr val="A9B6C3"/>
+                </a:solidFill>
+                <a:latin typeface="Segoe UI"/>
+              </a:rPr>
+              <a:t>.</a:t>
+            </a:r>
+          </a:p>
+        </p:txBody>
+      </p:sp>
+      <p:sp>
+        <p:nvSpPr>
+          <p:cNvPr id="14" name="TextBox 13"/>
+          <p:cNvSpPr txBox="1"/>
+          <p:nvPr/>
+        </p:nvSpPr>
+        <p:spPr>
+          <a:xfrm>
+            <a:off x="6172200" y="4526280"/>
+            <a:ext cx="201168" cy="274320"/>
+          </a:xfrm>
+          <a:prstGeom prst="rect">
+            <a:avLst/>
+          </a:prstGeom>
+          <a:noFill/>
+        </p:spPr>
+        <p:txBody>
+          <a:bodyPr wrap="square" anchor="t" lIns="0" rIns="0" tIns="0" bIns="0">
+            <a:spAutoFit/>
+          </a:bodyPr>
+          <a:lstStyle/>
+          <a:p>
+            <a:pPr algn="l">
+              <a:lnSpc>
+                <a:spcPct val="100000"/>
+              </a:lnSpc>
+            </a:pPr>
+            <a:r>
+              <a:rPr sz="1300" b="0">
+                <a:solidFill>
+                  <a:srgbClr val="4DD4C0"/>
+                </a:solidFill>
+                <a:latin typeface="Segoe UI"/>
+              </a:rPr>
+              <a:t>•</a:t>
+            </a:r>
+          </a:p>
+        </p:txBody>
+      </p:sp>
+      <p:sp>
+        <p:nvSpPr>
+          <p:cNvPr id="15" name="TextBox 14"/>
+          <p:cNvSpPr txBox="1"/>
+          <p:nvPr/>
+        </p:nvSpPr>
+        <p:spPr>
+          <a:xfrm>
+            <a:off x="6409944" y="4526280"/>
+            <a:ext cx="4663440" cy="914400"/>
+          </a:xfrm>
+          <a:prstGeom prst="rect">
+            <a:avLst/>
+          </a:prstGeom>
+          <a:noFill/>
+        </p:spPr>
+        <p:txBody>
+          <a:bodyPr wrap="square" anchor="t" lIns="0" rIns="0" tIns="0" bIns="0">
+            <a:spAutoFit/>
+          </a:bodyPr>
+          <a:lstStyle/>
+          <a:p>
+            <a:pPr algn="l">
+              <a:lnSpc>
+                <a:spcPct val="135000"/>
+              </a:lnSpc>
+            </a:pPr>
+            <a:r>
+              <a:rPr sz="1300" b="1">
+                <a:solidFill>
+                  <a:srgbClr val="E6EDF3"/>
+                </a:solidFill>
+                <a:latin typeface="Segoe UI"/>
+              </a:rPr>
+              <a:t>A contest week proves nothing</a:t>
+            </a:r>
+            <a:r>
+              <a:rPr sz="1300" b="0">
+                <a:solidFill>
+                  <a:srgbClr val="A9B6C3"/>
+                </a:solidFill>
+                <a:latin typeface="Segoe UI"/>
+              </a:rPr>
+              <a:t> about profitability. The literature motivates the idea; it does not validate this system.</a:t>
+            </a:r>
+          </a:p>
+        </p:txBody>
+      </p:sp>
+      <p:sp>
+        <p:nvSpPr>
+          <p:cNvPr id="16" name="TextBox 15"/>
+          <p:cNvSpPr txBox="1"/>
+          <p:nvPr/>
+        </p:nvSpPr>
+        <p:spPr>
+          <a:xfrm>
+            <a:off x="777240" y="5623560"/>
+            <a:ext cx="10637215" cy="457200"/>
+          </a:xfrm>
+          <a:prstGeom prst="rect">
+            <a:avLst/>
+          </a:prstGeom>
+          <a:noFill/>
+        </p:spPr>
+        <p:txBody>
+          <a:bodyPr wrap="square" anchor="t" lIns="0" rIns="0" tIns="0" bIns="0">
+            <a:spAutoFit/>
+          </a:bodyPr>
+          <a:lstStyle/>
+          <a:p>
+            <a:pPr algn="ctr">
+              <a:lnSpc>
+                <a:spcPct val="100000"/>
+              </a:lnSpc>
+            </a:pPr>
+            <a:r>
+              <a:rPr sz="2200" b="1">
+                <a:solidFill>
+                  <a:srgbClr val="4DD4C0"/>
+                </a:solidFill>
+                <a:latin typeface="Segoe UI"/>
+              </a:rPr>
+              <a:t>An agent that's most useful when it says no.</a:t>
             </a:r>
           </a:p>
         </p:txBody>
@@ -5102,7 +5848,8 @@
                 </a:solidFill>
                 <a:latin typeface="Segoe UI"/>
               </a:rPr>
-              <a:t>Most AI trading agents let the model decide.</a:t>
+              <a:t>Most AI trading agents give the model
+too much authority.</a:t>
             </a:r>
           </a:p>
         </p:txBody>
@@ -5115,8 +5862,8 @@
         </p:nvSpPr>
         <p:spPr>
           <a:xfrm>
-            <a:off x="777240" y="2487168"/>
-            <a:ext cx="5852160" cy="3108960"/>
+            <a:off x="777240" y="2697480"/>
+            <a:ext cx="6035040" cy="3108960"/>
           </a:xfrm>
           <a:prstGeom prst="rect">
             <a:avLst/>
@@ -5138,31 +5885,13 @@
               </a:spcAft>
             </a:pPr>
             <a:r>
-              <a:rPr sz="1600" b="0">
-                <a:solidFill>
-                  <a:srgbClr val="A9B6C3"/>
+              <a:rPr sz="1900" b="0">
+                <a:solidFill>
+                  <a:srgbClr val="E6EDF3"/>
                 </a:solidFill>
                 <a:latin typeface="Segoe UI"/>
               </a:rPr>
-              <a:t>An LLM that can choose the trade, size the position, and send the order has </a:t>
-            </a:r>
-            <a:r>
-              <a:rPr sz="1600" b="1">
-                <a:solidFill>
-                  <a:srgbClr val="E6EDF3"/>
-                </a:solidFill>
-                <a:latin typeface="Segoe UI"/>
-              </a:rPr>
-              <a:t>unbounded downside</a:t>
-            </a:r>
-            <a:r>
-              <a:rPr sz="1600" b="0">
-                <a:solidFill>
-                  <a:srgbClr val="A9B6C3"/>
-                </a:solidFill>
-                <a:latin typeface="Segoe UI"/>
-              </a:rPr>
-              <a:t> the moment it hallucinates a strike or misreads a quote.</a:t>
+              <a:t>You cannot unit-test a language model.</a:t>
             </a:r>
           </a:p>
           <a:p>
@@ -5175,13 +5904,13 @@
               </a:spcAft>
             </a:pPr>
             <a:r>
-              <a:rPr sz="1600" b="0">
-                <a:solidFill>
-                  <a:srgbClr val="A9B6C3"/>
+              <a:rPr sz="1900" b="1">
+                <a:solidFill>
+                  <a:srgbClr val="4DD4C0"/>
                 </a:solidFill>
                 <a:latin typeface="Segoe UI"/>
               </a:rPr>
-              <a:t>You cannot unit-test a language model. You can unit-test the code that decides whether to obey it.</a:t>
+              <a:t>But you can unit-test the code that decides whether to obey it.</a:t>
             </a:r>
           </a:p>
         </p:txBody>
@@ -5194,8 +5923,8 @@
         </p:nvSpPr>
         <p:spPr>
           <a:xfrm>
-            <a:off x="7178040" y="2377440"/>
-            <a:ext cx="4206240" cy="2286000"/>
+            <a:off x="7360920" y="2514600"/>
+            <a:ext cx="4023360" cy="2286000"/>
           </a:xfrm>
           <a:prstGeom prst="roundRect">
             <a:avLst>
@@ -5240,8 +5969,8 @@
         </p:nvSpPr>
         <p:spPr>
           <a:xfrm>
-            <a:off x="7452360" y="2606040"/>
-            <a:ext cx="3657600" cy="228600"/>
+            <a:off x="7653528" y="2788920"/>
+            <a:ext cx="3474720" cy="274320"/>
           </a:xfrm>
           <a:prstGeom prst="rect">
             <a:avLst/>
@@ -5260,13 +5989,13 @@
               </a:lnSpc>
             </a:pPr>
             <a:r>
-              <a:rPr sz="1050" b="1" spc="140">
+              <a:rPr sz="1050" b="1" spc="130">
                 <a:solidFill>
                   <a:srgbClr val="75828F"/>
                 </a:solidFill>
                 <a:latin typeface="Consolas"/>
               </a:rPr>
-              <a:t>VETOED'S ANSWER</a:t>
+              <a:t>SO THE MODEL'S ENTIRE AUTHORITY IS</a:t>
             </a:r>
           </a:p>
         </p:txBody>
@@ -5279,8 +6008,48 @@
         </p:nvSpPr>
         <p:spPr>
           <a:xfrm>
-            <a:off x="7452360" y="2971800"/>
-            <a:ext cx="3657600" cy="914400"/>
+            <a:off x="7653528" y="3200400"/>
+            <a:ext cx="3474720" cy="914400"/>
+          </a:xfrm>
+          <a:prstGeom prst="rect">
+            <a:avLst/>
+          </a:prstGeom>
+          <a:noFill/>
+        </p:spPr>
+        <p:txBody>
+          <a:bodyPr wrap="square" anchor="t" lIns="0" rIns="0" tIns="0" bIns="0">
+            <a:spAutoFit/>
+          </a:bodyPr>
+          <a:lstStyle/>
+          <a:p>
+            <a:pPr algn="l">
+              <a:lnSpc>
+                <a:spcPct val="135000"/>
+              </a:lnSpc>
+            </a:pPr>
+            <a:r>
+              <a:rPr sz="1700" b="1">
+                <a:solidFill>
+                  <a:srgbClr val="4DD4C0"/>
+                </a:solidFill>
+                <a:latin typeface="Segoe UI"/>
+              </a:rPr>
+              <a:t>Pick one item from a list
+it did not write.</a:t>
+            </a:r>
+          </a:p>
+        </p:txBody>
+      </p:sp>
+      <p:sp>
+        <p:nvSpPr>
+          <p:cNvPr id="8" name="TextBox 7"/>
+          <p:cNvSpPr txBox="1"/>
+          <p:nvPr/>
+        </p:nvSpPr>
+        <p:spPr>
+          <a:xfrm>
+            <a:off x="7653528" y="4160520"/>
+            <a:ext cx="3474720" cy="548640"/>
           </a:xfrm>
           <a:prstGeom prst="rect">
             <a:avLst/>
@@ -5299,53 +6068,13 @@
               </a:lnSpc>
             </a:pPr>
             <a:r>
-              <a:rPr sz="1900" b="1">
-                <a:solidFill>
-                  <a:srgbClr val="4DD4C0"/>
-                </a:solidFill>
-                <a:latin typeface="Consolas"/>
-              </a:rPr>
-              <a:t>The model picks an index
-from a pre-vetted list.</a:t>
-            </a:r>
-          </a:p>
-        </p:txBody>
-      </p:sp>
-      <p:sp>
-        <p:nvSpPr>
-          <p:cNvPr id="8" name="TextBox 7"/>
-          <p:cNvSpPr txBox="1"/>
-          <p:nvPr/>
-        </p:nvSpPr>
-        <p:spPr>
-          <a:xfrm>
-            <a:off x="7452360" y="3886200"/>
-            <a:ext cx="3657600" cy="731520"/>
-          </a:xfrm>
-          <a:prstGeom prst="rect">
-            <a:avLst/>
-          </a:prstGeom>
-          <a:noFill/>
-        </p:spPr>
-        <p:txBody>
-          <a:bodyPr wrap="square" anchor="t" lIns="0" rIns="0" tIns="0" bIns="0">
-            <a:spAutoFit/>
-          </a:bodyPr>
-          <a:lstStyle/>
-          <a:p>
-            <a:pPr algn="l">
-              <a:lnSpc>
-                <a:spcPct val="125000"/>
-              </a:lnSpc>
-            </a:pPr>
-            <a:r>
               <a:rPr sz="1150" b="0">
                 <a:solidFill>
                   <a:srgbClr val="75828F"/>
                 </a:solidFill>
                 <a:latin typeface="Segoe UI"/>
               </a:rPr>
-              <a:t>That is its entire authority. Everything else is deterministic, tested code that can overrule it.</a:t>
+              <a:t>It cannot build a trade, choose a size, or send an order.</a:t>
             </a:r>
           </a:p>
         </p:txBody>
@@ -5569,7 +6298,7 @@
                 </a:solidFill>
                 <a:latin typeface="Segoe UI"/>
               </a:rPr>
-              <a:t>Sell insurance. Don't predict direction.</a:t>
+              <a:t>We sell defined-risk insurance.</a:t>
             </a:r>
           </a:p>
         </p:txBody>
@@ -5582,165 +6311,846 @@
         </p:nvSpPr>
         <p:spPr>
           <a:xfrm>
-            <a:off x="777240" y="2423160"/>
-            <a:ext cx="9692640" cy="3108960"/>
-          </a:xfrm>
-          <a:prstGeom prst="rect">
-            <a:avLst/>
-          </a:prstGeom>
-          <a:noFill/>
-        </p:spPr>
-        <p:txBody>
-          <a:bodyPr wrap="square" lIns="0" rIns="0" tIns="0" bIns="0">
-            <a:spAutoFit/>
-          </a:bodyPr>
-          <a:lstStyle/>
-          <a:p>
-            <a:pPr>
+            <a:off x="777240" y="2148840"/>
+            <a:ext cx="10424160" cy="548640"/>
+          </a:xfrm>
+          <a:prstGeom prst="rect">
+            <a:avLst/>
+          </a:prstGeom>
+          <a:noFill/>
+        </p:spPr>
+        <p:txBody>
+          <a:bodyPr wrap="square" anchor="t" lIns="0" rIns="0" tIns="0" bIns="0">
+            <a:spAutoFit/>
+          </a:bodyPr>
+          <a:lstStyle/>
+          <a:p>
+            <a:pPr algn="l">
               <a:lnSpc>
                 <a:spcPct val="135000"/>
               </a:lnSpc>
-              <a:spcAft>
-                <a:spcPts val="1100"/>
-              </a:spcAft>
-            </a:pPr>
-            <a:r>
-              <a:rPr sz="1700" b="0">
+            </a:pPr>
+            <a:r>
+              <a:rPr sz="1500" b="0">
                 <a:solidFill>
                   <a:srgbClr val="A9B6C3"/>
                 </a:solidFill>
                 <a:latin typeface="Segoe UI"/>
               </a:rPr>
-              <a:t>The agent sells </a:t>
-            </a:r>
-            <a:r>
-              <a:rPr sz="1700" b="1">
+              <a:t>Two legs, always. The one we sell collects a premium; the one we buy </a:t>
+            </a:r>
+            <a:r>
+              <a:rPr sz="1500" b="1">
                 <a:solidFill>
                   <a:srgbClr val="E6EDF3"/>
                 </a:solidFill>
                 <a:latin typeface="Segoe UI"/>
               </a:rPr>
-              <a:t>defined-risk vertical credit spreads</a:t>
-            </a:r>
-            <a:r>
-              <a:rPr sz="1700" b="0">
+              <a:t>caps the loss before the order is sent</a:t>
+            </a:r>
+            <a:r>
+              <a:rPr sz="1500" b="0">
                 <a:solidFill>
                   <a:srgbClr val="A9B6C3"/>
                 </a:solidFill>
                 <a:latin typeface="Segoe UI"/>
               </a:rPr>
-              <a:t> — short one option, long another further out. The long leg caps the loss, so the worst case is known before the order is sent.</a:t>
-            </a:r>
-          </a:p>
-          <a:p>
-            <a:pPr>
-              <a:lnSpc>
-                <a:spcPct val="135000"/>
-              </a:lnSpc>
-              <a:spcAft>
-                <a:spcPts val="1100"/>
-              </a:spcAft>
-            </a:pPr>
-            <a:r>
-              <a:rPr sz="1700" b="0">
+              <a:t>.</a:t>
+            </a:r>
+          </a:p>
+        </p:txBody>
+      </p:sp>
+      <p:sp>
+        <p:nvSpPr>
+          <p:cNvPr id="5" name="Rounded Rectangle 4"/>
+          <p:cNvSpPr/>
+          <p:nvPr/>
+        </p:nvSpPr>
+        <p:spPr>
+          <a:xfrm>
+            <a:off x="777240" y="2834640"/>
+            <a:ext cx="5029200" cy="2743200"/>
+          </a:xfrm>
+          <a:prstGeom prst="roundRect">
+            <a:avLst>
+              <a:gd name="adj" fmla="val 6000"/>
+            </a:avLst>
+          </a:prstGeom>
+          <a:solidFill>
+            <a:srgbClr val="10161E"/>
+          </a:solidFill>
+          <a:ln w="12700">
+            <a:solidFill>
+              <a:srgbClr val="212C38"/>
+            </a:solidFill>
+          </a:ln>
+          <a:effectLst/>
+        </p:spPr>
+        <p:style>
+          <a:lnRef idx="1">
+            <a:schemeClr val="accent1"/>
+          </a:lnRef>
+          <a:fillRef idx="3">
+            <a:schemeClr val="accent1"/>
+          </a:fillRef>
+          <a:effectRef idx="2">
+            <a:schemeClr val="accent1"/>
+          </a:effectRef>
+          <a:fontRef idx="minor">
+            <a:schemeClr val="lt1"/>
+          </a:fontRef>
+        </p:style>
+        <p:txBody>
+          <a:bodyPr rtlCol="0" anchor="ctr"/>
+          <a:lstStyle/>
+          <a:p/>
+        </p:txBody>
+      </p:sp>
+      <p:sp>
+        <p:nvSpPr>
+          <p:cNvPr id="6" name="TextBox 5"/>
+          <p:cNvSpPr txBox="1"/>
+          <p:nvPr/>
+        </p:nvSpPr>
+        <p:spPr>
+          <a:xfrm>
+            <a:off x="1051560" y="3035808"/>
+            <a:ext cx="4480560" cy="274320"/>
+          </a:xfrm>
+          <a:prstGeom prst="rect">
+            <a:avLst/>
+          </a:prstGeom>
+          <a:noFill/>
+        </p:spPr>
+        <p:txBody>
+          <a:bodyPr wrap="square" anchor="t" lIns="0" rIns="0" tIns="0" bIns="0">
+            <a:spAutoFit/>
+          </a:bodyPr>
+          <a:lstStyle/>
+          <a:p>
+            <a:pPr algn="l">
+              <a:lnSpc>
+                <a:spcPct val="100000"/>
+              </a:lnSpc>
+            </a:pPr>
+            <a:r>
+              <a:rPr sz="1400" b="1" spc="110">
+                <a:solidFill>
+                  <a:srgbClr val="3ECF8E"/>
+                </a:solidFill>
+                <a:latin typeface="Consolas"/>
+              </a:rPr>
+              <a:t>PUT CREDIT SPREAD</a:t>
+            </a:r>
+          </a:p>
+        </p:txBody>
+      </p:sp>
+      <p:sp>
+        <p:nvSpPr>
+          <p:cNvPr id="7" name="TextBox 6"/>
+          <p:cNvSpPr txBox="1"/>
+          <p:nvPr/>
+        </p:nvSpPr>
+        <p:spPr>
+          <a:xfrm>
+            <a:off x="1051560" y="3364992"/>
+            <a:ext cx="4480560" cy="274320"/>
+          </a:xfrm>
+          <a:prstGeom prst="rect">
+            <a:avLst/>
+          </a:prstGeom>
+          <a:noFill/>
+        </p:spPr>
+        <p:txBody>
+          <a:bodyPr wrap="square" anchor="t" lIns="0" rIns="0" tIns="0" bIns="0">
+            <a:spAutoFit/>
+          </a:bodyPr>
+          <a:lstStyle/>
+          <a:p>
+            <a:pPr algn="l">
+              <a:lnSpc>
+                <a:spcPct val="100000"/>
+              </a:lnSpc>
+            </a:pPr>
+            <a:r>
+              <a:rPr sz="1150" b="0">
+                <a:solidFill>
+                  <a:srgbClr val="75828F"/>
+                </a:solidFill>
+                <a:latin typeface="Segoe UI"/>
+              </a:rPr>
+              <a:t>Profits if the stock does not fall far</a:t>
+            </a:r>
+          </a:p>
+        </p:txBody>
+      </p:sp>
+      <p:sp>
+        <p:nvSpPr>
+          <p:cNvPr id="8" name="Rectangle 7"/>
+          <p:cNvSpPr/>
+          <p:nvPr/>
+        </p:nvSpPr>
+        <p:spPr>
+          <a:xfrm>
+            <a:off x="1188720" y="4693920"/>
+            <a:ext cx="1325880" cy="55880"/>
+          </a:xfrm>
+          <a:prstGeom prst="rect">
+            <a:avLst/>
+          </a:prstGeom>
+          <a:noFill/>
+          <a:ln>
+            <a:noFill/>
+          </a:ln>
+          <a:effectLst/>
+        </p:spPr>
+        <p:style>
+          <a:lnRef idx="1">
+            <a:schemeClr val="accent1"/>
+          </a:lnRef>
+          <a:fillRef idx="3">
+            <a:schemeClr val="accent1"/>
+          </a:fillRef>
+          <a:effectRef idx="2">
+            <a:schemeClr val="accent1"/>
+          </a:effectRef>
+          <a:fontRef idx="minor">
+            <a:schemeClr val="lt1"/>
+          </a:fontRef>
+        </p:style>
+        <p:txBody>
+          <a:bodyPr rtlCol="0" anchor="ctr"/>
+          <a:lstStyle/>
+          <a:p>
+            <a:pPr algn="ctr"/>
+          </a:p>
+        </p:txBody>
+      </p:sp>
+      <p:cxnSp>
+        <p:nvCxnSpPr>
+          <p:cNvPr id="9" name="Connector 8"/>
+          <p:cNvCxnSpPr/>
+          <p:nvPr/>
+        </p:nvCxnSpPr>
+        <p:spPr>
+          <a:xfrm>
+            <a:off x="1188720" y="4709160"/>
+            <a:ext cx="1325880" cy="0"/>
+          </a:xfrm>
+          <a:prstGeom prst="line">
+            <a:avLst/>
+          </a:prstGeom>
+          <a:ln w="31750">
+            <a:solidFill>
+              <a:srgbClr val="3ECF8E"/>
+            </a:solidFill>
+          </a:ln>
+        </p:spPr>
+        <p:style>
+          <a:lnRef idx="2">
+            <a:schemeClr val="accent1"/>
+          </a:lnRef>
+          <a:fillRef idx="0">
+            <a:schemeClr val="accent1"/>
+          </a:fillRef>
+          <a:effectRef idx="1">
+            <a:schemeClr val="accent1"/>
+          </a:effectRef>
+          <a:fontRef idx="minor">
+            <a:schemeClr val="tx1"/>
+          </a:fontRef>
+        </p:style>
+      </p:cxnSp>
+      <p:sp>
+        <p:nvSpPr>
+          <p:cNvPr id="10" name="Rectangle 9"/>
+          <p:cNvSpPr/>
+          <p:nvPr/>
+        </p:nvSpPr>
+        <p:spPr>
+          <a:xfrm>
+            <a:off x="2514600" y="3779520"/>
+            <a:ext cx="1280160" cy="944880"/>
+          </a:xfrm>
+          <a:prstGeom prst="rect">
+            <a:avLst/>
+          </a:prstGeom>
+          <a:noFill/>
+          <a:ln>
+            <a:noFill/>
+          </a:ln>
+          <a:effectLst/>
+        </p:spPr>
+        <p:style>
+          <a:lnRef idx="1">
+            <a:schemeClr val="accent1"/>
+          </a:lnRef>
+          <a:fillRef idx="3">
+            <a:schemeClr val="accent1"/>
+          </a:fillRef>
+          <a:effectRef idx="2">
+            <a:schemeClr val="accent1"/>
+          </a:effectRef>
+          <a:fontRef idx="minor">
+            <a:schemeClr val="lt1"/>
+          </a:fontRef>
+        </p:style>
+        <p:txBody>
+          <a:bodyPr rtlCol="0" anchor="ctr"/>
+          <a:lstStyle/>
+          <a:p>
+            <a:pPr algn="ctr"/>
+          </a:p>
+        </p:txBody>
+      </p:sp>
+      <p:cxnSp>
+        <p:nvCxnSpPr>
+          <p:cNvPr id="11" name="Connector 10"/>
+          <p:cNvCxnSpPr/>
+          <p:nvPr/>
+        </p:nvCxnSpPr>
+        <p:spPr>
+          <a:xfrm flipV="1">
+            <a:off x="2514600" y="3794760"/>
+            <a:ext cx="1280160" cy="914400"/>
+          </a:xfrm>
+          <a:prstGeom prst="line">
+            <a:avLst/>
+          </a:prstGeom>
+          <a:ln w="31750">
+            <a:solidFill>
+              <a:srgbClr val="3ECF8E"/>
+            </a:solidFill>
+          </a:ln>
+        </p:spPr>
+        <p:style>
+          <a:lnRef idx="2">
+            <a:schemeClr val="accent1"/>
+          </a:lnRef>
+          <a:fillRef idx="0">
+            <a:schemeClr val="accent1"/>
+          </a:fillRef>
+          <a:effectRef idx="1">
+            <a:schemeClr val="accent1"/>
+          </a:effectRef>
+          <a:fontRef idx="minor">
+            <a:schemeClr val="tx1"/>
+          </a:fontRef>
+        </p:style>
+      </p:cxnSp>
+      <p:sp>
+        <p:nvSpPr>
+          <p:cNvPr id="12" name="Rectangle 11"/>
+          <p:cNvSpPr/>
+          <p:nvPr/>
+        </p:nvSpPr>
+        <p:spPr>
+          <a:xfrm>
+            <a:off x="3794760" y="3779520"/>
+            <a:ext cx="1600200" cy="55880"/>
+          </a:xfrm>
+          <a:prstGeom prst="rect">
+            <a:avLst/>
+          </a:prstGeom>
+          <a:noFill/>
+          <a:ln>
+            <a:noFill/>
+          </a:ln>
+          <a:effectLst/>
+        </p:spPr>
+        <p:style>
+          <a:lnRef idx="1">
+            <a:schemeClr val="accent1"/>
+          </a:lnRef>
+          <a:fillRef idx="3">
+            <a:schemeClr val="accent1"/>
+          </a:fillRef>
+          <a:effectRef idx="2">
+            <a:schemeClr val="accent1"/>
+          </a:effectRef>
+          <a:fontRef idx="minor">
+            <a:schemeClr val="lt1"/>
+          </a:fontRef>
+        </p:style>
+        <p:txBody>
+          <a:bodyPr rtlCol="0" anchor="ctr"/>
+          <a:lstStyle/>
+          <a:p>
+            <a:pPr algn="ctr"/>
+          </a:p>
+        </p:txBody>
+      </p:sp>
+      <p:cxnSp>
+        <p:nvCxnSpPr>
+          <p:cNvPr id="13" name="Connector 12"/>
+          <p:cNvCxnSpPr/>
+          <p:nvPr/>
+        </p:nvCxnSpPr>
+        <p:spPr>
+          <a:xfrm>
+            <a:off x="3794760" y="3794760"/>
+            <a:ext cx="1600200" cy="0"/>
+          </a:xfrm>
+          <a:prstGeom prst="line">
+            <a:avLst/>
+          </a:prstGeom>
+          <a:ln w="31750">
+            <a:solidFill>
+              <a:srgbClr val="3ECF8E"/>
+            </a:solidFill>
+          </a:ln>
+        </p:spPr>
+        <p:style>
+          <a:lnRef idx="2">
+            <a:schemeClr val="accent1"/>
+          </a:lnRef>
+          <a:fillRef idx="0">
+            <a:schemeClr val="accent1"/>
+          </a:fillRef>
+          <a:effectRef idx="1">
+            <a:schemeClr val="accent1"/>
+          </a:effectRef>
+          <a:fontRef idx="minor">
+            <a:schemeClr val="tx1"/>
+          </a:fontRef>
+        </p:style>
+      </p:cxnSp>
+      <p:sp>
+        <p:nvSpPr>
+          <p:cNvPr id="14" name="TextBox 13"/>
+          <p:cNvSpPr txBox="1"/>
+          <p:nvPr/>
+        </p:nvSpPr>
+        <p:spPr>
+          <a:xfrm>
+            <a:off x="1051560" y="5029200"/>
+            <a:ext cx="4480560" cy="365760"/>
+          </a:xfrm>
+          <a:prstGeom prst="rect">
+            <a:avLst/>
+          </a:prstGeom>
+          <a:noFill/>
+        </p:spPr>
+        <p:txBody>
+          <a:bodyPr wrap="square" anchor="t" lIns="0" rIns="0" tIns="0" bIns="0">
+            <a:spAutoFit/>
+          </a:bodyPr>
+          <a:lstStyle/>
+          <a:p>
+            <a:pPr algn="l">
+              <a:lnSpc>
+                <a:spcPct val="100000"/>
+              </a:lnSpc>
+            </a:pPr>
+            <a:r>
+              <a:rPr sz="1150" b="0">
                 <a:solidFill>
                   <a:srgbClr val="A9B6C3"/>
                 </a:solidFill>
                 <a:latin typeface="Segoe UI"/>
               </a:rPr>
-              <a:t>It profits because risk-neutral probabilities systematically </a:t>
-            </a:r>
-            <a:r>
-              <a:rPr sz="1700" b="1">
-                <a:solidFill>
-                  <a:srgbClr val="E6EDF3"/>
+              <a:t>SELL the 310 put   ·   BUY the 305 put</a:t>
+            </a:r>
+          </a:p>
+        </p:txBody>
+      </p:sp>
+      <p:sp>
+        <p:nvSpPr>
+          <p:cNvPr id="15" name="Rounded Rectangle 14"/>
+          <p:cNvSpPr/>
+          <p:nvPr/>
+        </p:nvSpPr>
+        <p:spPr>
+          <a:xfrm>
+            <a:off x="6172200" y="2834640"/>
+            <a:ext cx="5029200" cy="2743200"/>
+          </a:xfrm>
+          <a:prstGeom prst="roundRect">
+            <a:avLst>
+              <a:gd name="adj" fmla="val 6000"/>
+            </a:avLst>
+          </a:prstGeom>
+          <a:solidFill>
+            <a:srgbClr val="10161E"/>
+          </a:solidFill>
+          <a:ln w="12700">
+            <a:solidFill>
+              <a:srgbClr val="212C38"/>
+            </a:solidFill>
+          </a:ln>
+          <a:effectLst/>
+        </p:spPr>
+        <p:style>
+          <a:lnRef idx="1">
+            <a:schemeClr val="accent1"/>
+          </a:lnRef>
+          <a:fillRef idx="3">
+            <a:schemeClr val="accent1"/>
+          </a:fillRef>
+          <a:effectRef idx="2">
+            <a:schemeClr val="accent1"/>
+          </a:effectRef>
+          <a:fontRef idx="minor">
+            <a:schemeClr val="lt1"/>
+          </a:fontRef>
+        </p:style>
+        <p:txBody>
+          <a:bodyPr rtlCol="0" anchor="ctr"/>
+          <a:lstStyle/>
+          <a:p/>
+        </p:txBody>
+      </p:sp>
+      <p:sp>
+        <p:nvSpPr>
+          <p:cNvPr id="16" name="TextBox 15"/>
+          <p:cNvSpPr txBox="1"/>
+          <p:nvPr/>
+        </p:nvSpPr>
+        <p:spPr>
+          <a:xfrm>
+            <a:off x="6446520" y="3035808"/>
+            <a:ext cx="4480560" cy="274320"/>
+          </a:xfrm>
+          <a:prstGeom prst="rect">
+            <a:avLst/>
+          </a:prstGeom>
+          <a:noFill/>
+        </p:spPr>
+        <p:txBody>
+          <a:bodyPr wrap="square" anchor="t" lIns="0" rIns="0" tIns="0" bIns="0">
+            <a:spAutoFit/>
+          </a:bodyPr>
+          <a:lstStyle/>
+          <a:p>
+            <a:pPr algn="l">
+              <a:lnSpc>
+                <a:spcPct val="100000"/>
+              </a:lnSpc>
+            </a:pPr>
+            <a:r>
+              <a:rPr sz="1400" b="1" spc="110">
+                <a:solidFill>
+                  <a:srgbClr val="F2685C"/>
+                </a:solidFill>
+                <a:latin typeface="Consolas"/>
+              </a:rPr>
+              <a:t>CALL CREDIT SPREAD</a:t>
+            </a:r>
+          </a:p>
+        </p:txBody>
+      </p:sp>
+      <p:sp>
+        <p:nvSpPr>
+          <p:cNvPr id="17" name="TextBox 16"/>
+          <p:cNvSpPr txBox="1"/>
+          <p:nvPr/>
+        </p:nvSpPr>
+        <p:spPr>
+          <a:xfrm>
+            <a:off x="6446520" y="3364992"/>
+            <a:ext cx="4480560" cy="274320"/>
+          </a:xfrm>
+          <a:prstGeom prst="rect">
+            <a:avLst/>
+          </a:prstGeom>
+          <a:noFill/>
+        </p:spPr>
+        <p:txBody>
+          <a:bodyPr wrap="square" anchor="t" lIns="0" rIns="0" tIns="0" bIns="0">
+            <a:spAutoFit/>
+          </a:bodyPr>
+          <a:lstStyle/>
+          <a:p>
+            <a:pPr algn="l">
+              <a:lnSpc>
+                <a:spcPct val="100000"/>
+              </a:lnSpc>
+            </a:pPr>
+            <a:r>
+              <a:rPr sz="1150" b="0">
+                <a:solidFill>
+                  <a:srgbClr val="75828F"/>
                 </a:solidFill>
                 <a:latin typeface="Segoe UI"/>
               </a:rPr>
-              <a:t>overstate</a:t>
-            </a:r>
-            <a:r>
-              <a:rPr sz="1700" b="0">
+              <a:t>Profits if the stock does not rise far</a:t>
+            </a:r>
+          </a:p>
+        </p:txBody>
+      </p:sp>
+      <p:sp>
+        <p:nvSpPr>
+          <p:cNvPr id="18" name="Rectangle 17"/>
+          <p:cNvSpPr/>
+          <p:nvPr/>
+        </p:nvSpPr>
+        <p:spPr>
+          <a:xfrm>
+            <a:off x="6583680" y="3779520"/>
+            <a:ext cx="1325880" cy="55880"/>
+          </a:xfrm>
+          <a:prstGeom prst="rect">
+            <a:avLst/>
+          </a:prstGeom>
+          <a:noFill/>
+          <a:ln>
+            <a:noFill/>
+          </a:ln>
+          <a:effectLst/>
+        </p:spPr>
+        <p:style>
+          <a:lnRef idx="1">
+            <a:schemeClr val="accent1"/>
+          </a:lnRef>
+          <a:fillRef idx="3">
+            <a:schemeClr val="accent1"/>
+          </a:fillRef>
+          <a:effectRef idx="2">
+            <a:schemeClr val="accent1"/>
+          </a:effectRef>
+          <a:fontRef idx="minor">
+            <a:schemeClr val="lt1"/>
+          </a:fontRef>
+        </p:style>
+        <p:txBody>
+          <a:bodyPr rtlCol="0" anchor="ctr"/>
+          <a:lstStyle/>
+          <a:p>
+            <a:pPr algn="ctr"/>
+          </a:p>
+        </p:txBody>
+      </p:sp>
+      <p:cxnSp>
+        <p:nvCxnSpPr>
+          <p:cNvPr id="19" name="Connector 18"/>
+          <p:cNvCxnSpPr/>
+          <p:nvPr/>
+        </p:nvCxnSpPr>
+        <p:spPr>
+          <a:xfrm>
+            <a:off x="6583680" y="3794760"/>
+            <a:ext cx="1325880" cy="0"/>
+          </a:xfrm>
+          <a:prstGeom prst="line">
+            <a:avLst/>
+          </a:prstGeom>
+          <a:ln w="31750">
+            <a:solidFill>
+              <a:srgbClr val="F2685C"/>
+            </a:solidFill>
+          </a:ln>
+        </p:spPr>
+        <p:style>
+          <a:lnRef idx="2">
+            <a:schemeClr val="accent1"/>
+          </a:lnRef>
+          <a:fillRef idx="0">
+            <a:schemeClr val="accent1"/>
+          </a:fillRef>
+          <a:effectRef idx="1">
+            <a:schemeClr val="accent1"/>
+          </a:effectRef>
+          <a:fontRef idx="minor">
+            <a:schemeClr val="tx1"/>
+          </a:fontRef>
+        </p:style>
+      </p:cxnSp>
+      <p:sp>
+        <p:nvSpPr>
+          <p:cNvPr id="20" name="Rectangle 19"/>
+          <p:cNvSpPr/>
+          <p:nvPr/>
+        </p:nvSpPr>
+        <p:spPr>
+          <a:xfrm>
+            <a:off x="7909560" y="3779520"/>
+            <a:ext cx="1280160" cy="944880"/>
+          </a:xfrm>
+          <a:prstGeom prst="rect">
+            <a:avLst/>
+          </a:prstGeom>
+          <a:noFill/>
+          <a:ln>
+            <a:noFill/>
+          </a:ln>
+          <a:effectLst/>
+        </p:spPr>
+        <p:style>
+          <a:lnRef idx="1">
+            <a:schemeClr val="accent1"/>
+          </a:lnRef>
+          <a:fillRef idx="3">
+            <a:schemeClr val="accent1"/>
+          </a:fillRef>
+          <a:effectRef idx="2">
+            <a:schemeClr val="accent1"/>
+          </a:effectRef>
+          <a:fontRef idx="minor">
+            <a:schemeClr val="lt1"/>
+          </a:fontRef>
+        </p:style>
+        <p:txBody>
+          <a:bodyPr rtlCol="0" anchor="ctr"/>
+          <a:lstStyle/>
+          <a:p>
+            <a:pPr algn="ctr"/>
+          </a:p>
+        </p:txBody>
+      </p:sp>
+      <p:cxnSp>
+        <p:nvCxnSpPr>
+          <p:cNvPr id="21" name="Connector 20"/>
+          <p:cNvCxnSpPr/>
+          <p:nvPr/>
+        </p:nvCxnSpPr>
+        <p:spPr>
+          <a:xfrm>
+            <a:off x="7909560" y="3794760"/>
+            <a:ext cx="1280160" cy="914400"/>
+          </a:xfrm>
+          <a:prstGeom prst="line">
+            <a:avLst/>
+          </a:prstGeom>
+          <a:ln w="31750">
+            <a:solidFill>
+              <a:srgbClr val="F2685C"/>
+            </a:solidFill>
+          </a:ln>
+        </p:spPr>
+        <p:style>
+          <a:lnRef idx="2">
+            <a:schemeClr val="accent1"/>
+          </a:lnRef>
+          <a:fillRef idx="0">
+            <a:schemeClr val="accent1"/>
+          </a:fillRef>
+          <a:effectRef idx="1">
+            <a:schemeClr val="accent1"/>
+          </a:effectRef>
+          <a:fontRef idx="minor">
+            <a:schemeClr val="tx1"/>
+          </a:fontRef>
+        </p:style>
+      </p:cxnSp>
+      <p:sp>
+        <p:nvSpPr>
+          <p:cNvPr id="22" name="Rectangle 21"/>
+          <p:cNvSpPr/>
+          <p:nvPr/>
+        </p:nvSpPr>
+        <p:spPr>
+          <a:xfrm>
+            <a:off x="9189720" y="4693920"/>
+            <a:ext cx="1600200" cy="55880"/>
+          </a:xfrm>
+          <a:prstGeom prst="rect">
+            <a:avLst/>
+          </a:prstGeom>
+          <a:noFill/>
+          <a:ln>
+            <a:noFill/>
+          </a:ln>
+          <a:effectLst/>
+        </p:spPr>
+        <p:style>
+          <a:lnRef idx="1">
+            <a:schemeClr val="accent1"/>
+          </a:lnRef>
+          <a:fillRef idx="3">
+            <a:schemeClr val="accent1"/>
+          </a:fillRef>
+          <a:effectRef idx="2">
+            <a:schemeClr val="accent1"/>
+          </a:effectRef>
+          <a:fontRef idx="minor">
+            <a:schemeClr val="lt1"/>
+          </a:fontRef>
+        </p:style>
+        <p:txBody>
+          <a:bodyPr rtlCol="0" anchor="ctr"/>
+          <a:lstStyle/>
+          <a:p>
+            <a:pPr algn="ctr"/>
+          </a:p>
+        </p:txBody>
+      </p:sp>
+      <p:cxnSp>
+        <p:nvCxnSpPr>
+          <p:cNvPr id="23" name="Connector 22"/>
+          <p:cNvCxnSpPr/>
+          <p:nvPr/>
+        </p:nvCxnSpPr>
+        <p:spPr>
+          <a:xfrm>
+            <a:off x="9189720" y="4709160"/>
+            <a:ext cx="1600200" cy="0"/>
+          </a:xfrm>
+          <a:prstGeom prst="line">
+            <a:avLst/>
+          </a:prstGeom>
+          <a:ln w="31750">
+            <a:solidFill>
+              <a:srgbClr val="F2685C"/>
+            </a:solidFill>
+          </a:ln>
+        </p:spPr>
+        <p:style>
+          <a:lnRef idx="2">
+            <a:schemeClr val="accent1"/>
+          </a:lnRef>
+          <a:fillRef idx="0">
+            <a:schemeClr val="accent1"/>
+          </a:fillRef>
+          <a:effectRef idx="1">
+            <a:schemeClr val="accent1"/>
+          </a:effectRef>
+          <a:fontRef idx="minor">
+            <a:schemeClr val="tx1"/>
+          </a:fontRef>
+        </p:style>
+      </p:cxnSp>
+      <p:sp>
+        <p:nvSpPr>
+          <p:cNvPr id="24" name="TextBox 23"/>
+          <p:cNvSpPr txBox="1"/>
+          <p:nvPr/>
+        </p:nvSpPr>
+        <p:spPr>
+          <a:xfrm>
+            <a:off x="6446520" y="5029200"/>
+            <a:ext cx="4480560" cy="365760"/>
+          </a:xfrm>
+          <a:prstGeom prst="rect">
+            <a:avLst/>
+          </a:prstGeom>
+          <a:noFill/>
+        </p:spPr>
+        <p:txBody>
+          <a:bodyPr wrap="square" anchor="t" lIns="0" rIns="0" tIns="0" bIns="0">
+            <a:spAutoFit/>
+          </a:bodyPr>
+          <a:lstStyle/>
+          <a:p>
+            <a:pPr algn="l">
+              <a:lnSpc>
+                <a:spcPct val="100000"/>
+              </a:lnSpc>
+            </a:pPr>
+            <a:r>
+              <a:rPr sz="1150" b="0">
                 <a:solidFill>
                   <a:srgbClr val="A9B6C3"/>
                 </a:solidFill>
                 <a:latin typeface="Segoe UI"/>
               </a:rPr>
-              <a:t> the real-world chance of big moves. Option buyers overpay for protection. That gap is the </a:t>
-            </a:r>
-            <a:r>
-              <a:rPr sz="1700" b="1">
-                <a:solidFill>
-                  <a:srgbClr val="4DD4C0"/>
-                </a:solidFill>
-                <a:latin typeface="Segoe UI"/>
-              </a:rPr>
-              <a:t>volatility risk premium</a:t>
-            </a:r>
-            <a:r>
-              <a:rPr sz="1700" b="0">
-                <a:solidFill>
-                  <a:srgbClr val="A9B6C3"/>
-                </a:solidFill>
-                <a:latin typeface="Segoe UI"/>
-              </a:rPr>
-              <a:t>.</a:t>
-            </a:r>
-          </a:p>
-        </p:txBody>
-      </p:sp>
-      <p:sp>
-        <p:nvSpPr>
-          <p:cNvPr id="5" name="TextBox 4"/>
-          <p:cNvSpPr txBox="1"/>
-          <p:nvPr/>
-        </p:nvSpPr>
-        <p:spPr>
-          <a:xfrm>
-            <a:off x="777240" y="4846320"/>
-            <a:ext cx="10241280" cy="1280160"/>
-          </a:xfrm>
-          <a:prstGeom prst="rect">
-            <a:avLst/>
-          </a:prstGeom>
-          <a:noFill/>
-        </p:spPr>
-        <p:txBody>
-          <a:bodyPr wrap="square" anchor="t" lIns="0" rIns="0" tIns="0" bIns="0">
-            <a:spAutoFit/>
-          </a:bodyPr>
-          <a:lstStyle/>
-          <a:p>
-            <a:pPr algn="l">
-              <a:lnSpc>
-                <a:spcPct val="135000"/>
-              </a:lnSpc>
-            </a:pPr>
-            <a:r>
-              <a:rPr sz="1150" b="0">
-                <a:solidFill>
-                  <a:srgbClr val="75828F"/>
-                </a:solidFill>
-                <a:latin typeface="Segoe UI"/>
-              </a:rPr>
-              <a:t>Bakshi &amp; Kapadia (2003), RFS 16(2)  ·  Carr &amp; Wu (2009), RFS 22(3)  ·  CBOE PUT index, Jun 1986–Dec 2018: 9.95% vs 14.93% volatility at near-identical return.
-</a:t>
-            </a:r>
-            <a:r>
-              <a:rPr sz="1150" b="0">
-                <a:solidFill>
-                  <a:srgbClr val="F0A93B"/>
-                </a:solidFill>
-                <a:latin typeface="Segoe UI"/>
-              </a:rPr>
-              <a:t>These establish that the premium exists. They do not validate this agent: the PUT index is monthly at-the-money cash-secured puts, not 2–14 DTE defined-risk spreads.</a:t>
-            </a:r>
-          </a:p>
-        </p:txBody>
-      </p:sp>
-      <p:sp>
-        <p:nvSpPr>
-          <p:cNvPr id="6" name="TextBox 5"/>
+              <a:t>SELL the 300 call   ·   BUY the 305 call</a:t>
+            </a:r>
+          </a:p>
+        </p:txBody>
+      </p:sp>
+      <p:sp>
+        <p:nvSpPr>
+          <p:cNvPr id="25" name="TextBox 24"/>
           <p:cNvSpPr txBox="1"/>
           <p:nvPr/>
         </p:nvSpPr>
@@ -5779,7 +7189,7 @@
       </p:sp>
       <p:sp>
         <p:nvSpPr>
-          <p:cNvPr id="7" name="TextBox 6"/>
+          <p:cNvPr id="26" name="TextBox 25"/>
           <p:cNvSpPr txBox="1"/>
           <p:nvPr/>
         </p:nvSpPr>
@@ -5818,7 +7228,7 @@
       </p:sp>
       <p:sp>
         <p:nvSpPr>
-          <p:cNvPr id="8" name="Rectangle 7"/>
+          <p:cNvPr id="27" name="Rectangle 26"/>
           <p:cNvSpPr/>
           <p:nvPr/>
         </p:nvSpPr>
@@ -5918,7 +7328,7 @@
                 </a:solidFill>
                 <a:latin typeface="Consolas"/>
               </a:rPr>
-              <a:t>WHY A RISK-NEUTRAL EV MEASURES NOTHING</a:t>
+              <a:t>WHY VOLATILITY MATTERS</a:t>
             </a:r>
           </a:p>
         </p:txBody>
@@ -5957,8 +7367,8 @@
                 </a:solidFill>
                 <a:latin typeface="Segoe UI"/>
               </a:rPr>
-              <a:t>The signal has to be a difference,
-not a level.</a:t>
+              <a:t>Two numbers. When they disagree,
+the seller is being paid.</a:t>
             </a:r>
           </a:p>
         </p:txBody>
@@ -5971,8 +7381,8 @@
         </p:nvSpPr>
         <p:spPr>
           <a:xfrm>
-            <a:off x="777240" y="2834640"/>
-            <a:ext cx="5669280" cy="3108960"/>
+            <a:off x="777240" y="2743200"/>
+            <a:ext cx="5943600" cy="3108960"/>
           </a:xfrm>
           <a:prstGeom prst="rect">
             <a:avLst/>
@@ -5994,31 +7404,22 @@
               </a:spcAft>
             </a:pPr>
             <a:r>
-              <a:rPr sz="1600" b="0">
+              <a:rPr sz="1500" b="1">
+                <a:solidFill>
+                  <a:srgbClr val="4DD4C0"/>
+                </a:solidFill>
+                <a:latin typeface="Segoe UI"/>
+              </a:rPr>
+              <a:t>Implied volatility</a:t>
+            </a:r>
+            <a:r>
+              <a:rPr sz="1500" b="0">
                 <a:solidFill>
                   <a:srgbClr val="A9B6C3"/>
                 </a:solidFill>
                 <a:latin typeface="Segoe UI"/>
               </a:rPr>
-              <a:t>Under the risk-neutral measure a fairly-priced trade has an expected P&amp;L of exactly </a:t>
-            </a:r>
-            <a:r>
-              <a:rPr sz="1600" b="1">
-                <a:solidFill>
-                  <a:srgbClr val="E6EDF3"/>
-                </a:solidFill>
-                <a:latin typeface="Segoe UI"/>
-              </a:rPr>
-              <a:t>zero</a:t>
-            </a:r>
-            <a:r>
-              <a:rPr sz="1600" b="0">
-                <a:solidFill>
-                  <a:srgbClr val="A9B6C3"/>
-                </a:solidFill>
-                <a:latin typeface="Segoe UI"/>
-              </a:rPr>
-              <a:t>. A no-arbitrage identity, not an opinion.</a:t>
+              <a:t> — how much movement option prices are charging for.</a:t>
             </a:r>
           </a:p>
           <a:p>
@@ -6031,31 +7432,50 @@
               </a:spcAft>
             </a:pPr>
             <a:r>
-              <a:rPr sz="1600" b="0">
+              <a:rPr sz="1500" b="1">
+                <a:solidFill>
+                  <a:srgbClr val="3ECF8E"/>
+                </a:solidFill>
+                <a:latin typeface="Segoe UI"/>
+              </a:rPr>
+              <a:t>Realised volatility</a:t>
+            </a:r>
+            <a:r>
+              <a:rPr sz="1500" b="0">
                 <a:solidFill>
                   <a:srgbClr val="A9B6C3"/>
                 </a:solidFill>
                 <a:latin typeface="Segoe UI"/>
               </a:rPr>
-              <a:t>So an EV built from risk-neutral inputs can only reflect </a:t>
-            </a:r>
-            <a:r>
-              <a:rPr sz="1600" b="1">
-                <a:solidFill>
-                  <a:srgbClr val="F2685C"/>
+              <a:t> — how much the stock actually moved recently.</a:t>
+            </a:r>
+          </a:p>
+          <a:p>
+            <a:pPr>
+              <a:lnSpc>
+                <a:spcPct val="135000"/>
+              </a:lnSpc>
+              <a:spcAft>
+                <a:spcPts val="1100"/>
+              </a:spcAft>
+            </a:pPr>
+            <a:r>
+              <a:rPr sz="1500" b="0">
+                <a:solidFill>
+                  <a:srgbClr val="A9B6C3"/>
                 </a:solidFill>
                 <a:latin typeface="Segoe UI"/>
               </a:rPr>
-              <a:t>quoting noise</a:t>
-            </a:r>
-            <a:r>
-              <a:rPr sz="1600" b="0">
-                <a:solidFill>
-                  <a:srgbClr val="A9B6C3"/>
+              <a:t>When implied sits above realised, options are priced for more movement than has been happening. </a:t>
+            </a:r>
+            <a:r>
+              <a:rPr sz="1500" b="1">
+                <a:solidFill>
+                  <a:srgbClr val="E6EDF3"/>
                 </a:solidFill>
                 <a:latin typeface="Segoe UI"/>
               </a:rPr>
-              <a:t>. The edge has to come from comparing two volatilities.</a:t>
+              <a:t>That gap is what a premium seller is trying to collect.</a:t>
             </a:r>
           </a:p>
         </p:txBody>
@@ -6068,8 +7488,8 @@
         </p:nvSpPr>
         <p:spPr>
           <a:xfrm>
-            <a:off x="7086600" y="2743200"/>
-            <a:ext cx="4297680" cy="2103120"/>
+            <a:off x="7269480" y="2514600"/>
+            <a:ext cx="4114800" cy="2788920"/>
           </a:xfrm>
           <a:prstGeom prst="roundRect">
             <a:avLst>
@@ -6114,8 +7534,8 @@
         </p:nvSpPr>
         <p:spPr>
           <a:xfrm>
-            <a:off x="7379208" y="2999232"/>
-            <a:ext cx="3749039" cy="320040"/>
+            <a:off x="7562088" y="2743200"/>
+            <a:ext cx="3566160" cy="274320"/>
           </a:xfrm>
           <a:prstGeom prst="rect">
             <a:avLst/>
@@ -6134,13 +7554,13 @@
               </a:lnSpc>
             </a:pPr>
             <a:r>
-              <a:rPr sz="1100" b="1" spc="130">
-                <a:solidFill>
-                  <a:srgbClr val="F0A93B"/>
+              <a:rPr sz="1050" b="1" spc="130">
+                <a:solidFill>
+                  <a:srgbClr val="75828F"/>
                 </a:solidFill>
                 <a:latin typeface="Consolas"/>
               </a:rPr>
-              <a:t>AND DELTA IS NOT A PROBABILITY</a:t>
+              <a:t>AAPL, ONE LIVE SCREEN</a:t>
             </a:r>
           </a:p>
         </p:txBody>
@@ -6153,23 +7573,104 @@
         </p:nvSpPr>
         <p:spPr>
           <a:xfrm>
-            <a:off x="7379208" y="3401568"/>
-            <a:ext cx="3749039" cy="822960"/>
-          </a:xfrm>
-          <a:prstGeom prst="rect">
-            <a:avLst/>
-          </a:prstGeom>
-          <a:noFill/>
-        </p:spPr>
-        <p:txBody>
-          <a:bodyPr wrap="square" anchor="t" lIns="0" rIns="0" tIns="0" bIns="0">
-            <a:spAutoFit/>
-          </a:bodyPr>
-          <a:lstStyle/>
-          <a:p>
-            <a:pPr algn="l">
-              <a:lnSpc>
-                <a:spcPct val="135000"/>
+            <a:off x="7562088" y="3154680"/>
+            <a:ext cx="2194560" cy="228600"/>
+          </a:xfrm>
+          <a:prstGeom prst="rect">
+            <a:avLst/>
+          </a:prstGeom>
+          <a:noFill/>
+        </p:spPr>
+        <p:txBody>
+          <a:bodyPr wrap="square" anchor="t" lIns="0" rIns="0" tIns="0" bIns="0">
+            <a:spAutoFit/>
+          </a:bodyPr>
+          <a:lstStyle/>
+          <a:p>
+            <a:pPr algn="l">
+              <a:lnSpc>
+                <a:spcPct val="100000"/>
+              </a:lnSpc>
+            </a:pPr>
+            <a:r>
+              <a:rPr sz="1100" b="0">
+                <a:solidFill>
+                  <a:srgbClr val="75828F"/>
+                </a:solidFill>
+                <a:latin typeface="Consolas"/>
+              </a:rPr>
+              <a:t>implied</a:t>
+            </a:r>
+          </a:p>
+        </p:txBody>
+      </p:sp>
+      <p:sp>
+        <p:nvSpPr>
+          <p:cNvPr id="8" name="Rectangle 7"/>
+          <p:cNvSpPr/>
+          <p:nvPr/>
+        </p:nvSpPr>
+        <p:spPr>
+          <a:xfrm>
+            <a:off x="7562088" y="3410712"/>
+            <a:ext cx="2606040" cy="201168"/>
+          </a:xfrm>
+          <a:prstGeom prst="rect">
+            <a:avLst/>
+          </a:prstGeom>
+          <a:solidFill>
+            <a:srgbClr val="4DD4C0"/>
+          </a:solidFill>
+          <a:ln>
+            <a:noFill/>
+          </a:ln>
+          <a:effectLst/>
+        </p:spPr>
+        <p:style>
+          <a:lnRef idx="1">
+            <a:schemeClr val="accent1"/>
+          </a:lnRef>
+          <a:fillRef idx="3">
+            <a:schemeClr val="accent1"/>
+          </a:fillRef>
+          <a:effectRef idx="2">
+            <a:schemeClr val="accent1"/>
+          </a:effectRef>
+          <a:fontRef idx="minor">
+            <a:schemeClr val="lt1"/>
+          </a:fontRef>
+        </p:style>
+        <p:txBody>
+          <a:bodyPr rtlCol="0" anchor="ctr"/>
+          <a:lstStyle/>
+          <a:p/>
+        </p:txBody>
+      </p:sp>
+      <p:sp>
+        <p:nvSpPr>
+          <p:cNvPr id="9" name="TextBox 8"/>
+          <p:cNvSpPr txBox="1"/>
+          <p:nvPr/>
+        </p:nvSpPr>
+        <p:spPr>
+          <a:xfrm>
+            <a:off x="10287000" y="3300984"/>
+            <a:ext cx="914400" cy="320040"/>
+          </a:xfrm>
+          <a:prstGeom prst="rect">
+            <a:avLst/>
+          </a:prstGeom>
+          <a:noFill/>
+        </p:spPr>
+        <p:txBody>
+          <a:bodyPr wrap="square" anchor="t" lIns="0" rIns="0" tIns="0" bIns="0">
+            <a:spAutoFit/>
+          </a:bodyPr>
+          <a:lstStyle/>
+          <a:p>
+            <a:pPr algn="l">
+              <a:lnSpc>
+                <a:spcPct val="100000"/>
               </a:lnSpc>
             </a:pPr>
             <a:r>
@@ -6179,54 +7680,212 @@
                 </a:solidFill>
                 <a:latin typeface="Consolas"/>
               </a:rPr>
-              <a:t>delta  = N(d1)
-P(ITM) = N(d2)</a:t>
-            </a:r>
-          </a:p>
-        </p:txBody>
-      </p:sp>
-      <p:sp>
-        <p:nvSpPr>
-          <p:cNvPr id="8" name="TextBox 7"/>
-          <p:cNvSpPr txBox="1"/>
-          <p:nvPr/>
-        </p:nvSpPr>
-        <p:spPr>
-          <a:xfrm>
-            <a:off x="7379208" y="4279392"/>
-            <a:ext cx="3749039" cy="548640"/>
-          </a:xfrm>
-          <a:prstGeom prst="rect">
-            <a:avLst/>
-          </a:prstGeom>
-          <a:noFill/>
-        </p:spPr>
-        <p:txBody>
-          <a:bodyPr wrap="square" anchor="t" lIns="0" rIns="0" tIns="0" bIns="0">
-            <a:spAutoFit/>
-          </a:bodyPr>
-          <a:lstStyle/>
-          <a:p>
-            <a:pPr algn="l">
-              <a:lnSpc>
-                <a:spcPct val="125000"/>
-              </a:lnSpc>
-            </a:pPr>
-            <a:r>
-              <a:rPr sz="1200" b="0">
+              <a:t>23.8%</a:t>
+            </a:r>
+          </a:p>
+        </p:txBody>
+      </p:sp>
+      <p:sp>
+        <p:nvSpPr>
+          <p:cNvPr id="10" name="TextBox 9"/>
+          <p:cNvSpPr txBox="1"/>
+          <p:nvPr/>
+        </p:nvSpPr>
+        <p:spPr>
+          <a:xfrm>
+            <a:off x="7562088" y="3867912"/>
+            <a:ext cx="2194560" cy="228600"/>
+          </a:xfrm>
+          <a:prstGeom prst="rect">
+            <a:avLst/>
+          </a:prstGeom>
+          <a:noFill/>
+        </p:spPr>
+        <p:txBody>
+          <a:bodyPr wrap="square" anchor="t" lIns="0" rIns="0" tIns="0" bIns="0">
+            <a:spAutoFit/>
+          </a:bodyPr>
+          <a:lstStyle/>
+          <a:p>
+            <a:pPr algn="l">
+              <a:lnSpc>
+                <a:spcPct val="100000"/>
+              </a:lnSpc>
+            </a:pPr>
+            <a:r>
+              <a:rPr sz="1100" b="0">
                 <a:solidFill>
                   <a:srgbClr val="75828F"/>
                 </a:solidFill>
-                <a:latin typeface="Segoe UI"/>
-              </a:rPr>
-              <a:t>The gap flips sign between calls and puts.</a:t>
-            </a:r>
-          </a:p>
-        </p:txBody>
-      </p:sp>
-      <p:sp>
-        <p:nvSpPr>
-          <p:cNvPr id="9" name="TextBox 8"/>
+                <a:latin typeface="Consolas"/>
+              </a:rPr>
+              <a:t>realised, 20 day</a:t>
+            </a:r>
+          </a:p>
+        </p:txBody>
+      </p:sp>
+      <p:sp>
+        <p:nvSpPr>
+          <p:cNvPr id="11" name="Rectangle 10"/>
+          <p:cNvSpPr/>
+          <p:nvPr/>
+        </p:nvSpPr>
+        <p:spPr>
+          <a:xfrm>
+            <a:off x="7562088" y="4123944"/>
+            <a:ext cx="2066543" cy="201168"/>
+          </a:xfrm>
+          <a:prstGeom prst="rect">
+            <a:avLst/>
+          </a:prstGeom>
+          <a:solidFill>
+            <a:srgbClr val="3ECF8E"/>
+          </a:solidFill>
+          <a:ln>
+            <a:noFill/>
+          </a:ln>
+          <a:effectLst/>
+        </p:spPr>
+        <p:style>
+          <a:lnRef idx="1">
+            <a:schemeClr val="accent1"/>
+          </a:lnRef>
+          <a:fillRef idx="3">
+            <a:schemeClr val="accent1"/>
+          </a:fillRef>
+          <a:effectRef idx="2">
+            <a:schemeClr val="accent1"/>
+          </a:effectRef>
+          <a:fontRef idx="minor">
+            <a:schemeClr val="lt1"/>
+          </a:fontRef>
+        </p:style>
+        <p:txBody>
+          <a:bodyPr rtlCol="0" anchor="ctr"/>
+          <a:lstStyle/>
+          <a:p/>
+        </p:txBody>
+      </p:sp>
+      <p:sp>
+        <p:nvSpPr>
+          <p:cNvPr id="12" name="TextBox 11"/>
+          <p:cNvSpPr txBox="1"/>
+          <p:nvPr/>
+        </p:nvSpPr>
+        <p:spPr>
+          <a:xfrm>
+            <a:off x="10287000" y="4014216"/>
+            <a:ext cx="914400" cy="320040"/>
+          </a:xfrm>
+          <a:prstGeom prst="rect">
+            <a:avLst/>
+          </a:prstGeom>
+          <a:noFill/>
+        </p:spPr>
+        <p:txBody>
+          <a:bodyPr wrap="square" anchor="t" lIns="0" rIns="0" tIns="0" bIns="0">
+            <a:spAutoFit/>
+          </a:bodyPr>
+          <a:lstStyle/>
+          <a:p>
+            <a:pPr algn="l">
+              <a:lnSpc>
+                <a:spcPct val="100000"/>
+              </a:lnSpc>
+            </a:pPr>
+            <a:r>
+              <a:rPr sz="1600" b="1">
+                <a:solidFill>
+                  <a:srgbClr val="3ECF8E"/>
+                </a:solidFill>
+                <a:latin typeface="Consolas"/>
+              </a:rPr>
+              <a:t>18.9%</a:t>
+            </a:r>
+          </a:p>
+        </p:txBody>
+      </p:sp>
+      <p:sp>
+        <p:nvSpPr>
+          <p:cNvPr id="13" name="TextBox 12"/>
+          <p:cNvSpPr txBox="1"/>
+          <p:nvPr/>
+        </p:nvSpPr>
+        <p:spPr>
+          <a:xfrm>
+            <a:off x="7562088" y="4709160"/>
+            <a:ext cx="1371600" cy="274320"/>
+          </a:xfrm>
+          <a:prstGeom prst="rect">
+            <a:avLst/>
+          </a:prstGeom>
+          <a:noFill/>
+        </p:spPr>
+        <p:txBody>
+          <a:bodyPr wrap="square" anchor="t" lIns="0" rIns="0" tIns="0" bIns="0">
+            <a:spAutoFit/>
+          </a:bodyPr>
+          <a:lstStyle/>
+          <a:p>
+            <a:pPr algn="l">
+              <a:lnSpc>
+                <a:spcPct val="100000"/>
+              </a:lnSpc>
+            </a:pPr>
+            <a:r>
+              <a:rPr sz="1100" b="0">
+                <a:solidFill>
+                  <a:srgbClr val="75828F"/>
+                </a:solidFill>
+                <a:latin typeface="Consolas"/>
+              </a:rPr>
+              <a:t>ratio</a:t>
+            </a:r>
+          </a:p>
+        </p:txBody>
+      </p:sp>
+      <p:sp>
+        <p:nvSpPr>
+          <p:cNvPr id="14" name="TextBox 13"/>
+          <p:cNvSpPr txBox="1"/>
+          <p:nvPr/>
+        </p:nvSpPr>
+        <p:spPr>
+          <a:xfrm>
+            <a:off x="8549640" y="4526280"/>
+            <a:ext cx="2286000" cy="548640"/>
+          </a:xfrm>
+          <a:prstGeom prst="rect">
+            <a:avLst/>
+          </a:prstGeom>
+          <a:noFill/>
+        </p:spPr>
+        <p:txBody>
+          <a:bodyPr wrap="square" anchor="t" lIns="0" rIns="0" tIns="0" bIns="0">
+            <a:spAutoFit/>
+          </a:bodyPr>
+          <a:lstStyle/>
+          <a:p>
+            <a:pPr algn="l">
+              <a:lnSpc>
+                <a:spcPct val="100000"/>
+              </a:lnSpc>
+            </a:pPr>
+            <a:r>
+              <a:rPr sz="3000" b="1">
+                <a:solidFill>
+                  <a:srgbClr val="4DD4C0"/>
+                </a:solidFill>
+                <a:latin typeface="Consolas"/>
+              </a:rPr>
+              <a:t>1.26</a:t>
+            </a:r>
+          </a:p>
+        </p:txBody>
+      </p:sp>
+      <p:sp>
+        <p:nvSpPr>
+          <p:cNvPr id="15" name="TextBox 14"/>
           <p:cNvSpPr txBox="1"/>
           <p:nvPr/>
         </p:nvSpPr>
@@ -6265,7 +7924,7 @@
       </p:sp>
       <p:sp>
         <p:nvSpPr>
-          <p:cNvPr id="10" name="TextBox 9"/>
+          <p:cNvPr id="16" name="TextBox 15"/>
           <p:cNvSpPr txBox="1"/>
           <p:nvPr/>
         </p:nvSpPr>
@@ -6304,7 +7963,7 @@
       </p:sp>
       <p:sp>
         <p:nvSpPr>
-          <p:cNvPr id="11" name="Rectangle 10"/>
+          <p:cNvPr id="17" name="Rectangle 16"/>
           <p:cNvSpPr/>
           <p:nvPr/>
         </p:nvSpPr>
@@ -6443,7 +8102,7 @@
                 </a:solidFill>
                 <a:latin typeface="Segoe UI"/>
               </a:rPr>
-              <a:t>One model. Two volatilities.</a:t>
+              <a:t>One model. Two volatility inputs.</a:t>
             </a:r>
           </a:p>
         </p:txBody>
@@ -6456,36 +8115,42 @@
         </p:nvSpPr>
         <p:spPr>
           <a:xfrm>
-            <a:off x="777240" y="2286000"/>
-            <a:ext cx="10058400" cy="3108960"/>
-          </a:xfrm>
-          <a:prstGeom prst="rect">
-            <a:avLst/>
-          </a:prstGeom>
-          <a:noFill/>
-        </p:spPr>
-        <p:txBody>
-          <a:bodyPr wrap="square" lIns="0" rIns="0" tIns="0" bIns="0">
-            <a:spAutoFit/>
-          </a:bodyPr>
-          <a:lstStyle/>
-          <a:p>
-            <a:pPr>
-              <a:lnSpc>
-                <a:spcPct val="135000"/>
-              </a:lnSpc>
-              <a:spcAft>
-                <a:spcPts val="1100"/>
-              </a:spcAft>
-            </a:pPr>
-            <a:r>
-              <a:rPr sz="1700" b="0">
+            <a:off x="777240" y="2194560"/>
+            <a:ext cx="10424160" cy="365760"/>
+          </a:xfrm>
+          <a:prstGeom prst="rect">
+            <a:avLst/>
+          </a:prstGeom>
+          <a:noFill/>
+        </p:spPr>
+        <p:txBody>
+          <a:bodyPr wrap="square" anchor="t" lIns="0" rIns="0" tIns="0" bIns="0">
+            <a:spAutoFit/>
+          </a:bodyPr>
+          <a:lstStyle/>
+          <a:p>
+            <a:pPr algn="l">
+              <a:lnSpc>
+                <a:spcPct val="100000"/>
+              </a:lnSpc>
+            </a:pPr>
+            <a:r>
+              <a:rPr sz="1500" b="0">
                 <a:solidFill>
                   <a:srgbClr val="A9B6C3"/>
                 </a:solidFill>
                 <a:latin typeface="Segoe UI"/>
               </a:rPr>
-              <a:t>Price the same spread twice through the same lognormal. Change only the volatility fed into it. The difference is the premium — not an artefact of comparing two different formulas.</a:t>
+              <a:t>Same spread, same payoff, same probability model. </a:t>
+            </a:r>
+            <a:r>
+              <a:rPr sz="1500" b="1">
+                <a:solidFill>
+                  <a:srgbClr val="E6EDF3"/>
+                </a:solidFill>
+                <a:latin typeface="Segoe UI"/>
+              </a:rPr>
+              <a:t>Only the volatility changes.</a:t>
             </a:r>
           </a:p>
         </p:txBody>
@@ -6498,8 +8163,8 @@
         </p:nvSpPr>
         <p:spPr>
           <a:xfrm>
-            <a:off x="777240" y="3200400"/>
-            <a:ext cx="10637215" cy="1600200"/>
+            <a:off x="777240" y="2743200"/>
+            <a:ext cx="5029200" cy="1371600"/>
           </a:xfrm>
           <a:prstGeom prst="roundRect">
             <a:avLst>
@@ -6544,162 +8209,471 @@
         </p:nvSpPr>
         <p:spPr>
           <a:xfrm>
-            <a:off x="1143000" y="3429000"/>
-            <a:ext cx="10515600" cy="1188720"/>
-          </a:xfrm>
-          <a:prstGeom prst="rect">
-            <a:avLst/>
-          </a:prstGeom>
-          <a:noFill/>
-        </p:spPr>
-        <p:txBody>
-          <a:bodyPr wrap="square" anchor="t" lIns="0" rIns="0" tIns="0" bIns="0">
-            <a:spAutoFit/>
-          </a:bodyPr>
-          <a:lstStyle/>
-          <a:p>
-            <a:pPr algn="l">
-              <a:lnSpc>
-                <a:spcPct val="145000"/>
-              </a:lnSpc>
-            </a:pPr>
-            <a:r>
-              <a:rPr sz="1500" b="1">
+            <a:off x="996696" y="2962656"/>
+            <a:ext cx="4590288" cy="219456"/>
+          </a:xfrm>
+          <a:prstGeom prst="rect">
+            <a:avLst/>
+          </a:prstGeom>
+          <a:noFill/>
+        </p:spPr>
+        <p:txBody>
+          <a:bodyPr wrap="square" anchor="t" lIns="0" rIns="0" tIns="0" bIns="0">
+            <a:spAutoFit/>
+          </a:bodyPr>
+          <a:lstStyle/>
+          <a:p>
+            <a:pPr algn="l">
+              <a:lnSpc>
+                <a:spcPct val="100000"/>
+              </a:lnSpc>
+            </a:pPr>
+            <a:r>
+              <a:rPr sz="1050" b="1" spc="140">
+                <a:solidFill>
+                  <a:srgbClr val="75828F"/>
+                </a:solidFill>
+                <a:latin typeface="Consolas"/>
+              </a:rPr>
+              <a:t>PRICED AT REALISED VOL</a:t>
+            </a:r>
+          </a:p>
+        </p:txBody>
+      </p:sp>
+      <p:sp>
+        <p:nvSpPr>
+          <p:cNvPr id="7" name="TextBox 6"/>
+          <p:cNvSpPr txBox="1"/>
+          <p:nvPr/>
+        </p:nvSpPr>
+        <p:spPr>
+          <a:xfrm>
+            <a:off x="996696" y="3236976"/>
+            <a:ext cx="4590288" cy="502920"/>
+          </a:xfrm>
+          <a:prstGeom prst="rect">
+            <a:avLst/>
+          </a:prstGeom>
+          <a:noFill/>
+        </p:spPr>
+        <p:txBody>
+          <a:bodyPr wrap="square" anchor="t" lIns="0" rIns="0" tIns="0" bIns="0">
+            <a:spAutoFit/>
+          </a:bodyPr>
+          <a:lstStyle/>
+          <a:p>
+            <a:pPr algn="l">
+              <a:lnSpc>
+                <a:spcPct val="100000"/>
+              </a:lnSpc>
+            </a:pPr>
+            <a:r>
+              <a:rPr sz="2600" b="1">
+                <a:solidFill>
+                  <a:srgbClr val="3ECF8E"/>
+                </a:solidFill>
+                <a:latin typeface="Consolas"/>
+              </a:rPr>
+              <a:t>+$28.59</a:t>
+            </a:r>
+          </a:p>
+        </p:txBody>
+      </p:sp>
+      <p:sp>
+        <p:nvSpPr>
+          <p:cNvPr id="8" name="TextBox 7"/>
+          <p:cNvSpPr txBox="1"/>
+          <p:nvPr/>
+        </p:nvSpPr>
+        <p:spPr>
+          <a:xfrm>
+            <a:off x="996696" y="3419856"/>
+            <a:ext cx="4590288" cy="457200"/>
+          </a:xfrm>
+          <a:prstGeom prst="rect">
+            <a:avLst/>
+          </a:prstGeom>
+          <a:noFill/>
+        </p:spPr>
+        <p:txBody>
+          <a:bodyPr wrap="square" anchor="t" lIns="0" rIns="0" tIns="0" bIns="0">
+            <a:spAutoFit/>
+          </a:bodyPr>
+          <a:lstStyle/>
+          <a:p>
+            <a:pPr algn="l">
+              <a:lnSpc>
+                <a:spcPct val="120000"/>
+              </a:lnSpc>
+            </a:pPr>
+            <a:r>
+              <a:rPr sz="1150" b="0">
+                <a:solidFill>
+                  <a:srgbClr val="75828F"/>
+                </a:solidFill>
+                <a:latin typeface="Segoe UI"/>
+              </a:rPr>
+              <a:t>what it is worth if volatility keeps behaving like it has</a:t>
+            </a:r>
+          </a:p>
+        </p:txBody>
+      </p:sp>
+      <p:sp>
+        <p:nvSpPr>
+          <p:cNvPr id="9" name="Rounded Rectangle 8"/>
+          <p:cNvSpPr/>
+          <p:nvPr/>
+        </p:nvSpPr>
+        <p:spPr>
+          <a:xfrm>
+            <a:off x="6172200" y="2743200"/>
+            <a:ext cx="5029200" cy="1371600"/>
+          </a:xfrm>
+          <a:prstGeom prst="roundRect">
+            <a:avLst>
+              <a:gd name="adj" fmla="val 6000"/>
+            </a:avLst>
+          </a:prstGeom>
+          <a:solidFill>
+            <a:srgbClr val="10161E"/>
+          </a:solidFill>
+          <a:ln w="12700">
+            <a:solidFill>
+              <a:srgbClr val="212C38"/>
+            </a:solidFill>
+          </a:ln>
+          <a:effectLst/>
+        </p:spPr>
+        <p:style>
+          <a:lnRef idx="1">
+            <a:schemeClr val="accent1"/>
+          </a:lnRef>
+          <a:fillRef idx="3">
+            <a:schemeClr val="accent1"/>
+          </a:fillRef>
+          <a:effectRef idx="2">
+            <a:schemeClr val="accent1"/>
+          </a:effectRef>
+          <a:fontRef idx="minor">
+            <a:schemeClr val="lt1"/>
+          </a:fontRef>
+        </p:style>
+        <p:txBody>
+          <a:bodyPr rtlCol="0" anchor="ctr"/>
+          <a:lstStyle/>
+          <a:p/>
+        </p:txBody>
+      </p:sp>
+      <p:sp>
+        <p:nvSpPr>
+          <p:cNvPr id="10" name="TextBox 9"/>
+          <p:cNvSpPr txBox="1"/>
+          <p:nvPr/>
+        </p:nvSpPr>
+        <p:spPr>
+          <a:xfrm>
+            <a:off x="6391656" y="2962656"/>
+            <a:ext cx="4590288" cy="219456"/>
+          </a:xfrm>
+          <a:prstGeom prst="rect">
+            <a:avLst/>
+          </a:prstGeom>
+          <a:noFill/>
+        </p:spPr>
+        <p:txBody>
+          <a:bodyPr wrap="square" anchor="t" lIns="0" rIns="0" tIns="0" bIns="0">
+            <a:spAutoFit/>
+          </a:bodyPr>
+          <a:lstStyle/>
+          <a:p>
+            <a:pPr algn="l">
+              <a:lnSpc>
+                <a:spcPct val="100000"/>
+              </a:lnSpc>
+            </a:pPr>
+            <a:r>
+              <a:rPr sz="1050" b="1" spc="140">
+                <a:solidFill>
+                  <a:srgbClr val="75828F"/>
+                </a:solidFill>
+                <a:latin typeface="Consolas"/>
+              </a:rPr>
+              <a:t>PRICED AT IMPLIED VOL</a:t>
+            </a:r>
+          </a:p>
+        </p:txBody>
+      </p:sp>
+      <p:sp>
+        <p:nvSpPr>
+          <p:cNvPr id="11" name="TextBox 10"/>
+          <p:cNvSpPr txBox="1"/>
+          <p:nvPr/>
+        </p:nvSpPr>
+        <p:spPr>
+          <a:xfrm>
+            <a:off x="6391656" y="3236976"/>
+            <a:ext cx="4590288" cy="502920"/>
+          </a:xfrm>
+          <a:prstGeom prst="rect">
+            <a:avLst/>
+          </a:prstGeom>
+          <a:noFill/>
+        </p:spPr>
+        <p:txBody>
+          <a:bodyPr wrap="square" anchor="t" lIns="0" rIns="0" tIns="0" bIns="0">
+            <a:spAutoFit/>
+          </a:bodyPr>
+          <a:lstStyle/>
+          <a:p>
+            <a:pPr algn="l">
+              <a:lnSpc>
+                <a:spcPct val="100000"/>
+              </a:lnSpc>
+            </a:pPr>
+            <a:r>
+              <a:rPr sz="2600" b="1">
+                <a:solidFill>
+                  <a:srgbClr val="F2685C"/>
+                </a:solidFill>
+                <a:latin typeface="Consolas"/>
+              </a:rPr>
+              <a:t>−$13.85</a:t>
+            </a:r>
+          </a:p>
+        </p:txBody>
+      </p:sp>
+      <p:sp>
+        <p:nvSpPr>
+          <p:cNvPr id="12" name="TextBox 11"/>
+          <p:cNvSpPr txBox="1"/>
+          <p:nvPr/>
+        </p:nvSpPr>
+        <p:spPr>
+          <a:xfrm>
+            <a:off x="6391656" y="3419856"/>
+            <a:ext cx="4590288" cy="457200"/>
+          </a:xfrm>
+          <a:prstGeom prst="rect">
+            <a:avLst/>
+          </a:prstGeom>
+          <a:noFill/>
+        </p:spPr>
+        <p:txBody>
+          <a:bodyPr wrap="square" anchor="t" lIns="0" rIns="0" tIns="0" bIns="0">
+            <a:spAutoFit/>
+          </a:bodyPr>
+          <a:lstStyle/>
+          <a:p>
+            <a:pPr algn="l">
+              <a:lnSpc>
+                <a:spcPct val="120000"/>
+              </a:lnSpc>
+            </a:pPr>
+            <a:r>
+              <a:rPr sz="1150" b="0">
+                <a:solidFill>
+                  <a:srgbClr val="75828F"/>
+                </a:solidFill>
+                <a:latin typeface="Segoe UI"/>
+              </a:rPr>
+              <a:t>roughly what the market is charging for it today</a:t>
+            </a:r>
+          </a:p>
+        </p:txBody>
+      </p:sp>
+      <p:sp>
+        <p:nvSpPr>
+          <p:cNvPr id="13" name="Rounded Rectangle 12"/>
+          <p:cNvSpPr/>
+          <p:nvPr/>
+        </p:nvSpPr>
+        <p:spPr>
+          <a:xfrm>
+            <a:off x="777240" y="4315968"/>
+            <a:ext cx="10424160" cy="1051560"/>
+          </a:xfrm>
+          <a:prstGeom prst="roundRect">
+            <a:avLst>
+              <a:gd name="adj" fmla="val 6000"/>
+            </a:avLst>
+          </a:prstGeom>
+          <a:solidFill>
+            <a:srgbClr val="123832"/>
+          </a:solidFill>
+          <a:ln w="12700">
+            <a:solidFill>
+              <a:srgbClr val="4DD4C0"/>
+            </a:solidFill>
+          </a:ln>
+          <a:effectLst/>
+        </p:spPr>
+        <p:style>
+          <a:lnRef idx="1">
+            <a:schemeClr val="accent1"/>
+          </a:lnRef>
+          <a:fillRef idx="3">
+            <a:schemeClr val="accent1"/>
+          </a:fillRef>
+          <a:effectRef idx="2">
+            <a:schemeClr val="accent1"/>
+          </a:effectRef>
+          <a:fontRef idx="minor">
+            <a:schemeClr val="lt1"/>
+          </a:fontRef>
+        </p:style>
+        <p:txBody>
+          <a:bodyPr rtlCol="0" anchor="ctr"/>
+          <a:lstStyle/>
+          <a:p/>
+        </p:txBody>
+      </p:sp>
+      <p:sp>
+        <p:nvSpPr>
+          <p:cNvPr id="14" name="TextBox 13"/>
+          <p:cNvSpPr txBox="1"/>
+          <p:nvPr/>
+        </p:nvSpPr>
+        <p:spPr>
+          <a:xfrm>
+            <a:off x="1051560" y="4480560"/>
+            <a:ext cx="8229600" cy="274320"/>
+          </a:xfrm>
+          <a:prstGeom prst="rect">
+            <a:avLst/>
+          </a:prstGeom>
+          <a:noFill/>
+        </p:spPr>
+        <p:txBody>
+          <a:bodyPr wrap="square" anchor="t" lIns="0" rIns="0" tIns="0" bIns="0">
+            <a:spAutoFit/>
+          </a:bodyPr>
+          <a:lstStyle/>
+          <a:p>
+            <a:pPr algn="l">
+              <a:lnSpc>
+                <a:spcPct val="100000"/>
+              </a:lnSpc>
+            </a:pPr>
+            <a:r>
+              <a:rPr sz="1050" b="1" spc="130">
                 <a:solidFill>
                   <a:srgbClr val="4DD4C0"/>
                 </a:solidFill>
                 <a:latin typeface="Consolas"/>
               </a:rPr>
-              <a:t>ev_rw</a:t>
-            </a:r>
-            <a:r>
-              <a:rPr sz="1500" b="0">
+              <a:t>VETOED'S MODEL-DERIVED EDGE — THE DIFFERENCE</a:t>
+            </a:r>
+          </a:p>
+        </p:txBody>
+      </p:sp>
+      <p:sp>
+        <p:nvSpPr>
+          <p:cNvPr id="15" name="TextBox 14"/>
+          <p:cNvSpPr txBox="1"/>
+          <p:nvPr/>
+        </p:nvSpPr>
+        <p:spPr>
+          <a:xfrm>
+            <a:off x="1051560" y="4773168"/>
+            <a:ext cx="5486400" cy="457200"/>
+          </a:xfrm>
+          <a:prstGeom prst="rect">
+            <a:avLst/>
+          </a:prstGeom>
+          <a:noFill/>
+        </p:spPr>
+        <p:txBody>
+          <a:bodyPr wrap="square" anchor="t" lIns="0" rIns="0" tIns="0" bIns="0">
+            <a:spAutoFit/>
+          </a:bodyPr>
+          <a:lstStyle/>
+          <a:p>
+            <a:pPr algn="l">
+              <a:lnSpc>
+                <a:spcPct val="100000"/>
+              </a:lnSpc>
+            </a:pPr>
+            <a:r>
+              <a:rPr sz="2600" b="1">
+                <a:solidFill>
+                  <a:srgbClr val="4DD4C0"/>
+                </a:solidFill>
+                <a:latin typeface="Consolas"/>
+              </a:rPr>
+              <a:t>+$42.45</a:t>
+            </a:r>
+            <a:r>
+              <a:rPr sz="1300" b="0">
                 <a:solidFill>
                   <a:srgbClr val="A9B6C3"/>
                 </a:solidFill>
-                <a:latin typeface="Consolas"/>
-              </a:rPr>
-              <a:t>     = spread priced at 20-day REALISED volatility
-</a:t>
-            </a:r>
-            <a:r>
-              <a:rPr sz="1500" b="1">
-                <a:solidFill>
-                  <a:srgbClr val="4DD4C0"/>
-                </a:solidFill>
-                <a:latin typeface="Consolas"/>
-              </a:rPr>
-              <a:t>ev_rn</a:t>
-            </a:r>
-            <a:r>
-              <a:rPr sz="1500" b="0">
-                <a:solidFill>
-                  <a:srgbClr val="A9B6C3"/>
-                </a:solidFill>
-                <a:latin typeface="Consolas"/>
-              </a:rPr>
-              <a:t>     = spread priced at the market's IMPLIED volatility
-</a:t>
-            </a:r>
-            <a:r>
-              <a:rPr sz="1500" b="1">
+                <a:latin typeface="Segoe UI"/>
+              </a:rPr>
+              <a:t>   per spread</a:t>
+            </a:r>
+          </a:p>
+        </p:txBody>
+      </p:sp>
+      <p:sp>
+        <p:nvSpPr>
+          <p:cNvPr id="16" name="TextBox 15"/>
+          <p:cNvSpPr txBox="1"/>
+          <p:nvPr/>
+        </p:nvSpPr>
+        <p:spPr>
+          <a:xfrm>
+            <a:off x="777240" y="5532120"/>
+            <a:ext cx="10424160" cy="640080"/>
+          </a:xfrm>
+          <a:prstGeom prst="rect">
+            <a:avLst/>
+          </a:prstGeom>
+          <a:noFill/>
+        </p:spPr>
+        <p:txBody>
+          <a:bodyPr wrap="square" anchor="t" lIns="0" rIns="0" tIns="0" bIns="0">
+            <a:spAutoFit/>
+          </a:bodyPr>
+          <a:lstStyle/>
+          <a:p>
+            <a:pPr algn="l">
+              <a:lnSpc>
+                <a:spcPct val="135000"/>
+              </a:lnSpc>
+            </a:pPr>
+            <a:r>
+              <a:rPr sz="1150" b="0">
+                <a:solidFill>
+                  <a:srgbClr val="75828F"/>
+                </a:solidFill>
+                <a:latin typeface="Segoe UI"/>
+              </a:rPr>
+              <a:t>This is </a:t>
+            </a:r>
+            <a:r>
+              <a:rPr sz="1150" b="1">
                 <a:solidFill>
                   <a:srgbClr val="E6EDF3"/>
                 </a:solidFill>
-                <a:latin typeface="Consolas"/>
-              </a:rPr>
-              <a:t>vrp_edge = ev_rw − ev_rn</a:t>
-            </a:r>
-            <a:r>
-              <a:rPr sz="1500" b="0">
+                <a:latin typeface="Segoe UI"/>
+              </a:rPr>
+              <a:t>our own operational signal</a:t>
+            </a:r>
+            <a:r>
+              <a:rPr sz="1150" b="0">
                 <a:solidFill>
                   <a:srgbClr val="75828F"/>
                 </a:solidFill>
-                <a:latin typeface="Consolas"/>
-              </a:rPr>
-              <a:t>     ← the premium, in dollars</a:t>
-            </a:r>
-          </a:p>
-        </p:txBody>
-      </p:sp>
-      <p:sp>
-        <p:nvSpPr>
-          <p:cNvPr id="7" name="TextBox 6"/>
-          <p:cNvSpPr txBox="1"/>
-          <p:nvPr/>
-        </p:nvSpPr>
-        <p:spPr>
-          <a:xfrm>
-            <a:off x="777240" y="5074920"/>
-            <a:ext cx="10515600" cy="822960"/>
-          </a:xfrm>
-          <a:prstGeom prst="rect">
-            <a:avLst/>
-          </a:prstGeom>
-          <a:noFill/>
-        </p:spPr>
-        <p:txBody>
-          <a:bodyPr wrap="square" anchor="t" lIns="0" rIns="0" tIns="0" bIns="0">
-            <a:spAutoFit/>
-          </a:bodyPr>
-          <a:lstStyle/>
-          <a:p>
-            <a:pPr algn="l">
-              <a:lnSpc>
-                <a:spcPct val="135000"/>
-              </a:lnSpc>
-            </a:pPr>
-            <a:r>
-              <a:rPr sz="1500" b="0">
-                <a:solidFill>
-                  <a:srgbClr val="A9B6C3"/>
-                </a:solidFill>
                 <a:latin typeface="Segoe UI"/>
               </a:rPr>
-              <a:t>It must clear </a:t>
-            </a:r>
-            <a:r>
-              <a:rPr sz="1500" b="1">
-                <a:solidFill>
-                  <a:srgbClr val="E6EDF3"/>
-                </a:solidFill>
-                <a:latin typeface="Segoe UI"/>
-              </a:rPr>
-              <a:t>$2.00</a:t>
-            </a:r>
-            <a:r>
-              <a:rPr sz="1500" b="0">
-                <a:solidFill>
-                  <a:srgbClr val="A9B6C3"/>
-                </a:solidFill>
-                <a:latin typeface="Segoe UI"/>
-              </a:rPr>
-              <a:t> or the spread is discarded, and the shortlist ranks on </a:t>
-            </a:r>
-            <a:r>
-              <a:rPr sz="1500" b="0">
-                <a:solidFill>
-                  <a:srgbClr val="4DD4C0"/>
-                </a:solidFill>
-                <a:latin typeface="Consolas"/>
-              </a:rPr>
-              <a:t>vrp_edge / max_loss</a:t>
-            </a:r>
-            <a:r>
-              <a:rPr sz="1500" b="0">
-                <a:solidFill>
-                  <a:srgbClr val="A9B6C3"/>
-                </a:solidFill>
-                <a:latin typeface="Segoe UI"/>
-              </a:rPr>
-              <a:t> — premium per dollar actually at risk.</a:t>
-            </a:r>
-          </a:p>
-        </p:txBody>
-      </p:sp>
-      <p:sp>
-        <p:nvSpPr>
-          <p:cNvPr id="8" name="TextBox 7"/>
+              <a:t>, motivated by volatility-risk-premium research — not the canonical academic VRP, which is defined on variance swap rates over a matched horizon.</a:t>
+            </a:r>
+          </a:p>
+        </p:txBody>
+      </p:sp>
+      <p:sp>
+        <p:nvSpPr>
+          <p:cNvPr id="17" name="TextBox 16"/>
           <p:cNvSpPr txBox="1"/>
           <p:nvPr/>
         </p:nvSpPr>
@@ -6738,7 +8712,7 @@
       </p:sp>
       <p:sp>
         <p:nvSpPr>
-          <p:cNvPr id="9" name="TextBox 8"/>
+          <p:cNvPr id="18" name="TextBox 17"/>
           <p:cNvSpPr txBox="1"/>
           <p:nvPr/>
         </p:nvSpPr>
@@ -6777,7 +8751,7 @@
       </p:sp>
       <p:sp>
         <p:nvSpPr>
-          <p:cNvPr id="10" name="Rectangle 9"/>
+          <p:cNvPr id="19" name="Rectangle 18"/>
           <p:cNvSpPr/>
           <p:nvPr/>
         </p:nvSpPr>
@@ -6929,8 +8903,8 @@
         </p:nvSpPr>
         <p:spPr>
           <a:xfrm>
-            <a:off x="777240" y="2304288"/>
-            <a:ext cx="5943600" cy="3108960"/>
+            <a:off x="777240" y="2514600"/>
+            <a:ext cx="5852160" cy="3108960"/>
           </a:xfrm>
           <a:prstGeom prst="rect">
             <a:avLst/>
@@ -6952,40 +8926,31 @@
               </a:spcAft>
             </a:pPr>
             <a:r>
-              <a:rPr sz="1350" b="1">
-                <a:solidFill>
-                  <a:srgbClr val="F0A93B"/>
+              <a:rPr sz="1400" b="0">
+                <a:solidFill>
+                  <a:srgbClr val="A9B6C3"/>
                 </a:solidFill>
                 <a:latin typeface="Segoe UI"/>
               </a:rPr>
-              <a:t>One. </a:t>
-            </a:r>
-            <a:r>
-              <a:rPr sz="1350" b="0">
+              <a:t>An IWM trade where implied and realised volatility were </a:t>
+            </a:r>
+            <a:r>
+              <a:rPr sz="1400" b="1">
+                <a:solidFill>
+                  <a:srgbClr val="E6EDF3"/>
+                </a:solidFill>
+                <a:latin typeface="Segoe UI"/>
+              </a:rPr>
+              <a:t>almost identical</a:t>
+            </a:r>
+            <a:r>
+              <a:rPr sz="1400" b="0">
                 <a:solidFill>
                   <a:srgbClr val="A9B6C3"/>
                 </a:solidFill>
                 <a:latin typeface="Segoe UI"/>
               </a:rPr>
-              <a:t>The first build priced one side off </a:t>
-            </a:r>
-            <a:r>
-              <a:rPr sz="1350" b="1">
-                <a:solidFill>
-                  <a:srgbClr val="E6EDF3"/>
-                </a:solidFill>
-                <a:latin typeface="Segoe UI"/>
-              </a:rPr>
-              <a:t>delta</a:t>
-            </a:r>
-            <a:r>
-              <a:rPr sz="1350" b="0">
-                <a:solidFill>
-                  <a:srgbClr val="A9B6C3"/>
-                </a:solidFill>
-                <a:latin typeface="Segoe UI"/>
-              </a:rPr>
-              <a:t> and the other off a lognormal. IWM at implied 14.84% against realised 14.58% — no gap existed — and it reported $2.75 anyway.</a:t>
+              <a:t> — so there was no gap to collect.</a:t>
             </a:r>
           </a:p>
           <a:p>
@@ -6998,40 +8963,49 @@
               </a:spcAft>
             </a:pPr>
             <a:r>
-              <a:rPr sz="1350" b="1">
-                <a:solidFill>
-                  <a:srgbClr val="F0A93B"/>
+              <a:rPr sz="1400" b="0">
+                <a:solidFill>
+                  <a:srgbClr val="A9B6C3"/>
                 </a:solidFill>
                 <a:latin typeface="Segoe UI"/>
               </a:rPr>
-              <a:t>Two. </a:t>
-            </a:r>
-            <a:r>
-              <a:rPr sz="1350" b="0">
+              <a:t>It reported a healthy edge anyway. Two defects: one side used </a:t>
+            </a:r>
+            <a:r>
+              <a:rPr sz="1400" b="1">
+                <a:solidFill>
+                  <a:srgbClr val="E6EDF3"/>
+                </a:solidFill>
+                <a:latin typeface="Segoe UI"/>
+              </a:rPr>
+              <a:t>delta as a probability</a:t>
+            </a:r>
+            <a:r>
+              <a:rPr sz="1400" b="0">
                 <a:solidFill>
                   <a:srgbClr val="A9B6C3"/>
                 </a:solidFill>
                 <a:latin typeface="Segoe UI"/>
               </a:rPr>
-              <a:t>The payoff between the strikes was valued at its midpoint. Under a lognormal that is wrong by up to </a:t>
-            </a:r>
-            <a:r>
-              <a:rPr sz="1350" b="1">
+              <a:t>, and the payoff between the strikes was </a:t>
+            </a:r>
+            <a:r>
+              <a:rPr sz="1400" b="1">
                 <a:solidFill>
                   <a:srgbClr val="E6EDF3"/>
                 </a:solidFill>
                 <a:latin typeface="Segoe UI"/>
               </a:rPr>
-              <a:t>$37</a:t>
-            </a:r>
-            <a:r>
-              <a:rPr sz="1350" b="0">
+              <a:t>approximated at its midpoint</a:t>
+            </a:r>
+            <a:r>
+              <a:rPr sz="1400" b="0">
                 <a:solidFill>
                   <a:srgbClr val="A9B6C3"/>
                 </a:solidFill>
                 <a:latin typeface="Segoe UI"/>
               </a:rPr>
-              <a:t>, and it exceeded the $2.00 gate in 17% of cases — enough to flip a trade decision, not just a displayed number.</a:t>
+              <a:t>.</a:t>
             </a:r>
           </a:p>
           <a:p>
@@ -7044,22 +9018,22 @@
               </a:spcAft>
             </a:pPr>
             <a:r>
-              <a:rPr sz="1350" b="1">
+              <a:rPr sz="1400" b="1">
                 <a:solidFill>
                   <a:srgbClr val="E6EDF3"/>
                 </a:solidFill>
                 <a:latin typeface="Segoe UI"/>
               </a:rPr>
-              <a:t>Both fixed, both pinned by tests.</a:t>
-            </a:r>
-            <a:r>
-              <a:rPr sz="1350" b="0">
+              <a:t>Both changed real trade decisions</a:t>
+            </a:r>
+            <a:r>
+              <a:rPr sz="1400" b="0">
                 <a:solidFill>
                   <a:srgbClr val="A9B6C3"/>
                 </a:solidFill>
                 <a:latin typeface="Segoe UI"/>
               </a:rPr>
-              <a:t> The expected value is now exact in closed form, checked against a brute-force integral of the payoff.</a:t>
+              <a:t>, not just displayed numbers. Found, fixed, pinned by tests.</a:t>
             </a:r>
           </a:p>
         </p:txBody>
@@ -7072,8 +9046,8 @@
         </p:nvSpPr>
         <p:spPr>
           <a:xfrm>
-            <a:off x="7269480" y="2331720"/>
-            <a:ext cx="4114800" cy="1417320"/>
+            <a:off x="7269480" y="2377440"/>
+            <a:ext cx="4114800" cy="1207008"/>
           </a:xfrm>
           <a:prstGeom prst="roundRect">
             <a:avLst>
@@ -7118,7 +9092,7 @@
         </p:nvSpPr>
         <p:spPr>
           <a:xfrm>
-            <a:off x="7488936" y="2551176"/>
+            <a:off x="7488936" y="2596896"/>
             <a:ext cx="3675888" cy="219456"/>
           </a:xfrm>
           <a:prstGeom prst="rect">
@@ -7144,7 +9118,7 @@
                 </a:solidFill>
                 <a:latin typeface="Consolas"/>
               </a:rPr>
-              <a:t>REPORTED ON A NO-GAP TRADE</a:t>
+              <a:t>BEFORE — TWO MISMATCHED METHODS</a:t>
             </a:r>
           </a:p>
         </p:txBody>
@@ -7157,7 +9131,7 @@
         </p:nvSpPr>
         <p:spPr>
           <a:xfrm>
-            <a:off x="7488936" y="2825496"/>
+            <a:off x="7488936" y="2871216"/>
             <a:ext cx="3675888" cy="502920"/>
           </a:xfrm>
           <a:prstGeom prst="rect">
@@ -7177,7 +9151,7 @@
               </a:lnSpc>
             </a:pPr>
             <a:r>
-              <a:rPr sz="2800" b="1">
+              <a:rPr sz="2400" b="1">
                 <a:solidFill>
                   <a:srgbClr val="F2685C"/>
                 </a:solidFill>
@@ -7196,7 +9170,7 @@
         </p:nvSpPr>
         <p:spPr>
           <a:xfrm>
-            <a:off x="7488936" y="3054096"/>
+            <a:off x="7488936" y="2889504"/>
             <a:ext cx="3675888" cy="457200"/>
           </a:xfrm>
           <a:prstGeom prst="rect">
@@ -7222,7 +9196,7 @@
                 </a:solidFill>
                 <a:latin typeface="Segoe UI"/>
               </a:rPr>
-              <a:t>delta priced one side, a lognormal the other</a:t>
+              <a:t>reported on a trade with no gap on offer</a:t>
             </a:r>
           </a:p>
         </p:txBody>
@@ -7235,8 +9209,8 @@
         </p:nvSpPr>
         <p:spPr>
           <a:xfrm>
-            <a:off x="7269480" y="3913632"/>
-            <a:ext cx="4114800" cy="1600200"/>
+            <a:off x="7269480" y="3712463"/>
+            <a:ext cx="4114800" cy="1207008"/>
           </a:xfrm>
           <a:prstGeom prst="roundRect">
             <a:avLst>
@@ -7281,7 +9255,7 @@
         </p:nvSpPr>
         <p:spPr>
           <a:xfrm>
-            <a:off x="7488936" y="4133088"/>
+            <a:off x="7488936" y="3931919"/>
             <a:ext cx="3675888" cy="219456"/>
           </a:xfrm>
           <a:prstGeom prst="rect">
@@ -7307,7 +9281,7 @@
                 </a:solidFill>
                 <a:latin typeface="Consolas"/>
               </a:rPr>
-              <a:t>SAME TRADE, ONE EXACT MODEL</a:t>
+              <a:t>AFTER — ONE CORRECTED MODEL</a:t>
             </a:r>
           </a:p>
         </p:txBody>
@@ -7320,7 +9294,7 @@
         </p:nvSpPr>
         <p:spPr>
           <a:xfrm>
-            <a:off x="7488936" y="4407408"/>
+            <a:off x="7488936" y="4206239"/>
             <a:ext cx="3675888" cy="502920"/>
           </a:xfrm>
           <a:prstGeom prst="rect">
@@ -7340,7 +9314,7 @@
               </a:lnSpc>
             </a:pPr>
             <a:r>
-              <a:rPr sz="2800" b="1">
+              <a:rPr sz="2400" b="1">
                 <a:solidFill>
                   <a:srgbClr val="3ECF8E"/>
                 </a:solidFill>
@@ -7359,7 +9333,7 @@
         </p:nvSpPr>
         <p:spPr>
           <a:xfrm>
-            <a:off x="7488936" y="4818888"/>
+            <a:off x="7488936" y="4224527"/>
             <a:ext cx="3675888" cy="457200"/>
           </a:xfrm>
           <a:prstGeom prst="rect">
@@ -7385,14 +9359,138 @@
                 </a:solidFill>
                 <a:latin typeface="Segoe UI"/>
               </a:rPr>
-              <a:t>honest, and below the $2.00 gate — so it is not taken</a:t>
-            </a:r>
-          </a:p>
-        </p:txBody>
-      </p:sp>
-      <p:sp>
-        <p:nvSpPr>
-          <p:cNvPr id="13" name="TextBox 12"/>
+              <a:t>below the $2.00 gate — so it is not taken</a:t>
+            </a:r>
+          </a:p>
+        </p:txBody>
+      </p:sp>
+      <p:sp>
+        <p:nvSpPr>
+          <p:cNvPr id="13" name="Rounded Rectangle 12"/>
+          <p:cNvSpPr/>
+          <p:nvPr/>
+        </p:nvSpPr>
+        <p:spPr>
+          <a:xfrm>
+            <a:off x="7269480" y="5047488"/>
+            <a:ext cx="4114800" cy="914400"/>
+          </a:xfrm>
+          <a:prstGeom prst="roundRect">
+            <a:avLst>
+              <a:gd name="adj" fmla="val 6000"/>
+            </a:avLst>
+          </a:prstGeom>
+          <a:solidFill>
+            <a:srgbClr val="10161E"/>
+          </a:solidFill>
+          <a:ln w="12700">
+            <a:solidFill>
+              <a:srgbClr val="212C38"/>
+            </a:solidFill>
+          </a:ln>
+          <a:effectLst/>
+        </p:spPr>
+        <p:style>
+          <a:lnRef idx="1">
+            <a:schemeClr val="accent1"/>
+          </a:lnRef>
+          <a:fillRef idx="3">
+            <a:schemeClr val="accent1"/>
+          </a:fillRef>
+          <a:effectRef idx="2">
+            <a:schemeClr val="accent1"/>
+          </a:effectRef>
+          <a:fontRef idx="minor">
+            <a:schemeClr val="lt1"/>
+          </a:fontRef>
+        </p:style>
+        <p:txBody>
+          <a:bodyPr rtlCol="0" anchor="ctr"/>
+          <a:lstStyle/>
+          <a:p/>
+        </p:txBody>
+      </p:sp>
+      <p:sp>
+        <p:nvSpPr>
+          <p:cNvPr id="14" name="TextBox 13"/>
+          <p:cNvSpPr txBox="1"/>
+          <p:nvPr/>
+        </p:nvSpPr>
+        <p:spPr>
+          <a:xfrm>
+            <a:off x="7488936" y="5266944"/>
+            <a:ext cx="3675888" cy="219456"/>
+          </a:xfrm>
+          <a:prstGeom prst="rect">
+            <a:avLst/>
+          </a:prstGeom>
+          <a:noFill/>
+        </p:spPr>
+        <p:txBody>
+          <a:bodyPr wrap="square" anchor="t" lIns="0" rIns="0" tIns="0" bIns="0">
+            <a:spAutoFit/>
+          </a:bodyPr>
+          <a:lstStyle/>
+          <a:p>
+            <a:pPr algn="l">
+              <a:lnSpc>
+                <a:spcPct val="100000"/>
+              </a:lnSpc>
+            </a:pPr>
+            <a:r>
+              <a:rPr sz="1050" b="1" spc="140">
+                <a:solidFill>
+                  <a:srgbClr val="75828F"/>
+                </a:solidFill>
+                <a:latin typeface="Consolas"/>
+              </a:rPr>
+              <a:t>REGRESSION TESTS</a:t>
+            </a:r>
+          </a:p>
+        </p:txBody>
+      </p:sp>
+      <p:sp>
+        <p:nvSpPr>
+          <p:cNvPr id="15" name="TextBox 14"/>
+          <p:cNvSpPr txBox="1"/>
+          <p:nvPr/>
+        </p:nvSpPr>
+        <p:spPr>
+          <a:xfrm>
+            <a:off x="7488936" y="5541264"/>
+            <a:ext cx="3675888" cy="502920"/>
+          </a:xfrm>
+          <a:prstGeom prst="rect">
+            <a:avLst/>
+          </a:prstGeom>
+          <a:noFill/>
+        </p:spPr>
+        <p:txBody>
+          <a:bodyPr wrap="square" anchor="t" lIns="0" rIns="0" tIns="0" bIns="0">
+            <a:spAutoFit/>
+          </a:bodyPr>
+          <a:lstStyle/>
+          <a:p>
+            <a:pPr algn="l">
+              <a:lnSpc>
+                <a:spcPct val="100000"/>
+              </a:lnSpc>
+            </a:pPr>
+            <a:r>
+              <a:rPr sz="2200" b="1">
+                <a:solidFill>
+                  <a:srgbClr val="4DD4C0"/>
+                </a:solidFill>
+                <a:latin typeface="Consolas"/>
+              </a:rPr>
+              <a:t>77 → 207</a:t>
+            </a:r>
+          </a:p>
+        </p:txBody>
+      </p:sp>
+      <p:sp>
+        <p:nvSpPr>
+          <p:cNvPr id="16" name="TextBox 15"/>
           <p:cNvSpPr txBox="1"/>
           <p:nvPr/>
         </p:nvSpPr>
@@ -7431,7 +9529,7 @@
       </p:sp>
       <p:sp>
         <p:nvSpPr>
-          <p:cNvPr id="14" name="TextBox 13"/>
+          <p:cNvPr id="17" name="TextBox 16"/>
           <p:cNvSpPr txBox="1"/>
           <p:nvPr/>
         </p:nvSpPr>
@@ -7470,7 +9568,7 @@
       </p:sp>
       <p:sp>
         <p:nvSpPr>
-          <p:cNvPr id="15" name="Rectangle 14"/>
+          <p:cNvPr id="18" name="Rectangle 17"/>
           <p:cNvSpPr/>
           <p:nvPr/>
         </p:nvSpPr>
@@ -7609,7 +9707,8 @@
                 </a:solidFill>
                 <a:latin typeface="Segoe UI"/>
               </a:rPr>
-              <a:t>The model proposes. Deterministic code disposes.</a:t>
+              <a:t>The model proposes.
+Deterministic code disposes.</a:t>
             </a:r>
           </a:p>
         </p:txBody>
@@ -7622,8 +9721,8 @@
         </p:nvSpPr>
         <p:spPr>
           <a:xfrm>
-            <a:off x="777240" y="2395728"/>
-            <a:ext cx="3108960" cy="1234440"/>
+            <a:off x="777240" y="2606040"/>
+            <a:ext cx="2395728" cy="1298448"/>
           </a:xfrm>
           <a:prstGeom prst="roundRect">
             <a:avLst>
@@ -7668,8 +9767,8 @@
         </p:nvSpPr>
         <p:spPr>
           <a:xfrm>
-            <a:off x="777240" y="2606040"/>
-            <a:ext cx="3108960" cy="320040"/>
+            <a:off x="777240" y="2788920"/>
+            <a:ext cx="2395728" cy="274320"/>
           </a:xfrm>
           <a:prstGeom prst="rect">
             <a:avLst/>
@@ -7688,13 +9787,13 @@
               </a:lnSpc>
             </a:pPr>
             <a:r>
-              <a:rPr sz="1600" b="1">
+              <a:rPr sz="1400" b="1">
                 <a:solidFill>
                   <a:srgbClr val="E6EDF3"/>
                 </a:solidFill>
                 <a:latin typeface="Consolas"/>
               </a:rPr>
-              <a:t>screener.py</a:t>
+              <a:t>SCREENER</a:t>
             </a:r>
           </a:p>
         </p:txBody>
@@ -7707,8 +9806,8 @@
         </p:nvSpPr>
         <p:spPr>
           <a:xfrm>
-            <a:off x="777240" y="2971800"/>
-            <a:ext cx="3108960" cy="548640"/>
+            <a:off x="914400" y="3127248"/>
+            <a:ext cx="2121408" cy="274320"/>
           </a:xfrm>
           <a:prstGeom prst="rect">
             <a:avLst/>
@@ -7723,54 +9822,92 @@
           <a:p>
             <a:pPr algn="ctr">
               <a:lnSpc>
-                <a:spcPct val="125000"/>
-              </a:lnSpc>
-            </a:pPr>
-            <a:r>
-              <a:rPr sz="1150" b="0">
+                <a:spcPct val="120000"/>
+              </a:lnSpc>
+            </a:pPr>
+            <a:r>
+              <a:rPr sz="1050" b="0">
+                <a:solidFill>
+                  <a:srgbClr val="3ECF8E"/>
+                </a:solidFill>
+                <a:latin typeface="Segoe UI"/>
+              </a:rPr>
+              <a:t>builds valid spreads</a:t>
+            </a:r>
+          </a:p>
+        </p:txBody>
+      </p:sp>
+      <p:sp>
+        <p:nvSpPr>
+          <p:cNvPr id="7" name="TextBox 6"/>
+          <p:cNvSpPr txBox="1"/>
+          <p:nvPr/>
+        </p:nvSpPr>
+        <p:spPr>
+          <a:xfrm>
+            <a:off x="914400" y="3401568"/>
+            <a:ext cx="2121408" cy="274320"/>
+          </a:xfrm>
+          <a:prstGeom prst="rect">
+            <a:avLst/>
+          </a:prstGeom>
+          <a:noFill/>
+        </p:spPr>
+        <p:txBody>
+          <a:bodyPr wrap="square" anchor="t" lIns="0" rIns="0" tIns="0" bIns="0">
+            <a:spAutoFit/>
+          </a:bodyPr>
+          <a:lstStyle/>
+          <a:p>
+            <a:pPr algn="ctr">
+              <a:lnSpc>
+                <a:spcPct val="120000"/>
+              </a:lnSpc>
+            </a:pPr>
+            <a:r>
+              <a:rPr sz="1050" b="0">
+                <a:solidFill>
+                  <a:srgbClr val="F2685C"/>
+                </a:solidFill>
+                <a:latin typeface="Segoe UI"/>
+              </a:rPr>
+              <a:t>no judgement</a:t>
+            </a:r>
+          </a:p>
+        </p:txBody>
+      </p:sp>
+      <p:sp>
+        <p:nvSpPr>
+          <p:cNvPr id="8" name="TextBox 7"/>
+          <p:cNvSpPr txBox="1"/>
+          <p:nvPr/>
+        </p:nvSpPr>
+        <p:spPr>
+          <a:xfrm>
+            <a:off x="3172968" y="3108960"/>
+            <a:ext cx="283464" cy="274320"/>
+          </a:xfrm>
+          <a:prstGeom prst="rect">
+            <a:avLst/>
+          </a:prstGeom>
+          <a:noFill/>
+        </p:spPr>
+        <p:txBody>
+          <a:bodyPr wrap="square" anchor="t" lIns="0" rIns="0" tIns="0" bIns="0">
+            <a:spAutoFit/>
+          </a:bodyPr>
+          <a:lstStyle/>
+          <a:p>
+            <a:pPr algn="ctr">
+              <a:lnSpc>
+                <a:spcPct val="100000"/>
+              </a:lnSpc>
+            </a:pPr>
+            <a:r>
+              <a:rPr sz="1500" b="0">
                 <a:solidFill>
                   <a:srgbClr val="75828F"/>
                 </a:solidFill>
-                <a:latin typeface="Segoe UI"/>
-              </a:rPr>
-              <a:t>what is VALID
-pure arithmetic</a:t>
-            </a:r>
-          </a:p>
-        </p:txBody>
-      </p:sp>
-      <p:sp>
-        <p:nvSpPr>
-          <p:cNvPr id="7" name="TextBox 6"/>
-          <p:cNvSpPr txBox="1"/>
-          <p:nvPr/>
-        </p:nvSpPr>
-        <p:spPr>
-          <a:xfrm>
-            <a:off x="3886200" y="2834640"/>
-            <a:ext cx="685800" cy="365760"/>
-          </a:xfrm>
-          <a:prstGeom prst="rect">
-            <a:avLst/>
-          </a:prstGeom>
-          <a:noFill/>
-        </p:spPr>
-        <p:txBody>
-          <a:bodyPr wrap="square" anchor="t" lIns="0" rIns="0" tIns="0" bIns="0">
-            <a:spAutoFit/>
-          </a:bodyPr>
-          <a:lstStyle/>
-          <a:p>
-            <a:pPr algn="ctr">
-              <a:lnSpc>
-                <a:spcPct val="100000"/>
-              </a:lnSpc>
-            </a:pPr>
-            <a:r>
-              <a:rPr sz="2000" b="0">
-                <a:solidFill>
-                  <a:srgbClr val="75828F"/>
-                </a:solidFill>
                 <a:latin typeface="Consolas"/>
               </a:rPr>
               <a:t>→</a:t>
@@ -7780,14 +9917,14 @@
       </p:sp>
       <p:sp>
         <p:nvSpPr>
-          <p:cNvPr id="8" name="Rounded Rectangle 7"/>
+          <p:cNvPr id="9" name="Rounded Rectangle 8"/>
           <p:cNvSpPr/>
           <p:nvPr/>
         </p:nvSpPr>
         <p:spPr>
           <a:xfrm>
-            <a:off x="4572000" y="2395728"/>
-            <a:ext cx="3108960" cy="1234440"/>
+            <a:off x="3456432" y="2606040"/>
+            <a:ext cx="2395728" cy="1298448"/>
           </a:xfrm>
           <a:prstGeom prst="roundRect">
             <a:avLst>
@@ -7826,14 +9963,14 @@
       </p:sp>
       <p:sp>
         <p:nvSpPr>
-          <p:cNvPr id="9" name="TextBox 8"/>
-          <p:cNvSpPr txBox="1"/>
-          <p:nvPr/>
-        </p:nvSpPr>
-        <p:spPr>
-          <a:xfrm>
-            <a:off x="4572000" y="2606040"/>
-            <a:ext cx="3108960" cy="320040"/>
+          <p:cNvPr id="10" name="TextBox 9"/>
+          <p:cNvSpPr txBox="1"/>
+          <p:nvPr/>
+        </p:nvSpPr>
+        <p:spPr>
+          <a:xfrm>
+            <a:off x="3456432" y="2788920"/>
+            <a:ext cx="2395728" cy="274320"/>
           </a:xfrm>
           <a:prstGeom prst="rect">
             <a:avLst/>
@@ -7852,27 +9989,27 @@
               </a:lnSpc>
             </a:pPr>
             <a:r>
-              <a:rPr sz="1600" b="1">
+              <a:rPr sz="1400" b="1">
                 <a:solidFill>
                   <a:srgbClr val="F0A93B"/>
                 </a:solidFill>
                 <a:latin typeface="Consolas"/>
               </a:rPr>
-              <a:t>brain.py</a:t>
-            </a:r>
-          </a:p>
-        </p:txBody>
-      </p:sp>
-      <p:sp>
-        <p:nvSpPr>
-          <p:cNvPr id="10" name="TextBox 9"/>
-          <p:cNvSpPr txBox="1"/>
-          <p:nvPr/>
-        </p:nvSpPr>
-        <p:spPr>
-          <a:xfrm>
-            <a:off x="4572000" y="2971800"/>
-            <a:ext cx="3108960" cy="548640"/>
+              <a:t>LLM</a:t>
+            </a:r>
+          </a:p>
+        </p:txBody>
+      </p:sp>
+      <p:sp>
+        <p:nvSpPr>
+          <p:cNvPr id="11" name="TextBox 10"/>
+          <p:cNvSpPr txBox="1"/>
+          <p:nvPr/>
+        </p:nvSpPr>
+        <p:spPr>
+          <a:xfrm>
+            <a:off x="3593592" y="3127248"/>
+            <a:ext cx="2121408" cy="274320"/>
           </a:xfrm>
           <a:prstGeom prst="rect">
             <a:avLst/>
@@ -7887,54 +10024,92 @@
           <a:p>
             <a:pPr algn="ctr">
               <a:lnSpc>
-                <a:spcPct val="125000"/>
-              </a:lnSpc>
-            </a:pPr>
-            <a:r>
-              <a:rPr sz="1150" b="0">
+                <a:spcPct val="120000"/>
+              </a:lnSpc>
+            </a:pPr>
+            <a:r>
+              <a:rPr sz="1050" b="0">
+                <a:solidFill>
+                  <a:srgbClr val="3ECF8E"/>
+                </a:solidFill>
+                <a:latin typeface="Segoe UI"/>
+              </a:rPr>
+              <a:t>picks one, or none</a:t>
+            </a:r>
+          </a:p>
+        </p:txBody>
+      </p:sp>
+      <p:sp>
+        <p:nvSpPr>
+          <p:cNvPr id="12" name="TextBox 11"/>
+          <p:cNvSpPr txBox="1"/>
+          <p:nvPr/>
+        </p:nvSpPr>
+        <p:spPr>
+          <a:xfrm>
+            <a:off x="3593592" y="3401568"/>
+            <a:ext cx="2121408" cy="274320"/>
+          </a:xfrm>
+          <a:prstGeom prst="rect">
+            <a:avLst/>
+          </a:prstGeom>
+          <a:noFill/>
+        </p:spPr>
+        <p:txBody>
+          <a:bodyPr wrap="square" anchor="t" lIns="0" rIns="0" tIns="0" bIns="0">
+            <a:spAutoFit/>
+          </a:bodyPr>
+          <a:lstStyle/>
+          <a:p>
+            <a:pPr algn="ctr">
+              <a:lnSpc>
+                <a:spcPct val="120000"/>
+              </a:lnSpc>
+            </a:pPr>
+            <a:r>
+              <a:rPr sz="1050" b="0">
+                <a:solidFill>
+                  <a:srgbClr val="F2685C"/>
+                </a:solidFill>
+                <a:latin typeface="Segoe UI"/>
+              </a:rPr>
+              <a:t>cannot invent or size</a:t>
+            </a:r>
+          </a:p>
+        </p:txBody>
+      </p:sp>
+      <p:sp>
+        <p:nvSpPr>
+          <p:cNvPr id="13" name="TextBox 12"/>
+          <p:cNvSpPr txBox="1"/>
+          <p:nvPr/>
+        </p:nvSpPr>
+        <p:spPr>
+          <a:xfrm>
+            <a:off x="5852160" y="3108960"/>
+            <a:ext cx="283464" cy="274320"/>
+          </a:xfrm>
+          <a:prstGeom prst="rect">
+            <a:avLst/>
+          </a:prstGeom>
+          <a:noFill/>
+        </p:spPr>
+        <p:txBody>
+          <a:bodyPr wrap="square" anchor="t" lIns="0" rIns="0" tIns="0" bIns="0">
+            <a:spAutoFit/>
+          </a:bodyPr>
+          <a:lstStyle/>
+          <a:p>
+            <a:pPr algn="ctr">
+              <a:lnSpc>
+                <a:spcPct val="100000"/>
+              </a:lnSpc>
+            </a:pPr>
+            <a:r>
+              <a:rPr sz="1500" b="0">
                 <a:solidFill>
                   <a:srgbClr val="75828F"/>
                 </a:solidFill>
-                <a:latin typeface="Segoe UI"/>
-              </a:rPr>
-              <a:t>what is GOOD
-Featherless AI</a:t>
-            </a:r>
-          </a:p>
-        </p:txBody>
-      </p:sp>
-      <p:sp>
-        <p:nvSpPr>
-          <p:cNvPr id="11" name="TextBox 10"/>
-          <p:cNvSpPr txBox="1"/>
-          <p:nvPr/>
-        </p:nvSpPr>
-        <p:spPr>
-          <a:xfrm>
-            <a:off x="7680960" y="2834640"/>
-            <a:ext cx="685800" cy="365760"/>
-          </a:xfrm>
-          <a:prstGeom prst="rect">
-            <a:avLst/>
-          </a:prstGeom>
-          <a:noFill/>
-        </p:spPr>
-        <p:txBody>
-          <a:bodyPr wrap="square" anchor="t" lIns="0" rIns="0" tIns="0" bIns="0">
-            <a:spAutoFit/>
-          </a:bodyPr>
-          <a:lstStyle/>
-          <a:p>
-            <a:pPr algn="ctr">
-              <a:lnSpc>
-                <a:spcPct val="100000"/>
-              </a:lnSpc>
-            </a:pPr>
-            <a:r>
-              <a:rPr sz="2000" b="0">
-                <a:solidFill>
-                  <a:srgbClr val="75828F"/>
-                </a:solidFill>
                 <a:latin typeface="Consolas"/>
               </a:rPr>
               <a:t>→</a:t>
@@ -7944,14 +10119,14 @@
       </p:sp>
       <p:sp>
         <p:nvSpPr>
-          <p:cNvPr id="12" name="Rounded Rectangle 11"/>
+          <p:cNvPr id="14" name="Rounded Rectangle 13"/>
           <p:cNvSpPr/>
           <p:nvPr/>
         </p:nvSpPr>
         <p:spPr>
           <a:xfrm>
-            <a:off x="8366760" y="2395728"/>
-            <a:ext cx="3108960" cy="1234440"/>
+            <a:off x="6135624" y="2606040"/>
+            <a:ext cx="2395728" cy="1298448"/>
           </a:xfrm>
           <a:prstGeom prst="roundRect">
             <a:avLst>
@@ -7990,14 +10165,14 @@
       </p:sp>
       <p:sp>
         <p:nvSpPr>
-          <p:cNvPr id="13" name="TextBox 12"/>
-          <p:cNvSpPr txBox="1"/>
-          <p:nvPr/>
-        </p:nvSpPr>
-        <p:spPr>
-          <a:xfrm>
-            <a:off x="8366760" y="2606040"/>
-            <a:ext cx="3108960" cy="320040"/>
+          <p:cNvPr id="15" name="TextBox 14"/>
+          <p:cNvSpPr txBox="1"/>
+          <p:nvPr/>
+        </p:nvSpPr>
+        <p:spPr>
+          <a:xfrm>
+            <a:off x="6135624" y="2788920"/>
+            <a:ext cx="2395728" cy="274320"/>
           </a:xfrm>
           <a:prstGeom prst="rect">
             <a:avLst/>
@@ -8016,27 +10191,27 @@
               </a:lnSpc>
             </a:pPr>
             <a:r>
-              <a:rPr sz="1600" b="1">
+              <a:rPr sz="1400" b="1">
                 <a:solidFill>
                   <a:srgbClr val="E6EDF3"/>
                 </a:solidFill>
                 <a:latin typeface="Consolas"/>
               </a:rPr>
-              <a:t>risk.py</a:t>
-            </a:r>
-          </a:p>
-        </p:txBody>
-      </p:sp>
-      <p:sp>
-        <p:nvSpPr>
-          <p:cNvPr id="14" name="TextBox 13"/>
-          <p:cNvSpPr txBox="1"/>
-          <p:nvPr/>
-        </p:nvSpPr>
-        <p:spPr>
-          <a:xfrm>
-            <a:off x="8366760" y="2971800"/>
-            <a:ext cx="3108960" cy="548640"/>
+              <a:t>RISK</a:t>
+            </a:r>
+          </a:p>
+        </p:txBody>
+      </p:sp>
+      <p:sp>
+        <p:nvSpPr>
+          <p:cNvPr id="16" name="TextBox 15"/>
+          <p:cNvSpPr txBox="1"/>
+          <p:nvPr/>
+        </p:nvSpPr>
+        <p:spPr>
+          <a:xfrm>
+            <a:off x="6272784" y="3127248"/>
+            <a:ext cx="2121408" cy="274320"/>
           </a:xfrm>
           <a:prstGeom prst="rect">
             <a:avLst/>
@@ -8051,32 +10226,272 @@
           <a:p>
             <a:pPr algn="ctr">
               <a:lnSpc>
-                <a:spcPct val="125000"/>
-              </a:lnSpc>
-            </a:pPr>
-            <a:r>
-              <a:rPr sz="1150" b="0">
+                <a:spcPct val="120000"/>
+              </a:lnSpc>
+            </a:pPr>
+            <a:r>
+              <a:rPr sz="1050" b="0">
+                <a:solidFill>
+                  <a:srgbClr val="3ECF8E"/>
+                </a:solidFill>
+                <a:latin typeface="Segoe UI"/>
+              </a:rPr>
+              <a:t>sizes, and can veto</a:t>
+            </a:r>
+          </a:p>
+        </p:txBody>
+      </p:sp>
+      <p:sp>
+        <p:nvSpPr>
+          <p:cNvPr id="17" name="TextBox 16"/>
+          <p:cNvSpPr txBox="1"/>
+          <p:nvPr/>
+        </p:nvSpPr>
+        <p:spPr>
+          <a:xfrm>
+            <a:off x="6272784" y="3401568"/>
+            <a:ext cx="2121408" cy="274320"/>
+          </a:xfrm>
+          <a:prstGeom prst="rect">
+            <a:avLst/>
+          </a:prstGeom>
+          <a:noFill/>
+        </p:spPr>
+        <p:txBody>
+          <a:bodyPr wrap="square" anchor="t" lIns="0" rIns="0" tIns="0" bIns="0">
+            <a:spAutoFit/>
+          </a:bodyPr>
+          <a:lstStyle/>
+          <a:p>
+            <a:pPr algn="ctr">
+              <a:lnSpc>
+                <a:spcPct val="120000"/>
+              </a:lnSpc>
+            </a:pPr>
+            <a:r>
+              <a:rPr sz="1050" b="0">
+                <a:solidFill>
+                  <a:srgbClr val="F2685C"/>
+                </a:solidFill>
+                <a:latin typeface="Segoe UI"/>
+              </a:rPr>
+              <a:t>cannot be overruled</a:t>
+            </a:r>
+          </a:p>
+        </p:txBody>
+      </p:sp>
+      <p:sp>
+        <p:nvSpPr>
+          <p:cNvPr id="18" name="TextBox 17"/>
+          <p:cNvSpPr txBox="1"/>
+          <p:nvPr/>
+        </p:nvSpPr>
+        <p:spPr>
+          <a:xfrm>
+            <a:off x="8531352" y="3108960"/>
+            <a:ext cx="283464" cy="274320"/>
+          </a:xfrm>
+          <a:prstGeom prst="rect">
+            <a:avLst/>
+          </a:prstGeom>
+          <a:noFill/>
+        </p:spPr>
+        <p:txBody>
+          <a:bodyPr wrap="square" anchor="t" lIns="0" rIns="0" tIns="0" bIns="0">
+            <a:spAutoFit/>
+          </a:bodyPr>
+          <a:lstStyle/>
+          <a:p>
+            <a:pPr algn="ctr">
+              <a:lnSpc>
+                <a:spcPct val="100000"/>
+              </a:lnSpc>
+            </a:pPr>
+            <a:r>
+              <a:rPr sz="1500" b="0">
                 <a:solidFill>
                   <a:srgbClr val="75828F"/>
                 </a:solidFill>
+                <a:latin typeface="Consolas"/>
+              </a:rPr>
+              <a:t>→</a:t>
+            </a:r>
+          </a:p>
+        </p:txBody>
+      </p:sp>
+      <p:sp>
+        <p:nvSpPr>
+          <p:cNvPr id="19" name="Rounded Rectangle 18"/>
+          <p:cNvSpPr/>
+          <p:nvPr/>
+        </p:nvSpPr>
+        <p:spPr>
+          <a:xfrm>
+            <a:off x="8814816" y="2606040"/>
+            <a:ext cx="2395728" cy="1298448"/>
+          </a:xfrm>
+          <a:prstGeom prst="roundRect">
+            <a:avLst>
+              <a:gd name="adj" fmla="val 6000"/>
+            </a:avLst>
+          </a:prstGeom>
+          <a:solidFill>
+            <a:srgbClr val="10161E"/>
+          </a:solidFill>
+          <a:ln w="12700">
+            <a:solidFill>
+              <a:srgbClr val="212C38"/>
+            </a:solidFill>
+          </a:ln>
+          <a:effectLst/>
+        </p:spPr>
+        <p:style>
+          <a:lnRef idx="1">
+            <a:schemeClr val="accent1"/>
+          </a:lnRef>
+          <a:fillRef idx="3">
+            <a:schemeClr val="accent1"/>
+          </a:fillRef>
+          <a:effectRef idx="2">
+            <a:schemeClr val="accent1"/>
+          </a:effectRef>
+          <a:fontRef idx="minor">
+            <a:schemeClr val="lt1"/>
+          </a:fontRef>
+        </p:style>
+        <p:txBody>
+          <a:bodyPr rtlCol="0" anchor="ctr"/>
+          <a:lstStyle/>
+          <a:p/>
+        </p:txBody>
+      </p:sp>
+      <p:sp>
+        <p:nvSpPr>
+          <p:cNvPr id="20" name="TextBox 19"/>
+          <p:cNvSpPr txBox="1"/>
+          <p:nvPr/>
+        </p:nvSpPr>
+        <p:spPr>
+          <a:xfrm>
+            <a:off x="8814816" y="2788920"/>
+            <a:ext cx="2395728" cy="274320"/>
+          </a:xfrm>
+          <a:prstGeom prst="rect">
+            <a:avLst/>
+          </a:prstGeom>
+          <a:noFill/>
+        </p:spPr>
+        <p:txBody>
+          <a:bodyPr wrap="square" anchor="t" lIns="0" rIns="0" tIns="0" bIns="0">
+            <a:spAutoFit/>
+          </a:bodyPr>
+          <a:lstStyle/>
+          <a:p>
+            <a:pPr algn="ctr">
+              <a:lnSpc>
+                <a:spcPct val="100000"/>
+              </a:lnSpc>
+            </a:pPr>
+            <a:r>
+              <a:rPr sz="1400" b="1">
+                <a:solidFill>
+                  <a:srgbClr val="E6EDF3"/>
+                </a:solidFill>
+                <a:latin typeface="Consolas"/>
+              </a:rPr>
+              <a:t>ALPACA</a:t>
+            </a:r>
+          </a:p>
+        </p:txBody>
+      </p:sp>
+      <p:sp>
+        <p:nvSpPr>
+          <p:cNvPr id="21" name="TextBox 20"/>
+          <p:cNvSpPr txBox="1"/>
+          <p:nvPr/>
+        </p:nvSpPr>
+        <p:spPr>
+          <a:xfrm>
+            <a:off x="8951976" y="3127248"/>
+            <a:ext cx="2121408" cy="274320"/>
+          </a:xfrm>
+          <a:prstGeom prst="rect">
+            <a:avLst/>
+          </a:prstGeom>
+          <a:noFill/>
+        </p:spPr>
+        <p:txBody>
+          <a:bodyPr wrap="square" anchor="t" lIns="0" rIns="0" tIns="0" bIns="0">
+            <a:spAutoFit/>
+          </a:bodyPr>
+          <a:lstStyle/>
+          <a:p>
+            <a:pPr algn="ctr">
+              <a:lnSpc>
+                <a:spcPct val="120000"/>
+              </a:lnSpc>
+            </a:pPr>
+            <a:r>
+              <a:rPr sz="1050" b="0">
+                <a:solidFill>
+                  <a:srgbClr val="3ECF8E"/>
+                </a:solidFill>
                 <a:latin typeface="Segoe UI"/>
               </a:rPr>
-              <a:t>what is ALLOWED
-8 hard gates</a:t>
-            </a:r>
-          </a:p>
-        </p:txBody>
-      </p:sp>
-      <p:sp>
-        <p:nvSpPr>
-          <p:cNvPr id="15" name="TextBox 14"/>
-          <p:cNvSpPr txBox="1"/>
-          <p:nvPr/>
-        </p:nvSpPr>
-        <p:spPr>
-          <a:xfrm>
-            <a:off x="777240" y="3977639"/>
-            <a:ext cx="6766560" cy="320040"/>
+              <a:t>one atomic order</a:t>
+            </a:r>
+          </a:p>
+        </p:txBody>
+      </p:sp>
+      <p:sp>
+        <p:nvSpPr>
+          <p:cNvPr id="22" name="TextBox 21"/>
+          <p:cNvSpPr txBox="1"/>
+          <p:nvPr/>
+        </p:nvSpPr>
+        <p:spPr>
+          <a:xfrm>
+            <a:off x="8951976" y="3401568"/>
+            <a:ext cx="2121408" cy="274320"/>
+          </a:xfrm>
+          <a:prstGeom prst="rect">
+            <a:avLst/>
+          </a:prstGeom>
+          <a:noFill/>
+        </p:spPr>
+        <p:txBody>
+          <a:bodyPr wrap="square" anchor="t" lIns="0" rIns="0" tIns="0" bIns="0">
+            <a:spAutoFit/>
+          </a:bodyPr>
+          <a:lstStyle/>
+          <a:p>
+            <a:pPr algn="ctr">
+              <a:lnSpc>
+                <a:spcPct val="120000"/>
+              </a:lnSpc>
+            </a:pPr>
+            <a:r>
+              <a:rPr sz="1050" b="0">
+                <a:solidFill>
+                  <a:srgbClr val="F2685C"/>
+                </a:solidFill>
+                <a:latin typeface="Segoe UI"/>
+              </a:rPr>
+              <a:t>never legs in</a:t>
+            </a:r>
+          </a:p>
+        </p:txBody>
+      </p:sp>
+      <p:sp>
+        <p:nvSpPr>
+          <p:cNvPr id="23" name="TextBox 22"/>
+          <p:cNvSpPr txBox="1"/>
+          <p:nvPr/>
+        </p:nvSpPr>
+        <p:spPr>
+          <a:xfrm>
+            <a:off x="777240" y="4343400"/>
+            <a:ext cx="6949440" cy="292608"/>
           </a:xfrm>
           <a:prstGeom prst="rect">
             <a:avLst/>
@@ -8095,27 +10510,27 @@
               </a:lnSpc>
             </a:pPr>
             <a:r>
-              <a:rPr sz="1400" b="0">
+              <a:rPr sz="1300" b="0">
                 <a:solidFill>
                   <a:srgbClr val="A9B6C3"/>
                 </a:solidFill>
                 <a:latin typeface="Segoe UI"/>
               </a:rPr>
-              <a:t>Echoed legs are compared to the real candidate</a:t>
-            </a:r>
-          </a:p>
-        </p:txBody>
-      </p:sp>
-      <p:sp>
-        <p:nvSpPr>
-          <p:cNvPr id="16" name="TextBox 15"/>
-          <p:cNvSpPr txBox="1"/>
-          <p:nvPr/>
-        </p:nvSpPr>
-        <p:spPr>
-          <a:xfrm>
-            <a:off x="7635240" y="3977639"/>
-            <a:ext cx="3657600" cy="320040"/>
+              <a:t>Echoed contracts are checked against the shortlist</a:t>
+            </a:r>
+          </a:p>
+        </p:txBody>
+      </p:sp>
+      <p:sp>
+        <p:nvSpPr>
+          <p:cNvPr id="24" name="TextBox 23"/>
+          <p:cNvSpPr txBox="1"/>
+          <p:nvPr/>
+        </p:nvSpPr>
+        <p:spPr>
+          <a:xfrm>
+            <a:off x="7818120" y="4343400"/>
+            <a:ext cx="3566160" cy="292608"/>
           </a:xfrm>
           <a:prstGeom prst="rect">
             <a:avLst/>
@@ -8134,26 +10549,26 @@
               </a:lnSpc>
             </a:pPr>
             <a:r>
-              <a:rPr sz="1100" b="1" spc="120">
+              <a:rPr sz="1050" b="1" spc="110">
                 <a:solidFill>
                   <a:srgbClr val="F2685C"/>
                 </a:solidFill>
                 <a:latin typeface="Consolas"/>
               </a:rPr>
-              <a:t>HALLUCINATION → NO-TRADE</a:t>
-            </a:r>
-          </a:p>
-        </p:txBody>
-      </p:sp>
-      <p:sp>
-        <p:nvSpPr>
-          <p:cNvPr id="17" name="Rectangle 16"/>
+              <a:t>HALLUCINATION → NO TRADE</a:t>
+            </a:r>
+          </a:p>
+        </p:txBody>
+      </p:sp>
+      <p:sp>
+        <p:nvSpPr>
+          <p:cNvPr id="25" name="Rectangle 24"/>
           <p:cNvSpPr/>
           <p:nvPr/>
         </p:nvSpPr>
         <p:spPr>
           <a:xfrm>
-            <a:off x="777240" y="4361687"/>
+            <a:off x="777240" y="4690872"/>
             <a:ext cx="10637215" cy="9525"/>
           </a:xfrm>
           <a:prstGeom prst="rect">
@@ -8191,14 +10606,14 @@
       </p:sp>
       <p:sp>
         <p:nvSpPr>
-          <p:cNvPr id="18" name="TextBox 17"/>
-          <p:cNvSpPr txBox="1"/>
-          <p:nvPr/>
-        </p:nvSpPr>
-        <p:spPr>
-          <a:xfrm>
-            <a:off x="777240" y="4544567"/>
-            <a:ext cx="6766560" cy="320040"/>
+          <p:cNvPr id="26" name="TextBox 25"/>
+          <p:cNvSpPr txBox="1"/>
+          <p:nvPr/>
+        </p:nvSpPr>
+        <p:spPr>
+          <a:xfrm>
+            <a:off x="777240" y="4855464"/>
+            <a:ext cx="6949440" cy="292608"/>
           </a:xfrm>
           <a:prstGeom prst="rect">
             <a:avLst/>
@@ -8217,27 +10632,27 @@
               </a:lnSpc>
             </a:pPr>
             <a:r>
-              <a:rPr sz="1400" b="0">
+              <a:rPr sz="1300" b="0">
                 <a:solidFill>
                   <a:srgbClr val="A9B6C3"/>
                 </a:solidFill>
                 <a:latin typeface="Segoe UI"/>
               </a:rPr>
-              <a:t>The model returns contracts, and it is discarded</a:t>
-            </a:r>
-          </a:p>
-        </p:txBody>
-      </p:sp>
-      <p:sp>
-        <p:nvSpPr>
-          <p:cNvPr id="19" name="TextBox 18"/>
-          <p:cNvSpPr txBox="1"/>
-          <p:nvPr/>
-        </p:nvSpPr>
-        <p:spPr>
-          <a:xfrm>
-            <a:off x="7635240" y="4544567"/>
-            <a:ext cx="3657600" cy="320040"/>
+              <a:t>The model's requested size is discarded</a:t>
+            </a:r>
+          </a:p>
+        </p:txBody>
+      </p:sp>
+      <p:sp>
+        <p:nvSpPr>
+          <p:cNvPr id="27" name="TextBox 26"/>
+          <p:cNvSpPr txBox="1"/>
+          <p:nvPr/>
+        </p:nvSpPr>
+        <p:spPr>
+          <a:xfrm>
+            <a:off x="7818120" y="4855464"/>
+            <a:ext cx="3566160" cy="292608"/>
           </a:xfrm>
           <a:prstGeom prst="rect">
             <a:avLst/>
@@ -8256,7 +10671,7 @@
               </a:lnSpc>
             </a:pPr>
             <a:r>
-              <a:rPr sz="1100" b="1" spc="120">
+              <a:rPr sz="1050" b="1" spc="110">
                 <a:solidFill>
                   <a:srgbClr val="F2685C"/>
                 </a:solidFill>
@@ -8269,13 +10684,13 @@
       </p:sp>
       <p:sp>
         <p:nvSpPr>
-          <p:cNvPr id="20" name="Rectangle 19"/>
+          <p:cNvPr id="28" name="Rectangle 27"/>
           <p:cNvSpPr/>
           <p:nvPr/>
         </p:nvSpPr>
         <p:spPr>
           <a:xfrm>
-            <a:off x="777240" y="4928615"/>
+            <a:off x="777240" y="5202936"/>
             <a:ext cx="10637215" cy="9525"/>
           </a:xfrm>
           <a:prstGeom prst="rect">
@@ -8313,14 +10728,14 @@
       </p:sp>
       <p:sp>
         <p:nvSpPr>
-          <p:cNvPr id="21" name="TextBox 20"/>
-          <p:cNvSpPr txBox="1"/>
-          <p:nvPr/>
-        </p:nvSpPr>
-        <p:spPr>
-          <a:xfrm>
-            <a:off x="777240" y="5111495"/>
-            <a:ext cx="6766560" cy="320040"/>
+          <p:cNvPr id="29" name="TextBox 28"/>
+          <p:cNvSpPr txBox="1"/>
+          <p:nvPr/>
+        </p:nvSpPr>
+        <p:spPr>
+          <a:xfrm>
+            <a:off x="777240" y="5367528"/>
+            <a:ext cx="6949440" cy="292608"/>
           </a:xfrm>
           <a:prstGeom prst="rect">
             <a:avLst/>
@@ -8339,27 +10754,27 @@
               </a:lnSpc>
             </a:pPr>
             <a:r>
-              <a:rPr sz="1400" b="0">
+              <a:rPr sz="1300" b="0">
                 <a:solidFill>
                   <a:srgbClr val="A9B6C3"/>
                 </a:solidFill>
                 <a:latin typeface="Segoe UI"/>
               </a:rPr>
-              <a:t>No tool output reaches it; the rest is whitelisted</a:t>
-            </a:r>
-          </a:p>
-        </p:txBody>
-      </p:sp>
-      <p:sp>
-        <p:nvSpPr>
-          <p:cNvPr id="22" name="TextBox 21"/>
-          <p:cNvSpPr txBox="1"/>
-          <p:nvPr/>
-        </p:nvSpPr>
-        <p:spPr>
-          <a:xfrm>
-            <a:off x="7635240" y="5111495"/>
-            <a:ext cx="3657600" cy="320040"/>
+              <a:t>No broker or tool output ever enters the prompt</a:t>
+            </a:r>
+          </a:p>
+        </p:txBody>
+      </p:sp>
+      <p:sp>
+        <p:nvSpPr>
+          <p:cNvPr id="30" name="TextBox 29"/>
+          <p:cNvSpPr txBox="1"/>
+          <p:nvPr/>
+        </p:nvSpPr>
+        <p:spPr>
+          <a:xfrm>
+            <a:off x="7818120" y="5367528"/>
+            <a:ext cx="3566160" cy="292608"/>
           </a:xfrm>
           <a:prstGeom prst="rect">
             <a:avLst/>
@@ -8378,7 +10793,7 @@
               </a:lnSpc>
             </a:pPr>
             <a:r>
-              <a:rPr sz="1100" b="1" spc="120">
+              <a:rPr sz="1050" b="1" spc="110">
                 <a:solidFill>
                   <a:srgbClr val="F2685C"/>
                 </a:solidFill>
@@ -8391,13 +10806,13 @@
       </p:sp>
       <p:sp>
         <p:nvSpPr>
-          <p:cNvPr id="23" name="Rectangle 22"/>
+          <p:cNvPr id="31" name="Rectangle 30"/>
           <p:cNvSpPr/>
           <p:nvPr/>
         </p:nvSpPr>
         <p:spPr>
           <a:xfrm>
-            <a:off x="777240" y="5495543"/>
+            <a:off x="777240" y="5715000"/>
             <a:ext cx="10637215" cy="9525"/>
           </a:xfrm>
           <a:prstGeom prst="rect">
@@ -8435,14 +10850,14 @@
       </p:sp>
       <p:sp>
         <p:nvSpPr>
-          <p:cNvPr id="24" name="TextBox 23"/>
-          <p:cNvSpPr txBox="1"/>
-          <p:nvPr/>
-        </p:nvSpPr>
-        <p:spPr>
-          <a:xfrm>
-            <a:off x="777240" y="5678423"/>
-            <a:ext cx="6766560" cy="320040"/>
+          <p:cNvPr id="32" name="TextBox 31"/>
+          <p:cNvSpPr txBox="1"/>
+          <p:nvPr/>
+        </p:nvSpPr>
+        <p:spPr>
+          <a:xfrm>
+            <a:off x="777240" y="5879592"/>
+            <a:ext cx="6949440" cy="292608"/>
           </a:xfrm>
           <a:prstGeom prst="rect">
             <a:avLst/>
@@ -8461,27 +10876,27 @@
               </a:lnSpc>
             </a:pPr>
             <a:r>
-              <a:rPr sz="1400" b="0">
+              <a:rPr sz="1300" b="0">
                 <a:solidFill>
                   <a:srgbClr val="A9B6C3"/>
                 </a:solidFill>
                 <a:latin typeface="Segoe UI"/>
               </a:rPr>
-              <a:t>No LLM at all? Deterministic selection runs instead</a:t>
-            </a:r>
-          </a:p>
-        </p:txBody>
-      </p:sp>
-      <p:sp>
-        <p:nvSpPr>
-          <p:cNvPr id="25" name="TextBox 24"/>
-          <p:cNvSpPr txBox="1"/>
-          <p:nvPr/>
-        </p:nvSpPr>
-        <p:spPr>
-          <a:xfrm>
-            <a:off x="7635240" y="5678423"/>
-            <a:ext cx="3657600" cy="320040"/>
+              <a:t>No model available? Arithmetic selection runs instead</a:t>
+            </a:r>
+          </a:p>
+        </p:txBody>
+      </p:sp>
+      <p:sp>
+        <p:nvSpPr>
+          <p:cNvPr id="33" name="TextBox 32"/>
+          <p:cNvSpPr txBox="1"/>
+          <p:nvPr/>
+        </p:nvSpPr>
+        <p:spPr>
+          <a:xfrm>
+            <a:off x="7818120" y="5879592"/>
+            <a:ext cx="3566160" cy="292608"/>
           </a:xfrm>
           <a:prstGeom prst="rect">
             <a:avLst/>
@@ -8500,7 +10915,7 @@
               </a:lnSpc>
             </a:pPr>
             <a:r>
-              <a:rPr sz="1100" b="1" spc="120">
+              <a:rPr sz="1050" b="1" spc="110">
                 <a:solidFill>
                   <a:srgbClr val="3ECF8E"/>
                 </a:solidFill>
@@ -8513,13 +10928,13 @@
       </p:sp>
       <p:sp>
         <p:nvSpPr>
-          <p:cNvPr id="26" name="Rectangle 25"/>
+          <p:cNvPr id="34" name="Rectangle 33"/>
           <p:cNvSpPr/>
           <p:nvPr/>
         </p:nvSpPr>
         <p:spPr>
           <a:xfrm>
-            <a:off x="777240" y="6062471"/>
+            <a:off x="777240" y="6227064"/>
             <a:ext cx="10637215" cy="9525"/>
           </a:xfrm>
           <a:prstGeom prst="rect">
@@ -8557,7 +10972,7 @@
       </p:sp>
       <p:sp>
         <p:nvSpPr>
-          <p:cNvPr id="27" name="TextBox 26"/>
+          <p:cNvPr id="35" name="TextBox 34"/>
           <p:cNvSpPr txBox="1"/>
           <p:nvPr/>
         </p:nvSpPr>
@@ -8596,7 +11011,7 @@
       </p:sp>
       <p:sp>
         <p:nvSpPr>
-          <p:cNvPr id="28" name="TextBox 27"/>
+          <p:cNvPr id="36" name="TextBox 35"/>
           <p:cNvSpPr txBox="1"/>
           <p:nvPr/>
         </p:nvSpPr>
@@ -8635,7 +11050,7 @@
       </p:sp>
       <p:sp>
         <p:nvSpPr>
-          <p:cNvPr id="29" name="Rectangle 28"/>
+          <p:cNvPr id="37" name="Rectangle 36"/>
           <p:cNvSpPr/>
           <p:nvPr/>
         </p:nvSpPr>
@@ -8774,7 +11189,8 @@
                 </a:solidFill>
                 <a:latin typeface="Segoe UI"/>
               </a:rPr>
-              <a:t>Eight gates. Any veto rejects outright.</a:t>
+              <a:t>Eight gates. Any one of them
+rejects the trade outright.</a:t>
             </a:r>
           </a:p>
         </p:txBody>
@@ -8787,8 +11203,8 @@
         </p:nvSpPr>
         <p:spPr>
           <a:xfrm>
-            <a:off x="777240" y="2395728"/>
-            <a:ext cx="228600" cy="274320"/>
+            <a:off x="777240" y="2697480"/>
+            <a:ext cx="3291840" cy="731520"/>
           </a:xfrm>
           <a:prstGeom prst="rect">
             <a:avLst/>
@@ -8807,740 +11223,455 @@
               </a:lnSpc>
             </a:pPr>
             <a:r>
-              <a:rPr sz="1500" b="0">
+              <a:rPr sz="4400" b="1">
+                <a:solidFill>
+                  <a:srgbClr val="E6EDF3"/>
+                </a:solidFill>
+                <a:latin typeface="Consolas"/>
+              </a:rPr>
+              <a:t>5%</a:t>
+            </a:r>
+          </a:p>
+        </p:txBody>
+      </p:sp>
+      <p:sp>
+        <p:nvSpPr>
+          <p:cNvPr id="5" name="TextBox 4"/>
+          <p:cNvSpPr txBox="1"/>
+          <p:nvPr/>
+        </p:nvSpPr>
+        <p:spPr>
+          <a:xfrm>
+            <a:off x="777240" y="3410712"/>
+            <a:ext cx="3291840" cy="640080"/>
+          </a:xfrm>
+          <a:prstGeom prst="rect">
+            <a:avLst/>
+          </a:prstGeom>
+          <a:noFill/>
+        </p:spPr>
+        <p:txBody>
+          <a:bodyPr wrap="square" anchor="t" lIns="0" rIns="0" tIns="0" bIns="0">
+            <a:spAutoFit/>
+          </a:bodyPr>
+          <a:lstStyle/>
+          <a:p>
+            <a:pPr algn="l">
+              <a:lnSpc>
+                <a:spcPct val="130000"/>
+              </a:lnSpc>
+            </a:pPr>
+            <a:r>
+              <a:rPr sz="1250" b="0">
+                <a:solidFill>
+                  <a:srgbClr val="A9B6C3"/>
+                </a:solidFill>
+                <a:latin typeface="Segoe UI"/>
+              </a:rPr>
+              <a:t>of equity at risk
+in any one spread</a:t>
+            </a:r>
+          </a:p>
+        </p:txBody>
+      </p:sp>
+      <p:sp>
+        <p:nvSpPr>
+          <p:cNvPr id="6" name="TextBox 5"/>
+          <p:cNvSpPr txBox="1"/>
+          <p:nvPr/>
+        </p:nvSpPr>
+        <p:spPr>
+          <a:xfrm>
+            <a:off x="4389120" y="2697480"/>
+            <a:ext cx="3291840" cy="731520"/>
+          </a:xfrm>
+          <a:prstGeom prst="rect">
+            <a:avLst/>
+          </a:prstGeom>
+          <a:noFill/>
+        </p:spPr>
+        <p:txBody>
+          <a:bodyPr wrap="square" anchor="t" lIns="0" rIns="0" tIns="0" bIns="0">
+            <a:spAutoFit/>
+          </a:bodyPr>
+          <a:lstStyle/>
+          <a:p>
+            <a:pPr algn="l">
+              <a:lnSpc>
+                <a:spcPct val="100000"/>
+              </a:lnSpc>
+            </a:pPr>
+            <a:r>
+              <a:rPr sz="4400" b="1">
+                <a:solidFill>
+                  <a:srgbClr val="F2685C"/>
+                </a:solidFill>
+                <a:latin typeface="Consolas"/>
+              </a:rPr>
+              <a:t>−3%</a:t>
+            </a:r>
+          </a:p>
+        </p:txBody>
+      </p:sp>
+      <p:sp>
+        <p:nvSpPr>
+          <p:cNvPr id="7" name="TextBox 6"/>
+          <p:cNvSpPr txBox="1"/>
+          <p:nvPr/>
+        </p:nvSpPr>
+        <p:spPr>
+          <a:xfrm>
+            <a:off x="4389120" y="3410712"/>
+            <a:ext cx="3291840" cy="640080"/>
+          </a:xfrm>
+          <a:prstGeom prst="rect">
+            <a:avLst/>
+          </a:prstGeom>
+          <a:noFill/>
+        </p:spPr>
+        <p:txBody>
+          <a:bodyPr wrap="square" anchor="t" lIns="0" rIns="0" tIns="0" bIns="0">
+            <a:spAutoFit/>
+          </a:bodyPr>
+          <a:lstStyle/>
+          <a:p>
+            <a:pPr algn="l">
+              <a:lnSpc>
+                <a:spcPct val="130000"/>
+              </a:lnSpc>
+            </a:pPr>
+            <a:r>
+              <a:rPr sz="1250" b="0">
+                <a:solidFill>
+                  <a:srgbClr val="A9B6C3"/>
+                </a:solidFill>
+                <a:latin typeface="Segoe UI"/>
+              </a:rPr>
+              <a:t>on the day halts
+the whole session</a:t>
+            </a:r>
+          </a:p>
+        </p:txBody>
+      </p:sp>
+      <p:sp>
+        <p:nvSpPr>
+          <p:cNvPr id="8" name="TextBox 7"/>
+          <p:cNvSpPr txBox="1"/>
+          <p:nvPr/>
+        </p:nvSpPr>
+        <p:spPr>
+          <a:xfrm>
+            <a:off x="8001000" y="2697480"/>
+            <a:ext cx="3291840" cy="731520"/>
+          </a:xfrm>
+          <a:prstGeom prst="rect">
+            <a:avLst/>
+          </a:prstGeom>
+          <a:noFill/>
+        </p:spPr>
+        <p:txBody>
+          <a:bodyPr wrap="square" anchor="t" lIns="0" rIns="0" tIns="0" bIns="0">
+            <a:spAutoFit/>
+          </a:bodyPr>
+          <a:lstStyle/>
+          <a:p>
+            <a:pPr algn="l">
+              <a:lnSpc>
+                <a:spcPct val="100000"/>
+              </a:lnSpc>
+            </a:pPr>
+            <a:r>
+              <a:rPr sz="4400" b="1">
+                <a:solidFill>
+                  <a:srgbClr val="E6EDF3"/>
+                </a:solidFill>
+                <a:latin typeface="Consolas"/>
+              </a:rPr>
+              <a:t>25</a:t>
+            </a:r>
+          </a:p>
+        </p:txBody>
+      </p:sp>
+      <p:sp>
+        <p:nvSpPr>
+          <p:cNvPr id="9" name="TextBox 8"/>
+          <p:cNvSpPr txBox="1"/>
+          <p:nvPr/>
+        </p:nvSpPr>
+        <p:spPr>
+          <a:xfrm>
+            <a:off x="8001000" y="3410712"/>
+            <a:ext cx="3291840" cy="640080"/>
+          </a:xfrm>
+          <a:prstGeom prst="rect">
+            <a:avLst/>
+          </a:prstGeom>
+          <a:noFill/>
+        </p:spPr>
+        <p:txBody>
+          <a:bodyPr wrap="square" anchor="t" lIns="0" rIns="0" tIns="0" bIns="0">
+            <a:spAutoFit/>
+          </a:bodyPr>
+          <a:lstStyle/>
+          <a:p>
+            <a:pPr algn="l">
+              <a:lnSpc>
+                <a:spcPct val="130000"/>
+              </a:lnSpc>
+            </a:pPr>
+            <a:r>
+              <a:rPr sz="1250" b="0">
+                <a:solidFill>
+                  <a:srgbClr val="A9B6C3"/>
+                </a:solidFill>
+                <a:latin typeface="Segoe UI"/>
+              </a:rPr>
+              <a:t>contracts, hard cap
+whatever the maths says</a:t>
+            </a:r>
+          </a:p>
+        </p:txBody>
+      </p:sp>
+      <p:sp>
+        <p:nvSpPr>
+          <p:cNvPr id="10" name="TextBox 9"/>
+          <p:cNvSpPr txBox="1"/>
+          <p:nvPr/>
+        </p:nvSpPr>
+        <p:spPr>
+          <a:xfrm>
+            <a:off x="777240" y="4297680"/>
+            <a:ext cx="3291840" cy="731520"/>
+          </a:xfrm>
+          <a:prstGeom prst="rect">
+            <a:avLst/>
+          </a:prstGeom>
+          <a:noFill/>
+        </p:spPr>
+        <p:txBody>
+          <a:bodyPr wrap="square" anchor="t" lIns="0" rIns="0" tIns="0" bIns="0">
+            <a:spAutoFit/>
+          </a:bodyPr>
+          <a:lstStyle/>
+          <a:p>
+            <a:pPr algn="l">
+              <a:lnSpc>
+                <a:spcPct val="100000"/>
+              </a:lnSpc>
+            </a:pPr>
+            <a:r>
+              <a:rPr sz="4400" b="1">
+                <a:solidFill>
+                  <a:srgbClr val="3ECF8E"/>
+                </a:solidFill>
+                <a:latin typeface="Consolas"/>
+              </a:rPr>
+              <a:t>0</a:t>
+            </a:r>
+          </a:p>
+        </p:txBody>
+      </p:sp>
+      <p:sp>
+        <p:nvSpPr>
+          <p:cNvPr id="11" name="TextBox 10"/>
+          <p:cNvSpPr txBox="1"/>
+          <p:nvPr/>
+        </p:nvSpPr>
+        <p:spPr>
+          <a:xfrm>
+            <a:off x="777240" y="5010912"/>
+            <a:ext cx="3291840" cy="640080"/>
+          </a:xfrm>
+          <a:prstGeom prst="rect">
+            <a:avLst/>
+          </a:prstGeom>
+          <a:noFill/>
+        </p:spPr>
+        <p:txBody>
+          <a:bodyPr wrap="square" anchor="t" lIns="0" rIns="0" tIns="0" bIns="0">
+            <a:spAutoFit/>
+          </a:bodyPr>
+          <a:lstStyle/>
+          <a:p>
+            <a:pPr algn="l">
+              <a:lnSpc>
+                <a:spcPct val="130000"/>
+              </a:lnSpc>
+            </a:pPr>
+            <a:r>
+              <a:rPr sz="1250" b="0">
+                <a:solidFill>
+                  <a:srgbClr val="A9B6C3"/>
+                </a:solidFill>
+                <a:latin typeface="Segoe UI"/>
+              </a:rPr>
+              <a:t>naked positions,
+structurally impossible</a:t>
+            </a:r>
+          </a:p>
+        </p:txBody>
+      </p:sp>
+      <p:sp>
+        <p:nvSpPr>
+          <p:cNvPr id="12" name="TextBox 11"/>
+          <p:cNvSpPr txBox="1"/>
+          <p:nvPr/>
+        </p:nvSpPr>
+        <p:spPr>
+          <a:xfrm>
+            <a:off x="4389120" y="4297680"/>
+            <a:ext cx="3291840" cy="731520"/>
+          </a:xfrm>
+          <a:prstGeom prst="rect">
+            <a:avLst/>
+          </a:prstGeom>
+          <a:noFill/>
+        </p:spPr>
+        <p:txBody>
+          <a:bodyPr wrap="square" anchor="t" lIns="0" rIns="0" tIns="0" bIns="0">
+            <a:spAutoFit/>
+          </a:bodyPr>
+          <a:lstStyle/>
+          <a:p>
+            <a:pPr algn="l">
+              <a:lnSpc>
+                <a:spcPct val="100000"/>
+              </a:lnSpc>
+            </a:pPr>
+            <a:r>
+              <a:rPr sz="4400" b="1">
+                <a:solidFill>
+                  <a:srgbClr val="E6EDF3"/>
+                </a:solidFill>
+                <a:latin typeface="Consolas"/>
+              </a:rPr>
+              <a:t>2</a:t>
+            </a:r>
+          </a:p>
+        </p:txBody>
+      </p:sp>
+      <p:sp>
+        <p:nvSpPr>
+          <p:cNvPr id="13" name="TextBox 12"/>
+          <p:cNvSpPr txBox="1"/>
+          <p:nvPr/>
+        </p:nvSpPr>
+        <p:spPr>
+          <a:xfrm>
+            <a:off x="4389120" y="5010912"/>
+            <a:ext cx="3291840" cy="640080"/>
+          </a:xfrm>
+          <a:prstGeom prst="rect">
+            <a:avLst/>
+          </a:prstGeom>
+          <a:noFill/>
+        </p:spPr>
+        <p:txBody>
+          <a:bodyPr wrap="square" anchor="t" lIns="0" rIns="0" tIns="0" bIns="0">
+            <a:spAutoFit/>
+          </a:bodyPr>
+          <a:lstStyle/>
+          <a:p>
+            <a:pPr algn="l">
+              <a:lnSpc>
+                <a:spcPct val="130000"/>
+              </a:lnSpc>
+            </a:pPr>
+            <a:r>
+              <a:rPr sz="1250" b="0">
+                <a:solidFill>
+                  <a:srgbClr val="A9B6C3"/>
+                </a:solidFill>
+                <a:latin typeface="Segoe UI"/>
+              </a:rPr>
+              <a:t>legs, one atomic order —
+both fill or neither</a:t>
+            </a:r>
+          </a:p>
+        </p:txBody>
+      </p:sp>
+      <p:sp>
+        <p:nvSpPr>
+          <p:cNvPr id="14" name="TextBox 13"/>
+          <p:cNvSpPr txBox="1"/>
+          <p:nvPr/>
+        </p:nvSpPr>
+        <p:spPr>
+          <a:xfrm>
+            <a:off x="8001000" y="4297680"/>
+            <a:ext cx="3291840" cy="731520"/>
+          </a:xfrm>
+          <a:prstGeom prst="rect">
+            <a:avLst/>
+          </a:prstGeom>
+          <a:noFill/>
+        </p:spPr>
+        <p:txBody>
+          <a:bodyPr wrap="square" anchor="t" lIns="0" rIns="0" tIns="0" bIns="0">
+            <a:spAutoFit/>
+          </a:bodyPr>
+          <a:lstStyle/>
+          <a:p>
+            <a:pPr algn="l">
+              <a:lnSpc>
+                <a:spcPct val="100000"/>
+              </a:lnSpc>
+            </a:pPr>
+            <a:r>
+              <a:rPr sz="4400" b="1">
                 <a:solidFill>
                   <a:srgbClr val="4DD4C0"/>
                 </a:solidFill>
+                <a:latin typeface="Consolas"/>
+              </a:rPr>
+              <a:t>207</a:t>
+            </a:r>
+          </a:p>
+        </p:txBody>
+      </p:sp>
+      <p:sp>
+        <p:nvSpPr>
+          <p:cNvPr id="15" name="TextBox 14"/>
+          <p:cNvSpPr txBox="1"/>
+          <p:nvPr/>
+        </p:nvSpPr>
+        <p:spPr>
+          <a:xfrm>
+            <a:off x="8001000" y="5010912"/>
+            <a:ext cx="3291840" cy="640080"/>
+          </a:xfrm>
+          <a:prstGeom prst="rect">
+            <a:avLst/>
+          </a:prstGeom>
+          <a:noFill/>
+        </p:spPr>
+        <p:txBody>
+          <a:bodyPr wrap="square" anchor="t" lIns="0" rIns="0" tIns="0" bIns="0">
+            <a:spAutoFit/>
+          </a:bodyPr>
+          <a:lstStyle/>
+          <a:p>
+            <a:pPr algn="l">
+              <a:lnSpc>
+                <a:spcPct val="130000"/>
+              </a:lnSpc>
+            </a:pPr>
+            <a:r>
+              <a:rPr sz="1250" b="0">
+                <a:solidFill>
+                  <a:srgbClr val="A9B6C3"/>
+                </a:solidFill>
                 <a:latin typeface="Segoe UI"/>
               </a:rPr>
-              <a:t>•</a:t>
-            </a:r>
-          </a:p>
-        </p:txBody>
-      </p:sp>
-      <p:sp>
-        <p:nvSpPr>
-          <p:cNvPr id="5" name="TextBox 4"/>
-          <p:cNvSpPr txBox="1"/>
-          <p:nvPr/>
-        </p:nvSpPr>
-        <p:spPr>
-          <a:xfrm>
-            <a:off x="1033272" y="2395728"/>
-            <a:ext cx="5760720" cy="914400"/>
-          </a:xfrm>
-          <a:prstGeom prst="rect">
-            <a:avLst/>
-          </a:prstGeom>
-          <a:noFill/>
-        </p:spPr>
-        <p:txBody>
-          <a:bodyPr wrap="square" anchor="t" lIns="0" rIns="0" tIns="0" bIns="0">
-            <a:spAutoFit/>
-          </a:bodyPr>
-          <a:lstStyle/>
-          <a:p>
-            <a:pPr algn="l">
-              <a:lnSpc>
-                <a:spcPct val="130000"/>
-              </a:lnSpc>
-            </a:pPr>
-            <a:r>
-              <a:rPr sz="1400" b="1">
-                <a:solidFill>
-                  <a:srgbClr val="E6EDF3"/>
-                </a:solidFill>
-                <a:latin typeface="Segoe UI"/>
-              </a:rPr>
-              <a:t>Never naked</a:t>
-            </a:r>
-            <a:r>
-              <a:rPr sz="1400" b="0">
-                <a:solidFill>
-                  <a:srgbClr val="A9B6C3"/>
-                </a:solidFill>
-                <a:latin typeface="Segoe UI"/>
-              </a:rPr>
-              <a:t> — enforced three times: the screener only builds pairs, a gate proves the long leg caps the loss, and both legs move as one atomic mleg order.</a:t>
-            </a:r>
-          </a:p>
-        </p:txBody>
-      </p:sp>
-      <p:sp>
-        <p:nvSpPr>
-          <p:cNvPr id="6" name="TextBox 5"/>
-          <p:cNvSpPr txBox="1"/>
-          <p:nvPr/>
-        </p:nvSpPr>
-        <p:spPr>
-          <a:xfrm>
-            <a:off x="777240" y="3328416"/>
-            <a:ext cx="228600" cy="274320"/>
-          </a:xfrm>
-          <a:prstGeom prst="rect">
-            <a:avLst/>
-          </a:prstGeom>
-          <a:noFill/>
-        </p:spPr>
-        <p:txBody>
-          <a:bodyPr wrap="square" anchor="t" lIns="0" rIns="0" tIns="0" bIns="0">
-            <a:spAutoFit/>
-          </a:bodyPr>
-          <a:lstStyle/>
-          <a:p>
-            <a:pPr algn="l">
-              <a:lnSpc>
-                <a:spcPct val="100000"/>
-              </a:lnSpc>
-            </a:pPr>
-            <a:r>
-              <a:rPr sz="1500" b="0">
-                <a:solidFill>
-                  <a:srgbClr val="4DD4C0"/>
-                </a:solidFill>
-                <a:latin typeface="Segoe UI"/>
-              </a:rPr>
-              <a:t>•</a:t>
-            </a:r>
-          </a:p>
-        </p:txBody>
-      </p:sp>
-      <p:sp>
-        <p:nvSpPr>
-          <p:cNvPr id="7" name="TextBox 6"/>
-          <p:cNvSpPr txBox="1"/>
-          <p:nvPr/>
-        </p:nvSpPr>
-        <p:spPr>
-          <a:xfrm>
-            <a:off x="1033272" y="3328416"/>
-            <a:ext cx="5760720" cy="914400"/>
-          </a:xfrm>
-          <a:prstGeom prst="rect">
-            <a:avLst/>
-          </a:prstGeom>
-          <a:noFill/>
-        </p:spPr>
-        <p:txBody>
-          <a:bodyPr wrap="square" anchor="t" lIns="0" rIns="0" tIns="0" bIns="0">
-            <a:spAutoFit/>
-          </a:bodyPr>
-          <a:lstStyle/>
-          <a:p>
-            <a:pPr algn="l">
-              <a:lnSpc>
-                <a:spcPct val="130000"/>
-              </a:lnSpc>
-            </a:pPr>
-            <a:r>
-              <a:rPr sz="1400" b="1">
-                <a:solidFill>
-                  <a:srgbClr val="E6EDF3"/>
-                </a:solidFill>
-                <a:latin typeface="Segoe UI"/>
-              </a:rPr>
-              <a:t>Loss always capped</a:t>
-            </a:r>
-            <a:r>
-              <a:rPr sz="1400" b="0">
-                <a:solidFill>
-                  <a:srgbClr val="A9B6C3"/>
-                </a:solidFill>
-                <a:latin typeface="Segoe UI"/>
-              </a:rPr>
-              <a:t> — reconciled against width×100 − credit×100.</a:t>
-            </a:r>
-          </a:p>
-        </p:txBody>
-      </p:sp>
-      <p:sp>
-        <p:nvSpPr>
-          <p:cNvPr id="8" name="TextBox 7"/>
-          <p:cNvSpPr txBox="1"/>
-          <p:nvPr/>
-        </p:nvSpPr>
-        <p:spPr>
-          <a:xfrm>
-            <a:off x="777240" y="4261104"/>
-            <a:ext cx="228600" cy="274320"/>
-          </a:xfrm>
-          <a:prstGeom prst="rect">
-            <a:avLst/>
-          </a:prstGeom>
-          <a:noFill/>
-        </p:spPr>
-        <p:txBody>
-          <a:bodyPr wrap="square" anchor="t" lIns="0" rIns="0" tIns="0" bIns="0">
-            <a:spAutoFit/>
-          </a:bodyPr>
-          <a:lstStyle/>
-          <a:p>
-            <a:pPr algn="l">
-              <a:lnSpc>
-                <a:spcPct val="100000"/>
-              </a:lnSpc>
-            </a:pPr>
-            <a:r>
-              <a:rPr sz="1500" b="0">
-                <a:solidFill>
-                  <a:srgbClr val="4DD4C0"/>
-                </a:solidFill>
-                <a:latin typeface="Segoe UI"/>
-              </a:rPr>
-              <a:t>•</a:t>
-            </a:r>
-          </a:p>
-        </p:txBody>
-      </p:sp>
-      <p:sp>
-        <p:nvSpPr>
-          <p:cNvPr id="9" name="TextBox 8"/>
-          <p:cNvSpPr txBox="1"/>
-          <p:nvPr/>
-        </p:nvSpPr>
-        <p:spPr>
-          <a:xfrm>
-            <a:off x="1033272" y="4261104"/>
-            <a:ext cx="5760720" cy="914400"/>
-          </a:xfrm>
-          <a:prstGeom prst="rect">
-            <a:avLst/>
-          </a:prstGeom>
-          <a:noFill/>
-        </p:spPr>
-        <p:txBody>
-          <a:bodyPr wrap="square" anchor="t" lIns="0" rIns="0" tIns="0" bIns="0">
-            <a:spAutoFit/>
-          </a:bodyPr>
-          <a:lstStyle/>
-          <a:p>
-            <a:pPr algn="l">
-              <a:lnSpc>
-                <a:spcPct val="130000"/>
-              </a:lnSpc>
-            </a:pPr>
-            <a:r>
-              <a:rPr sz="1400" b="1">
-                <a:solidFill>
-                  <a:srgbClr val="E6EDF3"/>
-                </a:solidFill>
-                <a:latin typeface="Segoe UI"/>
-              </a:rPr>
-              <a:t>The LLM cannot size</a:t>
-            </a:r>
-            <a:r>
-              <a:rPr sz="1400" b="0">
-                <a:solidFill>
-                  <a:srgbClr val="A9B6C3"/>
-                </a:solidFill>
-                <a:latin typeface="Segoe UI"/>
-              </a:rPr>
-              <a:t> — sizing is the minimum of four constraints and a hard 25-contract cap.</a:t>
-            </a:r>
-          </a:p>
-        </p:txBody>
-      </p:sp>
-      <p:sp>
-        <p:nvSpPr>
-          <p:cNvPr id="10" name="TextBox 9"/>
-          <p:cNvSpPr txBox="1"/>
-          <p:nvPr/>
-        </p:nvSpPr>
-        <p:spPr>
-          <a:xfrm>
-            <a:off x="777240" y="5193792"/>
-            <a:ext cx="228600" cy="274320"/>
-          </a:xfrm>
-          <a:prstGeom prst="rect">
-            <a:avLst/>
-          </a:prstGeom>
-          <a:noFill/>
-        </p:spPr>
-        <p:txBody>
-          <a:bodyPr wrap="square" anchor="t" lIns="0" rIns="0" tIns="0" bIns="0">
-            <a:spAutoFit/>
-          </a:bodyPr>
-          <a:lstStyle/>
-          <a:p>
-            <a:pPr algn="l">
-              <a:lnSpc>
-                <a:spcPct val="100000"/>
-              </a:lnSpc>
-            </a:pPr>
-            <a:r>
-              <a:rPr sz="1500" b="0">
-                <a:solidFill>
-                  <a:srgbClr val="4DD4C0"/>
-                </a:solidFill>
-                <a:latin typeface="Segoe UI"/>
-              </a:rPr>
-              <a:t>•</a:t>
-            </a:r>
-          </a:p>
-        </p:txBody>
-      </p:sp>
-      <p:sp>
-        <p:nvSpPr>
-          <p:cNvPr id="11" name="TextBox 10"/>
-          <p:cNvSpPr txBox="1"/>
-          <p:nvPr/>
-        </p:nvSpPr>
-        <p:spPr>
-          <a:xfrm>
-            <a:off x="1033272" y="5193792"/>
-            <a:ext cx="5760720" cy="914400"/>
-          </a:xfrm>
-          <a:prstGeom prst="rect">
-            <a:avLst/>
-          </a:prstGeom>
-          <a:noFill/>
-        </p:spPr>
-        <p:txBody>
-          <a:bodyPr wrap="square" anchor="t" lIns="0" rIns="0" tIns="0" bIns="0">
-            <a:spAutoFit/>
-          </a:bodyPr>
-          <a:lstStyle/>
-          <a:p>
-            <a:pPr algn="l">
-              <a:lnSpc>
-                <a:spcPct val="130000"/>
-              </a:lnSpc>
-            </a:pPr>
-            <a:r>
-              <a:rPr sz="1400" b="1">
-                <a:solidFill>
-                  <a:srgbClr val="E6EDF3"/>
-                </a:solidFill>
-                <a:latin typeface="Segoe UI"/>
-              </a:rPr>
-              <a:t>Guardrails only ever restrict</a:t>
-            </a:r>
-            <a:r>
-              <a:rPr sz="1400" b="0">
-                <a:solidFill>
-                  <a:srgbClr val="A9B6C3"/>
-                </a:solidFill>
-                <a:latin typeface="Segoe UI"/>
-              </a:rPr>
-              <a:t> — clamped structurally, never by convention.</a:t>
-            </a:r>
-          </a:p>
-        </p:txBody>
-      </p:sp>
-      <p:sp>
-        <p:nvSpPr>
-          <p:cNvPr id="12" name="Rounded Rectangle 11"/>
-          <p:cNvSpPr/>
-          <p:nvPr/>
-        </p:nvSpPr>
-        <p:spPr>
-          <a:xfrm>
-            <a:off x="7269480" y="2331720"/>
-            <a:ext cx="4114800" cy="960120"/>
-          </a:xfrm>
-          <a:prstGeom prst="roundRect">
-            <a:avLst>
-              <a:gd name="adj" fmla="val 6000"/>
-            </a:avLst>
-          </a:prstGeom>
-          <a:solidFill>
-            <a:srgbClr val="10161E"/>
-          </a:solidFill>
-          <a:ln w="12700">
-            <a:solidFill>
-              <a:srgbClr val="212C38"/>
-            </a:solidFill>
-          </a:ln>
-          <a:effectLst/>
-        </p:spPr>
-        <p:style>
-          <a:lnRef idx="1">
-            <a:schemeClr val="accent1"/>
-          </a:lnRef>
-          <a:fillRef idx="3">
-            <a:schemeClr val="accent1"/>
-          </a:fillRef>
-          <a:effectRef idx="2">
-            <a:schemeClr val="accent1"/>
-          </a:effectRef>
-          <a:fontRef idx="minor">
-            <a:schemeClr val="lt1"/>
-          </a:fontRef>
-        </p:style>
-        <p:txBody>
-          <a:bodyPr rtlCol="0" anchor="ctr"/>
-          <a:lstStyle/>
-          <a:p/>
-        </p:txBody>
-      </p:sp>
-      <p:sp>
-        <p:nvSpPr>
-          <p:cNvPr id="13" name="TextBox 12"/>
-          <p:cNvSpPr txBox="1"/>
-          <p:nvPr/>
-        </p:nvSpPr>
-        <p:spPr>
-          <a:xfrm>
-            <a:off x="7488936" y="2551176"/>
-            <a:ext cx="3675888" cy="219456"/>
-          </a:xfrm>
-          <a:prstGeom prst="rect">
-            <a:avLst/>
-          </a:prstGeom>
-          <a:noFill/>
-        </p:spPr>
-        <p:txBody>
-          <a:bodyPr wrap="square" anchor="t" lIns="0" rIns="0" tIns="0" bIns="0">
-            <a:spAutoFit/>
-          </a:bodyPr>
-          <a:lstStyle/>
-          <a:p>
-            <a:pPr algn="l">
-              <a:lnSpc>
-                <a:spcPct val="100000"/>
-              </a:lnSpc>
-            </a:pPr>
-            <a:r>
-              <a:rPr sz="1050" b="1" spc="140">
-                <a:solidFill>
-                  <a:srgbClr val="75828F"/>
-                </a:solidFill>
-                <a:latin typeface="Consolas"/>
-              </a:rPr>
-              <a:t>PER POSITION</a:t>
-            </a:r>
-          </a:p>
-        </p:txBody>
-      </p:sp>
-      <p:sp>
-        <p:nvSpPr>
-          <p:cNvPr id="14" name="TextBox 13"/>
-          <p:cNvSpPr txBox="1"/>
-          <p:nvPr/>
-        </p:nvSpPr>
-        <p:spPr>
-          <a:xfrm>
-            <a:off x="7488936" y="2825496"/>
-            <a:ext cx="3675888" cy="502920"/>
-          </a:xfrm>
-          <a:prstGeom prst="rect">
-            <a:avLst/>
-          </a:prstGeom>
-          <a:noFill/>
-        </p:spPr>
-        <p:txBody>
-          <a:bodyPr wrap="square" anchor="t" lIns="0" rIns="0" tIns="0" bIns="0">
-            <a:spAutoFit/>
-          </a:bodyPr>
-          <a:lstStyle/>
-          <a:p>
-            <a:pPr algn="l">
-              <a:lnSpc>
-                <a:spcPct val="100000"/>
-              </a:lnSpc>
-            </a:pPr>
-            <a:r>
-              <a:rPr sz="2600" b="1">
-                <a:solidFill>
-                  <a:srgbClr val="E6EDF3"/>
-                </a:solidFill>
-                <a:latin typeface="Consolas"/>
-              </a:rPr>
-              <a:t>5%</a:t>
-            </a:r>
-          </a:p>
-        </p:txBody>
-      </p:sp>
-      <p:sp>
-        <p:nvSpPr>
-          <p:cNvPr id="15" name="Rounded Rectangle 14"/>
-          <p:cNvSpPr/>
-          <p:nvPr/>
-        </p:nvSpPr>
-        <p:spPr>
-          <a:xfrm>
-            <a:off x="7269480" y="3429000"/>
-            <a:ext cx="4114800" cy="960120"/>
-          </a:xfrm>
-          <a:prstGeom prst="roundRect">
-            <a:avLst>
-              <a:gd name="adj" fmla="val 6000"/>
-            </a:avLst>
-          </a:prstGeom>
-          <a:solidFill>
-            <a:srgbClr val="10161E"/>
-          </a:solidFill>
-          <a:ln w="12700">
-            <a:solidFill>
-              <a:srgbClr val="212C38"/>
-            </a:solidFill>
-          </a:ln>
-          <a:effectLst/>
-        </p:spPr>
-        <p:style>
-          <a:lnRef idx="1">
-            <a:schemeClr val="accent1"/>
-          </a:lnRef>
-          <a:fillRef idx="3">
-            <a:schemeClr val="accent1"/>
-          </a:fillRef>
-          <a:effectRef idx="2">
-            <a:schemeClr val="accent1"/>
-          </a:effectRef>
-          <a:fontRef idx="minor">
-            <a:schemeClr val="lt1"/>
-          </a:fontRef>
-        </p:style>
-        <p:txBody>
-          <a:bodyPr rtlCol="0" anchor="ctr"/>
-          <a:lstStyle/>
-          <a:p/>
+              <a:t>tests, most of them
+on the gates</a:t>
+            </a:r>
+          </a:p>
         </p:txBody>
       </p:sp>
       <p:sp>
         <p:nvSpPr>
           <p:cNvPr id="16" name="TextBox 15"/>
-          <p:cNvSpPr txBox="1"/>
-          <p:nvPr/>
-        </p:nvSpPr>
-        <p:spPr>
-          <a:xfrm>
-            <a:off x="7488936" y="3648456"/>
-            <a:ext cx="3675888" cy="219456"/>
-          </a:xfrm>
-          <a:prstGeom prst="rect">
-            <a:avLst/>
-          </a:prstGeom>
-          <a:noFill/>
-        </p:spPr>
-        <p:txBody>
-          <a:bodyPr wrap="square" anchor="t" lIns="0" rIns="0" tIns="0" bIns="0">
-            <a:spAutoFit/>
-          </a:bodyPr>
-          <a:lstStyle/>
-          <a:p>
-            <a:pPr algn="l">
-              <a:lnSpc>
-                <a:spcPct val="100000"/>
-              </a:lnSpc>
-            </a:pPr>
-            <a:r>
-              <a:rPr sz="1050" b="1" spc="140">
-                <a:solidFill>
-                  <a:srgbClr val="75828F"/>
-                </a:solidFill>
-                <a:latin typeface="Consolas"/>
-              </a:rPr>
-              <a:t>DAILY LOSS STOP</a:t>
-            </a:r>
-          </a:p>
-        </p:txBody>
-      </p:sp>
-      <p:sp>
-        <p:nvSpPr>
-          <p:cNvPr id="17" name="TextBox 16"/>
-          <p:cNvSpPr txBox="1"/>
-          <p:nvPr/>
-        </p:nvSpPr>
-        <p:spPr>
-          <a:xfrm>
-            <a:off x="7488936" y="3922776"/>
-            <a:ext cx="3675888" cy="502920"/>
-          </a:xfrm>
-          <a:prstGeom prst="rect">
-            <a:avLst/>
-          </a:prstGeom>
-          <a:noFill/>
-        </p:spPr>
-        <p:txBody>
-          <a:bodyPr wrap="square" anchor="t" lIns="0" rIns="0" tIns="0" bIns="0">
-            <a:spAutoFit/>
-          </a:bodyPr>
-          <a:lstStyle/>
-          <a:p>
-            <a:pPr algn="l">
-              <a:lnSpc>
-                <a:spcPct val="100000"/>
-              </a:lnSpc>
-            </a:pPr>
-            <a:r>
-              <a:rPr sz="2600" b="1">
-                <a:solidFill>
-                  <a:srgbClr val="F2685C"/>
-                </a:solidFill>
-                <a:latin typeface="Consolas"/>
-              </a:rPr>
-              <a:t>−3%</a:t>
-            </a:r>
-          </a:p>
-        </p:txBody>
-      </p:sp>
-      <p:sp>
-        <p:nvSpPr>
-          <p:cNvPr id="18" name="Rounded Rectangle 17"/>
-          <p:cNvSpPr/>
-          <p:nvPr/>
-        </p:nvSpPr>
-        <p:spPr>
-          <a:xfrm>
-            <a:off x="7269480" y="4526280"/>
-            <a:ext cx="4114800" cy="1234440"/>
-          </a:xfrm>
-          <a:prstGeom prst="roundRect">
-            <a:avLst>
-              <a:gd name="adj" fmla="val 6000"/>
-            </a:avLst>
-          </a:prstGeom>
-          <a:solidFill>
-            <a:srgbClr val="10161E"/>
-          </a:solidFill>
-          <a:ln w="12700">
-            <a:solidFill>
-              <a:srgbClr val="212C38"/>
-            </a:solidFill>
-          </a:ln>
-          <a:effectLst/>
-        </p:spPr>
-        <p:style>
-          <a:lnRef idx="1">
-            <a:schemeClr val="accent1"/>
-          </a:lnRef>
-          <a:fillRef idx="3">
-            <a:schemeClr val="accent1"/>
-          </a:fillRef>
-          <a:effectRef idx="2">
-            <a:schemeClr val="accent1"/>
-          </a:effectRef>
-          <a:fontRef idx="minor">
-            <a:schemeClr val="lt1"/>
-          </a:fontRef>
-        </p:style>
-        <p:txBody>
-          <a:bodyPr rtlCol="0" anchor="ctr"/>
-          <a:lstStyle/>
-          <a:p/>
-        </p:txBody>
-      </p:sp>
-      <p:sp>
-        <p:nvSpPr>
-          <p:cNvPr id="19" name="TextBox 18"/>
-          <p:cNvSpPr txBox="1"/>
-          <p:nvPr/>
-        </p:nvSpPr>
-        <p:spPr>
-          <a:xfrm>
-            <a:off x="7488936" y="4745736"/>
-            <a:ext cx="3675888" cy="219456"/>
-          </a:xfrm>
-          <a:prstGeom prst="rect">
-            <a:avLst/>
-          </a:prstGeom>
-          <a:noFill/>
-        </p:spPr>
-        <p:txBody>
-          <a:bodyPr wrap="square" anchor="t" lIns="0" rIns="0" tIns="0" bIns="0">
-            <a:spAutoFit/>
-          </a:bodyPr>
-          <a:lstStyle/>
-          <a:p>
-            <a:pPr algn="l">
-              <a:lnSpc>
-                <a:spcPct val="100000"/>
-              </a:lnSpc>
-            </a:pPr>
-            <a:r>
-              <a:rPr sz="1050" b="1" spc="140">
-                <a:solidFill>
-                  <a:srgbClr val="75828F"/>
-                </a:solidFill>
-                <a:latin typeface="Consolas"/>
-              </a:rPr>
-              <a:t>EXITS</a:t>
-            </a:r>
-          </a:p>
-        </p:txBody>
-      </p:sp>
-      <p:sp>
-        <p:nvSpPr>
-          <p:cNvPr id="20" name="TextBox 19"/>
-          <p:cNvSpPr txBox="1"/>
-          <p:nvPr/>
-        </p:nvSpPr>
-        <p:spPr>
-          <a:xfrm>
-            <a:off x="7488936" y="5020056"/>
-            <a:ext cx="3675888" cy="502920"/>
-          </a:xfrm>
-          <a:prstGeom prst="rect">
-            <a:avLst/>
-          </a:prstGeom>
-          <a:noFill/>
-        </p:spPr>
-        <p:txBody>
-          <a:bodyPr wrap="square" anchor="t" lIns="0" rIns="0" tIns="0" bIns="0">
-            <a:spAutoFit/>
-          </a:bodyPr>
-          <a:lstStyle/>
-          <a:p>
-            <a:pPr algn="l">
-              <a:lnSpc>
-                <a:spcPct val="100000"/>
-              </a:lnSpc>
-            </a:pPr>
-            <a:r>
-              <a:rPr sz="1500" b="1">
-                <a:solidFill>
-                  <a:srgbClr val="E6EDF3"/>
-                </a:solidFill>
-                <a:latin typeface="Consolas"/>
-              </a:rPr>
-              <a:t>+50% / −2× / δ×2 / 1DTE</a:t>
-            </a:r>
-          </a:p>
-        </p:txBody>
-      </p:sp>
-      <p:sp>
-        <p:nvSpPr>
-          <p:cNvPr id="21" name="TextBox 20"/>
-          <p:cNvSpPr txBox="1"/>
-          <p:nvPr/>
-        </p:nvSpPr>
-        <p:spPr>
-          <a:xfrm>
-            <a:off x="7488936" y="5065776"/>
-            <a:ext cx="3675888" cy="457200"/>
-          </a:xfrm>
-          <a:prstGeom prst="rect">
-            <a:avLst/>
-          </a:prstGeom>
-          <a:noFill/>
-        </p:spPr>
-        <p:txBody>
-          <a:bodyPr wrap="square" anchor="t" lIns="0" rIns="0" tIns="0" bIns="0">
-            <a:spAutoFit/>
-          </a:bodyPr>
-          <a:lstStyle/>
-          <a:p>
-            <a:pPr algn="l">
-              <a:lnSpc>
-                <a:spcPct val="120000"/>
-              </a:lnSpc>
-            </a:pPr>
-            <a:r>
-              <a:rPr sz="1150" b="0">
-                <a:solidFill>
-                  <a:srgbClr val="75828F"/>
-                </a:solidFill>
-                <a:latin typeface="Segoe UI"/>
-              </a:rPr>
-              <a:t>the stop fires at 44% of max loss, not 100%</a:t>
-            </a:r>
-          </a:p>
-        </p:txBody>
-      </p:sp>
-      <p:sp>
-        <p:nvSpPr>
-          <p:cNvPr id="22" name="TextBox 21"/>
           <p:cNvSpPr txBox="1"/>
           <p:nvPr/>
         </p:nvSpPr>
@@ -9579,7 +11710,7 @@
       </p:sp>
       <p:sp>
         <p:nvSpPr>
-          <p:cNvPr id="23" name="TextBox 22"/>
+          <p:cNvPr id="17" name="TextBox 16"/>
           <p:cNvSpPr txBox="1"/>
           <p:nvPr/>
         </p:nvSpPr>
@@ -9618,7 +11749,7 @@
       </p:sp>
       <p:sp>
         <p:nvSpPr>
-          <p:cNvPr id="24" name="Rectangle 23"/>
+          <p:cNvPr id="18" name="Rectangle 17"/>
           <p:cNvSpPr/>
           <p:nvPr/>
         </p:nvSpPr>
@@ -9770,8 +11901,8 @@
         </p:nvSpPr>
         <p:spPr>
           <a:xfrm>
-            <a:off x="777240" y="2212848"/>
-            <a:ext cx="10058400" cy="365760"/>
+            <a:off x="777240" y="2194560"/>
+            <a:ext cx="10058400" cy="320040"/>
           </a:xfrm>
           <a:prstGeom prst="rect">
             <a:avLst/>
@@ -9790,13 +11921,13 @@
               </a:lnSpc>
             </a:pPr>
             <a:r>
-              <a:rPr sz="1500" b="0">
+              <a:rPr sz="1400" b="0">
                 <a:solidFill>
                   <a:srgbClr val="A9B6C3"/>
                 </a:solidFill>
                 <a:latin typeface="Segoe UI"/>
               </a:rPr>
-              <a:t>One snapshot, counted at each gate. The signal tracks implied-versus-realised, as the hypothesis predicts.</a:t>
+              <a:t>One screen, counted at every gate.</a:t>
             </a:r>
           </a:p>
         </p:txBody>
@@ -9809,8 +11940,8 @@
         </p:nvSpPr>
         <p:spPr>
           <a:xfrm>
-            <a:off x="777240" y="2788920"/>
-            <a:ext cx="2011680" cy="274320"/>
+            <a:off x="777240" y="2697480"/>
+            <a:ext cx="1920240" cy="274320"/>
           </a:xfrm>
           <a:prstGeom prst="rect">
             <a:avLst/>
@@ -9829,7 +11960,7 @@
               </a:lnSpc>
             </a:pPr>
             <a:r>
-              <a:rPr sz="1050" b="1" spc="130">
+              <a:rPr sz="1050" b="1" spc="120">
                 <a:solidFill>
                   <a:srgbClr val="75828F"/>
                 </a:solidFill>
@@ -9848,8 +11979,8 @@
         </p:nvSpPr>
         <p:spPr>
           <a:xfrm>
-            <a:off x="2788920" y="2788920"/>
-            <a:ext cx="2743200" cy="274320"/>
+            <a:off x="2697480" y="2697480"/>
+            <a:ext cx="2651760" cy="274320"/>
           </a:xfrm>
           <a:prstGeom prst="rect">
             <a:avLst/>
@@ -9868,13 +11999,13 @@
               </a:lnSpc>
             </a:pPr>
             <a:r>
-              <a:rPr sz="1050" b="1" spc="130">
+              <a:rPr sz="1050" b="1" spc="120">
                 <a:solidFill>
                   <a:srgbClr val="75828F"/>
                 </a:solidFill>
                 <a:latin typeface="Consolas"/>
               </a:rPr>
-              <a:t>IMPLIED / REALISED</a:t>
+              <a:t>IMPLIED ÷ REALISED</a:t>
             </a:r>
           </a:p>
         </p:txBody>
@@ -9887,8 +12018,8 @@
         </p:nvSpPr>
         <p:spPr>
           <a:xfrm>
-            <a:off x="5532120" y="2788920"/>
-            <a:ext cx="5852160" cy="274320"/>
+            <a:off x="5349240" y="2697480"/>
+            <a:ext cx="1371600" cy="274320"/>
           </a:xfrm>
           <a:prstGeom prst="rect">
             <a:avLst/>
@@ -9907,13 +12038,13 @@
               </a:lnSpc>
             </a:pPr>
             <a:r>
-              <a:rPr sz="1050" b="1" spc="130">
+              <a:rPr sz="1050" b="1" spc="120">
                 <a:solidFill>
                   <a:srgbClr val="75828F"/>
                 </a:solidFill>
                 <a:latin typeface="Consolas"/>
               </a:rPr>
-              <a:t>OUTCOME</a:t>
+              <a:t>VALID</a:t>
             </a:r>
           </a:p>
         </p:txBody>
@@ -9926,8 +12057,8 @@
         </p:nvSpPr>
         <p:spPr>
           <a:xfrm>
-            <a:off x="777240" y="3172968"/>
-            <a:ext cx="2011680" cy="320040"/>
+            <a:off x="6720840" y="2697480"/>
+            <a:ext cx="4937760" cy="274320"/>
           </a:xfrm>
           <a:prstGeom prst="rect">
             <a:avLst/>
@@ -9946,7 +12077,46 @@
               </a:lnSpc>
             </a:pPr>
             <a:r>
-              <a:rPr sz="1500" b="1">
+              <a:rPr sz="1050" b="1" spc="120">
+                <a:solidFill>
+                  <a:srgbClr val="75828F"/>
+                </a:solidFill>
+                <a:latin typeface="Consolas"/>
+              </a:rPr>
+              <a:t>CLEARED THE GATE</a:t>
+            </a:r>
+          </a:p>
+        </p:txBody>
+      </p:sp>
+      <p:sp>
+        <p:nvSpPr>
+          <p:cNvPr id="9" name="TextBox 8"/>
+          <p:cNvSpPr txBox="1"/>
+          <p:nvPr/>
+        </p:nvSpPr>
+        <p:spPr>
+          <a:xfrm>
+            <a:off x="777240" y="3081528"/>
+            <a:ext cx="1920240" cy="320040"/>
+          </a:xfrm>
+          <a:prstGeom prst="rect">
+            <a:avLst/>
+          </a:prstGeom>
+          <a:noFill/>
+        </p:spPr>
+        <p:txBody>
+          <a:bodyPr wrap="square" anchor="t" lIns="0" rIns="0" tIns="0" bIns="0">
+            <a:spAutoFit/>
+          </a:bodyPr>
+          <a:lstStyle/>
+          <a:p>
+            <a:pPr algn="l">
+              <a:lnSpc>
+                <a:spcPct val="100000"/>
+              </a:lnSpc>
+            </a:pPr>
+            <a:r>
+              <a:rPr sz="1400" b="1">
                 <a:solidFill>
                   <a:srgbClr val="E6EDF3"/>
                 </a:solidFill>
@@ -9959,14 +12129,14 @@
       </p:sp>
       <p:sp>
         <p:nvSpPr>
-          <p:cNvPr id="9" name="TextBox 8"/>
-          <p:cNvSpPr txBox="1"/>
-          <p:nvPr/>
-        </p:nvSpPr>
-        <p:spPr>
-          <a:xfrm>
-            <a:off x="2788920" y="3172968"/>
-            <a:ext cx="2743200" cy="320040"/>
+          <p:cNvPr id="10" name="TextBox 9"/>
+          <p:cNvSpPr txBox="1"/>
+          <p:nvPr/>
+        </p:nvSpPr>
+        <p:spPr>
+          <a:xfrm>
+            <a:off x="2697480" y="3081528"/>
+            <a:ext cx="2651760" cy="320040"/>
           </a:xfrm>
           <a:prstGeom prst="rect">
             <a:avLst/>
@@ -9985,7 +12155,7 @@
               </a:lnSpc>
             </a:pPr>
             <a:r>
-              <a:rPr sz="1500" b="1">
+              <a:rPr sz="1400" b="1">
                 <a:solidFill>
                   <a:srgbClr val="3ECF8E"/>
                 </a:solidFill>
@@ -9998,14 +12168,14 @@
       </p:sp>
       <p:sp>
         <p:nvSpPr>
-          <p:cNvPr id="10" name="TextBox 9"/>
-          <p:cNvSpPr txBox="1"/>
-          <p:nvPr/>
-        </p:nvSpPr>
-        <p:spPr>
-          <a:xfrm>
-            <a:off x="5532120" y="3172968"/>
-            <a:ext cx="5852160" cy="320040"/>
+          <p:cNvPr id="11" name="TextBox 10"/>
+          <p:cNvSpPr txBox="1"/>
+          <p:nvPr/>
+        </p:nvSpPr>
+        <p:spPr>
+          <a:xfrm>
+            <a:off x="5349240" y="3081528"/>
+            <a:ext cx="1371600" cy="320040"/>
           </a:xfrm>
           <a:prstGeom prst="rect">
             <a:avLst/>
@@ -10024,26 +12194,65 @@
               </a:lnSpc>
             </a:pPr>
             <a:r>
-              <a:rPr sz="1350" b="0">
+              <a:rPr sz="1400" b="0">
                 <a:solidFill>
                   <a:srgbClr val="A9B6C3"/>
                 </a:solidFill>
+                <a:latin typeface="Consolas"/>
+              </a:rPr>
+              <a:t>2</a:t>
+            </a:r>
+          </a:p>
+        </p:txBody>
+      </p:sp>
+      <p:sp>
+        <p:nvSpPr>
+          <p:cNvPr id="12" name="TextBox 11"/>
+          <p:cNvSpPr txBox="1"/>
+          <p:nvPr/>
+        </p:nvSpPr>
+        <p:spPr>
+          <a:xfrm>
+            <a:off x="6720840" y="3081528"/>
+            <a:ext cx="4937760" cy="320040"/>
+          </a:xfrm>
+          <a:prstGeom prst="rect">
+            <a:avLst/>
+          </a:prstGeom>
+          <a:noFill/>
+        </p:spPr>
+        <p:txBody>
+          <a:bodyPr wrap="square" anchor="t" lIns="0" rIns="0" tIns="0" bIns="0">
+            <a:spAutoFit/>
+          </a:bodyPr>
+          <a:lstStyle/>
+          <a:p>
+            <a:pPr algn="l">
+              <a:lnSpc>
+                <a:spcPct val="100000"/>
+              </a:lnSpc>
+            </a:pPr>
+            <a:r>
+              <a:rPr sz="1300" b="0">
+                <a:solidFill>
+                  <a:srgbClr val="3ECF8E"/>
+                </a:solidFill>
                 <a:latin typeface="Segoe UI"/>
               </a:rPr>
-              <a:t>2 of 2 survive — +$42.45 and +$33.42</a:t>
-            </a:r>
-          </a:p>
-        </p:txBody>
-      </p:sp>
-      <p:sp>
-        <p:nvSpPr>
-          <p:cNvPr id="11" name="Rectangle 10"/>
+              <a:t>2  —  richest premium on the board</a:t>
+            </a:r>
+          </a:p>
+        </p:txBody>
+      </p:sp>
+      <p:sp>
+        <p:nvSpPr>
+          <p:cNvPr id="13" name="Rectangle 12"/>
           <p:cNvSpPr/>
           <p:nvPr/>
         </p:nvSpPr>
         <p:spPr>
           <a:xfrm>
-            <a:off x="777240" y="3538728"/>
+            <a:off x="777240" y="3447288"/>
             <a:ext cx="10637215" cy="9525"/>
           </a:xfrm>
           <a:prstGeom prst="rect">
@@ -10081,14 +12290,14 @@
       </p:sp>
       <p:sp>
         <p:nvSpPr>
-          <p:cNvPr id="12" name="TextBox 11"/>
-          <p:cNvSpPr txBox="1"/>
-          <p:nvPr/>
-        </p:nvSpPr>
-        <p:spPr>
-          <a:xfrm>
-            <a:off x="777240" y="3703320"/>
-            <a:ext cx="2011680" cy="320040"/>
+          <p:cNvPr id="14" name="TextBox 13"/>
+          <p:cNvSpPr txBox="1"/>
+          <p:nvPr/>
+        </p:nvSpPr>
+        <p:spPr>
+          <a:xfrm>
+            <a:off x="777240" y="3593592"/>
+            <a:ext cx="1920240" cy="320040"/>
           </a:xfrm>
           <a:prstGeom prst="rect">
             <a:avLst/>
@@ -10107,7 +12316,7 @@
               </a:lnSpc>
             </a:pPr>
             <a:r>
-              <a:rPr sz="1500" b="1">
+              <a:rPr sz="1400" b="1">
                 <a:solidFill>
                   <a:srgbClr val="E6EDF3"/>
                 </a:solidFill>
@@ -10120,14 +12329,14 @@
       </p:sp>
       <p:sp>
         <p:nvSpPr>
-          <p:cNvPr id="13" name="TextBox 12"/>
-          <p:cNvSpPr txBox="1"/>
-          <p:nvPr/>
-        </p:nvSpPr>
-        <p:spPr>
-          <a:xfrm>
-            <a:off x="2788920" y="3703320"/>
-            <a:ext cx="2743200" cy="320040"/>
+          <p:cNvPr id="15" name="TextBox 14"/>
+          <p:cNvSpPr txBox="1"/>
+          <p:nvPr/>
+        </p:nvSpPr>
+        <p:spPr>
+          <a:xfrm>
+            <a:off x="2697480" y="3593592"/>
+            <a:ext cx="2651760" cy="320040"/>
           </a:xfrm>
           <a:prstGeom prst="rect">
             <a:avLst/>
@@ -10146,7 +12355,7 @@
               </a:lnSpc>
             </a:pPr>
             <a:r>
-              <a:rPr sz="1500" b="1">
+              <a:rPr sz="1400" b="1">
                 <a:solidFill>
                   <a:srgbClr val="F0A93B"/>
                 </a:solidFill>
@@ -10159,14 +12368,14 @@
       </p:sp>
       <p:sp>
         <p:nvSpPr>
-          <p:cNvPr id="14" name="TextBox 13"/>
-          <p:cNvSpPr txBox="1"/>
-          <p:nvPr/>
-        </p:nvSpPr>
-        <p:spPr>
-          <a:xfrm>
-            <a:off x="5532120" y="3703320"/>
-            <a:ext cx="5852160" cy="320040"/>
+          <p:cNvPr id="16" name="TextBox 15"/>
+          <p:cNvSpPr txBox="1"/>
+          <p:nvPr/>
+        </p:nvSpPr>
+        <p:spPr>
+          <a:xfrm>
+            <a:off x="5349240" y="3593592"/>
+            <a:ext cx="1371600" cy="320040"/>
           </a:xfrm>
           <a:prstGeom prst="rect">
             <a:avLst/>
@@ -10185,26 +12394,65 @@
               </a:lnSpc>
             </a:pPr>
             <a:r>
-              <a:rPr sz="1350" b="0">
+              <a:rPr sz="1400" b="0">
                 <a:solidFill>
                   <a:srgbClr val="A9B6C3"/>
                 </a:solidFill>
+                <a:latin typeface="Consolas"/>
+              </a:rPr>
+              <a:t>3</a:t>
+            </a:r>
+          </a:p>
+        </p:txBody>
+      </p:sp>
+      <p:sp>
+        <p:nvSpPr>
+          <p:cNvPr id="17" name="TextBox 16"/>
+          <p:cNvSpPr txBox="1"/>
+          <p:nvPr/>
+        </p:nvSpPr>
+        <p:spPr>
+          <a:xfrm>
+            <a:off x="6720840" y="3593592"/>
+            <a:ext cx="4937760" cy="320040"/>
+          </a:xfrm>
+          <a:prstGeom prst="rect">
+            <a:avLst/>
+          </a:prstGeom>
+          <a:noFill/>
+        </p:spPr>
+        <p:txBody>
+          <a:bodyPr wrap="square" anchor="t" lIns="0" rIns="0" tIns="0" bIns="0">
+            <a:spAutoFit/>
+          </a:bodyPr>
+          <a:lstStyle/>
+          <a:p>
+            <a:pPr algn="l">
+              <a:lnSpc>
+                <a:spcPct val="100000"/>
+              </a:lnSpc>
+            </a:pPr>
+            <a:r>
+              <a:rPr sz="1300" b="0">
+                <a:solidFill>
+                  <a:srgbClr val="A9B6C3"/>
+                </a:solidFill>
                 <a:latin typeface="Segoe UI"/>
               </a:rPr>
-              <a:t>3 of 3 survive, +$4.29 to +$5.44</a:t>
-            </a:r>
-          </a:p>
-        </p:txBody>
-      </p:sp>
-      <p:sp>
-        <p:nvSpPr>
-          <p:cNvPr id="15" name="Rectangle 14"/>
+              <a:t>3</a:t>
+            </a:r>
+          </a:p>
+        </p:txBody>
+      </p:sp>
+      <p:sp>
+        <p:nvSpPr>
+          <p:cNvPr id="18" name="Rectangle 17"/>
           <p:cNvSpPr/>
           <p:nvPr/>
         </p:nvSpPr>
         <p:spPr>
           <a:xfrm>
-            <a:off x="777240" y="4069080"/>
+            <a:off x="777240" y="3959352"/>
             <a:ext cx="10637215" cy="9525"/>
           </a:xfrm>
           <a:prstGeom prst="rect">
@@ -10242,14 +12490,14 @@
       </p:sp>
       <p:sp>
         <p:nvSpPr>
-          <p:cNvPr id="16" name="TextBox 15"/>
-          <p:cNvSpPr txBox="1"/>
-          <p:nvPr/>
-        </p:nvSpPr>
-        <p:spPr>
-          <a:xfrm>
-            <a:off x="777240" y="4233672"/>
-            <a:ext cx="2011680" cy="320040"/>
+          <p:cNvPr id="19" name="TextBox 18"/>
+          <p:cNvSpPr txBox="1"/>
+          <p:nvPr/>
+        </p:nvSpPr>
+        <p:spPr>
+          <a:xfrm>
+            <a:off x="777240" y="4105656"/>
+            <a:ext cx="1920240" cy="320040"/>
           </a:xfrm>
           <a:prstGeom prst="rect">
             <a:avLst/>
@@ -10268,7 +12516,7 @@
               </a:lnSpc>
             </a:pPr>
             <a:r>
-              <a:rPr sz="1500" b="1">
+              <a:rPr sz="1400" b="1">
                 <a:solidFill>
                   <a:srgbClr val="E6EDF3"/>
                 </a:solidFill>
@@ -10281,14 +12529,14 @@
       </p:sp>
       <p:sp>
         <p:nvSpPr>
-          <p:cNvPr id="17" name="TextBox 16"/>
-          <p:cNvSpPr txBox="1"/>
-          <p:nvPr/>
-        </p:nvSpPr>
-        <p:spPr>
-          <a:xfrm>
-            <a:off x="2788920" y="4233672"/>
-            <a:ext cx="2743200" cy="320040"/>
+          <p:cNvPr id="20" name="TextBox 19"/>
+          <p:cNvSpPr txBox="1"/>
+          <p:nvPr/>
+        </p:nvSpPr>
+        <p:spPr>
+          <a:xfrm>
+            <a:off x="2697480" y="4105656"/>
+            <a:ext cx="2651760" cy="320040"/>
           </a:xfrm>
           <a:prstGeom prst="rect">
             <a:avLst/>
@@ -10307,7 +12555,7 @@
               </a:lnSpc>
             </a:pPr>
             <a:r>
-              <a:rPr sz="1500" b="1">
+              <a:rPr sz="1400" b="1">
                 <a:solidFill>
                   <a:srgbClr val="F0A93B"/>
                 </a:solidFill>
@@ -10320,14 +12568,14 @@
       </p:sp>
       <p:sp>
         <p:nvSpPr>
-          <p:cNvPr id="18" name="TextBox 17"/>
-          <p:cNvSpPr txBox="1"/>
-          <p:nvPr/>
-        </p:nvSpPr>
-        <p:spPr>
-          <a:xfrm>
-            <a:off x="5532120" y="4233672"/>
-            <a:ext cx="5852160" cy="320040"/>
+          <p:cNvPr id="21" name="TextBox 20"/>
+          <p:cNvSpPr txBox="1"/>
+          <p:nvPr/>
+        </p:nvSpPr>
+        <p:spPr>
+          <a:xfrm>
+            <a:off x="5349240" y="4105656"/>
+            <a:ext cx="1371600" cy="320040"/>
           </a:xfrm>
           <a:prstGeom prst="rect">
             <a:avLst/>
@@ -10346,26 +12594,65 @@
               </a:lnSpc>
             </a:pPr>
             <a:r>
-              <a:rPr sz="1350" b="0">
+              <a:rPr sz="1400" b="0">
                 <a:solidFill>
                   <a:srgbClr val="A9B6C3"/>
                 </a:solidFill>
+                <a:latin typeface="Consolas"/>
+              </a:rPr>
+              <a:t>13</a:t>
+            </a:r>
+          </a:p>
+        </p:txBody>
+      </p:sp>
+      <p:sp>
+        <p:nvSpPr>
+          <p:cNvPr id="22" name="TextBox 21"/>
+          <p:cNvSpPr txBox="1"/>
+          <p:nvPr/>
+        </p:nvSpPr>
+        <p:spPr>
+          <a:xfrm>
+            <a:off x="6720840" y="4105656"/>
+            <a:ext cx="4937760" cy="320040"/>
+          </a:xfrm>
+          <a:prstGeom prst="rect">
+            <a:avLst/>
+          </a:prstGeom>
+          <a:noFill/>
+        </p:spPr>
+        <p:txBody>
+          <a:bodyPr wrap="square" anchor="t" lIns="0" rIns="0" tIns="0" bIns="0">
+            <a:spAutoFit/>
+          </a:bodyPr>
+          <a:lstStyle/>
+          <a:p>
+            <a:pPr algn="l">
+              <a:lnSpc>
+                <a:spcPct val="100000"/>
+              </a:lnSpc>
+            </a:pPr>
+            <a:r>
+              <a:rPr sz="1300" b="0">
+                <a:solidFill>
+                  <a:srgbClr val="A9B6C3"/>
+                </a:solidFill>
                 <a:latin typeface="Segoe UI"/>
               </a:rPr>
-              <a:t>2 of 13 survive, best +$11.67</a:t>
-            </a:r>
-          </a:p>
-        </p:txBody>
-      </p:sp>
-      <p:sp>
-        <p:nvSpPr>
-          <p:cNvPr id="19" name="Rectangle 18"/>
+              <a:t>2</a:t>
+            </a:r>
+          </a:p>
+        </p:txBody>
+      </p:sp>
+      <p:sp>
+        <p:nvSpPr>
+          <p:cNvPr id="23" name="Rectangle 22"/>
           <p:cNvSpPr/>
           <p:nvPr/>
         </p:nvSpPr>
         <p:spPr>
           <a:xfrm>
-            <a:off x="777240" y="4599432"/>
+            <a:off x="777240" y="4471416"/>
             <a:ext cx="10637215" cy="9525"/>
           </a:xfrm>
           <a:prstGeom prst="rect">
@@ -10403,14 +12690,14 @@
       </p:sp>
       <p:sp>
         <p:nvSpPr>
-          <p:cNvPr id="20" name="TextBox 19"/>
-          <p:cNvSpPr txBox="1"/>
-          <p:nvPr/>
-        </p:nvSpPr>
-        <p:spPr>
-          <a:xfrm>
-            <a:off x="777240" y="4764024"/>
-            <a:ext cx="2011680" cy="320040"/>
+          <p:cNvPr id="24" name="TextBox 23"/>
+          <p:cNvSpPr txBox="1"/>
+          <p:nvPr/>
+        </p:nvSpPr>
+        <p:spPr>
+          <a:xfrm>
+            <a:off x="777240" y="4617720"/>
+            <a:ext cx="1920240" cy="320040"/>
           </a:xfrm>
           <a:prstGeom prst="rect">
             <a:avLst/>
@@ -10429,7 +12716,7 @@
               </a:lnSpc>
             </a:pPr>
             <a:r>
-              <a:rPr sz="1500" b="1">
+              <a:rPr sz="1400" b="1">
                 <a:solidFill>
                   <a:srgbClr val="E6EDF3"/>
                 </a:solidFill>
@@ -10442,14 +12729,14 @@
       </p:sp>
       <p:sp>
         <p:nvSpPr>
-          <p:cNvPr id="21" name="TextBox 20"/>
-          <p:cNvSpPr txBox="1"/>
-          <p:nvPr/>
-        </p:nvSpPr>
-        <p:spPr>
-          <a:xfrm>
-            <a:off x="2788920" y="4764024"/>
-            <a:ext cx="2743200" cy="320040"/>
+          <p:cNvPr id="25" name="TextBox 24"/>
+          <p:cNvSpPr txBox="1"/>
+          <p:nvPr/>
+        </p:nvSpPr>
+        <p:spPr>
+          <a:xfrm>
+            <a:off x="2697480" y="4617720"/>
+            <a:ext cx="2651760" cy="320040"/>
           </a:xfrm>
           <a:prstGeom prst="rect">
             <a:avLst/>
@@ -10468,7 +12755,7 @@
               </a:lnSpc>
             </a:pPr>
             <a:r>
-              <a:rPr sz="1500" b="1">
+              <a:rPr sz="1400" b="1">
                 <a:solidFill>
                   <a:srgbClr val="F2685C"/>
                 </a:solidFill>
@@ -10481,14 +12768,14 @@
       </p:sp>
       <p:sp>
         <p:nvSpPr>
-          <p:cNvPr id="22" name="TextBox 21"/>
-          <p:cNvSpPr txBox="1"/>
-          <p:nvPr/>
-        </p:nvSpPr>
-        <p:spPr>
-          <a:xfrm>
-            <a:off x="5532120" y="4764024"/>
-            <a:ext cx="5852160" cy="320040"/>
+          <p:cNvPr id="26" name="TextBox 25"/>
+          <p:cNvSpPr txBox="1"/>
+          <p:nvPr/>
+        </p:nvSpPr>
+        <p:spPr>
+          <a:xfrm>
+            <a:off x="5349240" y="4617720"/>
+            <a:ext cx="1371600" cy="320040"/>
           </a:xfrm>
           <a:prstGeom prst="rect">
             <a:avLst/>
@@ -10507,26 +12794,65 @@
               </a:lnSpc>
             </a:pPr>
             <a:r>
-              <a:rPr sz="1350" b="0">
+              <a:rPr sz="1400" b="0">
+                <a:solidFill>
+                  <a:srgbClr val="A9B6C3"/>
+                </a:solidFill>
+                <a:latin typeface="Consolas"/>
+              </a:rPr>
+              <a:t>2</a:t>
+            </a:r>
+          </a:p>
+        </p:txBody>
+      </p:sp>
+      <p:sp>
+        <p:nvSpPr>
+          <p:cNvPr id="27" name="TextBox 26"/>
+          <p:cNvSpPr txBox="1"/>
+          <p:nvPr/>
+        </p:nvSpPr>
+        <p:spPr>
+          <a:xfrm>
+            <a:off x="6720840" y="4617720"/>
+            <a:ext cx="4937760" cy="320040"/>
+          </a:xfrm>
+          <a:prstGeom prst="rect">
+            <a:avLst/>
+          </a:prstGeom>
+          <a:noFill/>
+        </p:spPr>
+        <p:txBody>
+          <a:bodyPr wrap="square" anchor="t" lIns="0" rIns="0" tIns="0" bIns="0">
+            <a:spAutoFit/>
+          </a:bodyPr>
+          <a:lstStyle/>
+          <a:p>
+            <a:pPr algn="l">
+              <a:lnSpc>
+                <a:spcPct val="100000"/>
+              </a:lnSpc>
+            </a:pPr>
+            <a:r>
+              <a:rPr sz="1300" b="0">
                 <a:solidFill>
                   <a:srgbClr val="F2685C"/>
                 </a:solidFill>
                 <a:latin typeface="Segoe UI"/>
               </a:rPr>
-              <a:t>0 of 2 — implied below realised, it sits out</a:t>
-            </a:r>
-          </a:p>
-        </p:txBody>
-      </p:sp>
-      <p:sp>
-        <p:nvSpPr>
-          <p:cNvPr id="23" name="Rectangle 22"/>
+              <a:t>0  —  implied below realised</a:t>
+            </a:r>
+          </a:p>
+        </p:txBody>
+      </p:sp>
+      <p:sp>
+        <p:nvSpPr>
+          <p:cNvPr id="28" name="Rectangle 27"/>
           <p:cNvSpPr/>
           <p:nvPr/>
         </p:nvSpPr>
         <p:spPr>
           <a:xfrm>
-            <a:off x="777240" y="5129784"/>
+            <a:off x="777240" y="4983480"/>
             <a:ext cx="10637215" cy="9525"/>
           </a:xfrm>
           <a:prstGeom prst="rect">
@@ -10564,14 +12890,14 @@
       </p:sp>
       <p:sp>
         <p:nvSpPr>
-          <p:cNvPr id="24" name="TextBox 23"/>
-          <p:cNvSpPr txBox="1"/>
-          <p:nvPr/>
-        </p:nvSpPr>
-        <p:spPr>
-          <a:xfrm>
-            <a:off x="777240" y="5522976"/>
-            <a:ext cx="10515600" cy="457200"/>
+          <p:cNvPr id="29" name="TextBox 28"/>
+          <p:cNvSpPr txBox="1"/>
+          <p:nvPr/>
+        </p:nvSpPr>
+        <p:spPr>
+          <a:xfrm>
+            <a:off x="777240" y="5449824"/>
+            <a:ext cx="10424160" cy="457200"/>
           </a:xfrm>
           <a:prstGeom prst="rect">
             <a:avLst/>
@@ -10590,29 +12916,29 @@
               </a:lnSpc>
             </a:pPr>
             <a:r>
-              <a:rPr sz="1500" b="1">
-                <a:solidFill>
-                  <a:srgbClr val="E6EDF3"/>
+              <a:rPr sz="1800" b="0">
+                <a:solidFill>
+                  <a:srgbClr val="A9B6C3"/>
                 </a:solidFill>
                 <a:latin typeface="Segoe UI"/>
               </a:rPr>
-              <a:t>QQQ sitting out is the point.</a:t>
-            </a:r>
-            <a:r>
-              <a:rPr sz="1500" b="0">
-                <a:solidFill>
-                  <a:srgbClr val="A9B6C3"/>
+              <a:t>The agent isn't looking for trades. </a:t>
+            </a:r>
+            <a:r>
+              <a:rPr sz="1800" b="1">
+                <a:solidFill>
+                  <a:srgbClr val="4DD4C0"/>
                 </a:solidFill>
                 <a:latin typeface="Segoe UI"/>
               </a:rPr>
-              <a:t> The agent is not looking for trades. It is looking for paid risk.</a:t>
-            </a:r>
-          </a:p>
-        </p:txBody>
-      </p:sp>
-      <p:sp>
-        <p:nvSpPr>
-          <p:cNvPr id="25" name="TextBox 24"/>
+              <a:t>It's looking for paid risk.</a:t>
+            </a:r>
+          </a:p>
+        </p:txBody>
+      </p:sp>
+      <p:sp>
+        <p:nvSpPr>
+          <p:cNvPr id="30" name="TextBox 29"/>
           <p:cNvSpPr txBox="1"/>
           <p:nvPr/>
         </p:nvSpPr>
@@ -10651,7 +12977,7 @@
       </p:sp>
       <p:sp>
         <p:nvSpPr>
-          <p:cNvPr id="26" name="TextBox 25"/>
+          <p:cNvPr id="31" name="TextBox 30"/>
           <p:cNvSpPr txBox="1"/>
           <p:nvPr/>
         </p:nvSpPr>
@@ -10690,7 +13016,7 @@
       </p:sp>
       <p:sp>
         <p:nvSpPr>
-          <p:cNvPr id="27" name="Rectangle 26"/>
+          <p:cNvPr id="32" name="Rectangle 31"/>
           <p:cNvSpPr/>
           <p:nvPr/>
         </p:nvSpPr>

--- a/Vetoed-deck.pptx
+++ b/Vetoed-deck.pptx
@@ -5,20 +5,20 @@
     <p:sldMasterId id="2147483648" r:id="rId1"/>
   </p:sldMasterIdLst>
   <p:sldIdLst>
-    <p:sldId id="256" r:id="rId7"/>
-    <p:sldId id="257" r:id="rId8"/>
-    <p:sldId id="258" r:id="rId9"/>
-    <p:sldId id="259" r:id="rId10"/>
-    <p:sldId id="260" r:id="rId11"/>
-    <p:sldId id="261" r:id="rId12"/>
-    <p:sldId id="262" r:id="rId13"/>
-    <p:sldId id="263" r:id="rId14"/>
-    <p:sldId id="264" r:id="rId15"/>
-    <p:sldId id="265" r:id="rId16"/>
-    <p:sldId id="266" r:id="rId17"/>
-    <p:sldId id="267" r:id="rId18"/>
+    <p:sldId id="256" r:id="rId2"/>
+    <p:sldId id="257" r:id="rId3"/>
+    <p:sldId id="258" r:id="rId4"/>
+    <p:sldId id="259" r:id="rId5"/>
+    <p:sldId id="260" r:id="rId6"/>
+    <p:sldId id="261" r:id="rId7"/>
+    <p:sldId id="262" r:id="rId8"/>
+    <p:sldId id="263" r:id="rId9"/>
+    <p:sldId id="264" r:id="rId10"/>
+    <p:sldId id="265" r:id="rId11"/>
+    <p:sldId id="266" r:id="rId12"/>
+    <p:sldId id="267" r:id="rId13"/>
   </p:sldIdLst>
-  <p:sldSz cx="12191695" cy="6858000" type="screen4x3"/>
+  <p:sldSz cx="12192000" cy="6858000"/>
   <p:notesSz cx="6858000" cy="9144000"/>
   <p:defaultTextStyle>
     <a:defPPr>
@@ -115,6 +115,22 @@
       </a:defRPr>
     </a:lvl9pPr>
   </p:defaultTextStyle>
+  <p:extLst>
+    <p:ext uri="{EFAFB233-063F-42B5-8137-9DF3F51BA10A}">
+      <p15:sldGuideLst xmlns:p15="http://schemas.microsoft.com/office/powerpoint/2012/main">
+        <p15:guide id="1" orient="horz" pos="2160">
+          <p15:clr>
+            <a:srgbClr val="A4A3A4"/>
+          </p15:clr>
+        </p15:guide>
+        <p15:guide id="2" pos="2880">
+          <p15:clr>
+            <a:srgbClr val="A4A3A4"/>
+          </p15:clr>
+        </p15:guide>
+      </p15:sldGuideLst>
+    </p:ext>
+  </p:extLst>
 </p:presentation>
 </file>
 
@@ -156,10 +172,9 @@
           <a:lstStyle/>
           <a:p>
             <a:r>
-              <a:rPr lang="en-US" smtClean="0"/>
+              <a:rPr lang="en-US"/>
               <a:t>Click to edit Master title style</a:t>
             </a:r>
-            <a:endParaRPr lang="en-US"/>
           </a:p>
         </p:txBody>
       </p:sp>
@@ -275,10 +290,9 @@
           </a:lstStyle>
           <a:p>
             <a:r>
-              <a:rPr lang="en-US" smtClean="0"/>
+              <a:rPr lang="en-US"/>
               <a:t>Click to edit Master subtitle style</a:t>
             </a:r>
-            <a:endParaRPr lang="en-US"/>
           </a:p>
         </p:txBody>
       </p:sp>
@@ -299,7 +313,7 @@
           <a:p>
             <a:fld id="{5BCAD085-E8A6-8845-BD4E-CB4CCA059FC4}" type="datetimeFigureOut">
               <a:rPr lang="en-US" smtClean="0"/>
-              <a:t>1/27/13</a:t>
+              <a:t>8/31/2026</a:t>
             </a:fld>
             <a:endParaRPr lang="en-US"/>
           </a:p>
@@ -393,10 +407,9 @@
           <a:lstStyle/>
           <a:p>
             <a:r>
-              <a:rPr lang="en-US" smtClean="0"/>
+              <a:rPr lang="en-US"/>
               <a:t>Click to edit Master title style</a:t>
             </a:r>
-            <a:endParaRPr lang="en-US"/>
           </a:p>
         </p:txBody>
       </p:sp>
@@ -417,38 +430,37 @@
           <a:p>
             <a:pPr lvl="0"/>
             <a:r>
-              <a:rPr lang="en-US" smtClean="0"/>
+              <a:rPr lang="en-US"/>
               <a:t>Click to edit Master text styles</a:t>
             </a:r>
           </a:p>
           <a:p>
             <a:pPr lvl="1"/>
             <a:r>
-              <a:rPr lang="en-US" smtClean="0"/>
+              <a:rPr lang="en-US"/>
               <a:t>Second level</a:t>
             </a:r>
           </a:p>
           <a:p>
             <a:pPr lvl="2"/>
             <a:r>
-              <a:rPr lang="en-US" smtClean="0"/>
+              <a:rPr lang="en-US"/>
               <a:t>Third level</a:t>
             </a:r>
           </a:p>
           <a:p>
             <a:pPr lvl="3"/>
             <a:r>
-              <a:rPr lang="en-US" smtClean="0"/>
+              <a:rPr lang="en-US"/>
               <a:t>Fourth level</a:t>
             </a:r>
           </a:p>
           <a:p>
             <a:pPr lvl="4"/>
             <a:r>
-              <a:rPr lang="en-US" smtClean="0"/>
+              <a:rPr lang="en-US"/>
               <a:t>Fifth level</a:t>
             </a:r>
-            <a:endParaRPr lang="en-US"/>
           </a:p>
         </p:txBody>
       </p:sp>
@@ -469,7 +481,7 @@
           <a:p>
             <a:fld id="{5BCAD085-E8A6-8845-BD4E-CB4CCA059FC4}" type="datetimeFigureOut">
               <a:rPr lang="en-US" smtClean="0"/>
-              <a:t>1/27/13</a:t>
+              <a:t>8/31/2026</a:t>
             </a:fld>
             <a:endParaRPr lang="en-US"/>
           </a:p>
@@ -568,10 +580,9 @@
           <a:lstStyle/>
           <a:p>
             <a:r>
-              <a:rPr lang="en-US" smtClean="0"/>
+              <a:rPr lang="en-US"/>
               <a:t>Click to edit Master title style</a:t>
             </a:r>
-            <a:endParaRPr lang="en-US"/>
           </a:p>
         </p:txBody>
       </p:sp>
@@ -597,38 +608,37 @@
           <a:p>
             <a:pPr lvl="0"/>
             <a:r>
-              <a:rPr lang="en-US" smtClean="0"/>
+              <a:rPr lang="en-US"/>
               <a:t>Click to edit Master text styles</a:t>
             </a:r>
           </a:p>
           <a:p>
             <a:pPr lvl="1"/>
             <a:r>
-              <a:rPr lang="en-US" smtClean="0"/>
+              <a:rPr lang="en-US"/>
               <a:t>Second level</a:t>
             </a:r>
           </a:p>
           <a:p>
             <a:pPr lvl="2"/>
             <a:r>
-              <a:rPr lang="en-US" smtClean="0"/>
+              <a:rPr lang="en-US"/>
               <a:t>Third level</a:t>
             </a:r>
           </a:p>
           <a:p>
             <a:pPr lvl="3"/>
             <a:r>
-              <a:rPr lang="en-US" smtClean="0"/>
+              <a:rPr lang="en-US"/>
               <a:t>Fourth level</a:t>
             </a:r>
           </a:p>
           <a:p>
             <a:pPr lvl="4"/>
             <a:r>
-              <a:rPr lang="en-US" smtClean="0"/>
+              <a:rPr lang="en-US"/>
               <a:t>Fifth level</a:t>
             </a:r>
-            <a:endParaRPr lang="en-US"/>
           </a:p>
         </p:txBody>
       </p:sp>
@@ -649,7 +659,7 @@
           <a:p>
             <a:fld id="{5BCAD085-E8A6-8845-BD4E-CB4CCA059FC4}" type="datetimeFigureOut">
               <a:rPr lang="en-US" smtClean="0"/>
-              <a:t>1/27/13</a:t>
+              <a:t>8/31/2026</a:t>
             </a:fld>
             <a:endParaRPr lang="en-US"/>
           </a:p>
@@ -743,10 +753,9 @@
           <a:lstStyle/>
           <a:p>
             <a:r>
-              <a:rPr lang="en-US" smtClean="0"/>
+              <a:rPr lang="en-US"/>
               <a:t>Click to edit Master title style</a:t>
             </a:r>
-            <a:endParaRPr lang="en-US"/>
           </a:p>
         </p:txBody>
       </p:sp>
@@ -767,38 +776,37 @@
           <a:p>
             <a:pPr lvl="0"/>
             <a:r>
-              <a:rPr lang="en-US" smtClean="0"/>
+              <a:rPr lang="en-US"/>
               <a:t>Click to edit Master text styles</a:t>
             </a:r>
           </a:p>
           <a:p>
             <a:pPr lvl="1"/>
             <a:r>
-              <a:rPr lang="en-US" smtClean="0"/>
+              <a:rPr lang="en-US"/>
               <a:t>Second level</a:t>
             </a:r>
           </a:p>
           <a:p>
             <a:pPr lvl="2"/>
             <a:r>
-              <a:rPr lang="en-US" smtClean="0"/>
+              <a:rPr lang="en-US"/>
               <a:t>Third level</a:t>
             </a:r>
           </a:p>
           <a:p>
             <a:pPr lvl="3"/>
             <a:r>
-              <a:rPr lang="en-US" smtClean="0"/>
+              <a:rPr lang="en-US"/>
               <a:t>Fourth level</a:t>
             </a:r>
           </a:p>
           <a:p>
             <a:pPr lvl="4"/>
             <a:r>
-              <a:rPr lang="en-US" smtClean="0"/>
+              <a:rPr lang="en-US"/>
               <a:t>Fifth level</a:t>
             </a:r>
-            <a:endParaRPr lang="en-US"/>
           </a:p>
         </p:txBody>
       </p:sp>
@@ -819,7 +827,7 @@
           <a:p>
             <a:fld id="{5BCAD085-E8A6-8845-BD4E-CB4CCA059FC4}" type="datetimeFigureOut">
               <a:rPr lang="en-US" smtClean="0"/>
-              <a:t>1/27/13</a:t>
+              <a:t>8/31/2026</a:t>
             </a:fld>
             <a:endParaRPr lang="en-US"/>
           </a:p>
@@ -922,10 +930,9 @@
           </a:lstStyle>
           <a:p>
             <a:r>
-              <a:rPr lang="en-US" smtClean="0"/>
+              <a:rPr lang="en-US"/>
               <a:t>Click to edit Master title style</a:t>
             </a:r>
-            <a:endParaRPr lang="en-US"/>
           </a:p>
         </p:txBody>
       </p:sp>
@@ -1042,7 +1049,7 @@
           <a:p>
             <a:pPr lvl="0"/>
             <a:r>
-              <a:rPr lang="en-US" smtClean="0"/>
+              <a:rPr lang="en-US"/>
               <a:t>Click to edit Master text styles</a:t>
             </a:r>
           </a:p>
@@ -1065,7 +1072,7 @@
           <a:p>
             <a:fld id="{5BCAD085-E8A6-8845-BD4E-CB4CCA059FC4}" type="datetimeFigureOut">
               <a:rPr lang="en-US" smtClean="0"/>
-              <a:t>1/27/13</a:t>
+              <a:t>8/31/2026</a:t>
             </a:fld>
             <a:endParaRPr lang="en-US"/>
           </a:p>
@@ -1159,10 +1166,9 @@
           <a:lstStyle/>
           <a:p>
             <a:r>
-              <a:rPr lang="en-US" smtClean="0"/>
+              <a:rPr lang="en-US"/>
               <a:t>Click to edit Master title style</a:t>
             </a:r>
-            <a:endParaRPr lang="en-US"/>
           </a:p>
         </p:txBody>
       </p:sp>
@@ -1216,38 +1222,37 @@
           <a:p>
             <a:pPr lvl="0"/>
             <a:r>
-              <a:rPr lang="en-US" smtClean="0"/>
+              <a:rPr lang="en-US"/>
               <a:t>Click to edit Master text styles</a:t>
             </a:r>
           </a:p>
           <a:p>
             <a:pPr lvl="1"/>
             <a:r>
-              <a:rPr lang="en-US" smtClean="0"/>
+              <a:rPr lang="en-US"/>
               <a:t>Second level</a:t>
             </a:r>
           </a:p>
           <a:p>
             <a:pPr lvl="2"/>
             <a:r>
-              <a:rPr lang="en-US" smtClean="0"/>
+              <a:rPr lang="en-US"/>
               <a:t>Third level</a:t>
             </a:r>
           </a:p>
           <a:p>
             <a:pPr lvl="3"/>
             <a:r>
-              <a:rPr lang="en-US" smtClean="0"/>
+              <a:rPr lang="en-US"/>
               <a:t>Fourth level</a:t>
             </a:r>
           </a:p>
           <a:p>
             <a:pPr lvl="4"/>
             <a:r>
-              <a:rPr lang="en-US" smtClean="0"/>
+              <a:rPr lang="en-US"/>
               <a:t>Fifth level</a:t>
             </a:r>
-            <a:endParaRPr lang="en-US"/>
           </a:p>
         </p:txBody>
       </p:sp>
@@ -1301,38 +1306,37 @@
           <a:p>
             <a:pPr lvl="0"/>
             <a:r>
-              <a:rPr lang="en-US" smtClean="0"/>
+              <a:rPr lang="en-US"/>
               <a:t>Click to edit Master text styles</a:t>
             </a:r>
           </a:p>
           <a:p>
             <a:pPr lvl="1"/>
             <a:r>
-              <a:rPr lang="en-US" smtClean="0"/>
+              <a:rPr lang="en-US"/>
               <a:t>Second level</a:t>
             </a:r>
           </a:p>
           <a:p>
             <a:pPr lvl="2"/>
             <a:r>
-              <a:rPr lang="en-US" smtClean="0"/>
+              <a:rPr lang="en-US"/>
               <a:t>Third level</a:t>
             </a:r>
           </a:p>
           <a:p>
             <a:pPr lvl="3"/>
             <a:r>
-              <a:rPr lang="en-US" smtClean="0"/>
+              <a:rPr lang="en-US"/>
               <a:t>Fourth level</a:t>
             </a:r>
           </a:p>
           <a:p>
             <a:pPr lvl="4"/>
             <a:r>
-              <a:rPr lang="en-US" smtClean="0"/>
+              <a:rPr lang="en-US"/>
               <a:t>Fifth level</a:t>
             </a:r>
-            <a:endParaRPr lang="en-US"/>
           </a:p>
         </p:txBody>
       </p:sp>
@@ -1353,7 +1357,7 @@
           <a:p>
             <a:fld id="{5BCAD085-E8A6-8845-BD4E-CB4CCA059FC4}" type="datetimeFigureOut">
               <a:rPr lang="en-US" smtClean="0"/>
-              <a:t>1/27/13</a:t>
+              <a:t>8/31/2026</a:t>
             </a:fld>
             <a:endParaRPr lang="en-US"/>
           </a:p>
@@ -1451,10 +1455,9 @@
           </a:lstStyle>
           <a:p>
             <a:r>
-              <a:rPr lang="en-US" smtClean="0"/>
+              <a:rPr lang="en-US"/>
               <a:t>Click to edit Master title style</a:t>
             </a:r>
-            <a:endParaRPr lang="en-US"/>
           </a:p>
         </p:txBody>
       </p:sp>
@@ -1517,7 +1520,7 @@
           <a:p>
             <a:pPr lvl="0"/>
             <a:r>
-              <a:rPr lang="en-US" smtClean="0"/>
+              <a:rPr lang="en-US"/>
               <a:t>Click to edit Master text styles</a:t>
             </a:r>
           </a:p>
@@ -1573,38 +1576,37 @@
           <a:p>
             <a:pPr lvl="0"/>
             <a:r>
-              <a:rPr lang="en-US" smtClean="0"/>
+              <a:rPr lang="en-US"/>
               <a:t>Click to edit Master text styles</a:t>
             </a:r>
           </a:p>
           <a:p>
             <a:pPr lvl="1"/>
             <a:r>
-              <a:rPr lang="en-US" smtClean="0"/>
+              <a:rPr lang="en-US"/>
               <a:t>Second level</a:t>
             </a:r>
           </a:p>
           <a:p>
             <a:pPr lvl="2"/>
             <a:r>
-              <a:rPr lang="en-US" smtClean="0"/>
+              <a:rPr lang="en-US"/>
               <a:t>Third level</a:t>
             </a:r>
           </a:p>
           <a:p>
             <a:pPr lvl="3"/>
             <a:r>
-              <a:rPr lang="en-US" smtClean="0"/>
+              <a:rPr lang="en-US"/>
               <a:t>Fourth level</a:t>
             </a:r>
           </a:p>
           <a:p>
             <a:pPr lvl="4"/>
             <a:r>
-              <a:rPr lang="en-US" smtClean="0"/>
+              <a:rPr lang="en-US"/>
               <a:t>Fifth level</a:t>
             </a:r>
-            <a:endParaRPr lang="en-US"/>
           </a:p>
         </p:txBody>
       </p:sp>
@@ -1667,7 +1669,7 @@
           <a:p>
             <a:pPr lvl="0"/>
             <a:r>
-              <a:rPr lang="en-US" smtClean="0"/>
+              <a:rPr lang="en-US"/>
               <a:t>Click to edit Master text styles</a:t>
             </a:r>
           </a:p>
@@ -1723,38 +1725,37 @@
           <a:p>
             <a:pPr lvl="0"/>
             <a:r>
-              <a:rPr lang="en-US" smtClean="0"/>
+              <a:rPr lang="en-US"/>
               <a:t>Click to edit Master text styles</a:t>
             </a:r>
           </a:p>
           <a:p>
             <a:pPr lvl="1"/>
             <a:r>
-              <a:rPr lang="en-US" smtClean="0"/>
+              <a:rPr lang="en-US"/>
               <a:t>Second level</a:t>
             </a:r>
           </a:p>
           <a:p>
             <a:pPr lvl="2"/>
             <a:r>
-              <a:rPr lang="en-US" smtClean="0"/>
+              <a:rPr lang="en-US"/>
               <a:t>Third level</a:t>
             </a:r>
           </a:p>
           <a:p>
             <a:pPr lvl="3"/>
             <a:r>
-              <a:rPr lang="en-US" smtClean="0"/>
+              <a:rPr lang="en-US"/>
               <a:t>Fourth level</a:t>
             </a:r>
           </a:p>
           <a:p>
             <a:pPr lvl="4"/>
             <a:r>
-              <a:rPr lang="en-US" smtClean="0"/>
+              <a:rPr lang="en-US"/>
               <a:t>Fifth level</a:t>
             </a:r>
-            <a:endParaRPr lang="en-US"/>
           </a:p>
         </p:txBody>
       </p:sp>
@@ -1775,7 +1776,7 @@
           <a:p>
             <a:fld id="{5BCAD085-E8A6-8845-BD4E-CB4CCA059FC4}" type="datetimeFigureOut">
               <a:rPr lang="en-US" smtClean="0"/>
-              <a:t>1/27/13</a:t>
+              <a:t>8/31/2026</a:t>
             </a:fld>
             <a:endParaRPr lang="en-US"/>
           </a:p>
@@ -1869,10 +1870,9 @@
           <a:lstStyle/>
           <a:p>
             <a:r>
-              <a:rPr lang="en-US" smtClean="0"/>
+              <a:rPr lang="en-US"/>
               <a:t>Click to edit Master title style</a:t>
             </a:r>
-            <a:endParaRPr lang="en-US"/>
           </a:p>
         </p:txBody>
       </p:sp>
@@ -1893,7 +1893,7 @@
           <a:p>
             <a:fld id="{5BCAD085-E8A6-8845-BD4E-CB4CCA059FC4}" type="datetimeFigureOut">
               <a:rPr lang="en-US" smtClean="0"/>
-              <a:t>1/27/13</a:t>
+              <a:t>8/31/2026</a:t>
             </a:fld>
             <a:endParaRPr lang="en-US"/>
           </a:p>
@@ -1988,7 +1988,7 @@
           <a:p>
             <a:fld id="{5BCAD085-E8A6-8845-BD4E-CB4CCA059FC4}" type="datetimeFigureOut">
               <a:rPr lang="en-US" smtClean="0"/>
-              <a:t>1/27/13</a:t>
+              <a:t>8/31/2026</a:t>
             </a:fld>
             <a:endParaRPr lang="en-US"/>
           </a:p>
@@ -2091,10 +2091,9 @@
           </a:lstStyle>
           <a:p>
             <a:r>
-              <a:rPr lang="en-US" smtClean="0"/>
+              <a:rPr lang="en-US"/>
               <a:t>Click to edit Master title style</a:t>
             </a:r>
-            <a:endParaRPr lang="en-US"/>
           </a:p>
         </p:txBody>
       </p:sp>
@@ -2148,38 +2147,37 @@
           <a:p>
             <a:pPr lvl="0"/>
             <a:r>
-              <a:rPr lang="en-US" smtClean="0"/>
+              <a:rPr lang="en-US"/>
               <a:t>Click to edit Master text styles</a:t>
             </a:r>
           </a:p>
           <a:p>
             <a:pPr lvl="1"/>
             <a:r>
-              <a:rPr lang="en-US" smtClean="0"/>
+              <a:rPr lang="en-US"/>
               <a:t>Second level</a:t>
             </a:r>
           </a:p>
           <a:p>
             <a:pPr lvl="2"/>
             <a:r>
-              <a:rPr lang="en-US" smtClean="0"/>
+              <a:rPr lang="en-US"/>
               <a:t>Third level</a:t>
             </a:r>
           </a:p>
           <a:p>
             <a:pPr lvl="3"/>
             <a:r>
-              <a:rPr lang="en-US" smtClean="0"/>
+              <a:rPr lang="en-US"/>
               <a:t>Fourth level</a:t>
             </a:r>
           </a:p>
           <a:p>
             <a:pPr lvl="4"/>
             <a:r>
-              <a:rPr lang="en-US" smtClean="0"/>
+              <a:rPr lang="en-US"/>
               <a:t>Fifth level</a:t>
             </a:r>
-            <a:endParaRPr lang="en-US"/>
           </a:p>
         </p:txBody>
       </p:sp>
@@ -2242,7 +2240,7 @@
           <a:p>
             <a:pPr lvl="0"/>
             <a:r>
-              <a:rPr lang="en-US" smtClean="0"/>
+              <a:rPr lang="en-US"/>
               <a:t>Click to edit Master text styles</a:t>
             </a:r>
           </a:p>
@@ -2265,7 +2263,7 @@
           <a:p>
             <a:fld id="{5BCAD085-E8A6-8845-BD4E-CB4CCA059FC4}" type="datetimeFigureOut">
               <a:rPr lang="en-US" smtClean="0"/>
-              <a:t>1/27/13</a:t>
+              <a:t>8/31/2026</a:t>
             </a:fld>
             <a:endParaRPr lang="en-US"/>
           </a:p>
@@ -2368,10 +2366,9 @@
           </a:lstStyle>
           <a:p>
             <a:r>
-              <a:rPr lang="en-US" smtClean="0"/>
+              <a:rPr lang="en-US"/>
               <a:t>Click to edit Master title style</a:t>
             </a:r>
-            <a:endParaRPr lang="en-US"/>
           </a:p>
         </p:txBody>
       </p:sp>
@@ -2495,7 +2492,7 @@
           <a:p>
             <a:pPr lvl="0"/>
             <a:r>
-              <a:rPr lang="en-US" smtClean="0"/>
+              <a:rPr lang="en-US"/>
               <a:t>Click to edit Master text styles</a:t>
             </a:r>
           </a:p>
@@ -2518,7 +2515,7 @@
           <a:p>
             <a:fld id="{5BCAD085-E8A6-8845-BD4E-CB4CCA059FC4}" type="datetimeFigureOut">
               <a:rPr lang="en-US" smtClean="0"/>
-              <a:t>1/27/13</a:t>
+              <a:t>8/31/2026</a:t>
             </a:fld>
             <a:endParaRPr lang="en-US"/>
           </a:p>
@@ -2627,10 +2624,9 @@
           <a:lstStyle/>
           <a:p>
             <a:r>
-              <a:rPr lang="en-US" smtClean="0"/>
+              <a:rPr lang="en-US"/>
               <a:t>Click to edit Master title style</a:t>
             </a:r>
-            <a:endParaRPr lang="en-US"/>
           </a:p>
         </p:txBody>
       </p:sp>
@@ -2661,38 +2657,37 @@
           <a:p>
             <a:pPr lvl="0"/>
             <a:r>
-              <a:rPr lang="en-US" smtClean="0"/>
+              <a:rPr lang="en-US"/>
               <a:t>Click to edit Master text styles</a:t>
             </a:r>
           </a:p>
           <a:p>
             <a:pPr lvl="1"/>
             <a:r>
-              <a:rPr lang="en-US" smtClean="0"/>
+              <a:rPr lang="en-US"/>
               <a:t>Second level</a:t>
             </a:r>
           </a:p>
           <a:p>
             <a:pPr lvl="2"/>
             <a:r>
-              <a:rPr lang="en-US" smtClean="0"/>
+              <a:rPr lang="en-US"/>
               <a:t>Third level</a:t>
             </a:r>
           </a:p>
           <a:p>
             <a:pPr lvl="3"/>
             <a:r>
-              <a:rPr lang="en-US" smtClean="0"/>
+              <a:rPr lang="en-US"/>
               <a:t>Fourth level</a:t>
             </a:r>
           </a:p>
           <a:p>
             <a:pPr lvl="4"/>
             <a:r>
-              <a:rPr lang="en-US" smtClean="0"/>
+              <a:rPr lang="en-US"/>
               <a:t>Fifth level</a:t>
             </a:r>
-            <a:endParaRPr lang="en-US"/>
           </a:p>
         </p:txBody>
       </p:sp>
@@ -2731,7 +2726,7 @@
           <a:p>
             <a:fld id="{5BCAD085-E8A6-8845-BD4E-CB4CCA059FC4}" type="datetimeFigureOut">
               <a:rPr lang="en-US" smtClean="0"/>
-              <a:t>1/27/13</a:t>
+              <a:t>8/31/2026</a:t>
             </a:fld>
             <a:endParaRPr lang="en-US"/>
           </a:p>
@@ -3090,7 +3085,7 @@
 </file>
 
 <file path=ppt/slides/slide1.xml><?xml version="1.0" encoding="utf-8"?>
-<p:sld xmlns:a="http://schemas.openxmlformats.org/drawingml/2006/main" xmlns:p="http://schemas.openxmlformats.org/presentationml/2006/main" xmlns:r="http://schemas.openxmlformats.org/officeDocument/2006/relationships">
+<p:sld xmlns:a="http://schemas.openxmlformats.org/drawingml/2006/main" xmlns:r="http://schemas.openxmlformats.org/officeDocument/2006/relationships" xmlns:p="http://schemas.openxmlformats.org/presentationml/2006/main">
   <p:cSld>
     <p:bg>
       <p:bgPr>
@@ -3106,7 +3101,14 @@
         <p:cNvGrpSpPr/>
         <p:nvPr/>
       </p:nvGrpSpPr>
-      <p:grpSpPr/>
+      <p:grpSpPr>
+        <a:xfrm>
+          <a:off x="0" y="0"/>
+          <a:ext cx="0" cy="0"/>
+          <a:chOff x="0" y="0"/>
+          <a:chExt cx="0" cy="0"/>
+        </a:xfrm>
+      </p:grpSpPr>
       <p:sp>
         <p:nvSpPr>
           <p:cNvPr id="2" name="TextBox 1"/>
@@ -3124,7 +3126,7 @@
           <a:noFill/>
         </p:spPr>
         <p:txBody>
-          <a:bodyPr wrap="square" anchor="t" lIns="0" rIns="0" tIns="0" bIns="0">
+          <a:bodyPr wrap="square" lIns="0" tIns="0" rIns="0" bIns="0" anchor="t">
             <a:spAutoFit/>
           </a:bodyPr>
           <a:lstStyle/>
@@ -3163,7 +3165,7 @@
           <a:noFill/>
         </p:spPr>
         <p:txBody>
-          <a:bodyPr wrap="square" anchor="t" lIns="0" rIns="0" tIns="0" bIns="0">
+          <a:bodyPr wrap="square" lIns="0" tIns="0" rIns="0" bIns="0" anchor="t">
             <a:spAutoFit/>
           </a:bodyPr>
           <a:lstStyle/>
@@ -3202,7 +3204,7 @@
           <a:noFill/>
         </p:spPr>
         <p:txBody>
-          <a:bodyPr wrap="square" anchor="t" lIns="0" rIns="0" tIns="0" bIns="0">
+          <a:bodyPr wrap="square" lIns="0" tIns="0" rIns="0" bIns="0" anchor="t">
             <a:spAutoFit/>
           </a:bodyPr>
           <a:lstStyle/>
@@ -3250,7 +3252,7 @@
           <a:noFill/>
         </p:spPr>
         <p:txBody>
-          <a:bodyPr wrap="square" anchor="t" lIns="0" rIns="0" tIns="0" bIns="0">
+          <a:bodyPr wrap="square" lIns="0" tIns="0" rIns="0" bIns="0" anchor="t">
             <a:spAutoFit/>
           </a:bodyPr>
           <a:lstStyle/>
@@ -3281,7 +3283,7 @@
 </file>
 
 <file path=ppt/slides/slide10.xml><?xml version="1.0" encoding="utf-8"?>
-<p:sld xmlns:a="http://schemas.openxmlformats.org/drawingml/2006/main" xmlns:p="http://schemas.openxmlformats.org/presentationml/2006/main" xmlns:r="http://schemas.openxmlformats.org/officeDocument/2006/relationships">
+<p:sld xmlns:a="http://schemas.openxmlformats.org/drawingml/2006/main" xmlns:r="http://schemas.openxmlformats.org/officeDocument/2006/relationships" xmlns:p="http://schemas.openxmlformats.org/presentationml/2006/main">
   <p:cSld>
     <p:bg>
       <p:bgPr>
@@ -3297,7 +3299,14 @@
         <p:cNvGrpSpPr/>
         <p:nvPr/>
       </p:nvGrpSpPr>
-      <p:grpSpPr/>
+      <p:grpSpPr>
+        <a:xfrm>
+          <a:off x="0" y="0"/>
+          <a:ext cx="0" cy="0"/>
+          <a:chOff x="0" y="0"/>
+          <a:chExt cx="0" cy="0"/>
+        </a:xfrm>
+      </p:grpSpPr>
       <p:sp>
         <p:nvSpPr>
           <p:cNvPr id="2" name="TextBox 1"/>
@@ -3315,7 +3324,7 @@
           <a:noFill/>
         </p:spPr>
         <p:txBody>
-          <a:bodyPr wrap="square" anchor="t" lIns="0" rIns="0" tIns="0" bIns="0">
+          <a:bodyPr wrap="square" lIns="0" tIns="0" rIns="0" bIns="0" anchor="t">
             <a:spAutoFit/>
           </a:bodyPr>
           <a:lstStyle/>
@@ -3354,7 +3363,7 @@
           <a:noFill/>
         </p:spPr>
         <p:txBody>
-          <a:bodyPr wrap="square" anchor="t" lIns="0" rIns="0" tIns="0" bIns="0">
+          <a:bodyPr wrap="square" lIns="0" tIns="0" rIns="0" bIns="0" anchor="t">
             <a:spAutoFit/>
           </a:bodyPr>
           <a:lstStyle/>
@@ -3420,7 +3429,9 @@
         <p:txBody>
           <a:bodyPr rtlCol="0" anchor="ctr"/>
           <a:lstStyle/>
-          <a:p/>
+          <a:p>
+            <a:endParaRPr/>
+          </a:p>
         </p:txBody>
       </p:sp>
       <p:sp>
@@ -3440,7 +3451,7 @@
           <a:noFill/>
         </p:spPr>
         <p:txBody>
-          <a:bodyPr wrap="square" anchor="t" lIns="0" rIns="0" tIns="0" bIns="0">
+          <a:bodyPr wrap="square" lIns="0" tIns="0" rIns="0" bIns="0" anchor="t">
             <a:spAutoFit/>
           </a:bodyPr>
           <a:lstStyle/>
@@ -3479,7 +3490,7 @@
           <a:noFill/>
         </p:spPr>
         <p:txBody>
-          <a:bodyPr wrap="square" anchor="t" lIns="0" rIns="0" tIns="0" bIns="0">
+          <a:bodyPr wrap="square" lIns="0" tIns="0" rIns="0" bIns="0" anchor="t">
             <a:spAutoFit/>
           </a:bodyPr>
           <a:lstStyle/>
@@ -3544,7 +3555,9 @@
         <p:txBody>
           <a:bodyPr rtlCol="0" anchor="ctr"/>
           <a:lstStyle/>
-          <a:p/>
+          <a:p>
+            <a:endParaRPr/>
+          </a:p>
         </p:txBody>
       </p:sp>
       <p:sp>
@@ -3564,7 +3577,7 @@
           <a:noFill/>
         </p:spPr>
         <p:txBody>
-          <a:bodyPr wrap="square" anchor="t" lIns="0" rIns="0" tIns="0" bIns="0">
+          <a:bodyPr wrap="square" lIns="0" tIns="0" rIns="0" bIns="0" anchor="t">
             <a:spAutoFit/>
           </a:bodyPr>
           <a:lstStyle/>
@@ -3603,7 +3616,7 @@
           <a:noFill/>
         </p:spPr>
         <p:txBody>
-          <a:bodyPr wrap="square" anchor="t" lIns="0" rIns="0" tIns="0" bIns="0">
+          <a:bodyPr wrap="square" lIns="0" tIns="0" rIns="0" bIns="0" anchor="t">
             <a:spAutoFit/>
           </a:bodyPr>
           <a:lstStyle/>
@@ -3668,7 +3681,9 @@
         <p:txBody>
           <a:bodyPr rtlCol="0" anchor="ctr"/>
           <a:lstStyle/>
-          <a:p/>
+          <a:p>
+            <a:endParaRPr/>
+          </a:p>
         </p:txBody>
       </p:sp>
       <p:sp>
@@ -3688,7 +3703,7 @@
           <a:noFill/>
         </p:spPr>
         <p:txBody>
-          <a:bodyPr wrap="square" anchor="t" lIns="0" rIns="0" tIns="0" bIns="0">
+          <a:bodyPr wrap="square" lIns="0" tIns="0" rIns="0" bIns="0" anchor="t">
             <a:spAutoFit/>
           </a:bodyPr>
           <a:lstStyle/>
@@ -3727,7 +3742,7 @@
           <a:noFill/>
         </p:spPr>
         <p:txBody>
-          <a:bodyPr wrap="square" anchor="t" lIns="0" rIns="0" tIns="0" bIns="0">
+          <a:bodyPr wrap="square" lIns="0" tIns="0" rIns="0" bIns="0" anchor="t">
             <a:spAutoFit/>
           </a:bodyPr>
           <a:lstStyle/>
@@ -3792,7 +3807,9 @@
         <p:txBody>
           <a:bodyPr rtlCol="0" anchor="ctr"/>
           <a:lstStyle/>
-          <a:p/>
+          <a:p>
+            <a:endParaRPr/>
+          </a:p>
         </p:txBody>
       </p:sp>
       <p:sp>
@@ -3812,7 +3829,7 @@
           <a:noFill/>
         </p:spPr>
         <p:txBody>
-          <a:bodyPr wrap="square" anchor="t" lIns="0" rIns="0" tIns="0" bIns="0">
+          <a:bodyPr wrap="square" lIns="0" tIns="0" rIns="0" bIns="0" anchor="t">
             <a:spAutoFit/>
           </a:bodyPr>
           <a:lstStyle/>
@@ -3851,7 +3868,7 @@
           <a:noFill/>
         </p:spPr>
         <p:txBody>
-          <a:bodyPr wrap="square" anchor="t" lIns="0" rIns="0" tIns="0" bIns="0">
+          <a:bodyPr wrap="square" lIns="0" tIns="0" rIns="0" bIns="0" anchor="t">
             <a:spAutoFit/>
           </a:bodyPr>
           <a:lstStyle/>
@@ -3916,7 +3933,9 @@
         <p:txBody>
           <a:bodyPr rtlCol="0" anchor="ctr"/>
           <a:lstStyle/>
-          <a:p/>
+          <a:p>
+            <a:endParaRPr/>
+          </a:p>
         </p:txBody>
       </p:sp>
       <p:sp>
@@ -3936,7 +3955,7 @@
           <a:noFill/>
         </p:spPr>
         <p:txBody>
-          <a:bodyPr wrap="square" anchor="t" lIns="0" rIns="0" tIns="0" bIns="0">
+          <a:bodyPr wrap="square" lIns="0" tIns="0" rIns="0" bIns="0" anchor="t">
             <a:spAutoFit/>
           </a:bodyPr>
           <a:lstStyle/>
@@ -3975,7 +3994,7 @@
           <a:noFill/>
         </p:spPr>
         <p:txBody>
-          <a:bodyPr wrap="square" anchor="t" lIns="0" rIns="0" tIns="0" bIns="0">
+          <a:bodyPr wrap="square" lIns="0" tIns="0" rIns="0" bIns="0" anchor="t">
             <a:spAutoFit/>
           </a:bodyPr>
           <a:lstStyle/>
@@ -4040,7 +4059,9 @@
         <p:txBody>
           <a:bodyPr rtlCol="0" anchor="ctr"/>
           <a:lstStyle/>
-          <a:p/>
+          <a:p>
+            <a:endParaRPr/>
+          </a:p>
         </p:txBody>
       </p:sp>
       <p:sp>
@@ -4060,7 +4081,7 @@
           <a:noFill/>
         </p:spPr>
         <p:txBody>
-          <a:bodyPr wrap="square" anchor="t" lIns="0" rIns="0" tIns="0" bIns="0">
+          <a:bodyPr wrap="square" lIns="0" tIns="0" rIns="0" bIns="0" anchor="t">
             <a:spAutoFit/>
           </a:bodyPr>
           <a:lstStyle/>
@@ -4099,7 +4120,7 @@
           <a:noFill/>
         </p:spPr>
         <p:txBody>
-          <a:bodyPr wrap="square" lIns="0" rIns="0" tIns="0" bIns="0">
+          <a:bodyPr wrap="square" lIns="0" tIns="0" rIns="0" bIns="0">
             <a:spAutoFit/>
           </a:bodyPr>
           <a:lstStyle/>
@@ -4195,7 +4216,9 @@
         <p:txBody>
           <a:bodyPr rtlCol="0" anchor="ctr"/>
           <a:lstStyle/>
-          <a:p/>
+          <a:p>
+            <a:endParaRPr/>
+          </a:p>
         </p:txBody>
       </p:sp>
       <p:sp>
@@ -4215,7 +4238,7 @@
           <a:noFill/>
         </p:spPr>
         <p:txBody>
-          <a:bodyPr wrap="square" anchor="t" lIns="0" rIns="0" tIns="0" bIns="0">
+          <a:bodyPr wrap="square" lIns="0" tIns="0" rIns="0" bIns="0" anchor="t">
             <a:spAutoFit/>
           </a:bodyPr>
           <a:lstStyle/>
@@ -4254,7 +4277,7 @@
           <a:noFill/>
         </p:spPr>
         <p:txBody>
-          <a:bodyPr wrap="square" anchor="t" lIns="0" rIns="0" tIns="0" bIns="0">
+          <a:bodyPr wrap="square" lIns="0" tIns="0" rIns="0" bIns="0" anchor="t">
             <a:spAutoFit/>
           </a:bodyPr>
           <a:lstStyle/>
@@ -4296,7 +4319,7 @@
           <a:noFill/>
         </p:spPr>
         <p:txBody>
-          <a:bodyPr wrap="square" anchor="t" lIns="0" rIns="0" tIns="0" bIns="0">
+          <a:bodyPr wrap="square" lIns="0" tIns="0" rIns="0" bIns="0" anchor="t">
             <a:spAutoFit/>
           </a:bodyPr>
           <a:lstStyle/>
@@ -4335,7 +4358,7 @@
           <a:noFill/>
         </p:spPr>
         <p:txBody>
-          <a:bodyPr wrap="square" anchor="t" lIns="0" rIns="0" tIns="0" bIns="0">
+          <a:bodyPr wrap="square" lIns="0" tIns="0" rIns="0" bIns="0" anchor="t">
             <a:spAutoFit/>
           </a:bodyPr>
           <a:lstStyle/>
@@ -4396,7 +4419,9 @@
         <p:txBody>
           <a:bodyPr rtlCol="0" anchor="ctr"/>
           <a:lstStyle/>
-          <a:p/>
+          <a:p>
+            <a:endParaRPr/>
+          </a:p>
         </p:txBody>
       </p:sp>
     </p:spTree>
@@ -4408,7 +4433,7 @@
 </file>
 
 <file path=ppt/slides/slide11.xml><?xml version="1.0" encoding="utf-8"?>
-<p:sld xmlns:a="http://schemas.openxmlformats.org/drawingml/2006/main" xmlns:p="http://schemas.openxmlformats.org/presentationml/2006/main" xmlns:r="http://schemas.openxmlformats.org/officeDocument/2006/relationships">
+<p:sld xmlns:a="http://schemas.openxmlformats.org/drawingml/2006/main" xmlns:r="http://schemas.openxmlformats.org/officeDocument/2006/relationships" xmlns:p="http://schemas.openxmlformats.org/presentationml/2006/main">
   <p:cSld>
     <p:bg>
       <p:bgPr>
@@ -4424,7 +4449,14 @@
         <p:cNvGrpSpPr/>
         <p:nvPr/>
       </p:nvGrpSpPr>
-      <p:grpSpPr/>
+      <p:grpSpPr>
+        <a:xfrm>
+          <a:off x="0" y="0"/>
+          <a:ext cx="0" cy="0"/>
+          <a:chOff x="0" y="0"/>
+          <a:chExt cx="0" cy="0"/>
+        </a:xfrm>
+      </p:grpSpPr>
       <p:sp>
         <p:nvSpPr>
           <p:cNvPr id="2" name="TextBox 1"/>
@@ -4442,7 +4474,7 @@
           <a:noFill/>
         </p:spPr>
         <p:txBody>
-          <a:bodyPr wrap="square" anchor="t" lIns="0" rIns="0" tIns="0" bIns="0">
+          <a:bodyPr wrap="square" lIns="0" tIns="0" rIns="0" bIns="0" anchor="t">
             <a:spAutoFit/>
           </a:bodyPr>
           <a:lstStyle/>
@@ -4481,7 +4513,7 @@
           <a:noFill/>
         </p:spPr>
         <p:txBody>
-          <a:bodyPr wrap="square" anchor="t" lIns="0" rIns="0" tIns="0" bIns="0">
+          <a:bodyPr wrap="square" lIns="0" tIns="0" rIns="0" bIns="0" anchor="t">
             <a:spAutoFit/>
           </a:bodyPr>
           <a:lstStyle/>
@@ -4521,7 +4553,7 @@
           <a:noFill/>
         </p:spPr>
         <p:txBody>
-          <a:bodyPr wrap="square" lIns="0" rIns="0" tIns="0" bIns="0">
+          <a:bodyPr wrap="square" lIns="0" tIns="0" rIns="0" bIns="0">
             <a:spAutoFit/>
           </a:bodyPr>
           <a:lstStyle/>
@@ -4591,7 +4623,7 @@
           <a:noFill/>
         </p:spPr>
         <p:txBody>
-          <a:bodyPr wrap="square" anchor="t" lIns="0" rIns="0" tIns="0" bIns="0">
+          <a:bodyPr wrap="square" lIns="0" tIns="0" rIns="0" bIns="0" anchor="t">
             <a:spAutoFit/>
           </a:bodyPr>
           <a:lstStyle/>
@@ -4630,7 +4662,7 @@
           <a:noFill/>
         </p:spPr>
         <p:txBody>
-          <a:bodyPr wrap="square" anchor="t" lIns="0" rIns="0" tIns="0" bIns="0">
+          <a:bodyPr wrap="square" lIns="0" tIns="0" rIns="0" bIns="0" anchor="t">
             <a:spAutoFit/>
           </a:bodyPr>
           <a:lstStyle/>
@@ -4669,7 +4701,7 @@
           <a:noFill/>
         </p:spPr>
         <p:txBody>
-          <a:bodyPr wrap="square" anchor="t" lIns="0" rIns="0" tIns="0" bIns="0">
+          <a:bodyPr wrap="square" lIns="0" tIns="0" rIns="0" bIns="0" anchor="t">
             <a:spAutoFit/>
           </a:bodyPr>
           <a:lstStyle/>
@@ -4686,7 +4718,7 @@
                 </a:solidFill>
                 <a:latin typeface="Consolas"/>
               </a:rPr>
-              <a:t>207</a:t>
+              <a:t>236</a:t>
             </a:r>
           </a:p>
         </p:txBody>
@@ -4708,7 +4740,7 @@
           <a:noFill/>
         </p:spPr>
         <p:txBody>
-          <a:bodyPr wrap="square" anchor="t" lIns="0" rIns="0" tIns="0" bIns="0">
+          <a:bodyPr wrap="square" lIns="0" tIns="0" rIns="0" bIns="0" anchor="t">
             <a:spAutoFit/>
           </a:bodyPr>
           <a:lstStyle/>
@@ -4747,7 +4779,7 @@
           <a:noFill/>
         </p:spPr>
         <p:txBody>
-          <a:bodyPr wrap="square" anchor="t" lIns="0" rIns="0" tIns="0" bIns="0">
+          <a:bodyPr wrap="square" lIns="0" tIns="0" rIns="0" bIns="0" anchor="t">
             <a:spAutoFit/>
           </a:bodyPr>
           <a:lstStyle/>
@@ -4786,7 +4818,7 @@
           <a:noFill/>
         </p:spPr>
         <p:txBody>
-          <a:bodyPr wrap="square" anchor="t" lIns="0" rIns="0" tIns="0" bIns="0">
+          <a:bodyPr wrap="square" lIns="0" tIns="0" rIns="0" bIns="0" anchor="t">
             <a:spAutoFit/>
           </a:bodyPr>
           <a:lstStyle/>
@@ -4825,7 +4857,7 @@
           <a:noFill/>
         </p:spPr>
         <p:txBody>
-          <a:bodyPr wrap="square" anchor="t" lIns="0" rIns="0" tIns="0" bIns="0">
+          <a:bodyPr wrap="square" lIns="0" tIns="0" rIns="0" bIns="0" anchor="t">
             <a:spAutoFit/>
           </a:bodyPr>
           <a:lstStyle/>
@@ -4864,7 +4896,7 @@
           <a:noFill/>
         </p:spPr>
         <p:txBody>
-          <a:bodyPr wrap="square" anchor="t" lIns="0" rIns="0" tIns="0" bIns="0">
+          <a:bodyPr wrap="square" lIns="0" tIns="0" rIns="0" bIns="0" anchor="t">
             <a:spAutoFit/>
           </a:bodyPr>
           <a:lstStyle/>
@@ -4903,7 +4935,7 @@
           <a:noFill/>
         </p:spPr>
         <p:txBody>
-          <a:bodyPr wrap="square" anchor="t" lIns="0" rIns="0" tIns="0" bIns="0">
+          <a:bodyPr wrap="square" lIns="0" tIns="0" rIns="0" bIns="0" anchor="t">
             <a:spAutoFit/>
           </a:bodyPr>
           <a:lstStyle/>
@@ -4942,7 +4974,7 @@
           <a:noFill/>
         </p:spPr>
         <p:txBody>
-          <a:bodyPr wrap="square" anchor="t" lIns="0" rIns="0" tIns="0" bIns="0">
+          <a:bodyPr wrap="square" lIns="0" tIns="0" rIns="0" bIns="0" anchor="t">
             <a:spAutoFit/>
           </a:bodyPr>
           <a:lstStyle/>
@@ -4981,7 +5013,7 @@
           <a:noFill/>
         </p:spPr>
         <p:txBody>
-          <a:bodyPr wrap="square" anchor="t" lIns="0" rIns="0" tIns="0" bIns="0">
+          <a:bodyPr wrap="square" lIns="0" tIns="0" rIns="0" bIns="0" anchor="t">
             <a:spAutoFit/>
           </a:bodyPr>
           <a:lstStyle/>
@@ -5020,7 +5052,7 @@
           <a:noFill/>
         </p:spPr>
         <p:txBody>
-          <a:bodyPr wrap="square" anchor="t" lIns="0" rIns="0" tIns="0" bIns="0">
+          <a:bodyPr wrap="square" lIns="0" tIns="0" rIns="0" bIns="0" anchor="t">
             <a:spAutoFit/>
           </a:bodyPr>
           <a:lstStyle/>
@@ -5081,7 +5113,9 @@
         <p:txBody>
           <a:bodyPr rtlCol="0" anchor="ctr"/>
           <a:lstStyle/>
-          <a:p/>
+          <a:p>
+            <a:endParaRPr/>
+          </a:p>
         </p:txBody>
       </p:sp>
     </p:spTree>
@@ -5093,7 +5127,7 @@
 </file>
 
 <file path=ppt/slides/slide12.xml><?xml version="1.0" encoding="utf-8"?>
-<p:sld xmlns:a="http://schemas.openxmlformats.org/drawingml/2006/main" xmlns:p="http://schemas.openxmlformats.org/presentationml/2006/main" xmlns:r="http://schemas.openxmlformats.org/officeDocument/2006/relationships">
+<p:sld xmlns:a="http://schemas.openxmlformats.org/drawingml/2006/main" xmlns:r="http://schemas.openxmlformats.org/officeDocument/2006/relationships" xmlns:p="http://schemas.openxmlformats.org/presentationml/2006/main">
   <p:cSld>
     <p:bg>
       <p:bgPr>
@@ -5109,7 +5143,14 @@
         <p:cNvGrpSpPr/>
         <p:nvPr/>
       </p:nvGrpSpPr>
-      <p:grpSpPr/>
+      <p:grpSpPr>
+        <a:xfrm>
+          <a:off x="0" y="0"/>
+          <a:ext cx="0" cy="0"/>
+          <a:chOff x="0" y="0"/>
+          <a:chExt cx="0" cy="0"/>
+        </a:xfrm>
+      </p:grpSpPr>
       <p:sp>
         <p:nvSpPr>
           <p:cNvPr id="2" name="TextBox 1"/>
@@ -5127,7 +5168,7 @@
           <a:noFill/>
         </p:spPr>
         <p:txBody>
-          <a:bodyPr wrap="square" anchor="t" lIns="0" rIns="0" tIns="0" bIns="0">
+          <a:bodyPr wrap="square" lIns="0" tIns="0" rIns="0" bIns="0" anchor="t">
             <a:spAutoFit/>
           </a:bodyPr>
           <a:lstStyle/>
@@ -5166,7 +5207,7 @@
           <a:noFill/>
         </p:spPr>
         <p:txBody>
-          <a:bodyPr wrap="square" anchor="t" lIns="0" rIns="0" tIns="0" bIns="0">
+          <a:bodyPr wrap="square" lIns="0" tIns="0" rIns="0" bIns="0" anchor="t">
             <a:spAutoFit/>
           </a:bodyPr>
           <a:lstStyle/>
@@ -5205,7 +5246,7 @@
           <a:noFill/>
         </p:spPr>
         <p:txBody>
-          <a:bodyPr wrap="square" anchor="t" lIns="0" rIns="0" tIns="0" bIns="0">
+          <a:bodyPr wrap="square" lIns="0" tIns="0" rIns="0" bIns="0" anchor="t">
             <a:spAutoFit/>
           </a:bodyPr>
           <a:lstStyle/>
@@ -5244,7 +5285,7 @@
           <a:noFill/>
         </p:spPr>
         <p:txBody>
-          <a:bodyPr wrap="square" anchor="t" lIns="0" rIns="0" tIns="0" bIns="0">
+          <a:bodyPr wrap="square" lIns="0" tIns="0" rIns="0" bIns="0" anchor="t">
             <a:spAutoFit/>
           </a:bodyPr>
           <a:lstStyle/>
@@ -5292,7 +5333,7 @@
           <a:noFill/>
         </p:spPr>
         <p:txBody>
-          <a:bodyPr wrap="square" anchor="t" lIns="0" rIns="0" tIns="0" bIns="0">
+          <a:bodyPr wrap="square" lIns="0" tIns="0" rIns="0" bIns="0" anchor="t">
             <a:spAutoFit/>
           </a:bodyPr>
           <a:lstStyle/>
@@ -5331,7 +5372,7 @@
           <a:noFill/>
         </p:spPr>
         <p:txBody>
-          <a:bodyPr wrap="square" anchor="t" lIns="0" rIns="0" tIns="0" bIns="0">
+          <a:bodyPr wrap="square" lIns="0" tIns="0" rIns="0" bIns="0" anchor="t">
             <a:spAutoFit/>
           </a:bodyPr>
           <a:lstStyle/>
@@ -5379,7 +5420,7 @@
           <a:noFill/>
         </p:spPr>
         <p:txBody>
-          <a:bodyPr wrap="square" anchor="t" lIns="0" rIns="0" tIns="0" bIns="0">
+          <a:bodyPr wrap="square" lIns="0" tIns="0" rIns="0" bIns="0" anchor="t">
             <a:spAutoFit/>
           </a:bodyPr>
           <a:lstStyle/>
@@ -5418,7 +5459,7 @@
           <a:noFill/>
         </p:spPr>
         <p:txBody>
-          <a:bodyPr wrap="square" anchor="t" lIns="0" rIns="0" tIns="0" bIns="0">
+          <a:bodyPr wrap="square" lIns="0" tIns="0" rIns="0" bIns="0" anchor="t">
             <a:spAutoFit/>
           </a:bodyPr>
           <a:lstStyle/>
@@ -5466,7 +5507,7 @@
           <a:noFill/>
         </p:spPr>
         <p:txBody>
-          <a:bodyPr wrap="square" anchor="t" lIns="0" rIns="0" tIns="0" bIns="0">
+          <a:bodyPr wrap="square" lIns="0" tIns="0" rIns="0" bIns="0" anchor="t">
             <a:spAutoFit/>
           </a:bodyPr>
           <a:lstStyle/>
@@ -5505,7 +5546,7 @@
           <a:noFill/>
         </p:spPr>
         <p:txBody>
-          <a:bodyPr wrap="square" anchor="t" lIns="0" rIns="0" tIns="0" bIns="0">
+          <a:bodyPr wrap="square" lIns="0" tIns="0" rIns="0" bIns="0" anchor="t">
             <a:spAutoFit/>
           </a:bodyPr>
           <a:lstStyle/>
@@ -5553,7 +5594,7 @@
           <a:noFill/>
         </p:spPr>
         <p:txBody>
-          <a:bodyPr wrap="square" anchor="t" lIns="0" rIns="0" tIns="0" bIns="0">
+          <a:bodyPr wrap="square" lIns="0" tIns="0" rIns="0" bIns="0" anchor="t">
             <a:spAutoFit/>
           </a:bodyPr>
           <a:lstStyle/>
@@ -5592,7 +5633,7 @@
           <a:noFill/>
         </p:spPr>
         <p:txBody>
-          <a:bodyPr wrap="square" anchor="t" lIns="0" rIns="0" tIns="0" bIns="0">
+          <a:bodyPr wrap="square" lIns="0" tIns="0" rIns="0" bIns="0" anchor="t">
             <a:spAutoFit/>
           </a:bodyPr>
           <a:lstStyle/>
@@ -5640,7 +5681,7 @@
           <a:noFill/>
         </p:spPr>
         <p:txBody>
-          <a:bodyPr wrap="square" anchor="t" lIns="0" rIns="0" tIns="0" bIns="0">
+          <a:bodyPr wrap="square" lIns="0" tIns="0" rIns="0" bIns="0" anchor="t">
             <a:spAutoFit/>
           </a:bodyPr>
           <a:lstStyle/>
@@ -5679,7 +5720,7 @@
           <a:noFill/>
         </p:spPr>
         <p:txBody>
-          <a:bodyPr wrap="square" anchor="t" lIns="0" rIns="0" tIns="0" bIns="0">
+          <a:bodyPr wrap="square" lIns="0" tIns="0" rIns="0" bIns="0" anchor="t">
             <a:spAutoFit/>
           </a:bodyPr>
           <a:lstStyle/>
@@ -5727,7 +5768,7 @@
           <a:noFill/>
         </p:spPr>
         <p:txBody>
-          <a:bodyPr wrap="square" anchor="t" lIns="0" rIns="0" tIns="0" bIns="0">
+          <a:bodyPr wrap="square" lIns="0" tIns="0" rIns="0" bIns="0" anchor="t">
             <a:spAutoFit/>
           </a:bodyPr>
           <a:lstStyle/>
@@ -5758,7 +5799,7 @@
 </file>
 
 <file path=ppt/slides/slide2.xml><?xml version="1.0" encoding="utf-8"?>
-<p:sld xmlns:a="http://schemas.openxmlformats.org/drawingml/2006/main" xmlns:p="http://schemas.openxmlformats.org/presentationml/2006/main" xmlns:r="http://schemas.openxmlformats.org/officeDocument/2006/relationships">
+<p:sld xmlns:a="http://schemas.openxmlformats.org/drawingml/2006/main" xmlns:r="http://schemas.openxmlformats.org/officeDocument/2006/relationships" xmlns:p="http://schemas.openxmlformats.org/presentationml/2006/main">
   <p:cSld>
     <p:bg>
       <p:bgPr>
@@ -5774,7 +5815,14 @@
         <p:cNvGrpSpPr/>
         <p:nvPr/>
       </p:nvGrpSpPr>
-      <p:grpSpPr/>
+      <p:grpSpPr>
+        <a:xfrm>
+          <a:off x="0" y="0"/>
+          <a:ext cx="0" cy="0"/>
+          <a:chOff x="0" y="0"/>
+          <a:chExt cx="0" cy="0"/>
+        </a:xfrm>
+      </p:grpSpPr>
       <p:sp>
         <p:nvSpPr>
           <p:cNvPr id="2" name="TextBox 1"/>
@@ -5792,7 +5840,7 @@
           <a:noFill/>
         </p:spPr>
         <p:txBody>
-          <a:bodyPr wrap="square" anchor="t" lIns="0" rIns="0" tIns="0" bIns="0">
+          <a:bodyPr wrap="square" lIns="0" tIns="0" rIns="0" bIns="0" anchor="t">
             <a:spAutoFit/>
           </a:bodyPr>
           <a:lstStyle/>
@@ -5831,7 +5879,7 @@
           <a:noFill/>
         </p:spPr>
         <p:txBody>
-          <a:bodyPr wrap="square" anchor="t" lIns="0" rIns="0" tIns="0" bIns="0">
+          <a:bodyPr wrap="square" lIns="0" tIns="0" rIns="0" bIns="0" anchor="t">
             <a:spAutoFit/>
           </a:bodyPr>
           <a:lstStyle/>
@@ -5871,7 +5919,7 @@
           <a:noFill/>
         </p:spPr>
         <p:txBody>
-          <a:bodyPr wrap="square" lIns="0" rIns="0" tIns="0" bIns="0">
+          <a:bodyPr wrap="square" lIns="0" tIns="0" rIns="0" bIns="0">
             <a:spAutoFit/>
           </a:bodyPr>
           <a:lstStyle/>
@@ -5958,7 +6006,9 @@
         <p:txBody>
           <a:bodyPr rtlCol="0" anchor="ctr"/>
           <a:lstStyle/>
-          <a:p/>
+          <a:p>
+            <a:endParaRPr/>
+          </a:p>
         </p:txBody>
       </p:sp>
       <p:sp>
@@ -5978,7 +6028,7 @@
           <a:noFill/>
         </p:spPr>
         <p:txBody>
-          <a:bodyPr wrap="square" anchor="t" lIns="0" rIns="0" tIns="0" bIns="0">
+          <a:bodyPr wrap="square" lIns="0" tIns="0" rIns="0" bIns="0" anchor="t">
             <a:spAutoFit/>
           </a:bodyPr>
           <a:lstStyle/>
@@ -6017,7 +6067,7 @@
           <a:noFill/>
         </p:spPr>
         <p:txBody>
-          <a:bodyPr wrap="square" anchor="t" lIns="0" rIns="0" tIns="0" bIns="0">
+          <a:bodyPr wrap="square" lIns="0" tIns="0" rIns="0" bIns="0" anchor="t">
             <a:spAutoFit/>
           </a:bodyPr>
           <a:lstStyle/>
@@ -6057,7 +6107,7 @@
           <a:noFill/>
         </p:spPr>
         <p:txBody>
-          <a:bodyPr wrap="square" anchor="t" lIns="0" rIns="0" tIns="0" bIns="0">
+          <a:bodyPr wrap="square" lIns="0" tIns="0" rIns="0" bIns="0" anchor="t">
             <a:spAutoFit/>
           </a:bodyPr>
           <a:lstStyle/>
@@ -6096,7 +6146,7 @@
           <a:noFill/>
         </p:spPr>
         <p:txBody>
-          <a:bodyPr wrap="square" anchor="t" lIns="0" rIns="0" tIns="0" bIns="0">
+          <a:bodyPr wrap="square" lIns="0" tIns="0" rIns="0" bIns="0" anchor="t">
             <a:spAutoFit/>
           </a:bodyPr>
           <a:lstStyle/>
@@ -6135,7 +6185,7 @@
           <a:noFill/>
         </p:spPr>
         <p:txBody>
-          <a:bodyPr wrap="square" anchor="t" lIns="0" rIns="0" tIns="0" bIns="0">
+          <a:bodyPr wrap="square" lIns="0" tIns="0" rIns="0" bIns="0" anchor="t">
             <a:spAutoFit/>
           </a:bodyPr>
           <a:lstStyle/>
@@ -6196,7 +6246,9 @@
         <p:txBody>
           <a:bodyPr rtlCol="0" anchor="ctr"/>
           <a:lstStyle/>
-          <a:p/>
+          <a:p>
+            <a:endParaRPr/>
+          </a:p>
         </p:txBody>
       </p:sp>
     </p:spTree>
@@ -6208,7 +6260,7 @@
 </file>
 
 <file path=ppt/slides/slide3.xml><?xml version="1.0" encoding="utf-8"?>
-<p:sld xmlns:a="http://schemas.openxmlformats.org/drawingml/2006/main" xmlns:p="http://schemas.openxmlformats.org/presentationml/2006/main" xmlns:r="http://schemas.openxmlformats.org/officeDocument/2006/relationships">
+<p:sld xmlns:a="http://schemas.openxmlformats.org/drawingml/2006/main" xmlns:r="http://schemas.openxmlformats.org/officeDocument/2006/relationships" xmlns:p="http://schemas.openxmlformats.org/presentationml/2006/main">
   <p:cSld>
     <p:bg>
       <p:bgPr>
@@ -6224,7 +6276,14 @@
         <p:cNvGrpSpPr/>
         <p:nvPr/>
       </p:nvGrpSpPr>
-      <p:grpSpPr/>
+      <p:grpSpPr>
+        <a:xfrm>
+          <a:off x="0" y="0"/>
+          <a:ext cx="0" cy="0"/>
+          <a:chOff x="0" y="0"/>
+          <a:chExt cx="0" cy="0"/>
+        </a:xfrm>
+      </p:grpSpPr>
       <p:sp>
         <p:nvSpPr>
           <p:cNvPr id="2" name="TextBox 1"/>
@@ -6242,7 +6301,7 @@
           <a:noFill/>
         </p:spPr>
         <p:txBody>
-          <a:bodyPr wrap="square" anchor="t" lIns="0" rIns="0" tIns="0" bIns="0">
+          <a:bodyPr wrap="square" lIns="0" tIns="0" rIns="0" bIns="0" anchor="t">
             <a:spAutoFit/>
           </a:bodyPr>
           <a:lstStyle/>
@@ -6281,7 +6340,7 @@
           <a:noFill/>
         </p:spPr>
         <p:txBody>
-          <a:bodyPr wrap="square" anchor="t" lIns="0" rIns="0" tIns="0" bIns="0">
+          <a:bodyPr wrap="square" lIns="0" tIns="0" rIns="0" bIns="0" anchor="t">
             <a:spAutoFit/>
           </a:bodyPr>
           <a:lstStyle/>
@@ -6320,7 +6379,7 @@
           <a:noFill/>
         </p:spPr>
         <p:txBody>
-          <a:bodyPr wrap="square" anchor="t" lIns="0" rIns="0" tIns="0" bIns="0">
+          <a:bodyPr wrap="square" lIns="0" tIns="0" rIns="0" bIns="0" anchor="t">
             <a:spAutoFit/>
           </a:bodyPr>
           <a:lstStyle/>
@@ -6403,7 +6462,9 @@
         <p:txBody>
           <a:bodyPr rtlCol="0" anchor="ctr"/>
           <a:lstStyle/>
-          <a:p/>
+          <a:p>
+            <a:endParaRPr/>
+          </a:p>
         </p:txBody>
       </p:sp>
       <p:sp>
@@ -6423,7 +6484,7 @@
           <a:noFill/>
         </p:spPr>
         <p:txBody>
-          <a:bodyPr wrap="square" anchor="t" lIns="0" rIns="0" tIns="0" bIns="0">
+          <a:bodyPr wrap="square" lIns="0" tIns="0" rIns="0" bIns="0" anchor="t">
             <a:spAutoFit/>
           </a:bodyPr>
           <a:lstStyle/>
@@ -6462,7 +6523,7 @@
           <a:noFill/>
         </p:spPr>
         <p:txBody>
-          <a:bodyPr wrap="square" anchor="t" lIns="0" rIns="0" tIns="0" bIns="0">
+          <a:bodyPr wrap="square" lIns="0" tIns="0" rIns="0" bIns="0" anchor="t">
             <a:spAutoFit/>
           </a:bodyPr>
           <a:lstStyle/>
@@ -6523,6 +6584,7 @@
           <a:lstStyle/>
           <a:p>
             <a:pPr algn="ctr"/>
+            <a:endParaRPr/>
           </a:p>
         </p:txBody>
       </p:sp>
@@ -6600,6 +6662,7 @@
           <a:lstStyle/>
           <a:p>
             <a:pPr algn="ctr"/>
+            <a:endParaRPr/>
           </a:p>
         </p:txBody>
       </p:sp>
@@ -6677,6 +6740,7 @@
           <a:lstStyle/>
           <a:p>
             <a:pPr algn="ctr"/>
+            <a:endParaRPr/>
           </a:p>
         </p:txBody>
       </p:sp>
@@ -6732,7 +6796,7 @@
           <a:noFill/>
         </p:spPr>
         <p:txBody>
-          <a:bodyPr wrap="square" anchor="t" lIns="0" rIns="0" tIns="0" bIns="0">
+          <a:bodyPr wrap="square" lIns="0" tIns="0" rIns="0" bIns="0" anchor="t">
             <a:spAutoFit/>
           </a:bodyPr>
           <a:lstStyle/>
@@ -6797,7 +6861,9 @@
         <p:txBody>
           <a:bodyPr rtlCol="0" anchor="ctr"/>
           <a:lstStyle/>
-          <a:p/>
+          <a:p>
+            <a:endParaRPr/>
+          </a:p>
         </p:txBody>
       </p:sp>
       <p:sp>
@@ -6817,7 +6883,7 @@
           <a:noFill/>
         </p:spPr>
         <p:txBody>
-          <a:bodyPr wrap="square" anchor="t" lIns="0" rIns="0" tIns="0" bIns="0">
+          <a:bodyPr wrap="square" lIns="0" tIns="0" rIns="0" bIns="0" anchor="t">
             <a:spAutoFit/>
           </a:bodyPr>
           <a:lstStyle/>
@@ -6856,7 +6922,7 @@
           <a:noFill/>
         </p:spPr>
         <p:txBody>
-          <a:bodyPr wrap="square" anchor="t" lIns="0" rIns="0" tIns="0" bIns="0">
+          <a:bodyPr wrap="square" lIns="0" tIns="0" rIns="0" bIns="0" anchor="t">
             <a:spAutoFit/>
           </a:bodyPr>
           <a:lstStyle/>
@@ -6917,6 +6983,7 @@
           <a:lstStyle/>
           <a:p>
             <a:pPr algn="ctr"/>
+            <a:endParaRPr/>
           </a:p>
         </p:txBody>
       </p:sp>
@@ -6994,6 +7061,7 @@
           <a:lstStyle/>
           <a:p>
             <a:pPr algn="ctr"/>
+            <a:endParaRPr/>
           </a:p>
         </p:txBody>
       </p:sp>
@@ -7071,6 +7139,7 @@
           <a:lstStyle/>
           <a:p>
             <a:pPr algn="ctr"/>
+            <a:endParaRPr/>
           </a:p>
         </p:txBody>
       </p:sp>
@@ -7126,7 +7195,7 @@
           <a:noFill/>
         </p:spPr>
         <p:txBody>
-          <a:bodyPr wrap="square" anchor="t" lIns="0" rIns="0" tIns="0" bIns="0">
+          <a:bodyPr wrap="square" lIns="0" tIns="0" rIns="0" bIns="0" anchor="t">
             <a:spAutoFit/>
           </a:bodyPr>
           <a:lstStyle/>
@@ -7165,7 +7234,7 @@
           <a:noFill/>
         </p:spPr>
         <p:txBody>
-          <a:bodyPr wrap="square" anchor="t" lIns="0" rIns="0" tIns="0" bIns="0">
+          <a:bodyPr wrap="square" lIns="0" tIns="0" rIns="0" bIns="0" anchor="t">
             <a:spAutoFit/>
           </a:bodyPr>
           <a:lstStyle/>
@@ -7204,7 +7273,7 @@
           <a:noFill/>
         </p:spPr>
         <p:txBody>
-          <a:bodyPr wrap="square" anchor="t" lIns="0" rIns="0" tIns="0" bIns="0">
+          <a:bodyPr wrap="square" lIns="0" tIns="0" rIns="0" bIns="0" anchor="t">
             <a:spAutoFit/>
           </a:bodyPr>
           <a:lstStyle/>
@@ -7265,7 +7334,9 @@
         <p:txBody>
           <a:bodyPr rtlCol="0" anchor="ctr"/>
           <a:lstStyle/>
-          <a:p/>
+          <a:p>
+            <a:endParaRPr/>
+          </a:p>
         </p:txBody>
       </p:sp>
     </p:spTree>
@@ -7277,7 +7348,7 @@
 </file>
 
 <file path=ppt/slides/slide4.xml><?xml version="1.0" encoding="utf-8"?>
-<p:sld xmlns:a="http://schemas.openxmlformats.org/drawingml/2006/main" xmlns:p="http://schemas.openxmlformats.org/presentationml/2006/main" xmlns:r="http://schemas.openxmlformats.org/officeDocument/2006/relationships">
+<p:sld xmlns:a="http://schemas.openxmlformats.org/drawingml/2006/main" xmlns:r="http://schemas.openxmlformats.org/officeDocument/2006/relationships" xmlns:p="http://schemas.openxmlformats.org/presentationml/2006/main">
   <p:cSld>
     <p:bg>
       <p:bgPr>
@@ -7293,7 +7364,14 @@
         <p:cNvGrpSpPr/>
         <p:nvPr/>
       </p:nvGrpSpPr>
-      <p:grpSpPr/>
+      <p:grpSpPr>
+        <a:xfrm>
+          <a:off x="0" y="0"/>
+          <a:ext cx="0" cy="0"/>
+          <a:chOff x="0" y="0"/>
+          <a:chExt cx="0" cy="0"/>
+        </a:xfrm>
+      </p:grpSpPr>
       <p:sp>
         <p:nvSpPr>
           <p:cNvPr id="2" name="TextBox 1"/>
@@ -7311,7 +7389,7 @@
           <a:noFill/>
         </p:spPr>
         <p:txBody>
-          <a:bodyPr wrap="square" anchor="t" lIns="0" rIns="0" tIns="0" bIns="0">
+          <a:bodyPr wrap="square" lIns="0" tIns="0" rIns="0" bIns="0" anchor="t">
             <a:spAutoFit/>
           </a:bodyPr>
           <a:lstStyle/>
@@ -7350,7 +7428,7 @@
           <a:noFill/>
         </p:spPr>
         <p:txBody>
-          <a:bodyPr wrap="square" anchor="t" lIns="0" rIns="0" tIns="0" bIns="0">
+          <a:bodyPr wrap="square" lIns="0" tIns="0" rIns="0" bIns="0" anchor="t">
             <a:spAutoFit/>
           </a:bodyPr>
           <a:lstStyle/>
@@ -7390,7 +7468,7 @@
           <a:noFill/>
         </p:spPr>
         <p:txBody>
-          <a:bodyPr wrap="square" lIns="0" rIns="0" tIns="0" bIns="0">
+          <a:bodyPr wrap="square" lIns="0" tIns="0" rIns="0" bIns="0">
             <a:spAutoFit/>
           </a:bodyPr>
           <a:lstStyle/>
@@ -7523,7 +7601,9 @@
         <p:txBody>
           <a:bodyPr rtlCol="0" anchor="ctr"/>
           <a:lstStyle/>
-          <a:p/>
+          <a:p>
+            <a:endParaRPr/>
+          </a:p>
         </p:txBody>
       </p:sp>
       <p:sp>
@@ -7543,7 +7623,7 @@
           <a:noFill/>
         </p:spPr>
         <p:txBody>
-          <a:bodyPr wrap="square" anchor="t" lIns="0" rIns="0" tIns="0" bIns="0">
+          <a:bodyPr wrap="square" lIns="0" tIns="0" rIns="0" bIns="0" anchor="t">
             <a:spAutoFit/>
           </a:bodyPr>
           <a:lstStyle/>
@@ -7582,7 +7662,7 @@
           <a:noFill/>
         </p:spPr>
         <p:txBody>
-          <a:bodyPr wrap="square" anchor="t" lIns="0" rIns="0" tIns="0" bIns="0">
+          <a:bodyPr wrap="square" lIns="0" tIns="0" rIns="0" bIns="0" anchor="t">
             <a:spAutoFit/>
           </a:bodyPr>
           <a:lstStyle/>
@@ -7643,7 +7723,9 @@
         <p:txBody>
           <a:bodyPr rtlCol="0" anchor="ctr"/>
           <a:lstStyle/>
-          <a:p/>
+          <a:p>
+            <a:endParaRPr/>
+          </a:p>
         </p:txBody>
       </p:sp>
       <p:sp>
@@ -7663,7 +7745,7 @@
           <a:noFill/>
         </p:spPr>
         <p:txBody>
-          <a:bodyPr wrap="square" anchor="t" lIns="0" rIns="0" tIns="0" bIns="0">
+          <a:bodyPr wrap="square" lIns="0" tIns="0" rIns="0" bIns="0" anchor="t">
             <a:spAutoFit/>
           </a:bodyPr>
           <a:lstStyle/>
@@ -7702,7 +7784,7 @@
           <a:noFill/>
         </p:spPr>
         <p:txBody>
-          <a:bodyPr wrap="square" anchor="t" lIns="0" rIns="0" tIns="0" bIns="0">
+          <a:bodyPr wrap="square" lIns="0" tIns="0" rIns="0" bIns="0" anchor="t">
             <a:spAutoFit/>
           </a:bodyPr>
           <a:lstStyle/>
@@ -7763,7 +7845,9 @@
         <p:txBody>
           <a:bodyPr rtlCol="0" anchor="ctr"/>
           <a:lstStyle/>
-          <a:p/>
+          <a:p>
+            <a:endParaRPr/>
+          </a:p>
         </p:txBody>
       </p:sp>
       <p:sp>
@@ -7783,7 +7867,7 @@
           <a:noFill/>
         </p:spPr>
         <p:txBody>
-          <a:bodyPr wrap="square" anchor="t" lIns="0" rIns="0" tIns="0" bIns="0">
+          <a:bodyPr wrap="square" lIns="0" tIns="0" rIns="0" bIns="0" anchor="t">
             <a:spAutoFit/>
           </a:bodyPr>
           <a:lstStyle/>
@@ -7822,7 +7906,7 @@
           <a:noFill/>
         </p:spPr>
         <p:txBody>
-          <a:bodyPr wrap="square" anchor="t" lIns="0" rIns="0" tIns="0" bIns="0">
+          <a:bodyPr wrap="square" lIns="0" tIns="0" rIns="0" bIns="0" anchor="t">
             <a:spAutoFit/>
           </a:bodyPr>
           <a:lstStyle/>
@@ -7861,7 +7945,7 @@
           <a:noFill/>
         </p:spPr>
         <p:txBody>
-          <a:bodyPr wrap="square" anchor="t" lIns="0" rIns="0" tIns="0" bIns="0">
+          <a:bodyPr wrap="square" lIns="0" tIns="0" rIns="0" bIns="0" anchor="t">
             <a:spAutoFit/>
           </a:bodyPr>
           <a:lstStyle/>
@@ -7900,7 +7984,7 @@
           <a:noFill/>
         </p:spPr>
         <p:txBody>
-          <a:bodyPr wrap="square" anchor="t" lIns="0" rIns="0" tIns="0" bIns="0">
+          <a:bodyPr wrap="square" lIns="0" tIns="0" rIns="0" bIns="0" anchor="t">
             <a:spAutoFit/>
           </a:bodyPr>
           <a:lstStyle/>
@@ -7939,7 +8023,7 @@
           <a:noFill/>
         </p:spPr>
         <p:txBody>
-          <a:bodyPr wrap="square" anchor="t" lIns="0" rIns="0" tIns="0" bIns="0">
+          <a:bodyPr wrap="square" lIns="0" tIns="0" rIns="0" bIns="0" anchor="t">
             <a:spAutoFit/>
           </a:bodyPr>
           <a:lstStyle/>
@@ -8000,7 +8084,9 @@
         <p:txBody>
           <a:bodyPr rtlCol="0" anchor="ctr"/>
           <a:lstStyle/>
-          <a:p/>
+          <a:p>
+            <a:endParaRPr/>
+          </a:p>
         </p:txBody>
       </p:sp>
     </p:spTree>
@@ -8012,7 +8098,7 @@
 </file>
 
 <file path=ppt/slides/slide5.xml><?xml version="1.0" encoding="utf-8"?>
-<p:sld xmlns:a="http://schemas.openxmlformats.org/drawingml/2006/main" xmlns:p="http://schemas.openxmlformats.org/presentationml/2006/main" xmlns:r="http://schemas.openxmlformats.org/officeDocument/2006/relationships">
+<p:sld xmlns:a="http://schemas.openxmlformats.org/drawingml/2006/main" xmlns:r="http://schemas.openxmlformats.org/officeDocument/2006/relationships" xmlns:p="http://schemas.openxmlformats.org/presentationml/2006/main">
   <p:cSld>
     <p:bg>
       <p:bgPr>
@@ -8028,7 +8114,14 @@
         <p:cNvGrpSpPr/>
         <p:nvPr/>
       </p:nvGrpSpPr>
-      <p:grpSpPr/>
+      <p:grpSpPr>
+        <a:xfrm>
+          <a:off x="0" y="0"/>
+          <a:ext cx="0" cy="0"/>
+          <a:chOff x="0" y="0"/>
+          <a:chExt cx="0" cy="0"/>
+        </a:xfrm>
+      </p:grpSpPr>
       <p:sp>
         <p:nvSpPr>
           <p:cNvPr id="2" name="TextBox 1"/>
@@ -8046,7 +8139,7 @@
           <a:noFill/>
         </p:spPr>
         <p:txBody>
-          <a:bodyPr wrap="square" anchor="t" lIns="0" rIns="0" tIns="0" bIns="0">
+          <a:bodyPr wrap="square" lIns="0" tIns="0" rIns="0" bIns="0" anchor="t">
             <a:spAutoFit/>
           </a:bodyPr>
           <a:lstStyle/>
@@ -8085,7 +8178,7 @@
           <a:noFill/>
         </p:spPr>
         <p:txBody>
-          <a:bodyPr wrap="square" anchor="t" lIns="0" rIns="0" tIns="0" bIns="0">
+          <a:bodyPr wrap="square" lIns="0" tIns="0" rIns="0" bIns="0" anchor="t">
             <a:spAutoFit/>
           </a:bodyPr>
           <a:lstStyle/>
@@ -8124,7 +8217,7 @@
           <a:noFill/>
         </p:spPr>
         <p:txBody>
-          <a:bodyPr wrap="square" anchor="t" lIns="0" rIns="0" tIns="0" bIns="0">
+          <a:bodyPr wrap="square" lIns="0" tIns="0" rIns="0" bIns="0" anchor="t">
             <a:spAutoFit/>
           </a:bodyPr>
           <a:lstStyle/>
@@ -8198,7 +8291,9 @@
         <p:txBody>
           <a:bodyPr rtlCol="0" anchor="ctr"/>
           <a:lstStyle/>
-          <a:p/>
+          <a:p>
+            <a:endParaRPr/>
+          </a:p>
         </p:txBody>
       </p:sp>
       <p:sp>
@@ -8218,7 +8313,7 @@
           <a:noFill/>
         </p:spPr>
         <p:txBody>
-          <a:bodyPr wrap="square" anchor="t" lIns="0" rIns="0" tIns="0" bIns="0">
+          <a:bodyPr wrap="square" lIns="0" tIns="0" rIns="0" bIns="0" anchor="t">
             <a:spAutoFit/>
           </a:bodyPr>
           <a:lstStyle/>
@@ -8257,7 +8352,7 @@
           <a:noFill/>
         </p:spPr>
         <p:txBody>
-          <a:bodyPr wrap="square" anchor="t" lIns="0" rIns="0" tIns="0" bIns="0">
+          <a:bodyPr wrap="square" lIns="0" tIns="0" rIns="0" bIns="0" anchor="t">
             <a:spAutoFit/>
           </a:bodyPr>
           <a:lstStyle/>
@@ -8268,7 +8363,7 @@
               </a:lnSpc>
             </a:pPr>
             <a:r>
-              <a:rPr sz="2600" b="1">
+              <a:rPr sz="2600" b="1" dirty="0">
                 <a:solidFill>
                   <a:srgbClr val="3ECF8E"/>
                 </a:solidFill>
@@ -8287,7 +8382,7 @@
         </p:nvSpPr>
         <p:spPr>
           <a:xfrm>
-            <a:off x="996696" y="3419856"/>
+            <a:off x="996696" y="3712464"/>
             <a:ext cx="4590288" cy="457200"/>
           </a:xfrm>
           <a:prstGeom prst="rect">
@@ -8296,7 +8391,7 @@
           <a:noFill/>
         </p:spPr>
         <p:txBody>
-          <a:bodyPr wrap="square" anchor="t" lIns="0" rIns="0" tIns="0" bIns="0">
+          <a:bodyPr wrap="square" lIns="0" tIns="0" rIns="0" bIns="0" anchor="t">
             <a:spAutoFit/>
           </a:bodyPr>
           <a:lstStyle/>
@@ -8307,7 +8402,7 @@
               </a:lnSpc>
             </a:pPr>
             <a:r>
-              <a:rPr sz="1150" b="0">
+              <a:rPr sz="1150" b="0" dirty="0">
                 <a:solidFill>
                   <a:srgbClr val="75828F"/>
                 </a:solidFill>
@@ -8361,7 +8456,9 @@
         <p:txBody>
           <a:bodyPr rtlCol="0" anchor="ctr"/>
           <a:lstStyle/>
-          <a:p/>
+          <a:p>
+            <a:endParaRPr/>
+          </a:p>
         </p:txBody>
       </p:sp>
       <p:sp>
@@ -8381,7 +8478,7 @@
           <a:noFill/>
         </p:spPr>
         <p:txBody>
-          <a:bodyPr wrap="square" anchor="t" lIns="0" rIns="0" tIns="0" bIns="0">
+          <a:bodyPr wrap="square" lIns="0" tIns="0" rIns="0" bIns="0" anchor="t">
             <a:spAutoFit/>
           </a:bodyPr>
           <a:lstStyle/>
@@ -8420,7 +8517,7 @@
           <a:noFill/>
         </p:spPr>
         <p:txBody>
-          <a:bodyPr wrap="square" anchor="t" lIns="0" rIns="0" tIns="0" bIns="0">
+          <a:bodyPr wrap="square" lIns="0" tIns="0" rIns="0" bIns="0" anchor="t">
             <a:spAutoFit/>
           </a:bodyPr>
           <a:lstStyle/>
@@ -8450,7 +8547,7 @@
         </p:nvSpPr>
         <p:spPr>
           <a:xfrm>
-            <a:off x="6391656" y="3419856"/>
+            <a:off x="6391656" y="3694176"/>
             <a:ext cx="4590288" cy="457200"/>
           </a:xfrm>
           <a:prstGeom prst="rect">
@@ -8459,7 +8556,7 @@
           <a:noFill/>
         </p:spPr>
         <p:txBody>
-          <a:bodyPr wrap="square" anchor="t" lIns="0" rIns="0" tIns="0" bIns="0">
+          <a:bodyPr wrap="square" lIns="0" tIns="0" rIns="0" bIns="0" anchor="t">
             <a:spAutoFit/>
           </a:bodyPr>
           <a:lstStyle/>
@@ -8524,7 +8621,9 @@
         <p:txBody>
           <a:bodyPr rtlCol="0" anchor="ctr"/>
           <a:lstStyle/>
-          <a:p/>
+          <a:p>
+            <a:endParaRPr/>
+          </a:p>
         </p:txBody>
       </p:sp>
       <p:sp>
@@ -8544,7 +8643,7 @@
           <a:noFill/>
         </p:spPr>
         <p:txBody>
-          <a:bodyPr wrap="square" anchor="t" lIns="0" rIns="0" tIns="0" bIns="0">
+          <a:bodyPr wrap="square" lIns="0" tIns="0" rIns="0" bIns="0" anchor="t">
             <a:spAutoFit/>
           </a:bodyPr>
           <a:lstStyle/>
@@ -8583,7 +8682,7 @@
           <a:noFill/>
         </p:spPr>
         <p:txBody>
-          <a:bodyPr wrap="square" anchor="t" lIns="0" rIns="0" tIns="0" bIns="0">
+          <a:bodyPr wrap="square" lIns="0" tIns="0" rIns="0" bIns="0" anchor="t">
             <a:spAutoFit/>
           </a:bodyPr>
           <a:lstStyle/>
@@ -8631,7 +8730,7 @@
           <a:noFill/>
         </p:spPr>
         <p:txBody>
-          <a:bodyPr wrap="square" anchor="t" lIns="0" rIns="0" tIns="0" bIns="0">
+          <a:bodyPr wrap="square" lIns="0" tIns="0" rIns="0" bIns="0" anchor="t">
             <a:spAutoFit/>
           </a:bodyPr>
           <a:lstStyle/>
@@ -8688,7 +8787,7 @@
           <a:noFill/>
         </p:spPr>
         <p:txBody>
-          <a:bodyPr wrap="square" anchor="t" lIns="0" rIns="0" tIns="0" bIns="0">
+          <a:bodyPr wrap="square" lIns="0" tIns="0" rIns="0" bIns="0" anchor="t">
             <a:spAutoFit/>
           </a:bodyPr>
           <a:lstStyle/>
@@ -8727,7 +8826,7 @@
           <a:noFill/>
         </p:spPr>
         <p:txBody>
-          <a:bodyPr wrap="square" anchor="t" lIns="0" rIns="0" tIns="0" bIns="0">
+          <a:bodyPr wrap="square" lIns="0" tIns="0" rIns="0" bIns="0" anchor="t">
             <a:spAutoFit/>
           </a:bodyPr>
           <a:lstStyle/>
@@ -8788,7 +8887,9 @@
         <p:txBody>
           <a:bodyPr rtlCol="0" anchor="ctr"/>
           <a:lstStyle/>
-          <a:p/>
+          <a:p>
+            <a:endParaRPr/>
+          </a:p>
         </p:txBody>
       </p:sp>
     </p:spTree>
@@ -8800,7 +8901,7 @@
 </file>
 
 <file path=ppt/slides/slide6.xml><?xml version="1.0" encoding="utf-8"?>
-<p:sld xmlns:a="http://schemas.openxmlformats.org/drawingml/2006/main" xmlns:p="http://schemas.openxmlformats.org/presentationml/2006/main" xmlns:r="http://schemas.openxmlformats.org/officeDocument/2006/relationships">
+<p:sld xmlns:a="http://schemas.openxmlformats.org/drawingml/2006/main" xmlns:r="http://schemas.openxmlformats.org/officeDocument/2006/relationships" xmlns:p="http://schemas.openxmlformats.org/presentationml/2006/main">
   <p:cSld>
     <p:bg>
       <p:bgPr>
@@ -8816,7 +8917,14 @@
         <p:cNvGrpSpPr/>
         <p:nvPr/>
       </p:nvGrpSpPr>
-      <p:grpSpPr/>
+      <p:grpSpPr>
+        <a:xfrm>
+          <a:off x="0" y="0"/>
+          <a:ext cx="0" cy="0"/>
+          <a:chOff x="0" y="0"/>
+          <a:chExt cx="0" cy="0"/>
+        </a:xfrm>
+      </p:grpSpPr>
       <p:sp>
         <p:nvSpPr>
           <p:cNvPr id="2" name="TextBox 1"/>
@@ -8834,7 +8942,7 @@
           <a:noFill/>
         </p:spPr>
         <p:txBody>
-          <a:bodyPr wrap="square" anchor="t" lIns="0" rIns="0" tIns="0" bIns="0">
+          <a:bodyPr wrap="square" lIns="0" tIns="0" rIns="0" bIns="0" anchor="t">
             <a:spAutoFit/>
           </a:bodyPr>
           <a:lstStyle/>
@@ -8873,7 +8981,7 @@
           <a:noFill/>
         </p:spPr>
         <p:txBody>
-          <a:bodyPr wrap="square" anchor="t" lIns="0" rIns="0" tIns="0" bIns="0">
+          <a:bodyPr wrap="square" lIns="0" tIns="0" rIns="0" bIns="0" anchor="t">
             <a:spAutoFit/>
           </a:bodyPr>
           <a:lstStyle/>
@@ -8912,7 +9020,7 @@
           <a:noFill/>
         </p:spPr>
         <p:txBody>
-          <a:bodyPr wrap="square" lIns="0" rIns="0" tIns="0" bIns="0">
+          <a:bodyPr wrap="square" lIns="0" tIns="0" rIns="0" bIns="0">
             <a:spAutoFit/>
           </a:bodyPr>
           <a:lstStyle/>
@@ -9081,7 +9189,9 @@
         <p:txBody>
           <a:bodyPr rtlCol="0" anchor="ctr"/>
           <a:lstStyle/>
-          <a:p/>
+          <a:p>
+            <a:endParaRPr/>
+          </a:p>
         </p:txBody>
       </p:sp>
       <p:sp>
@@ -9101,7 +9211,7 @@
           <a:noFill/>
         </p:spPr>
         <p:txBody>
-          <a:bodyPr wrap="square" anchor="t" lIns="0" rIns="0" tIns="0" bIns="0">
+          <a:bodyPr wrap="square" lIns="0" tIns="0" rIns="0" bIns="0" anchor="t">
             <a:spAutoFit/>
           </a:bodyPr>
           <a:lstStyle/>
@@ -9140,7 +9250,7 @@
           <a:noFill/>
         </p:spPr>
         <p:txBody>
-          <a:bodyPr wrap="square" anchor="t" lIns="0" rIns="0" tIns="0" bIns="0">
+          <a:bodyPr wrap="square" lIns="0" tIns="0" rIns="0" bIns="0" anchor="t">
             <a:spAutoFit/>
           </a:bodyPr>
           <a:lstStyle/>
@@ -9170,7 +9280,7 @@
         </p:nvSpPr>
         <p:spPr>
           <a:xfrm>
-            <a:off x="7488936" y="2889504"/>
+            <a:off x="7488936" y="3200400"/>
             <a:ext cx="3675888" cy="457200"/>
           </a:xfrm>
           <a:prstGeom prst="rect">
@@ -9179,7 +9289,7 @@
           <a:noFill/>
         </p:spPr>
         <p:txBody>
-          <a:bodyPr wrap="square" anchor="t" lIns="0" rIns="0" tIns="0" bIns="0">
+          <a:bodyPr wrap="square" lIns="0" tIns="0" rIns="0" bIns="0" anchor="t">
             <a:spAutoFit/>
           </a:bodyPr>
           <a:lstStyle/>
@@ -9244,7 +9354,9 @@
         <p:txBody>
           <a:bodyPr rtlCol="0" anchor="ctr"/>
           <a:lstStyle/>
-          <a:p/>
+          <a:p>
+            <a:endParaRPr/>
+          </a:p>
         </p:txBody>
       </p:sp>
       <p:sp>
@@ -9264,7 +9376,7 @@
           <a:noFill/>
         </p:spPr>
         <p:txBody>
-          <a:bodyPr wrap="square" anchor="t" lIns="0" rIns="0" tIns="0" bIns="0">
+          <a:bodyPr wrap="square" lIns="0" tIns="0" rIns="0" bIns="0" anchor="t">
             <a:spAutoFit/>
           </a:bodyPr>
           <a:lstStyle/>
@@ -9303,7 +9415,7 @@
           <a:noFill/>
         </p:spPr>
         <p:txBody>
-          <a:bodyPr wrap="square" anchor="t" lIns="0" rIns="0" tIns="0" bIns="0">
+          <a:bodyPr wrap="square" lIns="0" tIns="0" rIns="0" bIns="0" anchor="t">
             <a:spAutoFit/>
           </a:bodyPr>
           <a:lstStyle/>
@@ -9333,7 +9445,7 @@
         </p:nvSpPr>
         <p:spPr>
           <a:xfrm>
-            <a:off x="7488936" y="4224527"/>
+            <a:off x="7488936" y="4544567"/>
             <a:ext cx="3675888" cy="457200"/>
           </a:xfrm>
           <a:prstGeom prst="rect">
@@ -9342,7 +9454,7 @@
           <a:noFill/>
         </p:spPr>
         <p:txBody>
-          <a:bodyPr wrap="square" anchor="t" lIns="0" rIns="0" tIns="0" bIns="0">
+          <a:bodyPr wrap="square" lIns="0" tIns="0" rIns="0" bIns="0" anchor="t">
             <a:spAutoFit/>
           </a:bodyPr>
           <a:lstStyle/>
@@ -9353,7 +9465,7 @@
               </a:lnSpc>
             </a:pPr>
             <a:r>
-              <a:rPr sz="1150" b="0">
+              <a:rPr sz="1150" b="0" dirty="0">
                 <a:solidFill>
                   <a:srgbClr val="75828F"/>
                 </a:solidFill>
@@ -9407,7 +9519,9 @@
         <p:txBody>
           <a:bodyPr rtlCol="0" anchor="ctr"/>
           <a:lstStyle/>
-          <a:p/>
+          <a:p>
+            <a:endParaRPr/>
+          </a:p>
         </p:txBody>
       </p:sp>
       <p:sp>
@@ -9427,7 +9541,7 @@
           <a:noFill/>
         </p:spPr>
         <p:txBody>
-          <a:bodyPr wrap="square" anchor="t" lIns="0" rIns="0" tIns="0" bIns="0">
+          <a:bodyPr wrap="square" lIns="0" tIns="0" rIns="0" bIns="0" anchor="t">
             <a:spAutoFit/>
           </a:bodyPr>
           <a:lstStyle/>
@@ -9466,7 +9580,7 @@
           <a:noFill/>
         </p:spPr>
         <p:txBody>
-          <a:bodyPr wrap="square" anchor="t" lIns="0" rIns="0" tIns="0" bIns="0">
+          <a:bodyPr wrap="square" lIns="0" tIns="0" rIns="0" bIns="0" anchor="t">
             <a:spAutoFit/>
           </a:bodyPr>
           <a:lstStyle/>
@@ -9483,7 +9597,7 @@
                 </a:solidFill>
                 <a:latin typeface="Consolas"/>
               </a:rPr>
-              <a:t>77 → 207</a:t>
+              <a:t>77 → 236</a:t>
             </a:r>
           </a:p>
         </p:txBody>
@@ -9505,7 +9619,7 @@
           <a:noFill/>
         </p:spPr>
         <p:txBody>
-          <a:bodyPr wrap="square" anchor="t" lIns="0" rIns="0" tIns="0" bIns="0">
+          <a:bodyPr wrap="square" lIns="0" tIns="0" rIns="0" bIns="0" anchor="t">
             <a:spAutoFit/>
           </a:bodyPr>
           <a:lstStyle/>
@@ -9544,7 +9658,7 @@
           <a:noFill/>
         </p:spPr>
         <p:txBody>
-          <a:bodyPr wrap="square" anchor="t" lIns="0" rIns="0" tIns="0" bIns="0">
+          <a:bodyPr wrap="square" lIns="0" tIns="0" rIns="0" bIns="0" anchor="t">
             <a:spAutoFit/>
           </a:bodyPr>
           <a:lstStyle/>
@@ -9605,7 +9719,9 @@
         <p:txBody>
           <a:bodyPr rtlCol="0" anchor="ctr"/>
           <a:lstStyle/>
-          <a:p/>
+          <a:p>
+            <a:endParaRPr/>
+          </a:p>
         </p:txBody>
       </p:sp>
     </p:spTree>
@@ -9617,7 +9733,7 @@
 </file>
 
 <file path=ppt/slides/slide7.xml><?xml version="1.0" encoding="utf-8"?>
-<p:sld xmlns:a="http://schemas.openxmlformats.org/drawingml/2006/main" xmlns:p="http://schemas.openxmlformats.org/presentationml/2006/main" xmlns:r="http://schemas.openxmlformats.org/officeDocument/2006/relationships">
+<p:sld xmlns:a="http://schemas.openxmlformats.org/drawingml/2006/main" xmlns:r="http://schemas.openxmlformats.org/officeDocument/2006/relationships" xmlns:p="http://schemas.openxmlformats.org/presentationml/2006/main">
   <p:cSld>
     <p:bg>
       <p:bgPr>
@@ -9633,7 +9749,14 @@
         <p:cNvGrpSpPr/>
         <p:nvPr/>
       </p:nvGrpSpPr>
-      <p:grpSpPr/>
+      <p:grpSpPr>
+        <a:xfrm>
+          <a:off x="0" y="0"/>
+          <a:ext cx="0" cy="0"/>
+          <a:chOff x="0" y="0"/>
+          <a:chExt cx="0" cy="0"/>
+        </a:xfrm>
+      </p:grpSpPr>
       <p:sp>
         <p:nvSpPr>
           <p:cNvPr id="2" name="TextBox 1"/>
@@ -9651,7 +9774,7 @@
           <a:noFill/>
         </p:spPr>
         <p:txBody>
-          <a:bodyPr wrap="square" anchor="t" lIns="0" rIns="0" tIns="0" bIns="0">
+          <a:bodyPr wrap="square" lIns="0" tIns="0" rIns="0" bIns="0" anchor="t">
             <a:spAutoFit/>
           </a:bodyPr>
           <a:lstStyle/>
@@ -9690,7 +9813,7 @@
           <a:noFill/>
         </p:spPr>
         <p:txBody>
-          <a:bodyPr wrap="square" anchor="t" lIns="0" rIns="0" tIns="0" bIns="0">
+          <a:bodyPr wrap="square" lIns="0" tIns="0" rIns="0" bIns="0" anchor="t">
             <a:spAutoFit/>
           </a:bodyPr>
           <a:lstStyle/>
@@ -9756,7 +9879,9 @@
         <p:txBody>
           <a:bodyPr rtlCol="0" anchor="ctr"/>
           <a:lstStyle/>
-          <a:p/>
+          <a:p>
+            <a:endParaRPr/>
+          </a:p>
         </p:txBody>
       </p:sp>
       <p:sp>
@@ -9776,7 +9901,7 @@
           <a:noFill/>
         </p:spPr>
         <p:txBody>
-          <a:bodyPr wrap="square" anchor="t" lIns="0" rIns="0" tIns="0" bIns="0">
+          <a:bodyPr wrap="square" lIns="0" tIns="0" rIns="0" bIns="0" anchor="t">
             <a:spAutoFit/>
           </a:bodyPr>
           <a:lstStyle/>
@@ -9815,7 +9940,7 @@
           <a:noFill/>
         </p:spPr>
         <p:txBody>
-          <a:bodyPr wrap="square" anchor="t" lIns="0" rIns="0" tIns="0" bIns="0">
+          <a:bodyPr wrap="square" lIns="0" tIns="0" rIns="0" bIns="0" anchor="t">
             <a:spAutoFit/>
           </a:bodyPr>
           <a:lstStyle/>
@@ -9854,7 +9979,7 @@
           <a:noFill/>
         </p:spPr>
         <p:txBody>
-          <a:bodyPr wrap="square" anchor="t" lIns="0" rIns="0" tIns="0" bIns="0">
+          <a:bodyPr wrap="square" lIns="0" tIns="0" rIns="0" bIns="0" anchor="t">
             <a:spAutoFit/>
           </a:bodyPr>
           <a:lstStyle/>
@@ -9893,7 +10018,7 @@
           <a:noFill/>
         </p:spPr>
         <p:txBody>
-          <a:bodyPr wrap="square" anchor="t" lIns="0" rIns="0" tIns="0" bIns="0">
+          <a:bodyPr wrap="square" lIns="0" tIns="0" rIns="0" bIns="0" anchor="t">
             <a:spAutoFit/>
           </a:bodyPr>
           <a:lstStyle/>
@@ -9958,7 +10083,9 @@
         <p:txBody>
           <a:bodyPr rtlCol="0" anchor="ctr"/>
           <a:lstStyle/>
-          <a:p/>
+          <a:p>
+            <a:endParaRPr/>
+          </a:p>
         </p:txBody>
       </p:sp>
       <p:sp>
@@ -9978,7 +10105,7 @@
           <a:noFill/>
         </p:spPr>
         <p:txBody>
-          <a:bodyPr wrap="square" anchor="t" lIns="0" rIns="0" tIns="0" bIns="0">
+          <a:bodyPr wrap="square" lIns="0" tIns="0" rIns="0" bIns="0" anchor="t">
             <a:spAutoFit/>
           </a:bodyPr>
           <a:lstStyle/>
@@ -10017,7 +10144,7 @@
           <a:noFill/>
         </p:spPr>
         <p:txBody>
-          <a:bodyPr wrap="square" anchor="t" lIns="0" rIns="0" tIns="0" bIns="0">
+          <a:bodyPr wrap="square" lIns="0" tIns="0" rIns="0" bIns="0" anchor="t">
             <a:spAutoFit/>
           </a:bodyPr>
           <a:lstStyle/>
@@ -10056,7 +10183,7 @@
           <a:noFill/>
         </p:spPr>
         <p:txBody>
-          <a:bodyPr wrap="square" anchor="t" lIns="0" rIns="0" tIns="0" bIns="0">
+          <a:bodyPr wrap="square" lIns="0" tIns="0" rIns="0" bIns="0" anchor="t">
             <a:spAutoFit/>
           </a:bodyPr>
           <a:lstStyle/>
@@ -10095,7 +10222,7 @@
           <a:noFill/>
         </p:spPr>
         <p:txBody>
-          <a:bodyPr wrap="square" anchor="t" lIns="0" rIns="0" tIns="0" bIns="0">
+          <a:bodyPr wrap="square" lIns="0" tIns="0" rIns="0" bIns="0" anchor="t">
             <a:spAutoFit/>
           </a:bodyPr>
           <a:lstStyle/>
@@ -10160,7 +10287,9 @@
         <p:txBody>
           <a:bodyPr rtlCol="0" anchor="ctr"/>
           <a:lstStyle/>
-          <a:p/>
+          <a:p>
+            <a:endParaRPr/>
+          </a:p>
         </p:txBody>
       </p:sp>
       <p:sp>
@@ -10180,7 +10309,7 @@
           <a:noFill/>
         </p:spPr>
         <p:txBody>
-          <a:bodyPr wrap="square" anchor="t" lIns="0" rIns="0" tIns="0" bIns="0">
+          <a:bodyPr wrap="square" lIns="0" tIns="0" rIns="0" bIns="0" anchor="t">
             <a:spAutoFit/>
           </a:bodyPr>
           <a:lstStyle/>
@@ -10219,7 +10348,7 @@
           <a:noFill/>
         </p:spPr>
         <p:txBody>
-          <a:bodyPr wrap="square" anchor="t" lIns="0" rIns="0" tIns="0" bIns="0">
+          <a:bodyPr wrap="square" lIns="0" tIns="0" rIns="0" bIns="0" anchor="t">
             <a:spAutoFit/>
           </a:bodyPr>
           <a:lstStyle/>
@@ -10258,7 +10387,7 @@
           <a:noFill/>
         </p:spPr>
         <p:txBody>
-          <a:bodyPr wrap="square" anchor="t" lIns="0" rIns="0" tIns="0" bIns="0">
+          <a:bodyPr wrap="square" lIns="0" tIns="0" rIns="0" bIns="0" anchor="t">
             <a:spAutoFit/>
           </a:bodyPr>
           <a:lstStyle/>
@@ -10297,7 +10426,7 @@
           <a:noFill/>
         </p:spPr>
         <p:txBody>
-          <a:bodyPr wrap="square" anchor="t" lIns="0" rIns="0" tIns="0" bIns="0">
+          <a:bodyPr wrap="square" lIns="0" tIns="0" rIns="0" bIns="0" anchor="t">
             <a:spAutoFit/>
           </a:bodyPr>
           <a:lstStyle/>
@@ -10362,7 +10491,9 @@
         <p:txBody>
           <a:bodyPr rtlCol="0" anchor="ctr"/>
           <a:lstStyle/>
-          <a:p/>
+          <a:p>
+            <a:endParaRPr/>
+          </a:p>
         </p:txBody>
       </p:sp>
       <p:sp>
@@ -10382,7 +10513,7 @@
           <a:noFill/>
         </p:spPr>
         <p:txBody>
-          <a:bodyPr wrap="square" anchor="t" lIns="0" rIns="0" tIns="0" bIns="0">
+          <a:bodyPr wrap="square" lIns="0" tIns="0" rIns="0" bIns="0" anchor="t">
             <a:spAutoFit/>
           </a:bodyPr>
           <a:lstStyle/>
@@ -10421,7 +10552,7 @@
           <a:noFill/>
         </p:spPr>
         <p:txBody>
-          <a:bodyPr wrap="square" anchor="t" lIns="0" rIns="0" tIns="0" bIns="0">
+          <a:bodyPr wrap="square" lIns="0" tIns="0" rIns="0" bIns="0" anchor="t">
             <a:spAutoFit/>
           </a:bodyPr>
           <a:lstStyle/>
@@ -10460,7 +10591,7 @@
           <a:noFill/>
         </p:spPr>
         <p:txBody>
-          <a:bodyPr wrap="square" anchor="t" lIns="0" rIns="0" tIns="0" bIns="0">
+          <a:bodyPr wrap="square" lIns="0" tIns="0" rIns="0" bIns="0" anchor="t">
             <a:spAutoFit/>
           </a:bodyPr>
           <a:lstStyle/>
@@ -10499,7 +10630,7 @@
           <a:noFill/>
         </p:spPr>
         <p:txBody>
-          <a:bodyPr wrap="square" anchor="t" lIns="0" rIns="0" tIns="0" bIns="0">
+          <a:bodyPr wrap="square" lIns="0" tIns="0" rIns="0" bIns="0" anchor="t">
             <a:spAutoFit/>
           </a:bodyPr>
           <a:lstStyle/>
@@ -10538,7 +10669,7 @@
           <a:noFill/>
         </p:spPr>
         <p:txBody>
-          <a:bodyPr wrap="square" anchor="t" lIns="0" rIns="0" tIns="0" bIns="0">
+          <a:bodyPr wrap="square" lIns="0" tIns="0" rIns="0" bIns="0" anchor="t">
             <a:spAutoFit/>
           </a:bodyPr>
           <a:lstStyle/>
@@ -10601,6 +10732,7 @@
           <a:lstStyle/>
           <a:p>
             <a:pPr algn="ctr"/>
+            <a:endParaRPr/>
           </a:p>
         </p:txBody>
       </p:sp>
@@ -10621,7 +10753,7 @@
           <a:noFill/>
         </p:spPr>
         <p:txBody>
-          <a:bodyPr wrap="square" anchor="t" lIns="0" rIns="0" tIns="0" bIns="0">
+          <a:bodyPr wrap="square" lIns="0" tIns="0" rIns="0" bIns="0" anchor="t">
             <a:spAutoFit/>
           </a:bodyPr>
           <a:lstStyle/>
@@ -10660,7 +10792,7 @@
           <a:noFill/>
         </p:spPr>
         <p:txBody>
-          <a:bodyPr wrap="square" anchor="t" lIns="0" rIns="0" tIns="0" bIns="0">
+          <a:bodyPr wrap="square" lIns="0" tIns="0" rIns="0" bIns="0" anchor="t">
             <a:spAutoFit/>
           </a:bodyPr>
           <a:lstStyle/>
@@ -10723,6 +10855,7 @@
           <a:lstStyle/>
           <a:p>
             <a:pPr algn="ctr"/>
+            <a:endParaRPr/>
           </a:p>
         </p:txBody>
       </p:sp>
@@ -10743,7 +10876,7 @@
           <a:noFill/>
         </p:spPr>
         <p:txBody>
-          <a:bodyPr wrap="square" anchor="t" lIns="0" rIns="0" tIns="0" bIns="0">
+          <a:bodyPr wrap="square" lIns="0" tIns="0" rIns="0" bIns="0" anchor="t">
             <a:spAutoFit/>
           </a:bodyPr>
           <a:lstStyle/>
@@ -10782,7 +10915,7 @@
           <a:noFill/>
         </p:spPr>
         <p:txBody>
-          <a:bodyPr wrap="square" anchor="t" lIns="0" rIns="0" tIns="0" bIns="0">
+          <a:bodyPr wrap="square" lIns="0" tIns="0" rIns="0" bIns="0" anchor="t">
             <a:spAutoFit/>
           </a:bodyPr>
           <a:lstStyle/>
@@ -10845,6 +10978,7 @@
           <a:lstStyle/>
           <a:p>
             <a:pPr algn="ctr"/>
+            <a:endParaRPr/>
           </a:p>
         </p:txBody>
       </p:sp>
@@ -10865,7 +10999,7 @@
           <a:noFill/>
         </p:spPr>
         <p:txBody>
-          <a:bodyPr wrap="square" anchor="t" lIns="0" rIns="0" tIns="0" bIns="0">
+          <a:bodyPr wrap="square" lIns="0" tIns="0" rIns="0" bIns="0" anchor="t">
             <a:spAutoFit/>
           </a:bodyPr>
           <a:lstStyle/>
@@ -10904,7 +11038,7 @@
           <a:noFill/>
         </p:spPr>
         <p:txBody>
-          <a:bodyPr wrap="square" anchor="t" lIns="0" rIns="0" tIns="0" bIns="0">
+          <a:bodyPr wrap="square" lIns="0" tIns="0" rIns="0" bIns="0" anchor="t">
             <a:spAutoFit/>
           </a:bodyPr>
           <a:lstStyle/>
@@ -10967,6 +11101,7 @@
           <a:lstStyle/>
           <a:p>
             <a:pPr algn="ctr"/>
+            <a:endParaRPr/>
           </a:p>
         </p:txBody>
       </p:sp>
@@ -10987,7 +11122,7 @@
           <a:noFill/>
         </p:spPr>
         <p:txBody>
-          <a:bodyPr wrap="square" anchor="t" lIns="0" rIns="0" tIns="0" bIns="0">
+          <a:bodyPr wrap="square" lIns="0" tIns="0" rIns="0" bIns="0" anchor="t">
             <a:spAutoFit/>
           </a:bodyPr>
           <a:lstStyle/>
@@ -11026,7 +11161,7 @@
           <a:noFill/>
         </p:spPr>
         <p:txBody>
-          <a:bodyPr wrap="square" anchor="t" lIns="0" rIns="0" tIns="0" bIns="0">
+          <a:bodyPr wrap="square" lIns="0" tIns="0" rIns="0" bIns="0" anchor="t">
             <a:spAutoFit/>
           </a:bodyPr>
           <a:lstStyle/>
@@ -11087,7 +11222,9 @@
         <p:txBody>
           <a:bodyPr rtlCol="0" anchor="ctr"/>
           <a:lstStyle/>
-          <a:p/>
+          <a:p>
+            <a:endParaRPr/>
+          </a:p>
         </p:txBody>
       </p:sp>
     </p:spTree>
@@ -11099,7 +11236,7 @@
 </file>
 
 <file path=ppt/slides/slide8.xml><?xml version="1.0" encoding="utf-8"?>
-<p:sld xmlns:a="http://schemas.openxmlformats.org/drawingml/2006/main" xmlns:p="http://schemas.openxmlformats.org/presentationml/2006/main" xmlns:r="http://schemas.openxmlformats.org/officeDocument/2006/relationships">
+<p:sld xmlns:a="http://schemas.openxmlformats.org/drawingml/2006/main" xmlns:r="http://schemas.openxmlformats.org/officeDocument/2006/relationships" xmlns:p="http://schemas.openxmlformats.org/presentationml/2006/main">
   <p:cSld>
     <p:bg>
       <p:bgPr>
@@ -11115,7 +11252,14 @@
         <p:cNvGrpSpPr/>
         <p:nvPr/>
       </p:nvGrpSpPr>
-      <p:grpSpPr/>
+      <p:grpSpPr>
+        <a:xfrm>
+          <a:off x="0" y="0"/>
+          <a:ext cx="0" cy="0"/>
+          <a:chOff x="0" y="0"/>
+          <a:chExt cx="0" cy="0"/>
+        </a:xfrm>
+      </p:grpSpPr>
       <p:sp>
         <p:nvSpPr>
           <p:cNvPr id="2" name="TextBox 1"/>
@@ -11133,7 +11277,7 @@
           <a:noFill/>
         </p:spPr>
         <p:txBody>
-          <a:bodyPr wrap="square" anchor="t" lIns="0" rIns="0" tIns="0" bIns="0">
+          <a:bodyPr wrap="square" lIns="0" tIns="0" rIns="0" bIns="0" anchor="t">
             <a:spAutoFit/>
           </a:bodyPr>
           <a:lstStyle/>
@@ -11172,7 +11316,7 @@
           <a:noFill/>
         </p:spPr>
         <p:txBody>
-          <a:bodyPr wrap="square" anchor="t" lIns="0" rIns="0" tIns="0" bIns="0">
+          <a:bodyPr wrap="square" lIns="0" tIns="0" rIns="0" bIns="0" anchor="t">
             <a:spAutoFit/>
           </a:bodyPr>
           <a:lstStyle/>
@@ -11212,7 +11356,7 @@
           <a:noFill/>
         </p:spPr>
         <p:txBody>
-          <a:bodyPr wrap="square" anchor="t" lIns="0" rIns="0" tIns="0" bIns="0">
+          <a:bodyPr wrap="square" lIns="0" tIns="0" rIns="0" bIns="0" anchor="t">
             <a:spAutoFit/>
           </a:bodyPr>
           <a:lstStyle/>
@@ -11251,7 +11395,7 @@
           <a:noFill/>
         </p:spPr>
         <p:txBody>
-          <a:bodyPr wrap="square" anchor="t" lIns="0" rIns="0" tIns="0" bIns="0">
+          <a:bodyPr wrap="square" lIns="0" tIns="0" rIns="0" bIns="0" anchor="t">
             <a:spAutoFit/>
           </a:bodyPr>
           <a:lstStyle/>
@@ -11291,7 +11435,7 @@
           <a:noFill/>
         </p:spPr>
         <p:txBody>
-          <a:bodyPr wrap="square" anchor="t" lIns="0" rIns="0" tIns="0" bIns="0">
+          <a:bodyPr wrap="square" lIns="0" tIns="0" rIns="0" bIns="0" anchor="t">
             <a:spAutoFit/>
           </a:bodyPr>
           <a:lstStyle/>
@@ -11330,7 +11474,7 @@
           <a:noFill/>
         </p:spPr>
         <p:txBody>
-          <a:bodyPr wrap="square" anchor="t" lIns="0" rIns="0" tIns="0" bIns="0">
+          <a:bodyPr wrap="square" lIns="0" tIns="0" rIns="0" bIns="0" anchor="t">
             <a:spAutoFit/>
           </a:bodyPr>
           <a:lstStyle/>
@@ -11370,7 +11514,7 @@
           <a:noFill/>
         </p:spPr>
         <p:txBody>
-          <a:bodyPr wrap="square" anchor="t" lIns="0" rIns="0" tIns="0" bIns="0">
+          <a:bodyPr wrap="square" lIns="0" tIns="0" rIns="0" bIns="0" anchor="t">
             <a:spAutoFit/>
           </a:bodyPr>
           <a:lstStyle/>
@@ -11409,7 +11553,7 @@
           <a:noFill/>
         </p:spPr>
         <p:txBody>
-          <a:bodyPr wrap="square" anchor="t" lIns="0" rIns="0" tIns="0" bIns="0">
+          <a:bodyPr wrap="square" lIns="0" tIns="0" rIns="0" bIns="0" anchor="t">
             <a:spAutoFit/>
           </a:bodyPr>
           <a:lstStyle/>
@@ -11449,7 +11593,7 @@
           <a:noFill/>
         </p:spPr>
         <p:txBody>
-          <a:bodyPr wrap="square" anchor="t" lIns="0" rIns="0" tIns="0" bIns="0">
+          <a:bodyPr wrap="square" lIns="0" tIns="0" rIns="0" bIns="0" anchor="t">
             <a:spAutoFit/>
           </a:bodyPr>
           <a:lstStyle/>
@@ -11488,7 +11632,7 @@
           <a:noFill/>
         </p:spPr>
         <p:txBody>
-          <a:bodyPr wrap="square" anchor="t" lIns="0" rIns="0" tIns="0" bIns="0">
+          <a:bodyPr wrap="square" lIns="0" tIns="0" rIns="0" bIns="0" anchor="t">
             <a:spAutoFit/>
           </a:bodyPr>
           <a:lstStyle/>
@@ -11528,7 +11672,7 @@
           <a:noFill/>
         </p:spPr>
         <p:txBody>
-          <a:bodyPr wrap="square" anchor="t" lIns="0" rIns="0" tIns="0" bIns="0">
+          <a:bodyPr wrap="square" lIns="0" tIns="0" rIns="0" bIns="0" anchor="t">
             <a:spAutoFit/>
           </a:bodyPr>
           <a:lstStyle/>
@@ -11567,7 +11711,7 @@
           <a:noFill/>
         </p:spPr>
         <p:txBody>
-          <a:bodyPr wrap="square" anchor="t" lIns="0" rIns="0" tIns="0" bIns="0">
+          <a:bodyPr wrap="square" lIns="0" tIns="0" rIns="0" bIns="0" anchor="t">
             <a:spAutoFit/>
           </a:bodyPr>
           <a:lstStyle/>
@@ -11607,7 +11751,7 @@
           <a:noFill/>
         </p:spPr>
         <p:txBody>
-          <a:bodyPr wrap="square" anchor="t" lIns="0" rIns="0" tIns="0" bIns="0">
+          <a:bodyPr wrap="square" lIns="0" tIns="0" rIns="0" bIns="0" anchor="t">
             <a:spAutoFit/>
           </a:bodyPr>
           <a:lstStyle/>
@@ -11624,7 +11768,7 @@
                 </a:solidFill>
                 <a:latin typeface="Consolas"/>
               </a:rPr>
-              <a:t>207</a:t>
+              <a:t>236</a:t>
             </a:r>
           </a:p>
         </p:txBody>
@@ -11646,7 +11790,7 @@
           <a:noFill/>
         </p:spPr>
         <p:txBody>
-          <a:bodyPr wrap="square" anchor="t" lIns="0" rIns="0" tIns="0" bIns="0">
+          <a:bodyPr wrap="square" lIns="0" tIns="0" rIns="0" bIns="0" anchor="t">
             <a:spAutoFit/>
           </a:bodyPr>
           <a:lstStyle/>
@@ -11686,7 +11830,7 @@
           <a:noFill/>
         </p:spPr>
         <p:txBody>
-          <a:bodyPr wrap="square" anchor="t" lIns="0" rIns="0" tIns="0" bIns="0">
+          <a:bodyPr wrap="square" lIns="0" tIns="0" rIns="0" bIns="0" anchor="t">
             <a:spAutoFit/>
           </a:bodyPr>
           <a:lstStyle/>
@@ -11725,7 +11869,7 @@
           <a:noFill/>
         </p:spPr>
         <p:txBody>
-          <a:bodyPr wrap="square" anchor="t" lIns="0" rIns="0" tIns="0" bIns="0">
+          <a:bodyPr wrap="square" lIns="0" tIns="0" rIns="0" bIns="0" anchor="t">
             <a:spAutoFit/>
           </a:bodyPr>
           <a:lstStyle/>
@@ -11786,7 +11930,9 @@
         <p:txBody>
           <a:bodyPr rtlCol="0" anchor="ctr"/>
           <a:lstStyle/>
-          <a:p/>
+          <a:p>
+            <a:endParaRPr/>
+          </a:p>
         </p:txBody>
       </p:sp>
     </p:spTree>
@@ -11798,7 +11944,7 @@
 </file>
 
 <file path=ppt/slides/slide9.xml><?xml version="1.0" encoding="utf-8"?>
-<p:sld xmlns:a="http://schemas.openxmlformats.org/drawingml/2006/main" xmlns:p="http://schemas.openxmlformats.org/presentationml/2006/main" xmlns:r="http://schemas.openxmlformats.org/officeDocument/2006/relationships">
+<p:sld xmlns:a="http://schemas.openxmlformats.org/drawingml/2006/main" xmlns:r="http://schemas.openxmlformats.org/officeDocument/2006/relationships" xmlns:p="http://schemas.openxmlformats.org/presentationml/2006/main">
   <p:cSld>
     <p:bg>
       <p:bgPr>
@@ -11814,7 +11960,14 @@
         <p:cNvGrpSpPr/>
         <p:nvPr/>
       </p:nvGrpSpPr>
-      <p:grpSpPr/>
+      <p:grpSpPr>
+        <a:xfrm>
+          <a:off x="0" y="0"/>
+          <a:ext cx="0" cy="0"/>
+          <a:chOff x="0" y="0"/>
+          <a:chExt cx="0" cy="0"/>
+        </a:xfrm>
+      </p:grpSpPr>
       <p:sp>
         <p:nvSpPr>
           <p:cNvPr id="2" name="TextBox 1"/>
@@ -11832,7 +11985,7 @@
           <a:noFill/>
         </p:spPr>
         <p:txBody>
-          <a:bodyPr wrap="square" anchor="t" lIns="0" rIns="0" tIns="0" bIns="0">
+          <a:bodyPr wrap="square" lIns="0" tIns="0" rIns="0" bIns="0" anchor="t">
             <a:spAutoFit/>
           </a:bodyPr>
           <a:lstStyle/>
@@ -11871,7 +12024,7 @@
           <a:noFill/>
         </p:spPr>
         <p:txBody>
-          <a:bodyPr wrap="square" anchor="t" lIns="0" rIns="0" tIns="0" bIns="0">
+          <a:bodyPr wrap="square" lIns="0" tIns="0" rIns="0" bIns="0" anchor="t">
             <a:spAutoFit/>
           </a:bodyPr>
           <a:lstStyle/>
@@ -11910,7 +12063,7 @@
           <a:noFill/>
         </p:spPr>
         <p:txBody>
-          <a:bodyPr wrap="square" anchor="t" lIns="0" rIns="0" tIns="0" bIns="0">
+          <a:bodyPr wrap="square" lIns="0" tIns="0" rIns="0" bIns="0" anchor="t">
             <a:spAutoFit/>
           </a:bodyPr>
           <a:lstStyle/>
@@ -11949,7 +12102,7 @@
           <a:noFill/>
         </p:spPr>
         <p:txBody>
-          <a:bodyPr wrap="square" anchor="t" lIns="0" rIns="0" tIns="0" bIns="0">
+          <a:bodyPr wrap="square" lIns="0" tIns="0" rIns="0" bIns="0" anchor="t">
             <a:spAutoFit/>
           </a:bodyPr>
           <a:lstStyle/>
@@ -11988,7 +12141,7 @@
           <a:noFill/>
         </p:spPr>
         <p:txBody>
-          <a:bodyPr wrap="square" anchor="t" lIns="0" rIns="0" tIns="0" bIns="0">
+          <a:bodyPr wrap="square" lIns="0" tIns="0" rIns="0" bIns="0" anchor="t">
             <a:spAutoFit/>
           </a:bodyPr>
           <a:lstStyle/>
@@ -12027,7 +12180,7 @@
           <a:noFill/>
         </p:spPr>
         <p:txBody>
-          <a:bodyPr wrap="square" anchor="t" lIns="0" rIns="0" tIns="0" bIns="0">
+          <a:bodyPr wrap="square" lIns="0" tIns="0" rIns="0" bIns="0" anchor="t">
             <a:spAutoFit/>
           </a:bodyPr>
           <a:lstStyle/>
@@ -12066,7 +12219,7 @@
           <a:noFill/>
         </p:spPr>
         <p:txBody>
-          <a:bodyPr wrap="square" anchor="t" lIns="0" rIns="0" tIns="0" bIns="0">
+          <a:bodyPr wrap="square" lIns="0" tIns="0" rIns="0" bIns="0" anchor="t">
             <a:spAutoFit/>
           </a:bodyPr>
           <a:lstStyle/>
@@ -12105,7 +12258,7 @@
           <a:noFill/>
         </p:spPr>
         <p:txBody>
-          <a:bodyPr wrap="square" anchor="t" lIns="0" rIns="0" tIns="0" bIns="0">
+          <a:bodyPr wrap="square" lIns="0" tIns="0" rIns="0" bIns="0" anchor="t">
             <a:spAutoFit/>
           </a:bodyPr>
           <a:lstStyle/>
@@ -12144,7 +12297,7 @@
           <a:noFill/>
         </p:spPr>
         <p:txBody>
-          <a:bodyPr wrap="square" anchor="t" lIns="0" rIns="0" tIns="0" bIns="0">
+          <a:bodyPr wrap="square" lIns="0" tIns="0" rIns="0" bIns="0" anchor="t">
             <a:spAutoFit/>
           </a:bodyPr>
           <a:lstStyle/>
@@ -12183,7 +12336,7 @@
           <a:noFill/>
         </p:spPr>
         <p:txBody>
-          <a:bodyPr wrap="square" anchor="t" lIns="0" rIns="0" tIns="0" bIns="0">
+          <a:bodyPr wrap="square" lIns="0" tIns="0" rIns="0" bIns="0" anchor="t">
             <a:spAutoFit/>
           </a:bodyPr>
           <a:lstStyle/>
@@ -12222,7 +12375,7 @@
           <a:noFill/>
         </p:spPr>
         <p:txBody>
-          <a:bodyPr wrap="square" anchor="t" lIns="0" rIns="0" tIns="0" bIns="0">
+          <a:bodyPr wrap="square" lIns="0" tIns="0" rIns="0" bIns="0" anchor="t">
             <a:spAutoFit/>
           </a:bodyPr>
           <a:lstStyle/>
@@ -12285,6 +12438,7 @@
           <a:lstStyle/>
           <a:p>
             <a:pPr algn="ctr"/>
+            <a:endParaRPr/>
           </a:p>
         </p:txBody>
       </p:sp>
@@ -12305,7 +12459,7 @@
           <a:noFill/>
         </p:spPr>
         <p:txBody>
-          <a:bodyPr wrap="square" anchor="t" lIns="0" rIns="0" tIns="0" bIns="0">
+          <a:bodyPr wrap="square" lIns="0" tIns="0" rIns="0" bIns="0" anchor="t">
             <a:spAutoFit/>
           </a:bodyPr>
           <a:lstStyle/>
@@ -12344,7 +12498,7 @@
           <a:noFill/>
         </p:spPr>
         <p:txBody>
-          <a:bodyPr wrap="square" anchor="t" lIns="0" rIns="0" tIns="0" bIns="0">
+          <a:bodyPr wrap="square" lIns="0" tIns="0" rIns="0" bIns="0" anchor="t">
             <a:spAutoFit/>
           </a:bodyPr>
           <a:lstStyle/>
@@ -12383,7 +12537,7 @@
           <a:noFill/>
         </p:spPr>
         <p:txBody>
-          <a:bodyPr wrap="square" anchor="t" lIns="0" rIns="0" tIns="0" bIns="0">
+          <a:bodyPr wrap="square" lIns="0" tIns="0" rIns="0" bIns="0" anchor="t">
             <a:spAutoFit/>
           </a:bodyPr>
           <a:lstStyle/>
@@ -12422,7 +12576,7 @@
           <a:noFill/>
         </p:spPr>
         <p:txBody>
-          <a:bodyPr wrap="square" anchor="t" lIns="0" rIns="0" tIns="0" bIns="0">
+          <a:bodyPr wrap="square" lIns="0" tIns="0" rIns="0" bIns="0" anchor="t">
             <a:spAutoFit/>
           </a:bodyPr>
           <a:lstStyle/>
@@ -12485,6 +12639,7 @@
           <a:lstStyle/>
           <a:p>
             <a:pPr algn="ctr"/>
+            <a:endParaRPr/>
           </a:p>
         </p:txBody>
       </p:sp>
@@ -12505,7 +12660,7 @@
           <a:noFill/>
         </p:spPr>
         <p:txBody>
-          <a:bodyPr wrap="square" anchor="t" lIns="0" rIns="0" tIns="0" bIns="0">
+          <a:bodyPr wrap="square" lIns="0" tIns="0" rIns="0" bIns="0" anchor="t">
             <a:spAutoFit/>
           </a:bodyPr>
           <a:lstStyle/>
@@ -12544,7 +12699,7 @@
           <a:noFill/>
         </p:spPr>
         <p:txBody>
-          <a:bodyPr wrap="square" anchor="t" lIns="0" rIns="0" tIns="0" bIns="0">
+          <a:bodyPr wrap="square" lIns="0" tIns="0" rIns="0" bIns="0" anchor="t">
             <a:spAutoFit/>
           </a:bodyPr>
           <a:lstStyle/>
@@ -12583,7 +12738,7 @@
           <a:noFill/>
         </p:spPr>
         <p:txBody>
-          <a:bodyPr wrap="square" anchor="t" lIns="0" rIns="0" tIns="0" bIns="0">
+          <a:bodyPr wrap="square" lIns="0" tIns="0" rIns="0" bIns="0" anchor="t">
             <a:spAutoFit/>
           </a:bodyPr>
           <a:lstStyle/>
@@ -12622,7 +12777,7 @@
           <a:noFill/>
         </p:spPr>
         <p:txBody>
-          <a:bodyPr wrap="square" anchor="t" lIns="0" rIns="0" tIns="0" bIns="0">
+          <a:bodyPr wrap="square" lIns="0" tIns="0" rIns="0" bIns="0" anchor="t">
             <a:spAutoFit/>
           </a:bodyPr>
           <a:lstStyle/>
@@ -12685,6 +12840,7 @@
           <a:lstStyle/>
           <a:p>
             <a:pPr algn="ctr"/>
+            <a:endParaRPr/>
           </a:p>
         </p:txBody>
       </p:sp>
@@ -12705,7 +12861,7 @@
           <a:noFill/>
         </p:spPr>
         <p:txBody>
-          <a:bodyPr wrap="square" anchor="t" lIns="0" rIns="0" tIns="0" bIns="0">
+          <a:bodyPr wrap="square" lIns="0" tIns="0" rIns="0" bIns="0" anchor="t">
             <a:spAutoFit/>
           </a:bodyPr>
           <a:lstStyle/>
@@ -12744,7 +12900,7 @@
           <a:noFill/>
         </p:spPr>
         <p:txBody>
-          <a:bodyPr wrap="square" anchor="t" lIns="0" rIns="0" tIns="0" bIns="0">
+          <a:bodyPr wrap="square" lIns="0" tIns="0" rIns="0" bIns="0" anchor="t">
             <a:spAutoFit/>
           </a:bodyPr>
           <a:lstStyle/>
@@ -12783,7 +12939,7 @@
           <a:noFill/>
         </p:spPr>
         <p:txBody>
-          <a:bodyPr wrap="square" anchor="t" lIns="0" rIns="0" tIns="0" bIns="0">
+          <a:bodyPr wrap="square" lIns="0" tIns="0" rIns="0" bIns="0" anchor="t">
             <a:spAutoFit/>
           </a:bodyPr>
           <a:lstStyle/>
@@ -12822,7 +12978,7 @@
           <a:noFill/>
         </p:spPr>
         <p:txBody>
-          <a:bodyPr wrap="square" anchor="t" lIns="0" rIns="0" tIns="0" bIns="0">
+          <a:bodyPr wrap="square" lIns="0" tIns="0" rIns="0" bIns="0" anchor="t">
             <a:spAutoFit/>
           </a:bodyPr>
           <a:lstStyle/>
@@ -12885,6 +13041,7 @@
           <a:lstStyle/>
           <a:p>
             <a:pPr algn="ctr"/>
+            <a:endParaRPr/>
           </a:p>
         </p:txBody>
       </p:sp>
@@ -12905,7 +13062,7 @@
           <a:noFill/>
         </p:spPr>
         <p:txBody>
-          <a:bodyPr wrap="square" anchor="t" lIns="0" rIns="0" tIns="0" bIns="0">
+          <a:bodyPr wrap="square" lIns="0" tIns="0" rIns="0" bIns="0" anchor="t">
             <a:spAutoFit/>
           </a:bodyPr>
           <a:lstStyle/>
@@ -12953,7 +13110,7 @@
           <a:noFill/>
         </p:spPr>
         <p:txBody>
-          <a:bodyPr wrap="square" anchor="t" lIns="0" rIns="0" tIns="0" bIns="0">
+          <a:bodyPr wrap="square" lIns="0" tIns="0" rIns="0" bIns="0" anchor="t">
             <a:spAutoFit/>
           </a:bodyPr>
           <a:lstStyle/>
@@ -12992,7 +13149,7 @@
           <a:noFill/>
         </p:spPr>
         <p:txBody>
-          <a:bodyPr wrap="square" anchor="t" lIns="0" rIns="0" tIns="0" bIns="0">
+          <a:bodyPr wrap="square" lIns="0" tIns="0" rIns="0" bIns="0" anchor="t">
             <a:spAutoFit/>
           </a:bodyPr>
           <a:lstStyle/>
@@ -13053,7 +13210,9 @@
         <p:txBody>
           <a:bodyPr rtlCol="0" anchor="ctr"/>
           <a:lstStyle/>
-          <a:p/>
+          <a:p>
+            <a:endParaRPr/>
+          </a:p>
         </p:txBody>
       </p:sp>
     </p:spTree>

--- a/Vetoed-deck.pptx
+++ b/Vetoed-deck.pptx
@@ -4573,7 +4573,7 @@
                 </a:solidFill>
                 <a:latin typeface="Segoe UI"/>
               </a:rPr>
-              <a:t>A GitHub Actions schedule runs one full cycle roughly every 30 minutes during the US session. </a:t>
+              <a:t>A scheduled trigger starts one session a day on GitHub Actions; inside it the agent re-screens every 10 minutes and may open a position every 30. </a:t>
             </a:r>
             <a:r>
               <a:rPr sz="1400" b="1">
